--- a/static/ppts/G6_Sci_T2_Particle_Model.pptx
+++ b/static/ppts/G6_Sci_T2_Particle_Model.pptx
@@ -9,11 +9,9 @@
     <p:sldId id="257" r:id="rId3"/>
     <p:sldId id="258" r:id="rId4"/>
     <p:sldId id="259" r:id="rId5"/>
-    <p:sldId id="260" r:id="rId6"/>
-    <p:sldId id="261" r:id="rId7"/>
   </p:sldIdLst>
   <p:notesMasterIdLst>
-    <p:notesMasterId r:id="rId8"/>
+    <p:notesMasterId r:id="rId6"/>
   </p:notesMasterIdLst>
   <p:sldSz cx="9144000" cy="5143500"/>
   <p:notesSz cx="5143500" cy="9144000"/>
@@ -813,182 +811,6 @@
 </p:notes>
 </file>
 
-<file path=ppt/notesSlides/notesSlide5.xml><?xml version="1.0" encoding="utf-8"?>
-<p:notes xmlns:a="http://schemas.openxmlformats.org/drawingml/2006/main" xmlns:r="http://schemas.openxmlformats.org/officeDocument/2006/relationships" xmlns:p="http://schemas.openxmlformats.org/presentationml/2006/main">
-  <p:cSld>
-    <p:spTree>
-      <p:nvGrpSpPr>
-        <p:cNvPr id="1" name=""/>
-        <p:cNvGrpSpPr/>
-        <p:nvPr/>
-      </p:nvGrpSpPr>
-      <p:grpSpPr>
-        <a:xfrm>
-          <a:off x="0" y="0"/>
-          <a:ext cx="0" cy="0"/>
-          <a:chOff x="0" y="0"/>
-          <a:chExt cx="0" cy="0"/>
-        </a:xfrm>
-      </p:grpSpPr>
-      <p:sp>
-        <p:nvSpPr>
-          <p:cNvPr id="2" name="Slide Image Placeholder 1"/>
-          <p:cNvSpPr>
-            <a:spLocks noGrp="1" noRot="1" noChangeAspect="1"/>
-          </p:cNvSpPr>
-          <p:nvPr>
-            <p:ph type="sldImg"/>
-          </p:nvPr>
-        </p:nvSpPr>
-        <p:spPr/>
-      </p:sp>
-      <p:sp>
-        <p:nvSpPr>
-          <p:cNvPr id="3" name="Notes Placeholder 2"/>
-          <p:cNvSpPr>
-            <a:spLocks noGrp="1"/>
-          </p:cNvSpPr>
-          <p:nvPr>
-            <p:ph type="body" idx="1"/>
-          </p:nvPr>
-        </p:nvSpPr>
-        <p:spPr/>
-        <p:txBody>
-          <a:bodyPr/>
-          <a:lstStyle/>
-          <a:p>
-            <a:r>
-              <a:rPr lang="en-US" dirty="0"/>
-              <a:t/>
-            </a:r>
-            <a:endParaRPr lang="en-US" dirty="0"/>
-          </a:p>
-        </p:txBody>
-      </p:sp>
-      <p:sp>
-        <p:nvSpPr>
-          <p:cNvPr id="4" name="Slide Number Placeholder 3"/>
-          <p:cNvSpPr>
-            <a:spLocks noGrp="1"/>
-          </p:cNvSpPr>
-          <p:nvPr>
-            <p:ph type="sldNum" sz="quarter" idx="10"/>
-          </p:nvPr>
-        </p:nvSpPr>
-        <p:spPr/>
-        <p:txBody>
-          <a:bodyPr/>
-          <a:lstStyle/>
-          <a:p>
-            <a:fld id="{F7021451-1387-4CA6-816F-3879F97B5CBC}" type="slidenum">
-              <a:rPr lang="en-US"/>
-              <a:t>5</a:t>
-            </a:fld>
-            <a:endParaRPr lang="en-US"/>
-          </a:p>
-        </p:txBody>
-      </p:sp>
-    </p:spTree>
-    <p:extLst>
-      <p:ext uri="{BB962C8B-B14F-4D97-AF65-F5344CB8AC3E}">
-        <p14:creationId xmlns:p14="http://schemas.microsoft.com/office/powerpoint/2010/main" val="1024086991"/>
-      </p:ext>
-    </p:extLst>
-  </p:cSld>
-  <p:clrMapOvr>
-    <a:masterClrMapping/>
-  </p:clrMapOvr>
-</p:notes>
-</file>
-
-<file path=ppt/notesSlides/notesSlide6.xml><?xml version="1.0" encoding="utf-8"?>
-<p:notes xmlns:a="http://schemas.openxmlformats.org/drawingml/2006/main" xmlns:r="http://schemas.openxmlformats.org/officeDocument/2006/relationships" xmlns:p="http://schemas.openxmlformats.org/presentationml/2006/main">
-  <p:cSld>
-    <p:spTree>
-      <p:nvGrpSpPr>
-        <p:cNvPr id="1" name=""/>
-        <p:cNvGrpSpPr/>
-        <p:nvPr/>
-      </p:nvGrpSpPr>
-      <p:grpSpPr>
-        <a:xfrm>
-          <a:off x="0" y="0"/>
-          <a:ext cx="0" cy="0"/>
-          <a:chOff x="0" y="0"/>
-          <a:chExt cx="0" cy="0"/>
-        </a:xfrm>
-      </p:grpSpPr>
-      <p:sp>
-        <p:nvSpPr>
-          <p:cNvPr id="2" name="Slide Image Placeholder 1"/>
-          <p:cNvSpPr>
-            <a:spLocks noGrp="1" noRot="1" noChangeAspect="1"/>
-          </p:cNvSpPr>
-          <p:nvPr>
-            <p:ph type="sldImg"/>
-          </p:nvPr>
-        </p:nvSpPr>
-        <p:spPr/>
-      </p:sp>
-      <p:sp>
-        <p:nvSpPr>
-          <p:cNvPr id="3" name="Notes Placeholder 2"/>
-          <p:cNvSpPr>
-            <a:spLocks noGrp="1"/>
-          </p:cNvSpPr>
-          <p:nvPr>
-            <p:ph type="body" idx="1"/>
-          </p:nvPr>
-        </p:nvSpPr>
-        <p:spPr/>
-        <p:txBody>
-          <a:bodyPr/>
-          <a:lstStyle/>
-          <a:p>
-            <a:r>
-              <a:rPr lang="en-US" dirty="0"/>
-              <a:t/>
-            </a:r>
-            <a:endParaRPr lang="en-US" dirty="0"/>
-          </a:p>
-        </p:txBody>
-      </p:sp>
-      <p:sp>
-        <p:nvSpPr>
-          <p:cNvPr id="4" name="Slide Number Placeholder 3"/>
-          <p:cNvSpPr>
-            <a:spLocks noGrp="1"/>
-          </p:cNvSpPr>
-          <p:nvPr>
-            <p:ph type="sldNum" sz="quarter" idx="10"/>
-          </p:nvPr>
-        </p:nvSpPr>
-        <p:spPr/>
-        <p:txBody>
-          <a:bodyPr/>
-          <a:lstStyle/>
-          <a:p>
-            <a:fld id="{F7021451-1387-4CA6-816F-3879F97B5CBC}" type="slidenum">
-              <a:rPr lang="en-US"/>
-              <a:t>6</a:t>
-            </a:fld>
-            <a:endParaRPr lang="en-US"/>
-          </a:p>
-        </p:txBody>
-      </p:sp>
-    </p:spTree>
-    <p:extLst>
-      <p:ext uri="{BB962C8B-B14F-4D97-AF65-F5344CB8AC3E}">
-        <p14:creationId xmlns:p14="http://schemas.microsoft.com/office/powerpoint/2010/main" val="1024086991"/>
-      </p:ext>
-    </p:extLst>
-  </p:cSld>
-  <p:clrMapOvr>
-    <a:masterClrMapping/>
-  </p:clrMapOvr>
-</p:notes>
-</file>
-
 <file path=ppt/slideLayouts/slideLayout1.xml><?xml version="1.0" encoding="utf-8"?>
 <p:sldLayout xmlns:a="http://schemas.openxmlformats.org/drawingml/2006/main" xmlns:r="http://schemas.openxmlformats.org/officeDocument/2006/relationships" xmlns:p="http://schemas.openxmlformats.org/presentationml/2006/main" preserve="1">
   <p:cSld name="DEFAULT">
@@ -1302,7 +1124,7 @@
     <p:bg>
       <p:bgPr>
         <a:solidFill>
-          <a:srgbClr val="7C3AED"/>
+          <a:srgbClr val="1B2A4A"/>
         </a:solidFill>
       </p:bgPr>
     </p:bg>
@@ -1322,14 +1144,34 @@
       </p:grpSpPr>
       <p:sp>
         <p:nvSpPr>
-          <p:cNvPr id="2" name="Text 0"/>
+          <p:cNvPr id="2" name="Shape 0"/>
           <p:cNvSpPr/>
           <p:nvPr/>
         </p:nvSpPr>
         <p:spPr>
           <a:xfrm>
-            <a:off x="731520" y="1371600"/>
-            <a:ext cx="7680960" cy="1371600"/>
+            <a:off x="0" y="0"/>
+            <a:ext cx="109728" cy="5143500"/>
+          </a:xfrm>
+          <a:prstGeom prst="rect">
+            <a:avLst/>
+          </a:prstGeom>
+          <a:solidFill>
+            <a:srgbClr val="2A9D8F"/>
+          </a:solidFill>
+          <a:ln/>
+        </p:spPr>
+      </p:sp>
+      <p:sp>
+        <p:nvSpPr>
+          <p:cNvPr id="3" name="Text 1"/>
+          <p:cNvSpPr/>
+          <p:nvPr/>
+        </p:nvSpPr>
+        <p:spPr>
+          <a:xfrm>
+            <a:off x="731520" y="1280160"/>
+            <a:ext cx="7772400" cy="1371600"/>
           </a:xfrm>
           <a:prstGeom prst="rect">
             <a:avLst/>
@@ -1345,30 +1187,69 @@
               <a:buNone/>
             </a:pPr>
             <a:r>
-              <a:rPr lang="en-US" sz="4000" b="1" dirty="0">
+              <a:rPr lang="en-US" sz="3600" b="1" dirty="0">
                 <a:solidFill>
                   <a:srgbClr val="FFFFFF"/>
+                </a:solidFill>
+                <a:latin typeface="Georgia" pitchFamily="34" charset="0"/>
+                <a:ea typeface="Georgia" pitchFamily="34" charset="-122"/>
+                <a:cs typeface="Georgia" pitchFamily="34" charset="-120"/>
+              </a:rPr>
+              <a:t>The Particle Model</a:t>
+            </a:r>
+            <a:endParaRPr lang="en-US" sz="3600" dirty="0"/>
+          </a:p>
+        </p:txBody>
+      </p:sp>
+      <p:sp>
+        <p:nvSpPr>
+          <p:cNvPr id="4" name="Text 2"/>
+          <p:cNvSpPr/>
+          <p:nvPr/>
+        </p:nvSpPr>
+        <p:spPr>
+          <a:xfrm>
+            <a:off x="731520" y="2743200"/>
+            <a:ext cx="7772400" cy="548640"/>
+          </a:xfrm>
+          <a:prstGeom prst="rect">
+            <a:avLst/>
+          </a:prstGeom>
+          <a:noFill/>
+          <a:ln/>
+        </p:spPr>
+        <p:txBody>
+          <a:bodyPr wrap="square" rtlCol="0" anchor="ctr"/>
+          <a:lstStyle/>
+          <a:p>
+            <a:pPr indent="0" marL="0">
+              <a:buNone/>
+            </a:pPr>
+            <a:r>
+              <a:rPr lang="en-US" sz="1600" dirty="0">
+                <a:solidFill>
+                  <a:srgbClr val="9B9690"/>
                 </a:solidFill>
                 <a:latin typeface="Calibri" pitchFamily="34" charset="0"/>
                 <a:ea typeface="Calibri" pitchFamily="34" charset="-122"/>
                 <a:cs typeface="Calibri" pitchFamily="34" charset="-120"/>
               </a:rPr>
-              <a:t>The Particle Model</a:t>
-            </a:r>
-            <a:endParaRPr lang="en-US" sz="4000" dirty="0"/>
-          </a:p>
-        </p:txBody>
-      </p:sp>
-      <p:sp>
-        <p:nvSpPr>
-          <p:cNvPr id="3" name="Text 1"/>
+              <a:t>G6 Science · Chemistry</a:t>
+            </a:r>
+            <a:endParaRPr lang="en-US" sz="1600" dirty="0"/>
+          </a:p>
+        </p:txBody>
+      </p:sp>
+      <p:sp>
+        <p:nvSpPr>
+          <p:cNvPr id="5" name="Text 3"/>
           <p:cNvSpPr/>
           <p:nvPr/>
         </p:nvSpPr>
         <p:spPr>
           <a:xfrm>
-            <a:off x="731520" y="2926080"/>
-            <a:ext cx="7680960" cy="548640"/>
+            <a:off x="731520" y="4389120"/>
+            <a:ext cx="7772400" cy="457200"/>
           </a:xfrm>
           <a:prstGeom prst="rect">
             <a:avLst/>
@@ -1384,17 +1265,17 @@
               <a:buNone/>
             </a:pPr>
             <a:r>
-              <a:rPr lang="en-US" sz="1600" i="1" dirty="0">
-                <a:solidFill>
-                  <a:srgbClr val="FFFFFF"/>
+              <a:rPr lang="en-US" sz="1000" dirty="0">
+                <a:solidFill>
+                  <a:srgbClr val="6B6660"/>
                 </a:solidFill>
                 <a:latin typeface="Calibri" pitchFamily="34" charset="0"/>
                 <a:ea typeface="Calibri" pitchFamily="34" charset="-122"/>
                 <a:cs typeface="Calibri" pitchFamily="34" charset="-120"/>
               </a:rPr>
-              <a:t>Grade 6 Science · Mr Zocchi</a:t>
-            </a:r>
-            <a:endParaRPr lang="en-US" sz="1600" dirty="0"/>
+              <a:t>Mr Zocchi · mrzocchi.com</a:t>
+            </a:r>
+            <a:endParaRPr lang="en-US" sz="1000" dirty="0"/>
           </a:p>
         </p:txBody>
       </p:sp>
@@ -1409,6 +1290,13 @@
 <file path=ppt/slides/slide2.xml><?xml version="1.0" encoding="utf-8"?>
 <p:sld xmlns:a="http://schemas.openxmlformats.org/drawingml/2006/main" xmlns:r="http://schemas.openxmlformats.org/officeDocument/2006/relationships" xmlns:p="http://schemas.openxmlformats.org/presentationml/2006/main">
   <p:cSld name="Slide 2">
+    <p:bg>
+      <p:bgPr>
+        <a:solidFill>
+          <a:srgbClr val="FFFFFF"/>
+        </a:solidFill>
+      </p:bgPr>
+    </p:bg>
     <p:spTree>
       <p:nvGrpSpPr>
         <p:cNvPr id="1" name=""/>
@@ -1432,13 +1320,13 @@
         <p:spPr>
           <a:xfrm>
             <a:off x="0" y="0"/>
-            <a:ext cx="9144000" cy="548640"/>
-          </a:xfrm>
-          <a:prstGeom prst="rect">
-            <a:avLst/>
-          </a:prstGeom>
-          <a:solidFill>
-            <a:srgbClr val="7C3AED"/>
+            <a:ext cx="9144000" cy="54864"/>
+          </a:xfrm>
+          <a:prstGeom prst="rect">
+            <a:avLst/>
+          </a:prstGeom>
+          <a:solidFill>
+            <a:srgbClr val="2A9D8F"/>
           </a:solidFill>
           <a:ln/>
         </p:spPr>
@@ -1451,8 +1339,8 @@
         </p:nvSpPr>
         <p:spPr>
           <a:xfrm>
-            <a:off x="457200" y="45720"/>
-            <a:ext cx="8229600" cy="457200"/>
+            <a:off x="548640" y="274320"/>
+            <a:ext cx="8046720" cy="640080"/>
           </a:xfrm>
           <a:prstGeom prst="rect">
             <a:avLst/>
@@ -1461,125 +1349,186 @@
           <a:ln/>
         </p:spPr>
         <p:txBody>
-          <a:bodyPr wrap="square" rtlCol="0" anchor="ctr"/>
+          <a:bodyPr wrap="square" lIns="0" tIns="0" rIns="0" bIns="0" rtlCol="0" anchor="ctr"/>
           <a:lstStyle/>
           <a:p>
             <a:pPr indent="0" marL="0">
               <a:buNone/>
             </a:pPr>
             <a:r>
-              <a:rPr lang="en-US" sz="1800" b="1" dirty="0">
-                <a:solidFill>
-                  <a:srgbClr val="FFFFFF"/>
+              <a:rPr lang="en-US" sz="2600" b="1" dirty="0">
+                <a:solidFill>
+                  <a:srgbClr val="1B2A4A"/>
+                </a:solidFill>
+                <a:latin typeface="Georgia" pitchFamily="34" charset="0"/>
+                <a:ea typeface="Georgia" pitchFamily="34" charset="-122"/>
+                <a:cs typeface="Georgia" pitchFamily="34" charset="-120"/>
+              </a:rPr>
+              <a:t>Everything is Made of Particles</a:t>
+            </a:r>
+            <a:endParaRPr lang="en-US" sz="2600" dirty="0"/>
+          </a:p>
+        </p:txBody>
+      </p:sp>
+      <p:sp>
+        <p:nvSpPr>
+          <p:cNvPr id="4" name="Text 2"/>
+          <p:cNvSpPr/>
+          <p:nvPr/>
+        </p:nvSpPr>
+        <p:spPr>
+          <a:xfrm>
+            <a:off x="548640" y="1097280"/>
+            <a:ext cx="8046720" cy="3474720"/>
+          </a:xfrm>
+          <a:prstGeom prst="rect">
+            <a:avLst/>
+          </a:prstGeom>
+          <a:noFill/>
+          <a:ln/>
+        </p:spPr>
+        <p:txBody>
+          <a:bodyPr wrap="square" rtlCol="0" anchor="t"/>
+          <a:lstStyle/>
+          <a:p>
+            <a:pPr marL="342900" indent="-342900">
+              <a:spcAft>
+                <a:spcPts val="800"/>
+              </a:spcAft>
+              <a:buSzPct val="100000"/>
+              <a:buChar char="•"/>
+            </a:pPr>
+            <a:r>
+              <a:rPr lang="en-US" sz="1500" dirty="0">
+                <a:solidFill>
+                  <a:srgbClr val="3D3A36"/>
                 </a:solidFill>
                 <a:latin typeface="Calibri" pitchFamily="34" charset="0"/>
                 <a:ea typeface="Calibri" pitchFamily="34" charset="-122"/>
                 <a:cs typeface="Calibri" pitchFamily="34" charset="-120"/>
               </a:rPr>
-              <a:t>Everything is made of particles</a:t>
-            </a:r>
-            <a:endParaRPr lang="en-US" sz="1800" dirty="0"/>
-          </a:p>
-        </p:txBody>
-      </p:sp>
-      <p:sp>
-        <p:nvSpPr>
-          <p:cNvPr id="4" name="Text 2"/>
-          <p:cNvSpPr/>
-          <p:nvPr/>
-        </p:nvSpPr>
-        <p:spPr>
-          <a:xfrm>
-            <a:off x="731520" y="1097280"/>
-            <a:ext cx="7680960" cy="3200400"/>
-          </a:xfrm>
-          <a:prstGeom prst="rect">
-            <a:avLst/>
-          </a:prstGeom>
-          <a:noFill/>
-          <a:ln/>
-        </p:spPr>
-        <p:txBody>
-          <a:bodyPr wrap="square" rtlCol="0" anchor="ctr"/>
-          <a:lstStyle/>
-          <a:p>
-            <a:pPr indent="0" marL="0">
-              <a:buNone/>
-            </a:pPr>
-            <a:r>
-              <a:rPr lang="en-US" sz="1600" dirty="0">
-                <a:solidFill>
-                  <a:srgbClr val="363636"/>
+              <a:t>All matter is made up of tiny particles (atoms and molecules)</a:t>
+            </a:r>
+            <a:endParaRPr lang="en-US" sz="1500" dirty="0"/>
+          </a:p>
+          <a:p>
+            <a:pPr marL="342900" indent="-342900">
+              <a:spcAft>
+                <a:spcPts val="800"/>
+              </a:spcAft>
+              <a:buSzPct val="100000"/>
+              <a:buChar char="•"/>
+            </a:pPr>
+            <a:r>
+              <a:rPr lang="en-US" sz="1500" dirty="0">
+                <a:solidFill>
+                  <a:srgbClr val="3D3A36"/>
                 </a:solidFill>
                 <a:latin typeface="Calibri" pitchFamily="34" charset="0"/>
                 <a:ea typeface="Calibri" pitchFamily="34" charset="-122"/>
                 <a:cs typeface="Calibri" pitchFamily="34" charset="-120"/>
               </a:rPr>
-              <a:t>Content for: Everything is made of particles</a:t>
-            </a:r>
-            <a:endParaRPr lang="en-US" sz="1600" dirty="0"/>
-          </a:p>
-          <a:p>
-            <a:pPr indent="0" marL="0">
-              <a:buNone/>
-            </a:pPr>
-            <a:endParaRPr lang="en-US" sz="1600" dirty="0"/>
-          </a:p>
-          <a:p>
-            <a:pPr indent="0" marL="0">
-              <a:buNone/>
-            </a:pPr>
-            <a:r>
-              <a:rPr lang="en-US" sz="1600" dirty="0">
-                <a:solidFill>
-                  <a:srgbClr val="363636"/>
+              <a:t>Particles are too small to see — even with a microscope</a:t>
+            </a:r>
+            <a:endParaRPr lang="en-US" sz="1500" dirty="0"/>
+          </a:p>
+          <a:p>
+            <a:pPr marL="342900" indent="-342900">
+              <a:spcAft>
+                <a:spcPts val="800"/>
+              </a:spcAft>
+              <a:buSzPct val="100000"/>
+              <a:buChar char="•"/>
+            </a:pPr>
+            <a:r>
+              <a:rPr lang="en-US" sz="1500" dirty="0">
+                <a:solidFill>
+                  <a:srgbClr val="3D3A36"/>
                 </a:solidFill>
                 <a:latin typeface="Calibri" pitchFamily="34" charset="0"/>
                 <a:ea typeface="Calibri" pitchFamily="34" charset="-122"/>
                 <a:cs typeface="Calibri" pitchFamily="34" charset="-120"/>
               </a:rPr>
-              <a:t>Key points will be covered in class.</a:t>
-            </a:r>
-            <a:endParaRPr lang="en-US" sz="1600" dirty="0"/>
-          </a:p>
-        </p:txBody>
-      </p:sp>
-      <p:sp>
-        <p:nvSpPr>
-          <p:cNvPr id="5" name="Text 3"/>
-          <p:cNvSpPr/>
-          <p:nvPr/>
-        </p:nvSpPr>
-        <p:spPr>
-          <a:xfrm>
-            <a:off x="7772400" y="4663440"/>
-            <a:ext cx="1097280" cy="365760"/>
-          </a:xfrm>
-          <a:prstGeom prst="rect">
-            <a:avLst/>
-          </a:prstGeom>
-          <a:noFill/>
-          <a:ln/>
-        </p:spPr>
-        <p:txBody>
-          <a:bodyPr wrap="square" rtlCol="0" anchor="ctr"/>
-          <a:lstStyle/>
-          <a:p>
-            <a:pPr algn="r" indent="0" marL="0">
-              <a:buNone/>
-            </a:pPr>
-            <a:r>
-              <a:rPr lang="en-US" sz="1000" dirty="0">
-                <a:solidFill>
-                  <a:srgbClr val="999999"/>
+              <a:t>The particle model helps us explain how materials behave</a:t>
+            </a:r>
+            <a:endParaRPr lang="en-US" sz="1500" dirty="0"/>
+          </a:p>
+          <a:p>
+            <a:pPr marL="342900" indent="-342900">
+              <a:spcAft>
+                <a:spcPts val="800"/>
+              </a:spcAft>
+              <a:buSzPct val="100000"/>
+              <a:buChar char="•"/>
+            </a:pPr>
+            <a:r>
+              <a:rPr lang="en-US" sz="1500" dirty="0">
+                <a:solidFill>
+                  <a:srgbClr val="3D3A36"/>
                 </a:solidFill>
                 <a:latin typeface="Calibri" pitchFamily="34" charset="0"/>
                 <a:ea typeface="Calibri" pitchFamily="34" charset="-122"/>
                 <a:cs typeface="Calibri" pitchFamily="34" charset="-120"/>
               </a:rPr>
-              <a:t>2 / 6</a:t>
-            </a:r>
-            <a:endParaRPr lang="en-US" sz="1000" dirty="0"/>
+              <a:t>Particles are always moving — this is called kinetic theory</a:t>
+            </a:r>
+            <a:endParaRPr lang="en-US" sz="1500" dirty="0"/>
+          </a:p>
+        </p:txBody>
+      </p:sp>
+      <p:sp>
+        <p:nvSpPr>
+          <p:cNvPr id="5" name="Shape 3"/>
+          <p:cNvSpPr/>
+          <p:nvPr/>
+        </p:nvSpPr>
+        <p:spPr>
+          <a:xfrm>
+            <a:off x="548640" y="4754880"/>
+            <a:ext cx="8046720" cy="9144"/>
+          </a:xfrm>
+          <a:prstGeom prst="rect">
+            <a:avLst/>
+          </a:prstGeom>
+          <a:solidFill>
+            <a:srgbClr val="F3F1EE"/>
+          </a:solidFill>
+          <a:ln/>
+        </p:spPr>
+      </p:sp>
+      <p:sp>
+        <p:nvSpPr>
+          <p:cNvPr id="6" name="Text 4"/>
+          <p:cNvSpPr/>
+          <p:nvPr/>
+        </p:nvSpPr>
+        <p:spPr>
+          <a:xfrm>
+            <a:off x="548640" y="4800600"/>
+            <a:ext cx="3657600" cy="274320"/>
+          </a:xfrm>
+          <a:prstGeom prst="rect">
+            <a:avLst/>
+          </a:prstGeom>
+          <a:noFill/>
+          <a:ln/>
+        </p:spPr>
+        <p:txBody>
+          <a:bodyPr wrap="square" rtlCol="0" anchor="ctr"/>
+          <a:lstStyle/>
+          <a:p>
+            <a:pPr indent="0" marL="0">
+              <a:buNone/>
+            </a:pPr>
+            <a:r>
+              <a:rPr lang="en-US" sz="800" dirty="0">
+                <a:solidFill>
+                  <a:srgbClr val="9B9690"/>
+                </a:solidFill>
+              </a:rPr>
+              <a:t>mrzocchi.com</a:t>
+            </a:r>
+            <a:endParaRPr lang="en-US" sz="800" dirty="0"/>
           </a:p>
         </p:txBody>
       </p:sp>
@@ -1594,6 +1543,13 @@
 <file path=ppt/slides/slide3.xml><?xml version="1.0" encoding="utf-8"?>
 <p:sld xmlns:a="http://schemas.openxmlformats.org/drawingml/2006/main" xmlns:r="http://schemas.openxmlformats.org/officeDocument/2006/relationships" xmlns:p="http://schemas.openxmlformats.org/presentationml/2006/main">
   <p:cSld name="Slide 3">
+    <p:bg>
+      <p:bgPr>
+        <a:solidFill>
+          <a:srgbClr val="FFFFFF"/>
+        </a:solidFill>
+      </p:bgPr>
+    </p:bg>
     <p:spTree>
       <p:nvGrpSpPr>
         <p:cNvPr id="1" name=""/>
@@ -1617,13 +1573,13 @@
         <p:spPr>
           <a:xfrm>
             <a:off x="0" y="0"/>
-            <a:ext cx="9144000" cy="548640"/>
-          </a:xfrm>
-          <a:prstGeom prst="rect">
-            <a:avLst/>
-          </a:prstGeom>
-          <a:solidFill>
-            <a:srgbClr val="7C3AED"/>
+            <a:ext cx="9144000" cy="54864"/>
+          </a:xfrm>
+          <a:prstGeom prst="rect">
+            <a:avLst/>
+          </a:prstGeom>
+          <a:solidFill>
+            <a:srgbClr val="2A9D8F"/>
           </a:solidFill>
           <a:ln/>
         </p:spPr>
@@ -1636,8 +1592,8 @@
         </p:nvSpPr>
         <p:spPr>
           <a:xfrm>
-            <a:off x="457200" y="45720"/>
-            <a:ext cx="8229600" cy="457200"/>
+            <a:off x="548640" y="274320"/>
+            <a:ext cx="8046720" cy="640080"/>
           </a:xfrm>
           <a:prstGeom prst="rect">
             <a:avLst/>
@@ -1646,6 +1602,72 @@
           <a:ln/>
         </p:spPr>
         <p:txBody>
+          <a:bodyPr wrap="square" lIns="0" tIns="0" rIns="0" bIns="0" rtlCol="0" anchor="ctr"/>
+          <a:lstStyle/>
+          <a:p>
+            <a:pPr indent="0" marL="0">
+              <a:buNone/>
+            </a:pPr>
+            <a:r>
+              <a:rPr lang="en-US" sz="2600" b="1" dirty="0">
+                <a:solidFill>
+                  <a:srgbClr val="1B2A4A"/>
+                </a:solidFill>
+                <a:latin typeface="Georgia" pitchFamily="34" charset="0"/>
+                <a:ea typeface="Georgia" pitchFamily="34" charset="-122"/>
+                <a:cs typeface="Georgia" pitchFamily="34" charset="-120"/>
+              </a:rPr>
+              <a:t>Particles in Each State</a:t>
+            </a:r>
+            <a:endParaRPr lang="en-US" sz="2600" dirty="0"/>
+          </a:p>
+        </p:txBody>
+      </p:sp>
+      <p:sp>
+        <p:nvSpPr>
+          <p:cNvPr id="4" name="Shape 2"/>
+          <p:cNvSpPr/>
+          <p:nvPr/>
+        </p:nvSpPr>
+        <p:spPr>
+          <a:xfrm>
+            <a:off x="457200" y="1097280"/>
+            <a:ext cx="3840480" cy="3474720"/>
+          </a:xfrm>
+          <a:prstGeom prst="rect">
+            <a:avLst/>
+          </a:prstGeom>
+          <a:solidFill>
+            <a:srgbClr val="F3F1EE"/>
+          </a:solidFill>
+          <a:ln/>
+          <a:effectLst>
+            <a:outerShdw sx="100000" sy="100000" kx="0" ky="0" algn="bl" rotWithShape="0" blurRad="50800" dist="25400" dir="8100000">
+              <a:srgbClr val="000000">
+                <a:alpha val="10000"/>
+              </a:srgbClr>
+            </a:outerShdw>
+          </a:effectLst>
+        </p:spPr>
+      </p:sp>
+      <p:sp>
+        <p:nvSpPr>
+          <p:cNvPr id="5" name="Text 3"/>
+          <p:cNvSpPr/>
+          <p:nvPr/>
+        </p:nvSpPr>
+        <p:spPr>
+          <a:xfrm>
+            <a:off x="640080" y="1234440"/>
+            <a:ext cx="3474720" cy="411480"/>
+          </a:xfrm>
+          <a:prstGeom prst="rect">
+            <a:avLst/>
+          </a:prstGeom>
+          <a:noFill/>
+          <a:ln/>
+        </p:spPr>
+        <p:txBody>
           <a:bodyPr wrap="square" rtlCol="0" anchor="ctr"/>
           <a:lstStyle/>
           <a:p>
@@ -1653,118 +1675,331 @@
               <a:buNone/>
             </a:pPr>
             <a:r>
-              <a:rPr lang="en-US" sz="1800" b="1" dirty="0">
-                <a:solidFill>
-                  <a:srgbClr val="FFFFFF"/>
+              <a:rPr lang="en-US" sz="1600" b="1" dirty="0">
+                <a:solidFill>
+                  <a:srgbClr val="1B2A4A"/>
+                </a:solidFill>
+                <a:latin typeface="Georgia" pitchFamily="34" charset="0"/>
+                <a:ea typeface="Georgia" pitchFamily="34" charset="-122"/>
+                <a:cs typeface="Georgia" pitchFamily="34" charset="-120"/>
+              </a:rPr>
+              <a:t>Solids</a:t>
+            </a:r>
+            <a:endParaRPr lang="en-US" sz="1600" dirty="0"/>
+          </a:p>
+        </p:txBody>
+      </p:sp>
+      <p:sp>
+        <p:nvSpPr>
+          <p:cNvPr id="6" name="Text 4"/>
+          <p:cNvSpPr/>
+          <p:nvPr/>
+        </p:nvSpPr>
+        <p:spPr>
+          <a:xfrm>
+            <a:off x="640080" y="1737360"/>
+            <a:ext cx="3474720" cy="2651760"/>
+          </a:xfrm>
+          <a:prstGeom prst="rect">
+            <a:avLst/>
+          </a:prstGeom>
+          <a:noFill/>
+          <a:ln/>
+        </p:spPr>
+        <p:txBody>
+          <a:bodyPr wrap="square" rtlCol="0" anchor="t"/>
+          <a:lstStyle/>
+          <a:p>
+            <a:pPr marL="342900" indent="-342900">
+              <a:spcAft>
+                <a:spcPts val="600"/>
+              </a:spcAft>
+              <a:buSzPct val="100000"/>
+              <a:buChar char="•"/>
+            </a:pPr>
+            <a:r>
+              <a:rPr lang="en-US" sz="1300" dirty="0">
+                <a:solidFill>
+                  <a:srgbClr val="3D3A36"/>
                 </a:solidFill>
                 <a:latin typeface="Calibri" pitchFamily="34" charset="0"/>
                 <a:ea typeface="Calibri" pitchFamily="34" charset="-122"/>
                 <a:cs typeface="Calibri" pitchFamily="34" charset="-120"/>
               </a:rPr>
-              <a:t>Particle arrangement</a:t>
-            </a:r>
-            <a:endParaRPr lang="en-US" sz="1800" dirty="0"/>
-          </a:p>
-        </p:txBody>
-      </p:sp>
-      <p:sp>
-        <p:nvSpPr>
-          <p:cNvPr id="4" name="Text 2"/>
-          <p:cNvSpPr/>
-          <p:nvPr/>
-        </p:nvSpPr>
-        <p:spPr>
-          <a:xfrm>
-            <a:off x="731520" y="1097280"/>
-            <a:ext cx="7680960" cy="3200400"/>
-          </a:xfrm>
-          <a:prstGeom prst="rect">
-            <a:avLst/>
-          </a:prstGeom>
-          <a:noFill/>
-          <a:ln/>
-        </p:spPr>
-        <p:txBody>
-          <a:bodyPr wrap="square" rtlCol="0" anchor="ctr"/>
-          <a:lstStyle/>
-          <a:p>
-            <a:pPr indent="0" marL="0">
-              <a:buNone/>
-            </a:pPr>
-            <a:r>
-              <a:rPr lang="en-US" sz="1600" dirty="0">
-                <a:solidFill>
-                  <a:srgbClr val="363636"/>
+              <a:t>Particles packed tightly in fixed positions</a:t>
+            </a:r>
+            <a:endParaRPr lang="en-US" sz="1300" dirty="0"/>
+          </a:p>
+          <a:p>
+            <a:pPr marL="342900" indent="-342900">
+              <a:spcAft>
+                <a:spcPts val="600"/>
+              </a:spcAft>
+              <a:buSzPct val="100000"/>
+              <a:buChar char="•"/>
+            </a:pPr>
+            <a:r>
+              <a:rPr lang="en-US" sz="1300" dirty="0">
+                <a:solidFill>
+                  <a:srgbClr val="3D3A36"/>
                 </a:solidFill>
                 <a:latin typeface="Calibri" pitchFamily="34" charset="0"/>
                 <a:ea typeface="Calibri" pitchFamily="34" charset="-122"/>
                 <a:cs typeface="Calibri" pitchFamily="34" charset="-120"/>
               </a:rPr>
-              <a:t>Content for: Particle arrangement</a:t>
-            </a:r>
-            <a:endParaRPr lang="en-US" sz="1600" dirty="0"/>
-          </a:p>
-          <a:p>
-            <a:pPr indent="0" marL="0">
-              <a:buNone/>
-            </a:pPr>
-            <a:endParaRPr lang="en-US" sz="1600" dirty="0"/>
-          </a:p>
-          <a:p>
-            <a:pPr indent="0" marL="0">
-              <a:buNone/>
-            </a:pPr>
-            <a:r>
-              <a:rPr lang="en-US" sz="1600" dirty="0">
-                <a:solidFill>
-                  <a:srgbClr val="363636"/>
+              <a:t>Vibrate but don't move around</a:t>
+            </a:r>
+            <a:endParaRPr lang="en-US" sz="1300" dirty="0"/>
+          </a:p>
+          <a:p>
+            <a:pPr marL="342900" indent="-342900">
+              <a:spcAft>
+                <a:spcPts val="600"/>
+              </a:spcAft>
+              <a:buSzPct val="100000"/>
+              <a:buChar char="•"/>
+            </a:pPr>
+            <a:r>
+              <a:rPr lang="en-US" sz="1300" dirty="0">
+                <a:solidFill>
+                  <a:srgbClr val="3D3A36"/>
                 </a:solidFill>
                 <a:latin typeface="Calibri" pitchFamily="34" charset="0"/>
                 <a:ea typeface="Calibri" pitchFamily="34" charset="-122"/>
                 <a:cs typeface="Calibri" pitchFamily="34" charset="-120"/>
               </a:rPr>
-              <a:t>Key points will be covered in class.</a:t>
-            </a:r>
-            <a:endParaRPr lang="en-US" sz="1600" dirty="0"/>
-          </a:p>
-        </p:txBody>
-      </p:sp>
-      <p:sp>
-        <p:nvSpPr>
-          <p:cNvPr id="5" name="Text 3"/>
-          <p:cNvSpPr/>
-          <p:nvPr/>
-        </p:nvSpPr>
-        <p:spPr>
-          <a:xfrm>
-            <a:off x="7772400" y="4663440"/>
-            <a:ext cx="1097280" cy="365760"/>
-          </a:xfrm>
-          <a:prstGeom prst="rect">
-            <a:avLst/>
-          </a:prstGeom>
-          <a:noFill/>
-          <a:ln/>
-        </p:spPr>
-        <p:txBody>
-          <a:bodyPr wrap="square" rtlCol="0" anchor="ctr"/>
-          <a:lstStyle/>
-          <a:p>
-            <a:pPr algn="r" indent="0" marL="0">
-              <a:buNone/>
-            </a:pPr>
-            <a:r>
-              <a:rPr lang="en-US" sz="1000" dirty="0">
-                <a:solidFill>
-                  <a:srgbClr val="999999"/>
+              <a:t>Strong forces hold them together</a:t>
+            </a:r>
+            <a:endParaRPr lang="en-US" sz="1300" dirty="0"/>
+          </a:p>
+          <a:p>
+            <a:pPr marL="342900" indent="-342900">
+              <a:spcAft>
+                <a:spcPts val="600"/>
+              </a:spcAft>
+              <a:buSzPct val="100000"/>
+              <a:buChar char="•"/>
+            </a:pPr>
+            <a:r>
+              <a:rPr lang="en-US" sz="1300" dirty="0">
+                <a:solidFill>
+                  <a:srgbClr val="3D3A36"/>
                 </a:solidFill>
                 <a:latin typeface="Calibri" pitchFamily="34" charset="0"/>
                 <a:ea typeface="Calibri" pitchFamily="34" charset="-122"/>
                 <a:cs typeface="Calibri" pitchFamily="34" charset="-120"/>
               </a:rPr>
-              <a:t>3 / 6</a:t>
-            </a:r>
-            <a:endParaRPr lang="en-US" sz="1000" dirty="0"/>
+              <a:t>Fixed shape and volume</a:t>
+            </a:r>
+            <a:endParaRPr lang="en-US" sz="1300" dirty="0"/>
+          </a:p>
+        </p:txBody>
+      </p:sp>
+      <p:sp>
+        <p:nvSpPr>
+          <p:cNvPr id="7" name="Shape 5"/>
+          <p:cNvSpPr/>
+          <p:nvPr/>
+        </p:nvSpPr>
+        <p:spPr>
+          <a:xfrm>
+            <a:off x="4846320" y="1097280"/>
+            <a:ext cx="3840480" cy="3474720"/>
+          </a:xfrm>
+          <a:prstGeom prst="rect">
+            <a:avLst/>
+          </a:prstGeom>
+          <a:solidFill>
+            <a:srgbClr val="F3F1EE"/>
+          </a:solidFill>
+          <a:ln/>
+          <a:effectLst>
+            <a:outerShdw sx="100000" sy="100000" kx="0" ky="0" algn="bl" rotWithShape="0" blurRad="50800" dist="25400" dir="8100000">
+              <a:srgbClr val="000000">
+                <a:alpha val="10000"/>
+              </a:srgbClr>
+            </a:outerShdw>
+          </a:effectLst>
+        </p:spPr>
+      </p:sp>
+      <p:sp>
+        <p:nvSpPr>
+          <p:cNvPr id="8" name="Text 6"/>
+          <p:cNvSpPr/>
+          <p:nvPr/>
+        </p:nvSpPr>
+        <p:spPr>
+          <a:xfrm>
+            <a:off x="5029200" y="1234440"/>
+            <a:ext cx="3474720" cy="411480"/>
+          </a:xfrm>
+          <a:prstGeom prst="rect">
+            <a:avLst/>
+          </a:prstGeom>
+          <a:noFill/>
+          <a:ln/>
+        </p:spPr>
+        <p:txBody>
+          <a:bodyPr wrap="square" rtlCol="0" anchor="ctr"/>
+          <a:lstStyle/>
+          <a:p>
+            <a:pPr indent="0" marL="0">
+              <a:buNone/>
+            </a:pPr>
+            <a:r>
+              <a:rPr lang="en-US" sz="1600" b="1" dirty="0">
+                <a:solidFill>
+                  <a:srgbClr val="1B2A4A"/>
+                </a:solidFill>
+                <a:latin typeface="Georgia" pitchFamily="34" charset="0"/>
+                <a:ea typeface="Georgia" pitchFamily="34" charset="-122"/>
+                <a:cs typeface="Georgia" pitchFamily="34" charset="-120"/>
+              </a:rPr>
+              <a:t>Liquids &amp; Gases</a:t>
+            </a:r>
+            <a:endParaRPr lang="en-US" sz="1600" dirty="0"/>
+          </a:p>
+        </p:txBody>
+      </p:sp>
+      <p:sp>
+        <p:nvSpPr>
+          <p:cNvPr id="9" name="Text 7"/>
+          <p:cNvSpPr/>
+          <p:nvPr/>
+        </p:nvSpPr>
+        <p:spPr>
+          <a:xfrm>
+            <a:off x="5029200" y="1737360"/>
+            <a:ext cx="3474720" cy="2651760"/>
+          </a:xfrm>
+          <a:prstGeom prst="rect">
+            <a:avLst/>
+          </a:prstGeom>
+          <a:noFill/>
+          <a:ln/>
+        </p:spPr>
+        <p:txBody>
+          <a:bodyPr wrap="square" rtlCol="0" anchor="t"/>
+          <a:lstStyle/>
+          <a:p>
+            <a:pPr marL="342900" indent="-342900">
+              <a:spcAft>
+                <a:spcPts val="600"/>
+              </a:spcAft>
+              <a:buSzPct val="100000"/>
+              <a:buChar char="•"/>
+            </a:pPr>
+            <a:r>
+              <a:rPr lang="en-US" sz="1300" dirty="0">
+                <a:solidFill>
+                  <a:srgbClr val="3D3A36"/>
+                </a:solidFill>
+                <a:latin typeface="Calibri" pitchFamily="34" charset="0"/>
+                <a:ea typeface="Calibri" pitchFamily="34" charset="-122"/>
+                <a:cs typeface="Calibri" pitchFamily="34" charset="-120"/>
+              </a:rPr>
+              <a:t>Liquids: particles close but can slide past each other</a:t>
+            </a:r>
+            <a:endParaRPr lang="en-US" sz="1300" dirty="0"/>
+          </a:p>
+          <a:p>
+            <a:pPr marL="342900" indent="-342900">
+              <a:spcAft>
+                <a:spcPts val="600"/>
+              </a:spcAft>
+              <a:buSzPct val="100000"/>
+              <a:buChar char="•"/>
+            </a:pPr>
+            <a:r>
+              <a:rPr lang="en-US" sz="1300" dirty="0">
+                <a:solidFill>
+                  <a:srgbClr val="3D3A36"/>
+                </a:solidFill>
+                <a:latin typeface="Calibri" pitchFamily="34" charset="0"/>
+                <a:ea typeface="Calibri" pitchFamily="34" charset="-122"/>
+                <a:cs typeface="Calibri" pitchFamily="34" charset="-120"/>
+              </a:rPr>
+              <a:t>Liquids take the shape of their container</a:t>
+            </a:r>
+            <a:endParaRPr lang="en-US" sz="1300" dirty="0"/>
+          </a:p>
+          <a:p>
+            <a:pPr marL="342900" indent="-342900">
+              <a:spcAft>
+                <a:spcPts val="600"/>
+              </a:spcAft>
+              <a:buSzPct val="100000"/>
+              <a:buChar char="•"/>
+            </a:pPr>
+            <a:r>
+              <a:rPr lang="en-US" sz="1300" dirty="0">
+                <a:solidFill>
+                  <a:srgbClr val="3D3A36"/>
+                </a:solidFill>
+                <a:latin typeface="Calibri" pitchFamily="34" charset="0"/>
+                <a:ea typeface="Calibri" pitchFamily="34" charset="-122"/>
+                <a:cs typeface="Calibri" pitchFamily="34" charset="-120"/>
+              </a:rPr>
+              <a:t>Gases: particles far apart, move fast and randomly</a:t>
+            </a:r>
+            <a:endParaRPr lang="en-US" sz="1300" dirty="0"/>
+          </a:p>
+          <a:p>
+            <a:pPr marL="342900" indent="-342900">
+              <a:spcAft>
+                <a:spcPts val="600"/>
+              </a:spcAft>
+              <a:buSzPct val="100000"/>
+              <a:buChar char="•"/>
+            </a:pPr>
+            <a:r>
+              <a:rPr lang="en-US" sz="1300" dirty="0">
+                <a:solidFill>
+                  <a:srgbClr val="3D3A36"/>
+                </a:solidFill>
+                <a:latin typeface="Calibri" pitchFamily="34" charset="0"/>
+                <a:ea typeface="Calibri" pitchFamily="34" charset="-122"/>
+                <a:cs typeface="Calibri" pitchFamily="34" charset="-120"/>
+              </a:rPr>
+              <a:t>Gases fill any container and can be compressed</a:t>
+            </a:r>
+            <a:endParaRPr lang="en-US" sz="1300" dirty="0"/>
+          </a:p>
+        </p:txBody>
+      </p:sp>
+      <p:sp>
+        <p:nvSpPr>
+          <p:cNvPr id="10" name="Text 8"/>
+          <p:cNvSpPr/>
+          <p:nvPr/>
+        </p:nvSpPr>
+        <p:spPr>
+          <a:xfrm>
+            <a:off x="548640" y="4800600"/>
+            <a:ext cx="3657600" cy="274320"/>
+          </a:xfrm>
+          <a:prstGeom prst="rect">
+            <a:avLst/>
+          </a:prstGeom>
+          <a:noFill/>
+          <a:ln/>
+        </p:spPr>
+        <p:txBody>
+          <a:bodyPr wrap="square" rtlCol="0" anchor="ctr"/>
+          <a:lstStyle/>
+          <a:p>
+            <a:pPr indent="0" marL="0">
+              <a:buNone/>
+            </a:pPr>
+            <a:r>
+              <a:rPr lang="en-US" sz="800" dirty="0">
+                <a:solidFill>
+                  <a:srgbClr val="9B9690"/>
+                </a:solidFill>
+              </a:rPr>
+              <a:t>mrzocchi.com</a:t>
+            </a:r>
+            <a:endParaRPr lang="en-US" sz="800" dirty="0"/>
           </a:p>
         </p:txBody>
       </p:sp>
@@ -1779,6 +2014,13 @@
 <file path=ppt/slides/slide4.xml><?xml version="1.0" encoding="utf-8"?>
 <p:sld xmlns:a="http://schemas.openxmlformats.org/drawingml/2006/main" xmlns:r="http://schemas.openxmlformats.org/officeDocument/2006/relationships" xmlns:p="http://schemas.openxmlformats.org/presentationml/2006/main">
   <p:cSld name="Slide 4">
+    <p:bg>
+      <p:bgPr>
+        <a:solidFill>
+          <a:srgbClr val="1B2A4A"/>
+        </a:solidFill>
+      </p:bgPr>
+    </p:bg>
     <p:spTree>
       <p:nvGrpSpPr>
         <p:cNvPr id="1" name=""/>
@@ -1802,13 +2044,13 @@
         <p:spPr>
           <a:xfrm>
             <a:off x="0" y="0"/>
-            <a:ext cx="9144000" cy="548640"/>
-          </a:xfrm>
-          <a:prstGeom prst="rect">
-            <a:avLst/>
-          </a:prstGeom>
-          <a:solidFill>
-            <a:srgbClr val="7C3AED"/>
+            <a:ext cx="9144000" cy="54864"/>
+          </a:xfrm>
+          <a:prstGeom prst="rect">
+            <a:avLst/>
+          </a:prstGeom>
+          <a:solidFill>
+            <a:srgbClr val="2A9D8F"/>
           </a:solidFill>
           <a:ln/>
         </p:spPr>
@@ -1821,8 +2063,8 @@
         </p:nvSpPr>
         <p:spPr>
           <a:xfrm>
-            <a:off x="457200" y="45720"/>
-            <a:ext cx="8229600" cy="457200"/>
+            <a:off x="548640" y="457200"/>
+            <a:ext cx="8046720" cy="640080"/>
           </a:xfrm>
           <a:prstGeom prst="rect">
             <a:avLst/>
@@ -1838,77 +2080,121 @@
               <a:buNone/>
             </a:pPr>
             <a:r>
-              <a:rPr lang="en-US" sz="1800" b="1" dirty="0">
+              <a:rPr lang="en-US" sz="2800" b="1" dirty="0">
                 <a:solidFill>
                   <a:srgbClr val="FFFFFF"/>
+                </a:solidFill>
+                <a:latin typeface="Georgia" pitchFamily="34" charset="0"/>
+                <a:ea typeface="Georgia" pitchFamily="34" charset="-122"/>
+                <a:cs typeface="Georgia" pitchFamily="34" charset="-120"/>
+              </a:rPr>
+              <a:t>Key Takeaways</a:t>
+            </a:r>
+            <a:endParaRPr lang="en-US" sz="2800" dirty="0"/>
+          </a:p>
+        </p:txBody>
+      </p:sp>
+      <p:sp>
+        <p:nvSpPr>
+          <p:cNvPr id="4" name="Text 2"/>
+          <p:cNvSpPr/>
+          <p:nvPr/>
+        </p:nvSpPr>
+        <p:spPr>
+          <a:xfrm>
+            <a:off x="731520" y="1371600"/>
+            <a:ext cx="7680960" cy="3200400"/>
+          </a:xfrm>
+          <a:prstGeom prst="rect">
+            <a:avLst/>
+          </a:prstGeom>
+          <a:noFill/>
+          <a:ln/>
+        </p:spPr>
+        <p:txBody>
+          <a:bodyPr wrap="square" rtlCol="0" anchor="t"/>
+          <a:lstStyle/>
+          <a:p>
+            <a:pPr marL="342900" indent="-342900">
+              <a:spcAft>
+                <a:spcPts val="1000"/>
+              </a:spcAft>
+              <a:buSzPct val="100000"/>
+              <a:buChar char="•"/>
+            </a:pPr>
+            <a:r>
+              <a:rPr lang="en-US" sz="1600" dirty="0">
+                <a:solidFill>
+                  <a:srgbClr val="CADCFC"/>
                 </a:solidFill>
                 <a:latin typeface="Calibri" pitchFamily="34" charset="0"/>
                 <a:ea typeface="Calibri" pitchFamily="34" charset="-122"/>
                 <a:cs typeface="Calibri" pitchFamily="34" charset="-120"/>
               </a:rPr>
-              <a:t>Particle movement &amp; energy</a:t>
-            </a:r>
-            <a:endParaRPr lang="en-US" sz="1800" dirty="0"/>
-          </a:p>
-        </p:txBody>
-      </p:sp>
-      <p:sp>
-        <p:nvSpPr>
-          <p:cNvPr id="4" name="Text 2"/>
-          <p:cNvSpPr/>
-          <p:nvPr/>
-        </p:nvSpPr>
-        <p:spPr>
-          <a:xfrm>
-            <a:off x="731520" y="1097280"/>
-            <a:ext cx="7680960" cy="3200400"/>
-          </a:xfrm>
-          <a:prstGeom prst="rect">
-            <a:avLst/>
-          </a:prstGeom>
-          <a:noFill/>
-          <a:ln/>
-        </p:spPr>
-        <p:txBody>
-          <a:bodyPr wrap="square" rtlCol="0" anchor="ctr"/>
-          <a:lstStyle/>
-          <a:p>
-            <a:pPr indent="0" marL="0">
-              <a:buNone/>
+              <a:t>All matter = tiny particles in constant motion</a:t>
+            </a:r>
+            <a:endParaRPr lang="en-US" sz="1600" dirty="0"/>
+          </a:p>
+          <a:p>
+            <a:pPr marL="342900" indent="-342900">
+              <a:spcAft>
+                <a:spcPts val="1000"/>
+              </a:spcAft>
+              <a:buSzPct val="100000"/>
+              <a:buChar char="•"/>
             </a:pPr>
             <a:r>
               <a:rPr lang="en-US" sz="1600" dirty="0">
                 <a:solidFill>
-                  <a:srgbClr val="363636"/>
+                  <a:srgbClr val="CADCFC"/>
                 </a:solidFill>
                 <a:latin typeface="Calibri" pitchFamily="34" charset="0"/>
                 <a:ea typeface="Calibri" pitchFamily="34" charset="-122"/>
                 <a:cs typeface="Calibri" pitchFamily="34" charset="-120"/>
               </a:rPr>
-              <a:t>Content for: Particle movement &amp; energy</a:t>
+              <a:t>Solids: fixed, vibrate only | Liquids: close, slide | Gases: far, fast</a:t>
             </a:r>
             <a:endParaRPr lang="en-US" sz="1600" dirty="0"/>
           </a:p>
           <a:p>
-            <a:pPr indent="0" marL="0">
-              <a:buNone/>
-            </a:pPr>
-            <a:endParaRPr lang="en-US" sz="1600" dirty="0"/>
-          </a:p>
-          <a:p>
-            <a:pPr indent="0" marL="0">
-              <a:buNone/>
+            <a:pPr marL="342900" indent="-342900">
+              <a:spcAft>
+                <a:spcPts val="1000"/>
+              </a:spcAft>
+              <a:buSzPct val="100000"/>
+              <a:buChar char="•"/>
             </a:pPr>
             <a:r>
               <a:rPr lang="en-US" sz="1600" dirty="0">
                 <a:solidFill>
-                  <a:srgbClr val="363636"/>
+                  <a:srgbClr val="CADCFC"/>
                 </a:solidFill>
                 <a:latin typeface="Calibri" pitchFamily="34" charset="0"/>
                 <a:ea typeface="Calibri" pitchFamily="34" charset="-122"/>
                 <a:cs typeface="Calibri" pitchFamily="34" charset="-120"/>
               </a:rPr>
-              <a:t>Key points will be covered in class.</a:t>
+              <a:t>Particle arrangement explains properties of each state</a:t>
+            </a:r>
+            <a:endParaRPr lang="en-US" sz="1600" dirty="0"/>
+          </a:p>
+          <a:p>
+            <a:pPr marL="342900" indent="-342900">
+              <a:spcAft>
+                <a:spcPts val="1000"/>
+              </a:spcAft>
+              <a:buSzPct val="100000"/>
+              <a:buChar char="•"/>
+            </a:pPr>
+            <a:r>
+              <a:rPr lang="en-US" sz="1600" dirty="0">
+                <a:solidFill>
+                  <a:srgbClr val="CADCFC"/>
+                </a:solidFill>
+                <a:latin typeface="Calibri" pitchFamily="34" charset="0"/>
+                <a:ea typeface="Calibri" pitchFamily="34" charset="-122"/>
+                <a:cs typeface="Calibri" pitchFamily="34" charset="-120"/>
+              </a:rPr>
+              <a:t>More energy = particles move faster</a:t>
             </a:r>
             <a:endParaRPr lang="en-US" sz="1600" dirty="0"/>
           </a:p>
@@ -1922,8 +2208,8 @@
         </p:nvSpPr>
         <p:spPr>
           <a:xfrm>
-            <a:off x="7772400" y="4663440"/>
-            <a:ext cx="1097280" cy="365760"/>
+            <a:off x="548640" y="4572000"/>
+            <a:ext cx="3657600" cy="274320"/>
           </a:xfrm>
           <a:prstGeom prst="rect">
             <a:avLst/>
@@ -1935,389 +2221,16 @@
           <a:bodyPr wrap="square" rtlCol="0" anchor="ctr"/>
           <a:lstStyle/>
           <a:p>
-            <a:pPr algn="r" indent="0" marL="0">
-              <a:buNone/>
-            </a:pPr>
-            <a:r>
-              <a:rPr lang="en-US" sz="1000" dirty="0">
-                <a:solidFill>
-                  <a:srgbClr val="999999"/>
-                </a:solidFill>
-                <a:latin typeface="Calibri" pitchFamily="34" charset="0"/>
-                <a:ea typeface="Calibri" pitchFamily="34" charset="-122"/>
-                <a:cs typeface="Calibri" pitchFamily="34" charset="-120"/>
-              </a:rPr>
-              <a:t>4 / 6</a:t>
-            </a:r>
-            <a:endParaRPr lang="en-US" sz="1000" dirty="0"/>
-          </a:p>
-        </p:txBody>
-      </p:sp>
-    </p:spTree>
-  </p:cSld>
-  <p:clrMapOvr>
-    <a:masterClrMapping/>
-  </p:clrMapOvr>
-</p:sld>
-</file>
-
-<file path=ppt/slides/slide5.xml><?xml version="1.0" encoding="utf-8"?>
-<p:sld xmlns:a="http://schemas.openxmlformats.org/drawingml/2006/main" xmlns:r="http://schemas.openxmlformats.org/officeDocument/2006/relationships" xmlns:p="http://schemas.openxmlformats.org/presentationml/2006/main">
-  <p:cSld name="Slide 5">
-    <p:spTree>
-      <p:nvGrpSpPr>
-        <p:cNvPr id="1" name=""/>
-        <p:cNvGrpSpPr/>
-        <p:nvPr/>
-      </p:nvGrpSpPr>
-      <p:grpSpPr>
-        <a:xfrm>
-          <a:off x="0" y="0"/>
-          <a:ext cx="0" cy="0"/>
-          <a:chOff x="0" y="0"/>
-          <a:chExt cx="0" cy="0"/>
-        </a:xfrm>
-      </p:grpSpPr>
-      <p:sp>
-        <p:nvSpPr>
-          <p:cNvPr id="2" name="Shape 0"/>
-          <p:cNvSpPr/>
-          <p:nvPr/>
-        </p:nvSpPr>
-        <p:spPr>
-          <a:xfrm>
-            <a:off x="0" y="0"/>
-            <a:ext cx="9144000" cy="548640"/>
-          </a:xfrm>
-          <a:prstGeom prst="rect">
-            <a:avLst/>
-          </a:prstGeom>
-          <a:solidFill>
-            <a:srgbClr val="7C3AED"/>
-          </a:solidFill>
-          <a:ln/>
-        </p:spPr>
-      </p:sp>
-      <p:sp>
-        <p:nvSpPr>
-          <p:cNvPr id="3" name="Text 1"/>
-          <p:cNvSpPr/>
-          <p:nvPr/>
-        </p:nvSpPr>
-        <p:spPr>
-          <a:xfrm>
-            <a:off x="457200" y="45720"/>
-            <a:ext cx="8229600" cy="457200"/>
-          </a:xfrm>
-          <a:prstGeom prst="rect">
-            <a:avLst/>
-          </a:prstGeom>
-          <a:noFill/>
-          <a:ln/>
-        </p:spPr>
-        <p:txBody>
-          <a:bodyPr wrap="square" rtlCol="0" anchor="ctr"/>
-          <a:lstStyle/>
-          <a:p>
             <a:pPr indent="0" marL="0">
               <a:buNone/>
             </a:pPr>
             <a:r>
-              <a:rPr lang="en-US" sz="1800" b="1" dirty="0">
-                <a:solidFill>
-                  <a:srgbClr val="FFFFFF"/>
-                </a:solidFill>
-                <a:latin typeface="Calibri" pitchFamily="34" charset="0"/>
-                <a:ea typeface="Calibri" pitchFamily="34" charset="-122"/>
-                <a:cs typeface="Calibri" pitchFamily="34" charset="-120"/>
-              </a:rPr>
-              <a:t>Particle diagrams</a:t>
-            </a:r>
-            <a:endParaRPr lang="en-US" sz="1800" dirty="0"/>
-          </a:p>
-        </p:txBody>
-      </p:sp>
-      <p:sp>
-        <p:nvSpPr>
-          <p:cNvPr id="4" name="Text 2"/>
-          <p:cNvSpPr/>
-          <p:nvPr/>
-        </p:nvSpPr>
-        <p:spPr>
-          <a:xfrm>
-            <a:off x="731520" y="1097280"/>
-            <a:ext cx="7680960" cy="3200400"/>
-          </a:xfrm>
-          <a:prstGeom prst="rect">
-            <a:avLst/>
-          </a:prstGeom>
-          <a:noFill/>
-          <a:ln/>
-        </p:spPr>
-        <p:txBody>
-          <a:bodyPr wrap="square" rtlCol="0" anchor="ctr"/>
-          <a:lstStyle/>
-          <a:p>
-            <a:pPr indent="0" marL="0">
-              <a:buNone/>
-            </a:pPr>
-            <a:r>
-              <a:rPr lang="en-US" sz="1600" dirty="0">
-                <a:solidFill>
-                  <a:srgbClr val="363636"/>
-                </a:solidFill>
-                <a:latin typeface="Calibri" pitchFamily="34" charset="0"/>
-                <a:ea typeface="Calibri" pitchFamily="34" charset="-122"/>
-                <a:cs typeface="Calibri" pitchFamily="34" charset="-120"/>
-              </a:rPr>
-              <a:t>Content for: Particle diagrams</a:t>
-            </a:r>
-            <a:endParaRPr lang="en-US" sz="1600" dirty="0"/>
-          </a:p>
-          <a:p>
-            <a:pPr indent="0" marL="0">
-              <a:buNone/>
-            </a:pPr>
-            <a:endParaRPr lang="en-US" sz="1600" dirty="0"/>
-          </a:p>
-          <a:p>
-            <a:pPr indent="0" marL="0">
-              <a:buNone/>
-            </a:pPr>
-            <a:r>
-              <a:rPr lang="en-US" sz="1600" dirty="0">
-                <a:solidFill>
-                  <a:srgbClr val="363636"/>
-                </a:solidFill>
-                <a:latin typeface="Calibri" pitchFamily="34" charset="0"/>
-                <a:ea typeface="Calibri" pitchFamily="34" charset="-122"/>
-                <a:cs typeface="Calibri" pitchFamily="34" charset="-120"/>
-              </a:rPr>
-              <a:t>Key points will be covered in class.</a:t>
-            </a:r>
-            <a:endParaRPr lang="en-US" sz="1600" dirty="0"/>
-          </a:p>
-        </p:txBody>
-      </p:sp>
-      <p:sp>
-        <p:nvSpPr>
-          <p:cNvPr id="5" name="Text 3"/>
-          <p:cNvSpPr/>
-          <p:nvPr/>
-        </p:nvSpPr>
-        <p:spPr>
-          <a:xfrm>
-            <a:off x="7772400" y="4663440"/>
-            <a:ext cx="1097280" cy="365760"/>
-          </a:xfrm>
-          <a:prstGeom prst="rect">
-            <a:avLst/>
-          </a:prstGeom>
-          <a:noFill/>
-          <a:ln/>
-        </p:spPr>
-        <p:txBody>
-          <a:bodyPr wrap="square" rtlCol="0" anchor="ctr"/>
-          <a:lstStyle/>
-          <a:p>
-            <a:pPr algn="r" indent="0" marL="0">
-              <a:buNone/>
-            </a:pPr>
-            <a:r>
               <a:rPr lang="en-US" sz="1000" dirty="0">
                 <a:solidFill>
-                  <a:srgbClr val="999999"/>
-                </a:solidFill>
-                <a:latin typeface="Calibri" pitchFamily="34" charset="0"/>
-                <a:ea typeface="Calibri" pitchFamily="34" charset="-122"/>
-                <a:cs typeface="Calibri" pitchFamily="34" charset="-120"/>
-              </a:rPr>
-              <a:t>5 / 6</a:t>
-            </a:r>
-            <a:endParaRPr lang="en-US" sz="1000" dirty="0"/>
-          </a:p>
-        </p:txBody>
-      </p:sp>
-    </p:spTree>
-  </p:cSld>
-  <p:clrMapOvr>
-    <a:masterClrMapping/>
-  </p:clrMapOvr>
-</p:sld>
-</file>
-
-<file path=ppt/slides/slide6.xml><?xml version="1.0" encoding="utf-8"?>
-<p:sld xmlns:a="http://schemas.openxmlformats.org/drawingml/2006/main" xmlns:r="http://schemas.openxmlformats.org/officeDocument/2006/relationships" xmlns:p="http://schemas.openxmlformats.org/presentationml/2006/main">
-  <p:cSld name="Slide 6">
-    <p:spTree>
-      <p:nvGrpSpPr>
-        <p:cNvPr id="1" name=""/>
-        <p:cNvGrpSpPr/>
-        <p:nvPr/>
-      </p:nvGrpSpPr>
-      <p:grpSpPr>
-        <a:xfrm>
-          <a:off x="0" y="0"/>
-          <a:ext cx="0" cy="0"/>
-          <a:chOff x="0" y="0"/>
-          <a:chExt cx="0" cy="0"/>
-        </a:xfrm>
-      </p:grpSpPr>
-      <p:sp>
-        <p:nvSpPr>
-          <p:cNvPr id="2" name="Shape 0"/>
-          <p:cNvSpPr/>
-          <p:nvPr/>
-        </p:nvSpPr>
-        <p:spPr>
-          <a:xfrm>
-            <a:off x="0" y="0"/>
-            <a:ext cx="9144000" cy="548640"/>
-          </a:xfrm>
-          <a:prstGeom prst="rect">
-            <a:avLst/>
-          </a:prstGeom>
-          <a:solidFill>
-            <a:srgbClr val="7C3AED"/>
-          </a:solidFill>
-          <a:ln/>
-        </p:spPr>
-      </p:sp>
-      <p:sp>
-        <p:nvSpPr>
-          <p:cNvPr id="3" name="Text 1"/>
-          <p:cNvSpPr/>
-          <p:nvPr/>
-        </p:nvSpPr>
-        <p:spPr>
-          <a:xfrm>
-            <a:off x="457200" y="45720"/>
-            <a:ext cx="8229600" cy="457200"/>
-          </a:xfrm>
-          <a:prstGeom prst="rect">
-            <a:avLst/>
-          </a:prstGeom>
-          <a:noFill/>
-          <a:ln/>
-        </p:spPr>
-        <p:txBody>
-          <a:bodyPr wrap="square" rtlCol="0" anchor="ctr"/>
-          <a:lstStyle/>
-          <a:p>
-            <a:pPr indent="0" marL="0">
-              <a:buNone/>
-            </a:pPr>
-            <a:r>
-              <a:rPr lang="en-US" sz="1800" b="1" dirty="0">
-                <a:solidFill>
-                  <a:srgbClr val="FFFFFF"/>
-                </a:solidFill>
-                <a:latin typeface="Calibri" pitchFamily="34" charset="0"/>
-                <a:ea typeface="Calibri" pitchFamily="34" charset="-122"/>
-                <a:cs typeface="Calibri" pitchFamily="34" charset="-120"/>
-              </a:rPr>
-              <a:t>Key vocabulary</a:t>
-            </a:r>
-            <a:endParaRPr lang="en-US" sz="1800" dirty="0"/>
-          </a:p>
-        </p:txBody>
-      </p:sp>
-      <p:sp>
-        <p:nvSpPr>
-          <p:cNvPr id="4" name="Text 2"/>
-          <p:cNvSpPr/>
-          <p:nvPr/>
-        </p:nvSpPr>
-        <p:spPr>
-          <a:xfrm>
-            <a:off x="731520" y="1097280"/>
-            <a:ext cx="7680960" cy="3200400"/>
-          </a:xfrm>
-          <a:prstGeom prst="rect">
-            <a:avLst/>
-          </a:prstGeom>
-          <a:noFill/>
-          <a:ln/>
-        </p:spPr>
-        <p:txBody>
-          <a:bodyPr wrap="square" rtlCol="0" anchor="ctr"/>
-          <a:lstStyle/>
-          <a:p>
-            <a:pPr indent="0" marL="0">
-              <a:buNone/>
-            </a:pPr>
-            <a:r>
-              <a:rPr lang="en-US" sz="1600" dirty="0">
-                <a:solidFill>
-                  <a:srgbClr val="363636"/>
-                </a:solidFill>
-                <a:latin typeface="Calibri" pitchFamily="34" charset="0"/>
-                <a:ea typeface="Calibri" pitchFamily="34" charset="-122"/>
-                <a:cs typeface="Calibri" pitchFamily="34" charset="-120"/>
-              </a:rPr>
-              <a:t>Content for: Key vocabulary</a:t>
-            </a:r>
-            <a:endParaRPr lang="en-US" sz="1600" dirty="0"/>
-          </a:p>
-          <a:p>
-            <a:pPr indent="0" marL="0">
-              <a:buNone/>
-            </a:pPr>
-            <a:endParaRPr lang="en-US" sz="1600" dirty="0"/>
-          </a:p>
-          <a:p>
-            <a:pPr indent="0" marL="0">
-              <a:buNone/>
-            </a:pPr>
-            <a:r>
-              <a:rPr lang="en-US" sz="1600" dirty="0">
-                <a:solidFill>
-                  <a:srgbClr val="363636"/>
-                </a:solidFill>
-                <a:latin typeface="Calibri" pitchFamily="34" charset="0"/>
-                <a:ea typeface="Calibri" pitchFamily="34" charset="-122"/>
-                <a:cs typeface="Calibri" pitchFamily="34" charset="-120"/>
-              </a:rPr>
-              <a:t>Key points will be covered in class.</a:t>
-            </a:r>
-            <a:endParaRPr lang="en-US" sz="1600" dirty="0"/>
-          </a:p>
-        </p:txBody>
-      </p:sp>
-      <p:sp>
-        <p:nvSpPr>
-          <p:cNvPr id="5" name="Text 3"/>
-          <p:cNvSpPr/>
-          <p:nvPr/>
-        </p:nvSpPr>
-        <p:spPr>
-          <a:xfrm>
-            <a:off x="7772400" y="4663440"/>
-            <a:ext cx="1097280" cy="365760"/>
-          </a:xfrm>
-          <a:prstGeom prst="rect">
-            <a:avLst/>
-          </a:prstGeom>
-          <a:noFill/>
-          <a:ln/>
-        </p:spPr>
-        <p:txBody>
-          <a:bodyPr wrap="square" rtlCol="0" anchor="ctr"/>
-          <a:lstStyle/>
-          <a:p>
-            <a:pPr algn="r" indent="0" marL="0">
-              <a:buNone/>
-            </a:pPr>
-            <a:r>
-              <a:rPr lang="en-US" sz="1000" dirty="0">
-                <a:solidFill>
-                  <a:srgbClr val="999999"/>
-                </a:solidFill>
-                <a:latin typeface="Calibri" pitchFamily="34" charset="0"/>
-                <a:ea typeface="Calibri" pitchFamily="34" charset="-122"/>
-                <a:cs typeface="Calibri" pitchFamily="34" charset="-120"/>
-              </a:rPr>
-              <a:t>6 / 6</a:t>
+                  <a:srgbClr val="6B6660"/>
+                </a:solidFill>
+              </a:rPr>
+              <a:t>mrzocchi.com</a:t>
             </a:r>
             <a:endParaRPr lang="en-US" sz="1000" dirty="0"/>
           </a:p>

--- a/static/ppts/G6_Sci_T2_Particle_Model.pptx
+++ b/static/ppts/G6_Sci_T2_Particle_Model.pptx
@@ -9,9 +9,10 @@
     <p:sldId id="257" r:id="rId3"/>
     <p:sldId id="258" r:id="rId4"/>
     <p:sldId id="259" r:id="rId5"/>
+    <p:sldId id="260" r:id="rId6"/>
   </p:sldIdLst>
   <p:notesMasterIdLst>
-    <p:notesMasterId r:id="rId6"/>
+    <p:notesMasterId r:id="rId7"/>
   </p:notesMasterIdLst>
   <p:sldSz cx="9144000" cy="5143500"/>
   <p:notesSz cx="5143500" cy="9144000"/>
@@ -811,6 +812,94 @@
 </p:notes>
 </file>
 
+<file path=ppt/notesSlides/notesSlide5.xml><?xml version="1.0" encoding="utf-8"?>
+<p:notes xmlns:a="http://schemas.openxmlformats.org/drawingml/2006/main" xmlns:r="http://schemas.openxmlformats.org/officeDocument/2006/relationships" xmlns:p="http://schemas.openxmlformats.org/presentationml/2006/main">
+  <p:cSld>
+    <p:spTree>
+      <p:nvGrpSpPr>
+        <p:cNvPr id="1" name=""/>
+        <p:cNvGrpSpPr/>
+        <p:nvPr/>
+      </p:nvGrpSpPr>
+      <p:grpSpPr>
+        <a:xfrm>
+          <a:off x="0" y="0"/>
+          <a:ext cx="0" cy="0"/>
+          <a:chOff x="0" y="0"/>
+          <a:chExt cx="0" cy="0"/>
+        </a:xfrm>
+      </p:grpSpPr>
+      <p:sp>
+        <p:nvSpPr>
+          <p:cNvPr id="2" name="Slide Image Placeholder 1"/>
+          <p:cNvSpPr>
+            <a:spLocks noGrp="1" noRot="1" noChangeAspect="1"/>
+          </p:cNvSpPr>
+          <p:nvPr>
+            <p:ph type="sldImg"/>
+          </p:nvPr>
+        </p:nvSpPr>
+        <p:spPr/>
+      </p:sp>
+      <p:sp>
+        <p:nvSpPr>
+          <p:cNvPr id="3" name="Notes Placeholder 2"/>
+          <p:cNvSpPr>
+            <a:spLocks noGrp="1"/>
+          </p:cNvSpPr>
+          <p:nvPr>
+            <p:ph type="body" idx="1"/>
+          </p:nvPr>
+        </p:nvSpPr>
+        <p:spPr/>
+        <p:txBody>
+          <a:bodyPr/>
+          <a:lstStyle/>
+          <a:p>
+            <a:r>
+              <a:rPr lang="en-US" dirty="0"/>
+              <a:t/>
+            </a:r>
+            <a:endParaRPr lang="en-US" dirty="0"/>
+          </a:p>
+        </p:txBody>
+      </p:sp>
+      <p:sp>
+        <p:nvSpPr>
+          <p:cNvPr id="4" name="Slide Number Placeholder 3"/>
+          <p:cNvSpPr>
+            <a:spLocks noGrp="1"/>
+          </p:cNvSpPr>
+          <p:nvPr>
+            <p:ph type="sldNum" sz="quarter" idx="10"/>
+          </p:nvPr>
+        </p:nvSpPr>
+        <p:spPr/>
+        <p:txBody>
+          <a:bodyPr/>
+          <a:lstStyle/>
+          <a:p>
+            <a:fld id="{F7021451-1387-4CA6-816F-3879F97B5CBC}" type="slidenum">
+              <a:rPr lang="en-US"/>
+              <a:t>5</a:t>
+            </a:fld>
+            <a:endParaRPr lang="en-US"/>
+          </a:p>
+        </p:txBody>
+      </p:sp>
+    </p:spTree>
+    <p:extLst>
+      <p:ext uri="{BB962C8B-B14F-4D97-AF65-F5344CB8AC3E}">
+        <p14:creationId xmlns:p14="http://schemas.microsoft.com/office/powerpoint/2010/main" val="1024086991"/>
+      </p:ext>
+    </p:extLst>
+  </p:cSld>
+  <p:clrMapOvr>
+    <a:masterClrMapping/>
+  </p:clrMapOvr>
+</p:notes>
+</file>
+
 <file path=ppt/slideLayouts/slideLayout1.xml><?xml version="1.0" encoding="utf-8"?>
 <p:sldLayout xmlns:a="http://schemas.openxmlformats.org/drawingml/2006/main" xmlns:r="http://schemas.openxmlformats.org/officeDocument/2006/relationships" xmlns:p="http://schemas.openxmlformats.org/presentationml/2006/main" preserve="1">
   <p:cSld name="DEFAULT">
@@ -1170,7 +1259,7 @@
         </p:nvSpPr>
         <p:spPr>
           <a:xfrm>
-            <a:off x="731520" y="1280160"/>
+            <a:off x="731520" y="1097280"/>
             <a:ext cx="7772400" cy="1371600"/>
           </a:xfrm>
           <a:prstGeom prst="rect">
@@ -1187,7 +1276,7 @@
               <a:buNone/>
             </a:pPr>
             <a:r>
-              <a:rPr lang="en-US" sz="3600" b="1" dirty="0">
+              <a:rPr lang="en-US" sz="4000" b="1" dirty="0">
                 <a:solidFill>
                   <a:srgbClr val="FFFFFF"/>
                 </a:solidFill>
@@ -1197,7 +1286,7 @@
               </a:rPr>
               <a:t>The Particle Model</a:t>
             </a:r>
-            <a:endParaRPr lang="en-US" sz="3600" dirty="0"/>
+            <a:endParaRPr lang="en-US" sz="4000" dirty="0"/>
           </a:p>
         </p:txBody>
       </p:sp>
@@ -1209,7 +1298,7 @@
         </p:nvSpPr>
         <p:spPr>
           <a:xfrm>
-            <a:off x="731520" y="2743200"/>
+            <a:off x="731520" y="2560320"/>
             <a:ext cx="7772400" cy="548640"/>
           </a:xfrm>
           <a:prstGeom prst="rect">
@@ -1228,13 +1317,13 @@
             <a:r>
               <a:rPr lang="en-US" sz="1600" dirty="0">
                 <a:solidFill>
-                  <a:srgbClr val="9B9690"/>
+                  <a:srgbClr val="E9C46A"/>
                 </a:solidFill>
                 <a:latin typeface="Calibri" pitchFamily="34" charset="0"/>
                 <a:ea typeface="Calibri" pitchFamily="34" charset="-122"/>
                 <a:cs typeface="Calibri" pitchFamily="34" charset="-120"/>
               </a:rPr>
-              <a:t>G6 Science · Chemistry</a:t>
+              <a:t>Grade 6 Science · Mr Zocchi</a:t>
             </a:r>
             <a:endParaRPr lang="en-US" sz="1600" dirty="0"/>
           </a:p>
@@ -1242,14 +1331,36 @@
       </p:sp>
       <p:sp>
         <p:nvSpPr>
-          <p:cNvPr id="5" name="Text 3"/>
-          <p:cNvSpPr/>
-          <p:nvPr/>
-        </p:nvSpPr>
-        <p:spPr>
-          <a:xfrm>
-            <a:off x="731520" y="4389120"/>
-            <a:ext cx="7772400" cy="457200"/>
+          <p:cNvPr id="5" name="Shape 3"/>
+          <p:cNvSpPr/>
+          <p:nvPr/>
+        </p:nvSpPr>
+        <p:spPr>
+          <a:xfrm>
+            <a:off x="731520" y="3474720"/>
+            <a:ext cx="2011680" cy="411480"/>
+          </a:xfrm>
+          <a:prstGeom prst="roundRect">
+            <a:avLst>
+              <a:gd name="adj" fmla="val 17778"/>
+            </a:avLst>
+          </a:prstGeom>
+          <a:solidFill>
+            <a:srgbClr val="2A9D8F"/>
+          </a:solidFill>
+          <a:ln/>
+        </p:spPr>
+      </p:sp>
+      <p:sp>
+        <p:nvSpPr>
+          <p:cNvPr id="6" name="Text 4"/>
+          <p:cNvSpPr/>
+          <p:nvPr/>
+        </p:nvSpPr>
+        <p:spPr>
+          <a:xfrm>
+            <a:off x="731520" y="3474720"/>
+            <a:ext cx="2011680" cy="411480"/>
           </a:xfrm>
           <a:prstGeom prst="rect">
             <a:avLst/>
@@ -1261,21 +1372,21 @@
           <a:bodyPr wrap="square" rtlCol="0" anchor="ctr"/>
           <a:lstStyle/>
           <a:p>
-            <a:pPr indent="0" marL="0">
+            <a:pPr algn="ctr" indent="0" marL="0">
               <a:buNone/>
             </a:pPr>
             <a:r>
-              <a:rPr lang="en-US" sz="1000" dirty="0">
-                <a:solidFill>
-                  <a:srgbClr val="6B6660"/>
+              <a:rPr lang="en-US" sz="1200" b="1" dirty="0">
+                <a:solidFill>
+                  <a:srgbClr val="FFFFFF"/>
                 </a:solidFill>
                 <a:latin typeface="Calibri" pitchFamily="34" charset="0"/>
                 <a:ea typeface="Calibri" pitchFamily="34" charset="-122"/>
                 <a:cs typeface="Calibri" pitchFamily="34" charset="-120"/>
               </a:rPr>
-              <a:t>Mr Zocchi · mrzocchi.com</a:t>
-            </a:r>
-            <a:endParaRPr lang="en-US" sz="1000" dirty="0"/>
+              <a:t>Term 2 · Chemistry</a:t>
+            </a:r>
+            <a:endParaRPr lang="en-US" sz="1200" dirty="0"/>
           </a:p>
         </p:txBody>
       </p:sp>
@@ -1293,7 +1404,7 @@
     <p:bg>
       <p:bgPr>
         <a:solidFill>
-          <a:srgbClr val="FFFFFF"/>
+          <a:srgbClr val="FAF8F5"/>
         </a:solidFill>
       </p:bgPr>
     </p:bg>
@@ -1339,8 +1450,8 @@
         </p:nvSpPr>
         <p:spPr>
           <a:xfrm>
-            <a:off x="548640" y="274320"/>
-            <a:ext cx="8046720" cy="640080"/>
+            <a:off x="7772400" y="4709160"/>
+            <a:ext cx="1097280" cy="320040"/>
           </a:xfrm>
           <a:prstGeom prst="rect">
             <a:avLst/>
@@ -1349,14 +1460,105 @@
           <a:ln/>
         </p:spPr>
         <p:txBody>
-          <a:bodyPr wrap="square" lIns="0" tIns="0" rIns="0" bIns="0" rtlCol="0" anchor="ctr"/>
+          <a:bodyPr wrap="square" rtlCol="0" anchor="ctr"/>
+          <a:lstStyle/>
+          <a:p>
+            <a:pPr algn="r" indent="0" marL="0">
+              <a:buNone/>
+            </a:pPr>
+            <a:r>
+              <a:rPr lang="en-US" sz="900" dirty="0">
+                <a:solidFill>
+                  <a:srgbClr val="6B6660"/>
+                </a:solidFill>
+                <a:latin typeface="Calibri" pitchFamily="34" charset="0"/>
+                <a:ea typeface="Calibri" pitchFamily="34" charset="-122"/>
+                <a:cs typeface="Calibri" pitchFamily="34" charset="-120"/>
+              </a:rPr>
+              <a:t>2 / 5</a:t>
+            </a:r>
+            <a:endParaRPr lang="en-US" sz="900" dirty="0"/>
+          </a:p>
+        </p:txBody>
+      </p:sp>
+      <p:sp>
+        <p:nvSpPr>
+          <p:cNvPr id="4" name="Shape 2"/>
+          <p:cNvSpPr/>
+          <p:nvPr/>
+        </p:nvSpPr>
+        <p:spPr>
+          <a:xfrm>
+            <a:off x="1371600" y="914400"/>
+            <a:ext cx="6400800" cy="3200400"/>
+          </a:xfrm>
+          <a:prstGeom prst="rect">
+            <a:avLst/>
+          </a:prstGeom>
+          <a:solidFill>
+            <a:srgbClr val="FFFFFF"/>
+          </a:solidFill>
+          <a:ln w="12700">
+            <a:solidFill>
+              <a:srgbClr val="E5E2DC"/>
+            </a:solidFill>
+            <a:prstDash val="solid"/>
+          </a:ln>
+          <a:effectLst>
+            <a:outerShdw sx="100000" sy="100000" kx="0" ky="0" algn="bl" rotWithShape="0" blurRad="50800" dist="25400" dir="8100000">
+              <a:srgbClr val="000000">
+                <a:alpha val="10000"/>
+              </a:srgbClr>
+            </a:outerShdw>
+          </a:effectLst>
+        </p:spPr>
+      </p:sp>
+      <p:sp>
+        <p:nvSpPr>
+          <p:cNvPr id="5" name="Shape 3"/>
+          <p:cNvSpPr/>
+          <p:nvPr/>
+        </p:nvSpPr>
+        <p:spPr>
+          <a:xfrm>
+            <a:off x="1371600" y="914400"/>
+            <a:ext cx="91440" cy="3200400"/>
+          </a:xfrm>
+          <a:prstGeom prst="rect">
+            <a:avLst/>
+          </a:prstGeom>
+          <a:solidFill>
+            <a:srgbClr val="2A9D8F"/>
+          </a:solidFill>
+          <a:ln/>
+        </p:spPr>
+      </p:sp>
+      <p:sp>
+        <p:nvSpPr>
+          <p:cNvPr id="6" name="Text 4"/>
+          <p:cNvSpPr/>
+          <p:nvPr/>
+        </p:nvSpPr>
+        <p:spPr>
+          <a:xfrm>
+            <a:off x="1828800" y="1097280"/>
+            <a:ext cx="5669280" cy="640080"/>
+          </a:xfrm>
+          <a:prstGeom prst="rect">
+            <a:avLst/>
+          </a:prstGeom>
+          <a:noFill/>
+          <a:ln/>
+        </p:spPr>
+        <p:txBody>
+          <a:bodyPr wrap="square" rtlCol="0" anchor="ctr"/>
           <a:lstStyle/>
           <a:p>
             <a:pPr indent="0" marL="0">
               <a:buNone/>
             </a:pPr>
             <a:r>
-              <a:rPr lang="en-US" sz="2600" b="1" dirty="0">
+              <a:rPr lang="en-US" sz="2400" b="1" dirty="0">
                 <a:solidFill>
                   <a:srgbClr val="1B2A4A"/>
                 </a:solidFill>
@@ -1366,20 +1568,20 @@
               </a:rPr>
               <a:t>Everything is Made of Particles</a:t>
             </a:r>
-            <a:endParaRPr lang="en-US" sz="2600" dirty="0"/>
-          </a:p>
-        </p:txBody>
-      </p:sp>
-      <p:sp>
-        <p:nvSpPr>
-          <p:cNvPr id="4" name="Text 2"/>
-          <p:cNvSpPr/>
-          <p:nvPr/>
-        </p:nvSpPr>
-        <p:spPr>
-          <a:xfrm>
-            <a:off x="548640" y="1097280"/>
-            <a:ext cx="8046720" cy="3474720"/>
+            <a:endParaRPr lang="en-US" sz="2400" dirty="0"/>
+          </a:p>
+        </p:txBody>
+      </p:sp>
+      <p:sp>
+        <p:nvSpPr>
+          <p:cNvPr id="7" name="Text 5"/>
+          <p:cNvSpPr/>
+          <p:nvPr/>
+        </p:nvSpPr>
+        <p:spPr>
+          <a:xfrm>
+            <a:off x="1828800" y="1828800"/>
+            <a:ext cx="5669280" cy="2011680"/>
           </a:xfrm>
           <a:prstGeom prst="rect">
             <a:avLst/>
@@ -1391,12 +1593,11 @@
           <a:bodyPr wrap="square" rtlCol="0" anchor="t"/>
           <a:lstStyle/>
           <a:p>
-            <a:pPr marL="342900" indent="-342900">
-              <a:spcAft>
-                <a:spcPts val="800"/>
-              </a:spcAft>
-              <a:buSzPct val="100000"/>
-              <a:buChar char="•"/>
+            <a:pPr indent="0" marL="0">
+              <a:lnSpc>
+                <a:spcPct val="130000"/>
+              </a:lnSpc>
+              <a:buNone/>
             </a:pPr>
             <a:r>
               <a:rPr lang="en-US" sz="1500" dirty="0">
@@ -1407,128 +1608,9 @@
                 <a:ea typeface="Calibri" pitchFamily="34" charset="-122"/>
                 <a:cs typeface="Calibri" pitchFamily="34" charset="-120"/>
               </a:rPr>
-              <a:t>All matter is made up of tiny particles (atoms and molecules)</a:t>
+              <a:t>All matter is made up of tiny particles too small to see. These particles are always moving. The particle model helps us explain the properties of solids, liquids, and gases — including why ice floats on water and why you can smell perfume across a room.</a:t>
             </a:r>
             <a:endParaRPr lang="en-US" sz="1500" dirty="0"/>
-          </a:p>
-          <a:p>
-            <a:pPr marL="342900" indent="-342900">
-              <a:spcAft>
-                <a:spcPts val="800"/>
-              </a:spcAft>
-              <a:buSzPct val="100000"/>
-              <a:buChar char="•"/>
-            </a:pPr>
-            <a:r>
-              <a:rPr lang="en-US" sz="1500" dirty="0">
-                <a:solidFill>
-                  <a:srgbClr val="3D3A36"/>
-                </a:solidFill>
-                <a:latin typeface="Calibri" pitchFamily="34" charset="0"/>
-                <a:ea typeface="Calibri" pitchFamily="34" charset="-122"/>
-                <a:cs typeface="Calibri" pitchFamily="34" charset="-120"/>
-              </a:rPr>
-              <a:t>Particles are too small to see — even with a microscope</a:t>
-            </a:r>
-            <a:endParaRPr lang="en-US" sz="1500" dirty="0"/>
-          </a:p>
-          <a:p>
-            <a:pPr marL="342900" indent="-342900">
-              <a:spcAft>
-                <a:spcPts val="800"/>
-              </a:spcAft>
-              <a:buSzPct val="100000"/>
-              <a:buChar char="•"/>
-            </a:pPr>
-            <a:r>
-              <a:rPr lang="en-US" sz="1500" dirty="0">
-                <a:solidFill>
-                  <a:srgbClr val="3D3A36"/>
-                </a:solidFill>
-                <a:latin typeface="Calibri" pitchFamily="34" charset="0"/>
-                <a:ea typeface="Calibri" pitchFamily="34" charset="-122"/>
-                <a:cs typeface="Calibri" pitchFamily="34" charset="-120"/>
-              </a:rPr>
-              <a:t>The particle model helps us explain how materials behave</a:t>
-            </a:r>
-            <a:endParaRPr lang="en-US" sz="1500" dirty="0"/>
-          </a:p>
-          <a:p>
-            <a:pPr marL="342900" indent="-342900">
-              <a:spcAft>
-                <a:spcPts val="800"/>
-              </a:spcAft>
-              <a:buSzPct val="100000"/>
-              <a:buChar char="•"/>
-            </a:pPr>
-            <a:r>
-              <a:rPr lang="en-US" sz="1500" dirty="0">
-                <a:solidFill>
-                  <a:srgbClr val="3D3A36"/>
-                </a:solidFill>
-                <a:latin typeface="Calibri" pitchFamily="34" charset="0"/>
-                <a:ea typeface="Calibri" pitchFamily="34" charset="-122"/>
-                <a:cs typeface="Calibri" pitchFamily="34" charset="-120"/>
-              </a:rPr>
-              <a:t>Particles are always moving — this is called kinetic theory</a:t>
-            </a:r>
-            <a:endParaRPr lang="en-US" sz="1500" dirty="0"/>
-          </a:p>
-        </p:txBody>
-      </p:sp>
-      <p:sp>
-        <p:nvSpPr>
-          <p:cNvPr id="5" name="Shape 3"/>
-          <p:cNvSpPr/>
-          <p:nvPr/>
-        </p:nvSpPr>
-        <p:spPr>
-          <a:xfrm>
-            <a:off x="548640" y="4754880"/>
-            <a:ext cx="8046720" cy="9144"/>
-          </a:xfrm>
-          <a:prstGeom prst="rect">
-            <a:avLst/>
-          </a:prstGeom>
-          <a:solidFill>
-            <a:srgbClr val="F3F1EE"/>
-          </a:solidFill>
-          <a:ln/>
-        </p:spPr>
-      </p:sp>
-      <p:sp>
-        <p:nvSpPr>
-          <p:cNvPr id="6" name="Text 4"/>
-          <p:cNvSpPr/>
-          <p:nvPr/>
-        </p:nvSpPr>
-        <p:spPr>
-          <a:xfrm>
-            <a:off x="548640" y="4800600"/>
-            <a:ext cx="3657600" cy="274320"/>
-          </a:xfrm>
-          <a:prstGeom prst="rect">
-            <a:avLst/>
-          </a:prstGeom>
-          <a:noFill/>
-          <a:ln/>
-        </p:spPr>
-        <p:txBody>
-          <a:bodyPr wrap="square" rtlCol="0" anchor="ctr"/>
-          <a:lstStyle/>
-          <a:p>
-            <a:pPr indent="0" marL="0">
-              <a:buNone/>
-            </a:pPr>
-            <a:r>
-              <a:rPr lang="en-US" sz="800" dirty="0">
-                <a:solidFill>
-                  <a:srgbClr val="9B9690"/>
-                </a:solidFill>
-              </a:rPr>
-              <a:t>mrzocchi.com</a:t>
-            </a:r>
-            <a:endParaRPr lang="en-US" sz="800" dirty="0"/>
           </a:p>
         </p:txBody>
       </p:sp>
@@ -1546,7 +1628,7 @@
     <p:bg>
       <p:bgPr>
         <a:solidFill>
-          <a:srgbClr val="FFFFFF"/>
+          <a:srgbClr val="FAF8F5"/>
         </a:solidFill>
       </p:bgPr>
     </p:bg>
@@ -1592,8 +1674,8 @@
         </p:nvSpPr>
         <p:spPr>
           <a:xfrm>
-            <a:off x="548640" y="274320"/>
-            <a:ext cx="8046720" cy="640080"/>
+            <a:off x="7772400" y="4709160"/>
+            <a:ext cx="1097280" cy="320040"/>
           </a:xfrm>
           <a:prstGeom prst="rect">
             <a:avLst/>
@@ -1602,7 +1684,46 @@
           <a:ln/>
         </p:spPr>
         <p:txBody>
-          <a:bodyPr wrap="square" lIns="0" tIns="0" rIns="0" bIns="0" rtlCol="0" anchor="ctr"/>
+          <a:bodyPr wrap="square" rtlCol="0" anchor="ctr"/>
+          <a:lstStyle/>
+          <a:p>
+            <a:pPr algn="r" indent="0" marL="0">
+              <a:buNone/>
+            </a:pPr>
+            <a:r>
+              <a:rPr lang="en-US" sz="900" dirty="0">
+                <a:solidFill>
+                  <a:srgbClr val="6B6660"/>
+                </a:solidFill>
+                <a:latin typeface="Calibri" pitchFamily="34" charset="0"/>
+                <a:ea typeface="Calibri" pitchFamily="34" charset="-122"/>
+                <a:cs typeface="Calibri" pitchFamily="34" charset="-120"/>
+              </a:rPr>
+              <a:t>3 / 5</a:t>
+            </a:r>
+            <a:endParaRPr lang="en-US" sz="900" dirty="0"/>
+          </a:p>
+        </p:txBody>
+      </p:sp>
+      <p:sp>
+        <p:nvSpPr>
+          <p:cNvPr id="4" name="Text 2"/>
+          <p:cNvSpPr/>
+          <p:nvPr/>
+        </p:nvSpPr>
+        <p:spPr>
+          <a:xfrm>
+            <a:off x="457200" y="274320"/>
+            <a:ext cx="8229600" cy="640080"/>
+          </a:xfrm>
+          <a:prstGeom prst="rect">
+            <a:avLst/>
+          </a:prstGeom>
+          <a:noFill/>
+          <a:ln/>
+        </p:spPr>
+        <p:txBody>
+          <a:bodyPr wrap="square" rtlCol="0" anchor="ctr"/>
           <a:lstStyle/>
           <a:p>
             <a:pPr indent="0" marL="0">
@@ -1625,22 +1746,27 @@
       </p:sp>
       <p:sp>
         <p:nvSpPr>
-          <p:cNvPr id="4" name="Shape 2"/>
-          <p:cNvSpPr/>
-          <p:nvPr/>
-        </p:nvSpPr>
-        <p:spPr>
-          <a:xfrm>
-            <a:off x="457200" y="1097280"/>
-            <a:ext cx="3840480" cy="3474720"/>
-          </a:xfrm>
-          <a:prstGeom prst="rect">
-            <a:avLst/>
-          </a:prstGeom>
-          <a:solidFill>
-            <a:srgbClr val="F3F1EE"/>
-          </a:solidFill>
-          <a:ln/>
+          <p:cNvPr id="5" name="Shape 3"/>
+          <p:cNvSpPr/>
+          <p:nvPr/>
+        </p:nvSpPr>
+        <p:spPr>
+          <a:xfrm>
+            <a:off x="457200" y="1188720"/>
+            <a:ext cx="2560320" cy="1828800"/>
+          </a:xfrm>
+          <a:prstGeom prst="rect">
+            <a:avLst/>
+          </a:prstGeom>
+          <a:solidFill>
+            <a:srgbClr val="FFFFFF"/>
+          </a:solidFill>
+          <a:ln w="12700">
+            <a:solidFill>
+              <a:srgbClr val="E5E2DC"/>
+            </a:solidFill>
+            <a:prstDash val="solid"/>
+          </a:ln>
           <a:effectLst>
             <a:outerShdw sx="100000" sy="100000" kx="0" ky="0" algn="bl" rotWithShape="0" blurRad="50800" dist="25400" dir="8100000">
               <a:srgbClr val="000000">
@@ -1652,14 +1778,34 @@
       </p:sp>
       <p:sp>
         <p:nvSpPr>
-          <p:cNvPr id="5" name="Text 3"/>
-          <p:cNvSpPr/>
-          <p:nvPr/>
-        </p:nvSpPr>
-        <p:spPr>
-          <a:xfrm>
-            <a:off x="640080" y="1234440"/>
-            <a:ext cx="3474720" cy="411480"/>
+          <p:cNvPr id="6" name="Shape 4"/>
+          <p:cNvSpPr/>
+          <p:nvPr/>
+        </p:nvSpPr>
+        <p:spPr>
+          <a:xfrm>
+            <a:off x="457200" y="1188720"/>
+            <a:ext cx="2560320" cy="54864"/>
+          </a:xfrm>
+          <a:prstGeom prst="rect">
+            <a:avLst/>
+          </a:prstGeom>
+          <a:solidFill>
+            <a:srgbClr val="2A9D8F"/>
+          </a:solidFill>
+          <a:ln/>
+        </p:spPr>
+      </p:sp>
+      <p:sp>
+        <p:nvSpPr>
+          <p:cNvPr id="7" name="Text 5"/>
+          <p:cNvSpPr/>
+          <p:nvPr/>
+        </p:nvSpPr>
+        <p:spPr>
+          <a:xfrm>
+            <a:off x="594360" y="1325880"/>
+            <a:ext cx="2286000" cy="365760"/>
           </a:xfrm>
           <a:prstGeom prst="rect">
             <a:avLst/>
@@ -1675,71 +1821,46 @@
               <a:buNone/>
             </a:pPr>
             <a:r>
-              <a:rPr lang="en-US" sz="1600" b="1" dirty="0">
+              <a:rPr lang="en-US" sz="1400" b="1" dirty="0">
                 <a:solidFill>
                   <a:srgbClr val="1B2A4A"/>
-                </a:solidFill>
-                <a:latin typeface="Georgia" pitchFamily="34" charset="0"/>
-                <a:ea typeface="Georgia" pitchFamily="34" charset="-122"/>
-                <a:cs typeface="Georgia" pitchFamily="34" charset="-120"/>
-              </a:rPr>
-              <a:t>Solids</a:t>
-            </a:r>
-            <a:endParaRPr lang="en-US" sz="1600" dirty="0"/>
-          </a:p>
-        </p:txBody>
-      </p:sp>
-      <p:sp>
-        <p:nvSpPr>
-          <p:cNvPr id="6" name="Text 4"/>
-          <p:cNvSpPr/>
-          <p:nvPr/>
-        </p:nvSpPr>
-        <p:spPr>
-          <a:xfrm>
-            <a:off x="640080" y="1737360"/>
-            <a:ext cx="3474720" cy="2651760"/>
-          </a:xfrm>
-          <a:prstGeom prst="rect">
-            <a:avLst/>
-          </a:prstGeom>
-          <a:noFill/>
-          <a:ln/>
-        </p:spPr>
-        <p:txBody>
-          <a:bodyPr wrap="square" rtlCol="0" anchor="t"/>
-          <a:lstStyle/>
-          <a:p>
-            <a:pPr marL="342900" indent="-342900">
-              <a:spcAft>
-                <a:spcPts val="600"/>
-              </a:spcAft>
-              <a:buSzPct val="100000"/>
-              <a:buChar char="•"/>
-            </a:pPr>
-            <a:r>
-              <a:rPr lang="en-US" sz="1300" dirty="0">
-                <a:solidFill>
-                  <a:srgbClr val="3D3A36"/>
                 </a:solidFill>
                 <a:latin typeface="Calibri" pitchFamily="34" charset="0"/>
                 <a:ea typeface="Calibri" pitchFamily="34" charset="-122"/>
                 <a:cs typeface="Calibri" pitchFamily="34" charset="-120"/>
               </a:rPr>
-              <a:t>Particles packed tightly in fixed positions</a:t>
-            </a:r>
-            <a:endParaRPr lang="en-US" sz="1300" dirty="0"/>
-          </a:p>
-          <a:p>
-            <a:pPr marL="342900" indent="-342900">
-              <a:spcAft>
-                <a:spcPts val="600"/>
-              </a:spcAft>
-              <a:buSzPct val="100000"/>
-              <a:buChar char="•"/>
-            </a:pPr>
-            <a:r>
-              <a:rPr lang="en-US" sz="1300" dirty="0">
+              <a:t>Solid</a:t>
+            </a:r>
+            <a:endParaRPr lang="en-US" sz="1400" dirty="0"/>
+          </a:p>
+        </p:txBody>
+      </p:sp>
+      <p:sp>
+        <p:nvSpPr>
+          <p:cNvPr id="8" name="Text 6"/>
+          <p:cNvSpPr/>
+          <p:nvPr/>
+        </p:nvSpPr>
+        <p:spPr>
+          <a:xfrm>
+            <a:off x="594360" y="1737360"/>
+            <a:ext cx="2286000" cy="1097280"/>
+          </a:xfrm>
+          <a:prstGeom prst="rect">
+            <a:avLst/>
+          </a:prstGeom>
+          <a:noFill/>
+          <a:ln/>
+        </p:spPr>
+        <p:txBody>
+          <a:bodyPr wrap="square" rtlCol="0" anchor="t"/>
+          <a:lstStyle/>
+          <a:p>
+            <a:pPr indent="0" marL="0">
+              <a:buNone/>
+            </a:pPr>
+            <a:r>
+              <a:rPr lang="en-US" sz="1100" dirty="0">
                 <a:solidFill>
                   <a:srgbClr val="3D3A36"/>
                 </a:solidFill>
@@ -1747,72 +1868,35 @@
                 <a:ea typeface="Calibri" pitchFamily="34" charset="-122"/>
                 <a:cs typeface="Calibri" pitchFamily="34" charset="-120"/>
               </a:rPr>
-              <a:t>Vibrate but don't move around</a:t>
-            </a:r>
-            <a:endParaRPr lang="en-US" sz="1300" dirty="0"/>
-          </a:p>
-          <a:p>
-            <a:pPr marL="342900" indent="-342900">
-              <a:spcAft>
-                <a:spcPts val="600"/>
-              </a:spcAft>
-              <a:buSzPct val="100000"/>
-              <a:buChar char="•"/>
-            </a:pPr>
-            <a:r>
-              <a:rPr lang="en-US" sz="1300" dirty="0">
-                <a:solidFill>
-                  <a:srgbClr val="3D3A36"/>
-                </a:solidFill>
-                <a:latin typeface="Calibri" pitchFamily="34" charset="0"/>
-                <a:ea typeface="Calibri" pitchFamily="34" charset="-122"/>
-                <a:cs typeface="Calibri" pitchFamily="34" charset="-120"/>
-              </a:rPr>
-              <a:t>Strong forces hold them together</a:t>
-            </a:r>
-            <a:endParaRPr lang="en-US" sz="1300" dirty="0"/>
-          </a:p>
-          <a:p>
-            <a:pPr marL="342900" indent="-342900">
-              <a:spcAft>
-                <a:spcPts val="600"/>
-              </a:spcAft>
-              <a:buSzPct val="100000"/>
-              <a:buChar char="•"/>
-            </a:pPr>
-            <a:r>
-              <a:rPr lang="en-US" sz="1300" dirty="0">
-                <a:solidFill>
-                  <a:srgbClr val="3D3A36"/>
-                </a:solidFill>
-                <a:latin typeface="Calibri" pitchFamily="34" charset="0"/>
-                <a:ea typeface="Calibri" pitchFamily="34" charset="-122"/>
-                <a:cs typeface="Calibri" pitchFamily="34" charset="-120"/>
-              </a:rPr>
-              <a:t>Fixed shape and volume</a:t>
-            </a:r>
-            <a:endParaRPr lang="en-US" sz="1300" dirty="0"/>
-          </a:p>
-        </p:txBody>
-      </p:sp>
-      <p:sp>
-        <p:nvSpPr>
-          <p:cNvPr id="7" name="Shape 5"/>
-          <p:cNvSpPr/>
-          <p:nvPr/>
-        </p:nvSpPr>
-        <p:spPr>
-          <a:xfrm>
-            <a:off x="4846320" y="1097280"/>
-            <a:ext cx="3840480" cy="3474720"/>
-          </a:xfrm>
-          <a:prstGeom prst="rect">
-            <a:avLst/>
-          </a:prstGeom>
-          <a:solidFill>
-            <a:srgbClr val="F3F1EE"/>
-          </a:solidFill>
-          <a:ln/>
+              <a:t>Particles packed tightly in a regular pattern. They vibrate in fixed positions but cannot move around. Strong forces hold them together. Fixed shape and volume.</a:t>
+            </a:r>
+            <a:endParaRPr lang="en-US" sz="1100" dirty="0"/>
+          </a:p>
+        </p:txBody>
+      </p:sp>
+      <p:sp>
+        <p:nvSpPr>
+          <p:cNvPr id="9" name="Shape 7"/>
+          <p:cNvSpPr/>
+          <p:nvPr/>
+        </p:nvSpPr>
+        <p:spPr>
+          <a:xfrm>
+            <a:off x="3291840" y="1188720"/>
+            <a:ext cx="2560320" cy="1828800"/>
+          </a:xfrm>
+          <a:prstGeom prst="rect">
+            <a:avLst/>
+          </a:prstGeom>
+          <a:solidFill>
+            <a:srgbClr val="FFFFFF"/>
+          </a:solidFill>
+          <a:ln w="12700">
+            <a:solidFill>
+              <a:srgbClr val="E5E2DC"/>
+            </a:solidFill>
+            <a:prstDash val="solid"/>
+          </a:ln>
           <a:effectLst>
             <a:outerShdw sx="100000" sy="100000" kx="0" ky="0" algn="bl" rotWithShape="0" blurRad="50800" dist="25400" dir="8100000">
               <a:srgbClr val="000000">
@@ -1824,14 +1908,34 @@
       </p:sp>
       <p:sp>
         <p:nvSpPr>
-          <p:cNvPr id="8" name="Text 6"/>
-          <p:cNvSpPr/>
-          <p:nvPr/>
-        </p:nvSpPr>
-        <p:spPr>
-          <a:xfrm>
-            <a:off x="5029200" y="1234440"/>
-            <a:ext cx="3474720" cy="411480"/>
+          <p:cNvPr id="10" name="Shape 8"/>
+          <p:cNvSpPr/>
+          <p:nvPr/>
+        </p:nvSpPr>
+        <p:spPr>
+          <a:xfrm>
+            <a:off x="3291840" y="1188720"/>
+            <a:ext cx="2560320" cy="54864"/>
+          </a:xfrm>
+          <a:prstGeom prst="rect">
+            <a:avLst/>
+          </a:prstGeom>
+          <a:solidFill>
+            <a:srgbClr val="2A9D8F"/>
+          </a:solidFill>
+          <a:ln/>
+        </p:spPr>
+      </p:sp>
+      <p:sp>
+        <p:nvSpPr>
+          <p:cNvPr id="11" name="Text 9"/>
+          <p:cNvSpPr/>
+          <p:nvPr/>
+        </p:nvSpPr>
+        <p:spPr>
+          <a:xfrm>
+            <a:off x="3429000" y="1325880"/>
+            <a:ext cx="2286000" cy="365760"/>
           </a:xfrm>
           <a:prstGeom prst="rect">
             <a:avLst/>
@@ -1847,71 +1951,46 @@
               <a:buNone/>
             </a:pPr>
             <a:r>
-              <a:rPr lang="en-US" sz="1600" b="1" dirty="0">
+              <a:rPr lang="en-US" sz="1400" b="1" dirty="0">
                 <a:solidFill>
                   <a:srgbClr val="1B2A4A"/>
-                </a:solidFill>
-                <a:latin typeface="Georgia" pitchFamily="34" charset="0"/>
-                <a:ea typeface="Georgia" pitchFamily="34" charset="-122"/>
-                <a:cs typeface="Georgia" pitchFamily="34" charset="-120"/>
-              </a:rPr>
-              <a:t>Liquids &amp; Gases</a:t>
-            </a:r>
-            <a:endParaRPr lang="en-US" sz="1600" dirty="0"/>
-          </a:p>
-        </p:txBody>
-      </p:sp>
-      <p:sp>
-        <p:nvSpPr>
-          <p:cNvPr id="9" name="Text 7"/>
-          <p:cNvSpPr/>
-          <p:nvPr/>
-        </p:nvSpPr>
-        <p:spPr>
-          <a:xfrm>
-            <a:off x="5029200" y="1737360"/>
-            <a:ext cx="3474720" cy="2651760"/>
-          </a:xfrm>
-          <a:prstGeom prst="rect">
-            <a:avLst/>
-          </a:prstGeom>
-          <a:noFill/>
-          <a:ln/>
-        </p:spPr>
-        <p:txBody>
-          <a:bodyPr wrap="square" rtlCol="0" anchor="t"/>
-          <a:lstStyle/>
-          <a:p>
-            <a:pPr marL="342900" indent="-342900">
-              <a:spcAft>
-                <a:spcPts val="600"/>
-              </a:spcAft>
-              <a:buSzPct val="100000"/>
-              <a:buChar char="•"/>
-            </a:pPr>
-            <a:r>
-              <a:rPr lang="en-US" sz="1300" dirty="0">
-                <a:solidFill>
-                  <a:srgbClr val="3D3A36"/>
                 </a:solidFill>
                 <a:latin typeface="Calibri" pitchFamily="34" charset="0"/>
                 <a:ea typeface="Calibri" pitchFamily="34" charset="-122"/>
                 <a:cs typeface="Calibri" pitchFamily="34" charset="-120"/>
               </a:rPr>
-              <a:t>Liquids: particles close but can slide past each other</a:t>
-            </a:r>
-            <a:endParaRPr lang="en-US" sz="1300" dirty="0"/>
-          </a:p>
-          <a:p>
-            <a:pPr marL="342900" indent="-342900">
-              <a:spcAft>
-                <a:spcPts val="600"/>
-              </a:spcAft>
-              <a:buSzPct val="100000"/>
-              <a:buChar char="•"/>
-            </a:pPr>
-            <a:r>
-              <a:rPr lang="en-US" sz="1300" dirty="0">
+              <a:t>Liquid</a:t>
+            </a:r>
+            <a:endParaRPr lang="en-US" sz="1400" dirty="0"/>
+          </a:p>
+        </p:txBody>
+      </p:sp>
+      <p:sp>
+        <p:nvSpPr>
+          <p:cNvPr id="12" name="Text 10"/>
+          <p:cNvSpPr/>
+          <p:nvPr/>
+        </p:nvSpPr>
+        <p:spPr>
+          <a:xfrm>
+            <a:off x="3429000" y="1737360"/>
+            <a:ext cx="2286000" cy="1097280"/>
+          </a:xfrm>
+          <a:prstGeom prst="rect">
+            <a:avLst/>
+          </a:prstGeom>
+          <a:noFill/>
+          <a:ln/>
+        </p:spPr>
+        <p:txBody>
+          <a:bodyPr wrap="square" rtlCol="0" anchor="t"/>
+          <a:lstStyle/>
+          <a:p>
+            <a:pPr indent="0" marL="0">
+              <a:buNone/>
+            </a:pPr>
+            <a:r>
+              <a:rPr lang="en-US" sz="1100" dirty="0">
                 <a:solidFill>
                   <a:srgbClr val="3D3A36"/>
                 </a:solidFill>
@@ -1919,41 +1998,129 @@
                 <a:ea typeface="Calibri" pitchFamily="34" charset="-122"/>
                 <a:cs typeface="Calibri" pitchFamily="34" charset="-120"/>
               </a:rPr>
-              <a:t>Liquids take the shape of their container</a:t>
-            </a:r>
-            <a:endParaRPr lang="en-US" sz="1300" dirty="0"/>
-          </a:p>
-          <a:p>
-            <a:pPr marL="342900" indent="-342900">
-              <a:spcAft>
-                <a:spcPts val="600"/>
-              </a:spcAft>
-              <a:buSzPct val="100000"/>
-              <a:buChar char="•"/>
-            </a:pPr>
-            <a:r>
-              <a:rPr lang="en-US" sz="1300" dirty="0">
-                <a:solidFill>
-                  <a:srgbClr val="3D3A36"/>
+              <a:t>Particles close together but arranged randomly. They can slide past each other. Weaker forces than solids. Fixed volume but takes the shape of the container.</a:t>
+            </a:r>
+            <a:endParaRPr lang="en-US" sz="1100" dirty="0"/>
+          </a:p>
+        </p:txBody>
+      </p:sp>
+      <p:sp>
+        <p:nvSpPr>
+          <p:cNvPr id="13" name="Shape 11"/>
+          <p:cNvSpPr/>
+          <p:nvPr/>
+        </p:nvSpPr>
+        <p:spPr>
+          <a:xfrm>
+            <a:off x="6126480" y="1188720"/>
+            <a:ext cx="2560320" cy="1828800"/>
+          </a:xfrm>
+          <a:prstGeom prst="rect">
+            <a:avLst/>
+          </a:prstGeom>
+          <a:solidFill>
+            <a:srgbClr val="FFFFFF"/>
+          </a:solidFill>
+          <a:ln w="12700">
+            <a:solidFill>
+              <a:srgbClr val="E5E2DC"/>
+            </a:solidFill>
+            <a:prstDash val="solid"/>
+          </a:ln>
+          <a:effectLst>
+            <a:outerShdw sx="100000" sy="100000" kx="0" ky="0" algn="bl" rotWithShape="0" blurRad="50800" dist="25400" dir="8100000">
+              <a:srgbClr val="000000">
+                <a:alpha val="10000"/>
+              </a:srgbClr>
+            </a:outerShdw>
+          </a:effectLst>
+        </p:spPr>
+      </p:sp>
+      <p:sp>
+        <p:nvSpPr>
+          <p:cNvPr id="14" name="Shape 12"/>
+          <p:cNvSpPr/>
+          <p:nvPr/>
+        </p:nvSpPr>
+        <p:spPr>
+          <a:xfrm>
+            <a:off x="6126480" y="1188720"/>
+            <a:ext cx="2560320" cy="54864"/>
+          </a:xfrm>
+          <a:prstGeom prst="rect">
+            <a:avLst/>
+          </a:prstGeom>
+          <a:solidFill>
+            <a:srgbClr val="2A9D8F"/>
+          </a:solidFill>
+          <a:ln/>
+        </p:spPr>
+      </p:sp>
+      <p:sp>
+        <p:nvSpPr>
+          <p:cNvPr id="15" name="Text 13"/>
+          <p:cNvSpPr/>
+          <p:nvPr/>
+        </p:nvSpPr>
+        <p:spPr>
+          <a:xfrm>
+            <a:off x="6263640" y="1325880"/>
+            <a:ext cx="2286000" cy="365760"/>
+          </a:xfrm>
+          <a:prstGeom prst="rect">
+            <a:avLst/>
+          </a:prstGeom>
+          <a:noFill/>
+          <a:ln/>
+        </p:spPr>
+        <p:txBody>
+          <a:bodyPr wrap="square" rtlCol="0" anchor="ctr"/>
+          <a:lstStyle/>
+          <a:p>
+            <a:pPr indent="0" marL="0">
+              <a:buNone/>
+            </a:pPr>
+            <a:r>
+              <a:rPr lang="en-US" sz="1400" b="1" dirty="0">
+                <a:solidFill>
+                  <a:srgbClr val="1B2A4A"/>
                 </a:solidFill>
                 <a:latin typeface="Calibri" pitchFamily="34" charset="0"/>
                 <a:ea typeface="Calibri" pitchFamily="34" charset="-122"/>
                 <a:cs typeface="Calibri" pitchFamily="34" charset="-120"/>
               </a:rPr>
-              <a:t>Gases: particles far apart, move fast and randomly</a:t>
-            </a:r>
-            <a:endParaRPr lang="en-US" sz="1300" dirty="0"/>
-          </a:p>
-          <a:p>
-            <a:pPr marL="342900" indent="-342900">
-              <a:spcAft>
-                <a:spcPts val="600"/>
-              </a:spcAft>
-              <a:buSzPct val="100000"/>
-              <a:buChar char="•"/>
-            </a:pPr>
-            <a:r>
-              <a:rPr lang="en-US" sz="1300" dirty="0">
+              <a:t>Gas</a:t>
+            </a:r>
+            <a:endParaRPr lang="en-US" sz="1400" dirty="0"/>
+          </a:p>
+        </p:txBody>
+      </p:sp>
+      <p:sp>
+        <p:nvSpPr>
+          <p:cNvPr id="16" name="Text 14"/>
+          <p:cNvSpPr/>
+          <p:nvPr/>
+        </p:nvSpPr>
+        <p:spPr>
+          <a:xfrm>
+            <a:off x="6263640" y="1737360"/>
+            <a:ext cx="2286000" cy="1097280"/>
+          </a:xfrm>
+          <a:prstGeom prst="rect">
+            <a:avLst/>
+          </a:prstGeom>
+          <a:noFill/>
+          <a:ln/>
+        </p:spPr>
+        <p:txBody>
+          <a:bodyPr wrap="square" rtlCol="0" anchor="t"/>
+          <a:lstStyle/>
+          <a:p>
+            <a:pPr indent="0" marL="0">
+              <a:buNone/>
+            </a:pPr>
+            <a:r>
+              <a:rPr lang="en-US" sz="1100" dirty="0">
                 <a:solidFill>
                   <a:srgbClr val="3D3A36"/>
                 </a:solidFill>
@@ -1961,45 +2128,9 @@
                 <a:ea typeface="Calibri" pitchFamily="34" charset="-122"/>
                 <a:cs typeface="Calibri" pitchFamily="34" charset="-120"/>
               </a:rPr>
-              <a:t>Gases fill any container and can be compressed</a:t>
-            </a:r>
-            <a:endParaRPr lang="en-US" sz="1300" dirty="0"/>
-          </a:p>
-        </p:txBody>
-      </p:sp>
-      <p:sp>
-        <p:nvSpPr>
-          <p:cNvPr id="10" name="Text 8"/>
-          <p:cNvSpPr/>
-          <p:nvPr/>
-        </p:nvSpPr>
-        <p:spPr>
-          <a:xfrm>
-            <a:off x="548640" y="4800600"/>
-            <a:ext cx="3657600" cy="274320"/>
-          </a:xfrm>
-          <a:prstGeom prst="rect">
-            <a:avLst/>
-          </a:prstGeom>
-          <a:noFill/>
-          <a:ln/>
-        </p:spPr>
-        <p:txBody>
-          <a:bodyPr wrap="square" rtlCol="0" anchor="ctr"/>
-          <a:lstStyle/>
-          <a:p>
-            <a:pPr indent="0" marL="0">
-              <a:buNone/>
-            </a:pPr>
-            <a:r>
-              <a:rPr lang="en-US" sz="800" dirty="0">
-                <a:solidFill>
-                  <a:srgbClr val="9B9690"/>
-                </a:solidFill>
-              </a:rPr>
-              <a:t>mrzocchi.com</a:t>
-            </a:r>
-            <a:endParaRPr lang="en-US" sz="800" dirty="0"/>
+              <a:t>Particles far apart, moving quickly in all directions. Very weak forces between them. No fixed shape or volume — fills the entire container.</a:t>
+            </a:r>
+            <a:endParaRPr lang="en-US" sz="1100" dirty="0"/>
           </a:p>
         </p:txBody>
       </p:sp>
@@ -2014,6 +2145,466 @@
 <file path=ppt/slides/slide4.xml><?xml version="1.0" encoding="utf-8"?>
 <p:sld xmlns:a="http://schemas.openxmlformats.org/drawingml/2006/main" xmlns:r="http://schemas.openxmlformats.org/officeDocument/2006/relationships" xmlns:p="http://schemas.openxmlformats.org/presentationml/2006/main">
   <p:cSld name="Slide 4">
+    <p:bg>
+      <p:bgPr>
+        <a:solidFill>
+          <a:srgbClr val="FAF8F5"/>
+        </a:solidFill>
+      </p:bgPr>
+    </p:bg>
+    <p:spTree>
+      <p:nvGrpSpPr>
+        <p:cNvPr id="1" name=""/>
+        <p:cNvGrpSpPr/>
+        <p:nvPr/>
+      </p:nvGrpSpPr>
+      <p:grpSpPr>
+        <a:xfrm>
+          <a:off x="0" y="0"/>
+          <a:ext cx="0" cy="0"/>
+          <a:chOff x="0" y="0"/>
+          <a:chExt cx="0" cy="0"/>
+        </a:xfrm>
+      </p:grpSpPr>
+      <p:sp>
+        <p:nvSpPr>
+          <p:cNvPr id="2" name="Shape 0"/>
+          <p:cNvSpPr/>
+          <p:nvPr/>
+        </p:nvSpPr>
+        <p:spPr>
+          <a:xfrm>
+            <a:off x="0" y="0"/>
+            <a:ext cx="9144000" cy="54864"/>
+          </a:xfrm>
+          <a:prstGeom prst="rect">
+            <a:avLst/>
+          </a:prstGeom>
+          <a:solidFill>
+            <a:srgbClr val="2A9D8F"/>
+          </a:solidFill>
+          <a:ln/>
+        </p:spPr>
+      </p:sp>
+      <p:sp>
+        <p:nvSpPr>
+          <p:cNvPr id="3" name="Text 1"/>
+          <p:cNvSpPr/>
+          <p:nvPr/>
+        </p:nvSpPr>
+        <p:spPr>
+          <a:xfrm>
+            <a:off x="7772400" y="4709160"/>
+            <a:ext cx="1097280" cy="320040"/>
+          </a:xfrm>
+          <a:prstGeom prst="rect">
+            <a:avLst/>
+          </a:prstGeom>
+          <a:noFill/>
+          <a:ln/>
+        </p:spPr>
+        <p:txBody>
+          <a:bodyPr wrap="square" rtlCol="0" anchor="ctr"/>
+          <a:lstStyle/>
+          <a:p>
+            <a:pPr algn="r" indent="0" marL="0">
+              <a:buNone/>
+            </a:pPr>
+            <a:r>
+              <a:rPr lang="en-US" sz="900" dirty="0">
+                <a:solidFill>
+                  <a:srgbClr val="6B6660"/>
+                </a:solidFill>
+                <a:latin typeface="Calibri" pitchFamily="34" charset="0"/>
+                <a:ea typeface="Calibri" pitchFamily="34" charset="-122"/>
+                <a:cs typeface="Calibri" pitchFamily="34" charset="-120"/>
+              </a:rPr>
+              <a:t>4 / 5</a:t>
+            </a:r>
+            <a:endParaRPr lang="en-US" sz="900" dirty="0"/>
+          </a:p>
+        </p:txBody>
+      </p:sp>
+      <p:sp>
+        <p:nvSpPr>
+          <p:cNvPr id="4" name="Text 2"/>
+          <p:cNvSpPr/>
+          <p:nvPr/>
+        </p:nvSpPr>
+        <p:spPr>
+          <a:xfrm>
+            <a:off x="457200" y="274320"/>
+            <a:ext cx="8229600" cy="640080"/>
+          </a:xfrm>
+          <a:prstGeom prst="rect">
+            <a:avLst/>
+          </a:prstGeom>
+          <a:noFill/>
+          <a:ln/>
+        </p:spPr>
+        <p:txBody>
+          <a:bodyPr wrap="square" rtlCol="0" anchor="ctr"/>
+          <a:lstStyle/>
+          <a:p>
+            <a:pPr indent="0" marL="0">
+              <a:buNone/>
+            </a:pPr>
+            <a:r>
+              <a:rPr lang="en-US" sz="2600" b="1" dirty="0">
+                <a:solidFill>
+                  <a:srgbClr val="1B2A4A"/>
+                </a:solidFill>
+                <a:latin typeface="Georgia" pitchFamily="34" charset="0"/>
+                <a:ea typeface="Georgia" pitchFamily="34" charset="-122"/>
+                <a:cs typeface="Georgia" pitchFamily="34" charset="-120"/>
+              </a:rPr>
+              <a:t>Particle Properties</a:t>
+            </a:r>
+            <a:endParaRPr lang="en-US" sz="2600" dirty="0"/>
+          </a:p>
+        </p:txBody>
+      </p:sp>
+      <p:sp>
+        <p:nvSpPr>
+          <p:cNvPr id="5" name="Text 3"/>
+          <p:cNvSpPr/>
+          <p:nvPr/>
+        </p:nvSpPr>
+        <p:spPr>
+          <a:xfrm>
+            <a:off x="457200" y="1188720"/>
+            <a:ext cx="3840480" cy="3474720"/>
+          </a:xfrm>
+          <a:prstGeom prst="rect">
+            <a:avLst/>
+          </a:prstGeom>
+          <a:noFill/>
+          <a:ln/>
+        </p:spPr>
+        <p:txBody>
+          <a:bodyPr wrap="square" rtlCol="0" anchor="t"/>
+          <a:lstStyle/>
+          <a:p>
+            <a:pPr marL="342900" indent="-342900">
+              <a:spcAft>
+                <a:spcPts val="600"/>
+              </a:spcAft>
+              <a:buSzPct val="100000"/>
+              <a:buChar char="•"/>
+            </a:pPr>
+            <a:r>
+              <a:rPr lang="en-US" sz="1400" dirty="0">
+                <a:solidFill>
+                  <a:srgbClr val="3D3A36"/>
+                </a:solidFill>
+                <a:latin typeface="Calibri" pitchFamily="34" charset="0"/>
+                <a:ea typeface="Calibri" pitchFamily="34" charset="-122"/>
+                <a:cs typeface="Calibri" pitchFamily="34" charset="-120"/>
+              </a:rPr>
+              <a:t>Particles in solids vibrate — they have kinetic energy</a:t>
+            </a:r>
+            <a:endParaRPr lang="en-US" sz="1400" dirty="0"/>
+          </a:p>
+          <a:p>
+            <a:pPr marL="342900" indent="-342900">
+              <a:spcAft>
+                <a:spcPts val="600"/>
+              </a:spcAft>
+              <a:buSzPct val="100000"/>
+              <a:buChar char="•"/>
+            </a:pPr>
+            <a:r>
+              <a:rPr lang="en-US" sz="1400" dirty="0">
+                <a:solidFill>
+                  <a:srgbClr val="3D3A36"/>
+                </a:solidFill>
+                <a:latin typeface="Calibri" pitchFamily="34" charset="0"/>
+                <a:ea typeface="Calibri" pitchFamily="34" charset="-122"/>
+                <a:cs typeface="Calibri" pitchFamily="34" charset="-120"/>
+              </a:rPr>
+              <a:t>Heating gives particles MORE energy — they move faster</a:t>
+            </a:r>
+            <a:endParaRPr lang="en-US" sz="1400" dirty="0"/>
+          </a:p>
+          <a:p>
+            <a:pPr marL="342900" indent="-342900">
+              <a:spcAft>
+                <a:spcPts val="600"/>
+              </a:spcAft>
+              <a:buSzPct val="100000"/>
+              <a:buChar char="•"/>
+            </a:pPr>
+            <a:r>
+              <a:rPr lang="en-US" sz="1400" dirty="0">
+                <a:solidFill>
+                  <a:srgbClr val="3D3A36"/>
+                </a:solidFill>
+                <a:latin typeface="Calibri" pitchFamily="34" charset="0"/>
+                <a:ea typeface="Calibri" pitchFamily="34" charset="-122"/>
+                <a:cs typeface="Calibri" pitchFamily="34" charset="-120"/>
+              </a:rPr>
+              <a:t>The higher the temperature, the faster the particles move</a:t>
+            </a:r>
+            <a:endParaRPr lang="en-US" sz="1400" dirty="0"/>
+          </a:p>
+          <a:p>
+            <a:pPr marL="342900" indent="-342900">
+              <a:spcAft>
+                <a:spcPts val="600"/>
+              </a:spcAft>
+              <a:buSzPct val="100000"/>
+              <a:buChar char="•"/>
+            </a:pPr>
+            <a:r>
+              <a:rPr lang="en-US" sz="1400" dirty="0">
+                <a:solidFill>
+                  <a:srgbClr val="3D3A36"/>
+                </a:solidFill>
+                <a:latin typeface="Calibri" pitchFamily="34" charset="0"/>
+                <a:ea typeface="Calibri" pitchFamily="34" charset="-122"/>
+                <a:cs typeface="Calibri" pitchFamily="34" charset="-120"/>
+              </a:rPr>
+              <a:t>Particles are too small to see, even with a microscope</a:t>
+            </a:r>
+            <a:endParaRPr lang="en-US" sz="1400" dirty="0"/>
+          </a:p>
+          <a:p>
+            <a:pPr marL="342900" indent="-342900">
+              <a:spcAft>
+                <a:spcPts val="600"/>
+              </a:spcAft>
+              <a:buSzPct val="100000"/>
+              <a:buChar char="•"/>
+            </a:pPr>
+            <a:r>
+              <a:rPr lang="en-US" sz="1400" dirty="0">
+                <a:solidFill>
+                  <a:srgbClr val="3D3A36"/>
+                </a:solidFill>
+                <a:latin typeface="Calibri" pitchFamily="34" charset="0"/>
+                <a:ea typeface="Calibri" pitchFamily="34" charset="-122"/>
+                <a:cs typeface="Calibri" pitchFamily="34" charset="-120"/>
+              </a:rPr>
+              <a:t>The spaces between gas particles are much larger than the particles themselves</a:t>
+            </a:r>
+            <a:endParaRPr lang="en-US" sz="1400" dirty="0"/>
+          </a:p>
+        </p:txBody>
+      </p:sp>
+      <p:sp>
+        <p:nvSpPr>
+          <p:cNvPr id="6" name="Shape 4"/>
+          <p:cNvSpPr/>
+          <p:nvPr/>
+        </p:nvSpPr>
+        <p:spPr>
+          <a:xfrm>
+            <a:off x="4846320" y="1188720"/>
+            <a:ext cx="3840480" cy="3474720"/>
+          </a:xfrm>
+          <a:prstGeom prst="rect">
+            <a:avLst/>
+          </a:prstGeom>
+          <a:solidFill>
+            <a:srgbClr val="FFFFFF"/>
+          </a:solidFill>
+          <a:ln w="12700">
+            <a:solidFill>
+              <a:srgbClr val="E5E2DC"/>
+            </a:solidFill>
+            <a:prstDash val="solid"/>
+          </a:ln>
+          <a:effectLst>
+            <a:outerShdw sx="100000" sy="100000" kx="0" ky="0" algn="bl" rotWithShape="0" blurRad="50800" dist="25400" dir="8100000">
+              <a:srgbClr val="000000">
+                <a:alpha val="10000"/>
+              </a:srgbClr>
+            </a:outerShdw>
+          </a:effectLst>
+        </p:spPr>
+      </p:sp>
+      <p:sp>
+        <p:nvSpPr>
+          <p:cNvPr id="7" name="Shape 5"/>
+          <p:cNvSpPr/>
+          <p:nvPr/>
+        </p:nvSpPr>
+        <p:spPr>
+          <a:xfrm>
+            <a:off x="4846320" y="1188720"/>
+            <a:ext cx="3840480" cy="54864"/>
+          </a:xfrm>
+          <a:prstGeom prst="rect">
+            <a:avLst/>
+          </a:prstGeom>
+          <a:solidFill>
+            <a:srgbClr val="2A9D8F"/>
+          </a:solidFill>
+          <a:ln/>
+        </p:spPr>
+      </p:sp>
+      <p:sp>
+        <p:nvSpPr>
+          <p:cNvPr id="8" name="Text 6"/>
+          <p:cNvSpPr/>
+          <p:nvPr/>
+        </p:nvSpPr>
+        <p:spPr>
+          <a:xfrm>
+            <a:off x="5120640" y="1371600"/>
+            <a:ext cx="3291840" cy="3108960"/>
+          </a:xfrm>
+          <a:prstGeom prst="rect">
+            <a:avLst/>
+          </a:prstGeom>
+          <a:noFill/>
+          <a:ln/>
+        </p:spPr>
+        <p:txBody>
+          <a:bodyPr wrap="square" rtlCol="0" anchor="t"/>
+          <a:lstStyle/>
+          <a:p>
+            <a:pPr indent="0" marL="0">
+              <a:spcAft>
+                <a:spcPts val="400"/>
+              </a:spcAft>
+              <a:buNone/>
+            </a:pPr>
+            <a:r>
+              <a:rPr lang="en-US" sz="1600" b="1" dirty="0">
+                <a:solidFill>
+                  <a:srgbClr val="1B2A4A"/>
+                </a:solidFill>
+                <a:latin typeface="Calibri" pitchFamily="34" charset="0"/>
+                <a:ea typeface="Calibri" pitchFamily="34" charset="-122"/>
+                <a:cs typeface="Calibri" pitchFamily="34" charset="-120"/>
+              </a:rPr>
+              <a:t>Diffusion</a:t>
+            </a:r>
+            <a:endParaRPr lang="en-US" sz="1600" dirty="0"/>
+          </a:p>
+          <a:p>
+            <a:pPr indent="0" marL="0">
+              <a:spcAft>
+                <a:spcPts val="400"/>
+              </a:spcAft>
+              <a:buNone/>
+            </a:pPr>
+            <a:endParaRPr lang="en-US" sz="1600" dirty="0"/>
+          </a:p>
+          <a:p>
+            <a:pPr indent="0" marL="0">
+              <a:spcAft>
+                <a:spcPts val="400"/>
+              </a:spcAft>
+              <a:buNone/>
+            </a:pPr>
+            <a:r>
+              <a:rPr lang="en-US" sz="1300" dirty="0">
+                <a:solidFill>
+                  <a:srgbClr val="3D3A36"/>
+                </a:solidFill>
+                <a:latin typeface="Calibri" pitchFamily="34" charset="0"/>
+                <a:ea typeface="Calibri" pitchFamily="34" charset="-122"/>
+                <a:cs typeface="Calibri" pitchFamily="34" charset="-120"/>
+              </a:rPr>
+              <a:t>Diffusion = particles spreading from high to low concentration</a:t>
+            </a:r>
+            <a:endParaRPr lang="en-US" sz="1600" dirty="0"/>
+          </a:p>
+          <a:p>
+            <a:pPr indent="0" marL="0">
+              <a:spcAft>
+                <a:spcPts val="400"/>
+              </a:spcAft>
+              <a:buNone/>
+            </a:pPr>
+            <a:r>
+              <a:rPr lang="en-US" sz="1300" dirty="0">
+                <a:solidFill>
+                  <a:srgbClr val="3D3A36"/>
+                </a:solidFill>
+                <a:latin typeface="Calibri" pitchFamily="34" charset="0"/>
+                <a:ea typeface="Calibri" pitchFamily="34" charset="-122"/>
+                <a:cs typeface="Calibri" pitchFamily="34" charset="-120"/>
+              </a:rPr>
+              <a:t>Example: smell of perfume spreads across a room</a:t>
+            </a:r>
+            <a:endParaRPr lang="en-US" sz="1600" dirty="0"/>
+          </a:p>
+          <a:p>
+            <a:pPr indent="0" marL="0">
+              <a:spcAft>
+                <a:spcPts val="400"/>
+              </a:spcAft>
+              <a:buNone/>
+            </a:pPr>
+            <a:r>
+              <a:rPr lang="en-US" sz="1300" dirty="0">
+                <a:solidFill>
+                  <a:srgbClr val="3D3A36"/>
+                </a:solidFill>
+                <a:latin typeface="Calibri" pitchFamily="34" charset="0"/>
+                <a:ea typeface="Calibri" pitchFamily="34" charset="-122"/>
+                <a:cs typeface="Calibri" pitchFamily="34" charset="-120"/>
+              </a:rPr>
+              <a:t>Happens faster at higher temperatures (particles move faster)</a:t>
+            </a:r>
+            <a:endParaRPr lang="en-US" sz="1600" dirty="0"/>
+          </a:p>
+          <a:p>
+            <a:pPr indent="0" marL="0">
+              <a:spcAft>
+                <a:spcPts val="400"/>
+              </a:spcAft>
+              <a:buNone/>
+            </a:pPr>
+            <a:r>
+              <a:rPr lang="en-US" sz="1300" dirty="0">
+                <a:solidFill>
+                  <a:srgbClr val="3D3A36"/>
+                </a:solidFill>
+                <a:latin typeface="Calibri" pitchFamily="34" charset="0"/>
+                <a:ea typeface="Calibri" pitchFamily="34" charset="-122"/>
+                <a:cs typeface="Calibri" pitchFamily="34" charset="-120"/>
+              </a:rPr>
+              <a:t>Happens in liquids and gases, NOT solids</a:t>
+            </a:r>
+            <a:endParaRPr lang="en-US" sz="1600" dirty="0"/>
+          </a:p>
+          <a:p>
+            <a:pPr indent="0" marL="0">
+              <a:spcAft>
+                <a:spcPts val="400"/>
+              </a:spcAft>
+              <a:buNone/>
+            </a:pPr>
+            <a:r>
+              <a:rPr lang="en-US" sz="1300" dirty="0">
+                <a:solidFill>
+                  <a:srgbClr val="3D3A36"/>
+                </a:solidFill>
+                <a:latin typeface="Calibri" pitchFamily="34" charset="0"/>
+                <a:ea typeface="Calibri" pitchFamily="34" charset="-122"/>
+                <a:cs typeface="Calibri" pitchFamily="34" charset="-120"/>
+              </a:rPr>
+              <a:t>Evidence that particles are always moving randomly</a:t>
+            </a:r>
+            <a:endParaRPr lang="en-US" sz="1600" dirty="0"/>
+          </a:p>
+        </p:txBody>
+      </p:sp>
+    </p:spTree>
+  </p:cSld>
+  <p:clrMapOvr>
+    <a:masterClrMapping/>
+  </p:clrMapOvr>
+</p:sld>
+</file>
+
+<file path=ppt/slides/slide5.xml><?xml version="1.0" encoding="utf-8"?>
+<p:sld xmlns:a="http://schemas.openxmlformats.org/drawingml/2006/main" xmlns:r="http://schemas.openxmlformats.org/officeDocument/2006/relationships" xmlns:p="http://schemas.openxmlformats.org/presentationml/2006/main">
+  <p:cSld name="Slide 5">
     <p:bg>
       <p:bgPr>
         <a:solidFill>
@@ -2044,13 +2635,13 @@
         <p:spPr>
           <a:xfrm>
             <a:off x="0" y="0"/>
-            <a:ext cx="9144000" cy="54864"/>
-          </a:xfrm>
-          <a:prstGeom prst="rect">
-            <a:avLst/>
-          </a:prstGeom>
-          <a:solidFill>
-            <a:srgbClr val="2A9D8F"/>
+            <a:ext cx="109728" cy="5143500"/>
+          </a:xfrm>
+          <a:prstGeom prst="rect">
+            <a:avLst/>
+          </a:prstGeom>
+          <a:solidFill>
+            <a:srgbClr val="E9C46A"/>
           </a:solidFill>
           <a:ln/>
         </p:spPr>
@@ -2063,8 +2654,8 @@
         </p:nvSpPr>
         <p:spPr>
           <a:xfrm>
-            <a:off x="548640" y="457200"/>
-            <a:ext cx="8046720" cy="640080"/>
+            <a:off x="731520" y="457200"/>
+            <a:ext cx="7772400" cy="731520"/>
           </a:xfrm>
           <a:prstGeom prst="rect">
             <a:avLst/>
@@ -2080,7 +2671,7 @@
               <a:buNone/>
             </a:pPr>
             <a:r>
-              <a:rPr lang="en-US" sz="2800" b="1" dirty="0">
+              <a:rPr lang="en-US" sz="3200" b="1" dirty="0">
                 <a:solidFill>
                   <a:srgbClr val="FFFFFF"/>
                 </a:solidFill>
@@ -2090,7 +2681,7 @@
               </a:rPr>
               <a:t>Key Takeaways</a:t>
             </a:r>
-            <a:endParaRPr lang="en-US" sz="2800" dirty="0"/>
+            <a:endParaRPr lang="en-US" sz="3200" dirty="0"/>
           </a:p>
         </p:txBody>
       </p:sp>
@@ -2102,8 +2693,8 @@
         </p:nvSpPr>
         <p:spPr>
           <a:xfrm>
-            <a:off x="731520" y="1371600"/>
-            <a:ext cx="7680960" cy="3200400"/>
+            <a:off x="731520" y="1463040"/>
+            <a:ext cx="7772400" cy="3200400"/>
           </a:xfrm>
           <a:prstGeom prst="rect">
             <a:avLst/>
@@ -2123,7 +2714,7 @@
               <a:buChar char="•"/>
             </a:pPr>
             <a:r>
-              <a:rPr lang="en-US" sz="1600" dirty="0">
+              <a:rPr lang="en-US" sz="1500" dirty="0">
                 <a:solidFill>
                   <a:srgbClr val="CADCFC"/>
                 </a:solidFill>
@@ -2131,9 +2722,9 @@
                 <a:ea typeface="Calibri" pitchFamily="34" charset="-122"/>
                 <a:cs typeface="Calibri" pitchFamily="34" charset="-120"/>
               </a:rPr>
-              <a:t>All matter = tiny particles in constant motion</a:t>
-            </a:r>
-            <a:endParaRPr lang="en-US" sz="1600" dirty="0"/>
+              <a:t>All matter is made of tiny, constantly moving particles</a:t>
+            </a:r>
+            <a:endParaRPr lang="en-US" sz="1500" dirty="0"/>
           </a:p>
           <a:p>
             <a:pPr marL="342900" indent="-342900">
@@ -2144,7 +2735,7 @@
               <a:buChar char="•"/>
             </a:pPr>
             <a:r>
-              <a:rPr lang="en-US" sz="1600" dirty="0">
+              <a:rPr lang="en-US" sz="1500" dirty="0">
                 <a:solidFill>
                   <a:srgbClr val="CADCFC"/>
                 </a:solidFill>
@@ -2152,9 +2743,9 @@
                 <a:ea typeface="Calibri" pitchFamily="34" charset="-122"/>
                 <a:cs typeface="Calibri" pitchFamily="34" charset="-120"/>
               </a:rPr>
-              <a:t>Solids: fixed, vibrate only | Liquids: close, slide | Gases: far, fast</a:t>
-            </a:r>
-            <a:endParaRPr lang="en-US" sz="1600" dirty="0"/>
+              <a:t>Solids: regular, vibrate in place. Liquids: close, slide past. Gases: far apart, fast</a:t>
+            </a:r>
+            <a:endParaRPr lang="en-US" sz="1500" dirty="0"/>
           </a:p>
           <a:p>
             <a:pPr marL="342900" indent="-342900">
@@ -2165,7 +2756,7 @@
               <a:buChar char="•"/>
             </a:pPr>
             <a:r>
-              <a:rPr lang="en-US" sz="1600" dirty="0">
+              <a:rPr lang="en-US" sz="1500" dirty="0">
                 <a:solidFill>
                   <a:srgbClr val="CADCFC"/>
                 </a:solidFill>
@@ -2173,9 +2764,9 @@
                 <a:ea typeface="Calibri" pitchFamily="34" charset="-122"/>
                 <a:cs typeface="Calibri" pitchFamily="34" charset="-120"/>
               </a:rPr>
-              <a:t>Particle arrangement explains properties of each state</a:t>
-            </a:r>
-            <a:endParaRPr lang="en-US" sz="1600" dirty="0"/>
+              <a:t>Heating increases particle energy and speed</a:t>
+            </a:r>
+            <a:endParaRPr lang="en-US" sz="1500" dirty="0"/>
           </a:p>
           <a:p>
             <a:pPr marL="342900" indent="-342900">
@@ -2186,7 +2777,7 @@
               <a:buChar char="•"/>
             </a:pPr>
             <a:r>
-              <a:rPr lang="en-US" sz="1600" dirty="0">
+              <a:rPr lang="en-US" sz="1500" dirty="0">
                 <a:solidFill>
                   <a:srgbClr val="CADCFC"/>
                 </a:solidFill>
@@ -2194,9 +2785,30 @@
                 <a:ea typeface="Calibri" pitchFamily="34" charset="-122"/>
                 <a:cs typeface="Calibri" pitchFamily="34" charset="-120"/>
               </a:rPr>
-              <a:t>More energy = particles move faster</a:t>
-            </a:r>
-            <a:endParaRPr lang="en-US" sz="1600" dirty="0"/>
+              <a:t>Diffusion: particles spread from high to low concentration</a:t>
+            </a:r>
+            <a:endParaRPr lang="en-US" sz="1500" dirty="0"/>
+          </a:p>
+          <a:p>
+            <a:pPr marL="342900" indent="-342900">
+              <a:spcAft>
+                <a:spcPts val="1000"/>
+              </a:spcAft>
+              <a:buSzPct val="100000"/>
+              <a:buChar char="•"/>
+            </a:pPr>
+            <a:r>
+              <a:rPr lang="en-US" sz="1500" dirty="0">
+                <a:solidFill>
+                  <a:srgbClr val="CADCFC"/>
+                </a:solidFill>
+                <a:latin typeface="Calibri" pitchFamily="34" charset="0"/>
+                <a:ea typeface="Calibri" pitchFamily="34" charset="-122"/>
+                <a:cs typeface="Calibri" pitchFamily="34" charset="-120"/>
+              </a:rPr>
+              <a:t>Diffusion is faster at higher temperatures</a:t>
+            </a:r>
+            <a:endParaRPr lang="en-US" sz="1500" dirty="0"/>
           </a:p>
         </p:txBody>
       </p:sp>
@@ -2208,8 +2820,8 @@
         </p:nvSpPr>
         <p:spPr>
           <a:xfrm>
-            <a:off x="548640" y="4572000"/>
-            <a:ext cx="3657600" cy="274320"/>
+            <a:off x="731520" y="4572000"/>
+            <a:ext cx="7772400" cy="365760"/>
           </a:xfrm>
           <a:prstGeom prst="rect">
             <a:avLst/>
@@ -2225,14 +2837,17 @@
               <a:buNone/>
             </a:pPr>
             <a:r>
-              <a:rPr lang="en-US" sz="1000" dirty="0">
-                <a:solidFill>
-                  <a:srgbClr val="6B6660"/>
-                </a:solidFill>
+              <a:rPr lang="en-US" sz="1100" dirty="0">
+                <a:solidFill>
+                  <a:srgbClr val="E9C46A"/>
+                </a:solidFill>
+                <a:latin typeface="Calibri" pitchFamily="34" charset="0"/>
+                <a:ea typeface="Calibri" pitchFamily="34" charset="-122"/>
+                <a:cs typeface="Calibri" pitchFamily="34" charset="-120"/>
               </a:rPr>
               <a:t>mrzocchi.com</a:t>
             </a:r>
-            <a:endParaRPr lang="en-US" sz="1000" dirty="0"/>
+            <a:endParaRPr lang="en-US" sz="1100" dirty="0"/>
           </a:p>
         </p:txBody>
       </p:sp>

--- a/static/ppts/G6_Sci_T2_Particle_Model.pptx
+++ b/static/ppts/G6_Sci_T2_Particle_Model.pptx
@@ -10,9 +10,12 @@
     <p:sldId id="258" r:id="rId4"/>
     <p:sldId id="259" r:id="rId5"/>
     <p:sldId id="260" r:id="rId6"/>
+    <p:sldId id="261" r:id="rId7"/>
+    <p:sldId id="262" r:id="rId8"/>
+    <p:sldId id="263" r:id="rId9"/>
   </p:sldIdLst>
   <p:notesMasterIdLst>
-    <p:notesMasterId r:id="rId7"/>
+    <p:notesMasterId r:id="rId10"/>
   </p:notesMasterIdLst>
   <p:sldSz cx="9144000" cy="5143500"/>
   <p:notesSz cx="5143500" cy="9144000"/>
@@ -900,6 +903,270 @@
 </p:notes>
 </file>
 
+<file path=ppt/notesSlides/notesSlide6.xml><?xml version="1.0" encoding="utf-8"?>
+<p:notes xmlns:a="http://schemas.openxmlformats.org/drawingml/2006/main" xmlns:r="http://schemas.openxmlformats.org/officeDocument/2006/relationships" xmlns:p="http://schemas.openxmlformats.org/presentationml/2006/main">
+  <p:cSld>
+    <p:spTree>
+      <p:nvGrpSpPr>
+        <p:cNvPr id="1" name=""/>
+        <p:cNvGrpSpPr/>
+        <p:nvPr/>
+      </p:nvGrpSpPr>
+      <p:grpSpPr>
+        <a:xfrm>
+          <a:off x="0" y="0"/>
+          <a:ext cx="0" cy="0"/>
+          <a:chOff x="0" y="0"/>
+          <a:chExt cx="0" cy="0"/>
+        </a:xfrm>
+      </p:grpSpPr>
+      <p:sp>
+        <p:nvSpPr>
+          <p:cNvPr id="2" name="Slide Image Placeholder 1"/>
+          <p:cNvSpPr>
+            <a:spLocks noGrp="1" noRot="1" noChangeAspect="1"/>
+          </p:cNvSpPr>
+          <p:nvPr>
+            <p:ph type="sldImg"/>
+          </p:nvPr>
+        </p:nvSpPr>
+        <p:spPr/>
+      </p:sp>
+      <p:sp>
+        <p:nvSpPr>
+          <p:cNvPr id="3" name="Notes Placeholder 2"/>
+          <p:cNvSpPr>
+            <a:spLocks noGrp="1"/>
+          </p:cNvSpPr>
+          <p:nvPr>
+            <p:ph type="body" idx="1"/>
+          </p:nvPr>
+        </p:nvSpPr>
+        <p:spPr/>
+        <p:txBody>
+          <a:bodyPr/>
+          <a:lstStyle/>
+          <a:p>
+            <a:r>
+              <a:rPr lang="en-US" dirty="0"/>
+              <a:t/>
+            </a:r>
+            <a:endParaRPr lang="en-US" dirty="0"/>
+          </a:p>
+        </p:txBody>
+      </p:sp>
+      <p:sp>
+        <p:nvSpPr>
+          <p:cNvPr id="4" name="Slide Number Placeholder 3"/>
+          <p:cNvSpPr>
+            <a:spLocks noGrp="1"/>
+          </p:cNvSpPr>
+          <p:nvPr>
+            <p:ph type="sldNum" sz="quarter" idx="10"/>
+          </p:nvPr>
+        </p:nvSpPr>
+        <p:spPr/>
+        <p:txBody>
+          <a:bodyPr/>
+          <a:lstStyle/>
+          <a:p>
+            <a:fld id="{F7021451-1387-4CA6-816F-3879F97B5CBC}" type="slidenum">
+              <a:rPr lang="en-US"/>
+              <a:t>6</a:t>
+            </a:fld>
+            <a:endParaRPr lang="en-US"/>
+          </a:p>
+        </p:txBody>
+      </p:sp>
+    </p:spTree>
+    <p:extLst>
+      <p:ext uri="{BB962C8B-B14F-4D97-AF65-F5344CB8AC3E}">
+        <p14:creationId xmlns:p14="http://schemas.microsoft.com/office/powerpoint/2010/main" val="1024086991"/>
+      </p:ext>
+    </p:extLst>
+  </p:cSld>
+  <p:clrMapOvr>
+    <a:masterClrMapping/>
+  </p:clrMapOvr>
+</p:notes>
+</file>
+
+<file path=ppt/notesSlides/notesSlide7.xml><?xml version="1.0" encoding="utf-8"?>
+<p:notes xmlns:a="http://schemas.openxmlformats.org/drawingml/2006/main" xmlns:r="http://schemas.openxmlformats.org/officeDocument/2006/relationships" xmlns:p="http://schemas.openxmlformats.org/presentationml/2006/main">
+  <p:cSld>
+    <p:spTree>
+      <p:nvGrpSpPr>
+        <p:cNvPr id="1" name=""/>
+        <p:cNvGrpSpPr/>
+        <p:nvPr/>
+      </p:nvGrpSpPr>
+      <p:grpSpPr>
+        <a:xfrm>
+          <a:off x="0" y="0"/>
+          <a:ext cx="0" cy="0"/>
+          <a:chOff x="0" y="0"/>
+          <a:chExt cx="0" cy="0"/>
+        </a:xfrm>
+      </p:grpSpPr>
+      <p:sp>
+        <p:nvSpPr>
+          <p:cNvPr id="2" name="Slide Image Placeholder 1"/>
+          <p:cNvSpPr>
+            <a:spLocks noGrp="1" noRot="1" noChangeAspect="1"/>
+          </p:cNvSpPr>
+          <p:nvPr>
+            <p:ph type="sldImg"/>
+          </p:nvPr>
+        </p:nvSpPr>
+        <p:spPr/>
+      </p:sp>
+      <p:sp>
+        <p:nvSpPr>
+          <p:cNvPr id="3" name="Notes Placeholder 2"/>
+          <p:cNvSpPr>
+            <a:spLocks noGrp="1"/>
+          </p:cNvSpPr>
+          <p:nvPr>
+            <p:ph type="body" idx="1"/>
+          </p:nvPr>
+        </p:nvSpPr>
+        <p:spPr/>
+        <p:txBody>
+          <a:bodyPr/>
+          <a:lstStyle/>
+          <a:p>
+            <a:r>
+              <a:rPr lang="en-US" dirty="0"/>
+              <a:t/>
+            </a:r>
+            <a:endParaRPr lang="en-US" dirty="0"/>
+          </a:p>
+        </p:txBody>
+      </p:sp>
+      <p:sp>
+        <p:nvSpPr>
+          <p:cNvPr id="4" name="Slide Number Placeholder 3"/>
+          <p:cNvSpPr>
+            <a:spLocks noGrp="1"/>
+          </p:cNvSpPr>
+          <p:nvPr>
+            <p:ph type="sldNum" sz="quarter" idx="10"/>
+          </p:nvPr>
+        </p:nvSpPr>
+        <p:spPr/>
+        <p:txBody>
+          <a:bodyPr/>
+          <a:lstStyle/>
+          <a:p>
+            <a:fld id="{F7021451-1387-4CA6-816F-3879F97B5CBC}" type="slidenum">
+              <a:rPr lang="en-US"/>
+              <a:t>7</a:t>
+            </a:fld>
+            <a:endParaRPr lang="en-US"/>
+          </a:p>
+        </p:txBody>
+      </p:sp>
+    </p:spTree>
+    <p:extLst>
+      <p:ext uri="{BB962C8B-B14F-4D97-AF65-F5344CB8AC3E}">
+        <p14:creationId xmlns:p14="http://schemas.microsoft.com/office/powerpoint/2010/main" val="1024086991"/>
+      </p:ext>
+    </p:extLst>
+  </p:cSld>
+  <p:clrMapOvr>
+    <a:masterClrMapping/>
+  </p:clrMapOvr>
+</p:notes>
+</file>
+
+<file path=ppt/notesSlides/notesSlide8.xml><?xml version="1.0" encoding="utf-8"?>
+<p:notes xmlns:a="http://schemas.openxmlformats.org/drawingml/2006/main" xmlns:r="http://schemas.openxmlformats.org/officeDocument/2006/relationships" xmlns:p="http://schemas.openxmlformats.org/presentationml/2006/main">
+  <p:cSld>
+    <p:spTree>
+      <p:nvGrpSpPr>
+        <p:cNvPr id="1" name=""/>
+        <p:cNvGrpSpPr/>
+        <p:nvPr/>
+      </p:nvGrpSpPr>
+      <p:grpSpPr>
+        <a:xfrm>
+          <a:off x="0" y="0"/>
+          <a:ext cx="0" cy="0"/>
+          <a:chOff x="0" y="0"/>
+          <a:chExt cx="0" cy="0"/>
+        </a:xfrm>
+      </p:grpSpPr>
+      <p:sp>
+        <p:nvSpPr>
+          <p:cNvPr id="2" name="Slide Image Placeholder 1"/>
+          <p:cNvSpPr>
+            <a:spLocks noGrp="1" noRot="1" noChangeAspect="1"/>
+          </p:cNvSpPr>
+          <p:nvPr>
+            <p:ph type="sldImg"/>
+          </p:nvPr>
+        </p:nvSpPr>
+        <p:spPr/>
+      </p:sp>
+      <p:sp>
+        <p:nvSpPr>
+          <p:cNvPr id="3" name="Notes Placeholder 2"/>
+          <p:cNvSpPr>
+            <a:spLocks noGrp="1"/>
+          </p:cNvSpPr>
+          <p:nvPr>
+            <p:ph type="body" idx="1"/>
+          </p:nvPr>
+        </p:nvSpPr>
+        <p:spPr/>
+        <p:txBody>
+          <a:bodyPr/>
+          <a:lstStyle/>
+          <a:p>
+            <a:r>
+              <a:rPr lang="en-US" dirty="0"/>
+              <a:t/>
+            </a:r>
+            <a:endParaRPr lang="en-US" dirty="0"/>
+          </a:p>
+        </p:txBody>
+      </p:sp>
+      <p:sp>
+        <p:nvSpPr>
+          <p:cNvPr id="4" name="Slide Number Placeholder 3"/>
+          <p:cNvSpPr>
+            <a:spLocks noGrp="1"/>
+          </p:cNvSpPr>
+          <p:nvPr>
+            <p:ph type="sldNum" sz="quarter" idx="10"/>
+          </p:nvPr>
+        </p:nvSpPr>
+        <p:spPr/>
+        <p:txBody>
+          <a:bodyPr/>
+          <a:lstStyle/>
+          <a:p>
+            <a:fld id="{F7021451-1387-4CA6-816F-3879F97B5CBC}" type="slidenum">
+              <a:rPr lang="en-US"/>
+              <a:t>8</a:t>
+            </a:fld>
+            <a:endParaRPr lang="en-US"/>
+          </a:p>
+        </p:txBody>
+      </p:sp>
+    </p:spTree>
+    <p:extLst>
+      <p:ext uri="{BB962C8B-B14F-4D97-AF65-F5344CB8AC3E}">
+        <p14:creationId xmlns:p14="http://schemas.microsoft.com/office/powerpoint/2010/main" val="1024086991"/>
+      </p:ext>
+    </p:extLst>
+  </p:cSld>
+  <p:clrMapOvr>
+    <a:masterClrMapping/>
+  </p:clrMapOvr>
+</p:notes>
+</file>
+
 <file path=ppt/slideLayouts/slideLayout1.xml><?xml version="1.0" encoding="utf-8"?>
 <p:sldLayout xmlns:a="http://schemas.openxmlformats.org/drawingml/2006/main" xmlns:r="http://schemas.openxmlformats.org/officeDocument/2006/relationships" xmlns:p="http://schemas.openxmlformats.org/presentationml/2006/main" preserve="1">
   <p:cSld name="DEFAULT">
@@ -1210,13 +1477,6 @@
 <file path=ppt/slides/slide1.xml><?xml version="1.0" encoding="utf-8"?>
 <p:sld xmlns:a="http://schemas.openxmlformats.org/drawingml/2006/main" xmlns:r="http://schemas.openxmlformats.org/officeDocument/2006/relationships" xmlns:p="http://schemas.openxmlformats.org/presentationml/2006/main">
   <p:cSld name="Slide 1">
-    <p:bg>
-      <p:bgPr>
-        <a:solidFill>
-          <a:srgbClr val="1B2A4A"/>
-        </a:solidFill>
-      </p:bgPr>
-    </p:bg>
     <p:spTree>
       <p:nvGrpSpPr>
         <p:cNvPr id="1" name=""/>
@@ -1240,7 +1500,27 @@
         <p:spPr>
           <a:xfrm>
             <a:off x="0" y="0"/>
-            <a:ext cx="109728" cy="5143500"/>
+            <a:ext cx="9144000" cy="5143500"/>
+          </a:xfrm>
+          <a:prstGeom prst="rect">
+            <a:avLst/>
+          </a:prstGeom>
+          <a:solidFill>
+            <a:srgbClr val="1B2A4A"/>
+          </a:solidFill>
+          <a:ln/>
+        </p:spPr>
+      </p:sp>
+      <p:sp>
+        <p:nvSpPr>
+          <p:cNvPr id="3" name="Shape 1"/>
+          <p:cNvSpPr/>
+          <p:nvPr/>
+        </p:nvSpPr>
+        <p:spPr>
+          <a:xfrm>
+            <a:off x="0" y="4777740"/>
+            <a:ext cx="9144000" cy="365760"/>
           </a:xfrm>
           <a:prstGeom prst="rect">
             <a:avLst/>
@@ -1253,14 +1533,36 @@
       </p:sp>
       <p:sp>
         <p:nvSpPr>
-          <p:cNvPr id="3" name="Text 1"/>
-          <p:cNvSpPr/>
-          <p:nvPr/>
-        </p:nvSpPr>
-        <p:spPr>
-          <a:xfrm>
-            <a:off x="731520" y="1097280"/>
-            <a:ext cx="7772400" cy="1371600"/>
+          <p:cNvPr id="4" name="Shape 2"/>
+          <p:cNvSpPr/>
+          <p:nvPr/>
+        </p:nvSpPr>
+        <p:spPr>
+          <a:xfrm>
+            <a:off x="6858000" y="-1371600"/>
+            <a:ext cx="4572000" cy="4572000"/>
+          </a:xfrm>
+          <a:prstGeom prst="ellipse">
+            <a:avLst/>
+          </a:prstGeom>
+          <a:solidFill>
+            <a:srgbClr val="2A9D8F">
+              <a:alpha val="12000"/>
+            </a:srgbClr>
+          </a:solidFill>
+          <a:ln/>
+        </p:spPr>
+      </p:sp>
+      <p:sp>
+        <p:nvSpPr>
+          <p:cNvPr id="5" name="Text 3"/>
+          <p:cNvSpPr/>
+          <p:nvPr/>
+        </p:nvSpPr>
+        <p:spPr>
+          <a:xfrm>
+            <a:off x="731520" y="914400"/>
+            <a:ext cx="7680960" cy="457200"/>
           </a:xfrm>
           <a:prstGeom prst="rect">
             <a:avLst/>
@@ -1276,7 +1578,46 @@
               <a:buNone/>
             </a:pPr>
             <a:r>
-              <a:rPr lang="en-US" sz="4000" b="1" dirty="0">
+              <a:rPr lang="en-US" sz="1300" b="1" spc="500" kern="0" dirty="0">
+                <a:solidFill>
+                  <a:srgbClr val="2A9D8F"/>
+                </a:solidFill>
+                <a:latin typeface="Calibri" pitchFamily="34" charset="0"/>
+                <a:ea typeface="Calibri" pitchFamily="34" charset="-122"/>
+                <a:cs typeface="Calibri" pitchFamily="34" charset="-120"/>
+              </a:rPr>
+              <a:t>GRADE 6 SCIENCE</a:t>
+            </a:r>
+            <a:endParaRPr lang="en-US" sz="1300" dirty="0"/>
+          </a:p>
+        </p:txBody>
+      </p:sp>
+      <p:sp>
+        <p:nvSpPr>
+          <p:cNvPr id="6" name="Text 4"/>
+          <p:cNvSpPr/>
+          <p:nvPr/>
+        </p:nvSpPr>
+        <p:spPr>
+          <a:xfrm>
+            <a:off x="731520" y="1463040"/>
+            <a:ext cx="6858000" cy="1645920"/>
+          </a:xfrm>
+          <a:prstGeom prst="rect">
+            <a:avLst/>
+          </a:prstGeom>
+          <a:noFill/>
+          <a:ln/>
+        </p:spPr>
+        <p:txBody>
+          <a:bodyPr wrap="square" rtlCol="0" anchor="t"/>
+          <a:lstStyle/>
+          <a:p>
+            <a:pPr indent="0" marL="0">
+              <a:buNone/>
+            </a:pPr>
+            <a:r>
+              <a:rPr lang="en-US" sz="3800" b="1" dirty="0">
                 <a:solidFill>
                   <a:srgbClr val="FFFFFF"/>
                 </a:solidFill>
@@ -1286,20 +1627,20 @@
               </a:rPr>
               <a:t>The Particle Model</a:t>
             </a:r>
-            <a:endParaRPr lang="en-US" sz="4000" dirty="0"/>
-          </a:p>
-        </p:txBody>
-      </p:sp>
-      <p:sp>
-        <p:nvSpPr>
-          <p:cNvPr id="4" name="Text 2"/>
-          <p:cNvSpPr/>
-          <p:nvPr/>
-        </p:nvSpPr>
-        <p:spPr>
-          <a:xfrm>
-            <a:off x="731520" y="2560320"/>
-            <a:ext cx="7772400" cy="548640"/>
+            <a:endParaRPr lang="en-US" sz="3800" dirty="0"/>
+          </a:p>
+        </p:txBody>
+      </p:sp>
+      <p:sp>
+        <p:nvSpPr>
+          <p:cNvPr id="7" name="Text 5"/>
+          <p:cNvSpPr/>
+          <p:nvPr/>
+        </p:nvSpPr>
+        <p:spPr>
+          <a:xfrm>
+            <a:off x="731520" y="3200400"/>
+            <a:ext cx="6400800" cy="548640"/>
           </a:xfrm>
           <a:prstGeom prst="rect">
             <a:avLst/>
@@ -1315,15 +1656,15 @@
               <a:buNone/>
             </a:pPr>
             <a:r>
-              <a:rPr lang="en-US" sz="1600" dirty="0">
-                <a:solidFill>
-                  <a:srgbClr val="E9C46A"/>
+              <a:rPr lang="en-US" sz="1600" i="1" dirty="0">
+                <a:solidFill>
+                  <a:srgbClr val="9B9690"/>
                 </a:solidFill>
                 <a:latin typeface="Calibri" pitchFamily="34" charset="0"/>
                 <a:ea typeface="Calibri" pitchFamily="34" charset="-122"/>
                 <a:cs typeface="Calibri" pitchFamily="34" charset="-120"/>
               </a:rPr>
-              <a:t>Grade 6 Science · Mr Zocchi</a:t>
+              <a:t>Everything is made of tiny particles</a:t>
             </a:r>
             <a:endParaRPr lang="en-US" sz="1600" dirty="0"/>
           </a:p>
@@ -1331,36 +1672,14 @@
       </p:sp>
       <p:sp>
         <p:nvSpPr>
-          <p:cNvPr id="5" name="Shape 3"/>
-          <p:cNvSpPr/>
-          <p:nvPr/>
-        </p:nvSpPr>
-        <p:spPr>
-          <a:xfrm>
-            <a:off x="731520" y="3474720"/>
-            <a:ext cx="2011680" cy="411480"/>
-          </a:xfrm>
-          <a:prstGeom prst="roundRect">
-            <a:avLst>
-              <a:gd name="adj" fmla="val 17778"/>
-            </a:avLst>
-          </a:prstGeom>
-          <a:solidFill>
-            <a:srgbClr val="2A9D8F"/>
-          </a:solidFill>
-          <a:ln/>
-        </p:spPr>
-      </p:sp>
-      <p:sp>
-        <p:nvSpPr>
-          <p:cNvPr id="6" name="Text 4"/>
-          <p:cNvSpPr/>
-          <p:nvPr/>
-        </p:nvSpPr>
-        <p:spPr>
-          <a:xfrm>
-            <a:off x="731520" y="3474720"/>
-            <a:ext cx="2011680" cy="411480"/>
+          <p:cNvPr id="8" name="Text 6"/>
+          <p:cNvSpPr/>
+          <p:nvPr/>
+        </p:nvSpPr>
+        <p:spPr>
+          <a:xfrm>
+            <a:off x="731520" y="4297680"/>
+            <a:ext cx="2743200" cy="365760"/>
           </a:xfrm>
           <a:prstGeom prst="rect">
             <a:avLst/>
@@ -1372,21 +1691,21 @@
           <a:bodyPr wrap="square" rtlCol="0" anchor="ctr"/>
           <a:lstStyle/>
           <a:p>
-            <a:pPr algn="ctr" indent="0" marL="0">
+            <a:pPr indent="0" marL="0">
               <a:buNone/>
             </a:pPr>
             <a:r>
-              <a:rPr lang="en-US" sz="1200" b="1" dirty="0">
-                <a:solidFill>
-                  <a:srgbClr val="FFFFFF"/>
+              <a:rPr lang="en-US" sz="1100" dirty="0">
+                <a:solidFill>
+                  <a:srgbClr val="9B9690"/>
                 </a:solidFill>
                 <a:latin typeface="Calibri" pitchFamily="34" charset="0"/>
                 <a:ea typeface="Calibri" pitchFamily="34" charset="-122"/>
                 <a:cs typeface="Calibri" pitchFamily="34" charset="-120"/>
               </a:rPr>
-              <a:t>Term 2 · Chemistry</a:t>
-            </a:r>
-            <a:endParaRPr lang="en-US" sz="1200" dirty="0"/>
+              <a:t>mrzocchi.com</a:t>
+            </a:r>
+            <a:endParaRPr lang="en-US" sz="1100" dirty="0"/>
           </a:p>
         </p:txBody>
       </p:sp>
@@ -1431,7 +1750,47 @@
         <p:spPr>
           <a:xfrm>
             <a:off x="0" y="0"/>
-            <a:ext cx="9144000" cy="54864"/>
+            <a:ext cx="9144000" cy="822960"/>
+          </a:xfrm>
+          <a:prstGeom prst="rect">
+            <a:avLst/>
+          </a:prstGeom>
+          <a:solidFill>
+            <a:srgbClr val="FFFFFF"/>
+          </a:solidFill>
+          <a:ln/>
+        </p:spPr>
+      </p:sp>
+      <p:sp>
+        <p:nvSpPr>
+          <p:cNvPr id="3" name="Shape 1"/>
+          <p:cNvSpPr/>
+          <p:nvPr/>
+        </p:nvSpPr>
+        <p:spPr>
+          <a:xfrm>
+            <a:off x="0" y="804672"/>
+            <a:ext cx="9144000" cy="27432"/>
+          </a:xfrm>
+          <a:prstGeom prst="rect">
+            <a:avLst/>
+          </a:prstGeom>
+          <a:solidFill>
+            <a:srgbClr val="E5E2DC"/>
+          </a:solidFill>
+          <a:ln/>
+        </p:spPr>
+      </p:sp>
+      <p:sp>
+        <p:nvSpPr>
+          <p:cNvPr id="4" name="Shape 2"/>
+          <p:cNvSpPr/>
+          <p:nvPr/>
+        </p:nvSpPr>
+        <p:spPr>
+          <a:xfrm>
+            <a:off x="548640" y="201168"/>
+            <a:ext cx="54864" cy="420624"/>
           </a:xfrm>
           <a:prstGeom prst="rect">
             <a:avLst/>
@@ -1444,14 +1803,14 @@
       </p:sp>
       <p:sp>
         <p:nvSpPr>
-          <p:cNvPr id="3" name="Text 1"/>
-          <p:cNvSpPr/>
-          <p:nvPr/>
-        </p:nvSpPr>
-        <p:spPr>
-          <a:xfrm>
-            <a:off x="7772400" y="4709160"/>
-            <a:ext cx="1097280" cy="320040"/>
+          <p:cNvPr id="5" name="Text 3"/>
+          <p:cNvSpPr/>
+          <p:nvPr/>
+        </p:nvSpPr>
+        <p:spPr>
+          <a:xfrm>
+            <a:off x="777240" y="137160"/>
+            <a:ext cx="7772400" cy="548640"/>
           </a:xfrm>
           <a:prstGeom prst="rect">
             <a:avLst/>
@@ -1460,37 +1819,37 @@
           <a:ln/>
         </p:spPr>
         <p:txBody>
-          <a:bodyPr wrap="square" rtlCol="0" anchor="ctr"/>
-          <a:lstStyle/>
-          <a:p>
-            <a:pPr algn="r" indent="0" marL="0">
+          <a:bodyPr wrap="square" lIns="0" tIns="0" rIns="0" bIns="0" rtlCol="0" anchor="ctr"/>
+          <a:lstStyle/>
+          <a:p>
+            <a:pPr indent="0" marL="0">
               <a:buNone/>
             </a:pPr>
             <a:r>
-              <a:rPr lang="en-US" sz="900" dirty="0">
-                <a:solidFill>
-                  <a:srgbClr val="6B6660"/>
-                </a:solidFill>
-                <a:latin typeface="Calibri" pitchFamily="34" charset="0"/>
-                <a:ea typeface="Calibri" pitchFamily="34" charset="-122"/>
-                <a:cs typeface="Calibri" pitchFamily="34" charset="-120"/>
-              </a:rPr>
-              <a:t>2 / 5</a:t>
-            </a:r>
-            <a:endParaRPr lang="en-US" sz="900" dirty="0"/>
-          </a:p>
-        </p:txBody>
-      </p:sp>
-      <p:sp>
-        <p:nvSpPr>
-          <p:cNvPr id="4" name="Shape 2"/>
-          <p:cNvSpPr/>
-          <p:nvPr/>
-        </p:nvSpPr>
-        <p:spPr>
-          <a:xfrm>
-            <a:off x="1371600" y="914400"/>
-            <a:ext cx="6400800" cy="3200400"/>
+              <a:rPr lang="en-US" sz="2000" b="1" dirty="0">
+                <a:solidFill>
+                  <a:srgbClr val="1B2A4A"/>
+                </a:solidFill>
+                <a:latin typeface="Georgia" pitchFamily="34" charset="0"/>
+                <a:ea typeface="Georgia" pitchFamily="34" charset="-122"/>
+                <a:cs typeface="Georgia" pitchFamily="34" charset="-120"/>
+              </a:rPr>
+              <a:t>Key Vocabulary</a:t>
+            </a:r>
+            <a:endParaRPr lang="en-US" sz="2000" dirty="0"/>
+          </a:p>
+        </p:txBody>
+      </p:sp>
+      <p:sp>
+        <p:nvSpPr>
+          <p:cNvPr id="6" name="Shape 4"/>
+          <p:cNvSpPr/>
+          <p:nvPr/>
+        </p:nvSpPr>
+        <p:spPr>
+          <a:xfrm>
+            <a:off x="731520" y="1051560"/>
+            <a:ext cx="3657600" cy="658368"/>
           </a:xfrm>
           <a:prstGeom prst="rect">
             <a:avLst/>
@@ -1498,12 +1857,7 @@
           <a:solidFill>
             <a:srgbClr val="FFFFFF"/>
           </a:solidFill>
-          <a:ln w="12700">
-            <a:solidFill>
-              <a:srgbClr val="E5E2DC"/>
-            </a:solidFill>
-            <a:prstDash val="solid"/>
-          </a:ln>
+          <a:ln/>
           <a:effectLst>
             <a:outerShdw sx="100000" sy="100000" kx="0" ky="0" algn="bl" rotWithShape="0" blurRad="50800" dist="25400" dir="8100000">
               <a:srgbClr val="000000">
@@ -1515,14 +1869,14 @@
       </p:sp>
       <p:sp>
         <p:nvSpPr>
-          <p:cNvPr id="5" name="Shape 3"/>
-          <p:cNvSpPr/>
-          <p:nvPr/>
-        </p:nvSpPr>
-        <p:spPr>
-          <a:xfrm>
-            <a:off x="1371600" y="914400"/>
-            <a:ext cx="91440" cy="3200400"/>
+          <p:cNvPr id="7" name="Shape 5"/>
+          <p:cNvSpPr/>
+          <p:nvPr/>
+        </p:nvSpPr>
+        <p:spPr>
+          <a:xfrm>
+            <a:off x="731520" y="1051560"/>
+            <a:ext cx="54864" cy="658368"/>
           </a:xfrm>
           <a:prstGeom prst="rect">
             <a:avLst/>
@@ -1535,14 +1889,14 @@
       </p:sp>
       <p:sp>
         <p:nvSpPr>
-          <p:cNvPr id="6" name="Text 4"/>
-          <p:cNvSpPr/>
-          <p:nvPr/>
-        </p:nvSpPr>
-        <p:spPr>
-          <a:xfrm>
-            <a:off x="1828800" y="1097280"/>
-            <a:ext cx="5669280" cy="640080"/>
+          <p:cNvPr id="8" name="Text 6"/>
+          <p:cNvSpPr/>
+          <p:nvPr/>
+        </p:nvSpPr>
+        <p:spPr>
+          <a:xfrm>
+            <a:off x="914400" y="1051560"/>
+            <a:ext cx="1463040" cy="658368"/>
           </a:xfrm>
           <a:prstGeom prst="rect">
             <a:avLst/>
@@ -1551,14 +1905,14 @@
           <a:ln/>
         </p:spPr>
         <p:txBody>
-          <a:bodyPr wrap="square" rtlCol="0" anchor="ctr"/>
+          <a:bodyPr wrap="square" lIns="0" tIns="0" rIns="0" bIns="0" rtlCol="0" anchor="ctr"/>
           <a:lstStyle/>
           <a:p>
             <a:pPr indent="0" marL="0">
               <a:buNone/>
             </a:pPr>
             <a:r>
-              <a:rPr lang="en-US" sz="2400" b="1" dirty="0">
+              <a:rPr lang="en-US" sz="1300" b="1" dirty="0">
                 <a:solidFill>
                   <a:srgbClr val="1B2A4A"/>
                 </a:solidFill>
@@ -1566,22 +1920,22 @@
                 <a:ea typeface="Georgia" pitchFamily="34" charset="-122"/>
                 <a:cs typeface="Georgia" pitchFamily="34" charset="-120"/>
               </a:rPr>
-              <a:t>Everything is Made of Particles</a:t>
-            </a:r>
-            <a:endParaRPr lang="en-US" sz="2400" dirty="0"/>
-          </a:p>
-        </p:txBody>
-      </p:sp>
-      <p:sp>
-        <p:nvSpPr>
-          <p:cNvPr id="7" name="Text 5"/>
-          <p:cNvSpPr/>
-          <p:nvPr/>
-        </p:nvSpPr>
-        <p:spPr>
-          <a:xfrm>
-            <a:off x="1828800" y="1828800"/>
-            <a:ext cx="5669280" cy="2011680"/>
+              <a:t>Particle</a:t>
+            </a:r>
+            <a:endParaRPr lang="en-US" sz="1300" dirty="0"/>
+          </a:p>
+        </p:txBody>
+      </p:sp>
+      <p:sp>
+        <p:nvSpPr>
+          <p:cNvPr id="9" name="Text 7"/>
+          <p:cNvSpPr/>
+          <p:nvPr/>
+        </p:nvSpPr>
+        <p:spPr>
+          <a:xfrm>
+            <a:off x="2377440" y="1051560"/>
+            <a:ext cx="1920240" cy="658368"/>
           </a:xfrm>
           <a:prstGeom prst="rect">
             <a:avLst/>
@@ -1590,27 +1944,649 @@
           <a:ln/>
         </p:spPr>
         <p:txBody>
-          <a:bodyPr wrap="square" rtlCol="0" anchor="t"/>
+          <a:bodyPr wrap="square" lIns="0" tIns="0" rIns="0" bIns="0" rtlCol="0" anchor="ctr"/>
           <a:lstStyle/>
           <a:p>
             <a:pPr indent="0" marL="0">
-              <a:lnSpc>
-                <a:spcPct val="130000"/>
-              </a:lnSpc>
               <a:buNone/>
             </a:pPr>
             <a:r>
-              <a:rPr lang="en-US" sz="1500" dirty="0">
-                <a:solidFill>
-                  <a:srgbClr val="3D3A36"/>
+              <a:rPr lang="en-US" sz="1100" dirty="0">
+                <a:solidFill>
+                  <a:srgbClr val="6B6660"/>
                 </a:solidFill>
                 <a:latin typeface="Calibri" pitchFamily="34" charset="0"/>
                 <a:ea typeface="Calibri" pitchFamily="34" charset="-122"/>
                 <a:cs typeface="Calibri" pitchFamily="34" charset="-120"/>
               </a:rPr>
-              <a:t>All matter is made up of tiny particles too small to see. These particles are always moving. The particle model helps us explain the properties of solids, liquids, and gases — including why ice floats on water and why you can smell perfume across a room.</a:t>
-            </a:r>
-            <a:endParaRPr lang="en-US" sz="1500" dirty="0"/>
+              <a:t>Tiny piece of matter (atom or molecule)</a:t>
+            </a:r>
+            <a:endParaRPr lang="en-US" sz="1100" dirty="0"/>
+          </a:p>
+        </p:txBody>
+      </p:sp>
+      <p:sp>
+        <p:nvSpPr>
+          <p:cNvPr id="10" name="Shape 8"/>
+          <p:cNvSpPr/>
+          <p:nvPr/>
+        </p:nvSpPr>
+        <p:spPr>
+          <a:xfrm>
+            <a:off x="4754880" y="1051560"/>
+            <a:ext cx="3657600" cy="658368"/>
+          </a:xfrm>
+          <a:prstGeom prst="rect">
+            <a:avLst/>
+          </a:prstGeom>
+          <a:solidFill>
+            <a:srgbClr val="FFFFFF"/>
+          </a:solidFill>
+          <a:ln/>
+          <a:effectLst>
+            <a:outerShdw sx="100000" sy="100000" kx="0" ky="0" algn="bl" rotWithShape="0" blurRad="50800" dist="25400" dir="8100000">
+              <a:srgbClr val="000000">
+                <a:alpha val="10000"/>
+              </a:srgbClr>
+            </a:outerShdw>
+          </a:effectLst>
+        </p:spPr>
+      </p:sp>
+      <p:sp>
+        <p:nvSpPr>
+          <p:cNvPr id="11" name="Shape 9"/>
+          <p:cNvSpPr/>
+          <p:nvPr/>
+        </p:nvSpPr>
+        <p:spPr>
+          <a:xfrm>
+            <a:off x="4754880" y="1051560"/>
+            <a:ext cx="54864" cy="658368"/>
+          </a:xfrm>
+          <a:prstGeom prst="rect">
+            <a:avLst/>
+          </a:prstGeom>
+          <a:solidFill>
+            <a:srgbClr val="2A9D8F"/>
+          </a:solidFill>
+          <a:ln/>
+        </p:spPr>
+      </p:sp>
+      <p:sp>
+        <p:nvSpPr>
+          <p:cNvPr id="12" name="Text 10"/>
+          <p:cNvSpPr/>
+          <p:nvPr/>
+        </p:nvSpPr>
+        <p:spPr>
+          <a:xfrm>
+            <a:off x="4937760" y="1051560"/>
+            <a:ext cx="1463040" cy="658368"/>
+          </a:xfrm>
+          <a:prstGeom prst="rect">
+            <a:avLst/>
+          </a:prstGeom>
+          <a:noFill/>
+          <a:ln/>
+        </p:spPr>
+        <p:txBody>
+          <a:bodyPr wrap="square" lIns="0" tIns="0" rIns="0" bIns="0" rtlCol="0" anchor="ctr"/>
+          <a:lstStyle/>
+          <a:p>
+            <a:pPr indent="0" marL="0">
+              <a:buNone/>
+            </a:pPr>
+            <a:r>
+              <a:rPr lang="en-US" sz="1300" b="1" dirty="0">
+                <a:solidFill>
+                  <a:srgbClr val="1B2A4A"/>
+                </a:solidFill>
+                <a:latin typeface="Georgia" pitchFamily="34" charset="0"/>
+                <a:ea typeface="Georgia" pitchFamily="34" charset="-122"/>
+                <a:cs typeface="Georgia" pitchFamily="34" charset="-120"/>
+              </a:rPr>
+              <a:t>Matter</a:t>
+            </a:r>
+            <a:endParaRPr lang="en-US" sz="1300" dirty="0"/>
+          </a:p>
+        </p:txBody>
+      </p:sp>
+      <p:sp>
+        <p:nvSpPr>
+          <p:cNvPr id="13" name="Text 11"/>
+          <p:cNvSpPr/>
+          <p:nvPr/>
+        </p:nvSpPr>
+        <p:spPr>
+          <a:xfrm>
+            <a:off x="6400800" y="1051560"/>
+            <a:ext cx="1920240" cy="658368"/>
+          </a:xfrm>
+          <a:prstGeom prst="rect">
+            <a:avLst/>
+          </a:prstGeom>
+          <a:noFill/>
+          <a:ln/>
+        </p:spPr>
+        <p:txBody>
+          <a:bodyPr wrap="square" lIns="0" tIns="0" rIns="0" bIns="0" rtlCol="0" anchor="ctr"/>
+          <a:lstStyle/>
+          <a:p>
+            <a:pPr indent="0" marL="0">
+              <a:buNone/>
+            </a:pPr>
+            <a:r>
+              <a:rPr lang="en-US" sz="1100" dirty="0">
+                <a:solidFill>
+                  <a:srgbClr val="6B6660"/>
+                </a:solidFill>
+                <a:latin typeface="Calibri" pitchFamily="34" charset="0"/>
+                <a:ea typeface="Calibri" pitchFamily="34" charset="-122"/>
+                <a:cs typeface="Calibri" pitchFamily="34" charset="-120"/>
+              </a:rPr>
+              <a:t>Anything that has mass and takes up space</a:t>
+            </a:r>
+            <a:endParaRPr lang="en-US" sz="1100" dirty="0"/>
+          </a:p>
+        </p:txBody>
+      </p:sp>
+      <p:sp>
+        <p:nvSpPr>
+          <p:cNvPr id="14" name="Shape 12"/>
+          <p:cNvSpPr/>
+          <p:nvPr/>
+        </p:nvSpPr>
+        <p:spPr>
+          <a:xfrm>
+            <a:off x="731520" y="1819656"/>
+            <a:ext cx="3657600" cy="658368"/>
+          </a:xfrm>
+          <a:prstGeom prst="rect">
+            <a:avLst/>
+          </a:prstGeom>
+          <a:solidFill>
+            <a:srgbClr val="FFFFFF"/>
+          </a:solidFill>
+          <a:ln/>
+          <a:effectLst>
+            <a:outerShdw sx="100000" sy="100000" kx="0" ky="0" algn="bl" rotWithShape="0" blurRad="50800" dist="25400" dir="8100000">
+              <a:srgbClr val="000000">
+                <a:alpha val="10000"/>
+              </a:srgbClr>
+            </a:outerShdw>
+          </a:effectLst>
+        </p:spPr>
+      </p:sp>
+      <p:sp>
+        <p:nvSpPr>
+          <p:cNvPr id="15" name="Shape 13"/>
+          <p:cNvSpPr/>
+          <p:nvPr/>
+        </p:nvSpPr>
+        <p:spPr>
+          <a:xfrm>
+            <a:off x="731520" y="1819656"/>
+            <a:ext cx="54864" cy="658368"/>
+          </a:xfrm>
+          <a:prstGeom prst="rect">
+            <a:avLst/>
+          </a:prstGeom>
+          <a:solidFill>
+            <a:srgbClr val="2A9D8F"/>
+          </a:solidFill>
+          <a:ln/>
+        </p:spPr>
+      </p:sp>
+      <p:sp>
+        <p:nvSpPr>
+          <p:cNvPr id="16" name="Text 14"/>
+          <p:cNvSpPr/>
+          <p:nvPr/>
+        </p:nvSpPr>
+        <p:spPr>
+          <a:xfrm>
+            <a:off x="914400" y="1819656"/>
+            <a:ext cx="1463040" cy="658368"/>
+          </a:xfrm>
+          <a:prstGeom prst="rect">
+            <a:avLst/>
+          </a:prstGeom>
+          <a:noFill/>
+          <a:ln/>
+        </p:spPr>
+        <p:txBody>
+          <a:bodyPr wrap="square" lIns="0" tIns="0" rIns="0" bIns="0" rtlCol="0" anchor="ctr"/>
+          <a:lstStyle/>
+          <a:p>
+            <a:pPr indent="0" marL="0">
+              <a:buNone/>
+            </a:pPr>
+            <a:r>
+              <a:rPr lang="en-US" sz="1300" b="1" dirty="0">
+                <a:solidFill>
+                  <a:srgbClr val="1B2A4A"/>
+                </a:solidFill>
+                <a:latin typeface="Georgia" pitchFamily="34" charset="0"/>
+                <a:ea typeface="Georgia" pitchFamily="34" charset="-122"/>
+                <a:cs typeface="Georgia" pitchFamily="34" charset="-120"/>
+              </a:rPr>
+              <a:t>State</a:t>
+            </a:r>
+            <a:endParaRPr lang="en-US" sz="1300" dirty="0"/>
+          </a:p>
+        </p:txBody>
+      </p:sp>
+      <p:sp>
+        <p:nvSpPr>
+          <p:cNvPr id="17" name="Text 15"/>
+          <p:cNvSpPr/>
+          <p:nvPr/>
+        </p:nvSpPr>
+        <p:spPr>
+          <a:xfrm>
+            <a:off x="2377440" y="1819656"/>
+            <a:ext cx="1920240" cy="658368"/>
+          </a:xfrm>
+          <a:prstGeom prst="rect">
+            <a:avLst/>
+          </a:prstGeom>
+          <a:noFill/>
+          <a:ln/>
+        </p:spPr>
+        <p:txBody>
+          <a:bodyPr wrap="square" lIns="0" tIns="0" rIns="0" bIns="0" rtlCol="0" anchor="ctr"/>
+          <a:lstStyle/>
+          <a:p>
+            <a:pPr indent="0" marL="0">
+              <a:buNone/>
+            </a:pPr>
+            <a:r>
+              <a:rPr lang="en-US" sz="1100" dirty="0">
+                <a:solidFill>
+                  <a:srgbClr val="6B6660"/>
+                </a:solidFill>
+                <a:latin typeface="Calibri" pitchFamily="34" charset="0"/>
+                <a:ea typeface="Calibri" pitchFamily="34" charset="-122"/>
+                <a:cs typeface="Calibri" pitchFamily="34" charset="-120"/>
+              </a:rPr>
+              <a:t>Solid, liquid, or gas</a:t>
+            </a:r>
+            <a:endParaRPr lang="en-US" sz="1100" dirty="0"/>
+          </a:p>
+        </p:txBody>
+      </p:sp>
+      <p:sp>
+        <p:nvSpPr>
+          <p:cNvPr id="18" name="Shape 16"/>
+          <p:cNvSpPr/>
+          <p:nvPr/>
+        </p:nvSpPr>
+        <p:spPr>
+          <a:xfrm>
+            <a:off x="4754880" y="1819656"/>
+            <a:ext cx="3657600" cy="658368"/>
+          </a:xfrm>
+          <a:prstGeom prst="rect">
+            <a:avLst/>
+          </a:prstGeom>
+          <a:solidFill>
+            <a:srgbClr val="FFFFFF"/>
+          </a:solidFill>
+          <a:ln/>
+          <a:effectLst>
+            <a:outerShdw sx="100000" sy="100000" kx="0" ky="0" algn="bl" rotWithShape="0" blurRad="50800" dist="25400" dir="8100000">
+              <a:srgbClr val="000000">
+                <a:alpha val="10000"/>
+              </a:srgbClr>
+            </a:outerShdw>
+          </a:effectLst>
+        </p:spPr>
+      </p:sp>
+      <p:sp>
+        <p:nvSpPr>
+          <p:cNvPr id="19" name="Shape 17"/>
+          <p:cNvSpPr/>
+          <p:nvPr/>
+        </p:nvSpPr>
+        <p:spPr>
+          <a:xfrm>
+            <a:off x="4754880" y="1819656"/>
+            <a:ext cx="54864" cy="658368"/>
+          </a:xfrm>
+          <a:prstGeom prst="rect">
+            <a:avLst/>
+          </a:prstGeom>
+          <a:solidFill>
+            <a:srgbClr val="2A9D8F"/>
+          </a:solidFill>
+          <a:ln/>
+        </p:spPr>
+      </p:sp>
+      <p:sp>
+        <p:nvSpPr>
+          <p:cNvPr id="20" name="Text 18"/>
+          <p:cNvSpPr/>
+          <p:nvPr/>
+        </p:nvSpPr>
+        <p:spPr>
+          <a:xfrm>
+            <a:off x="4937760" y="1819656"/>
+            <a:ext cx="1463040" cy="658368"/>
+          </a:xfrm>
+          <a:prstGeom prst="rect">
+            <a:avLst/>
+          </a:prstGeom>
+          <a:noFill/>
+          <a:ln/>
+        </p:spPr>
+        <p:txBody>
+          <a:bodyPr wrap="square" lIns="0" tIns="0" rIns="0" bIns="0" rtlCol="0" anchor="ctr"/>
+          <a:lstStyle/>
+          <a:p>
+            <a:pPr indent="0" marL="0">
+              <a:buNone/>
+            </a:pPr>
+            <a:r>
+              <a:rPr lang="en-US" sz="1300" b="1" dirty="0">
+                <a:solidFill>
+                  <a:srgbClr val="1B2A4A"/>
+                </a:solidFill>
+                <a:latin typeface="Georgia" pitchFamily="34" charset="0"/>
+                <a:ea typeface="Georgia" pitchFamily="34" charset="-122"/>
+                <a:cs typeface="Georgia" pitchFamily="34" charset="-120"/>
+              </a:rPr>
+              <a:t>Arrangement</a:t>
+            </a:r>
+            <a:endParaRPr lang="en-US" sz="1300" dirty="0"/>
+          </a:p>
+        </p:txBody>
+      </p:sp>
+      <p:sp>
+        <p:nvSpPr>
+          <p:cNvPr id="21" name="Text 19"/>
+          <p:cNvSpPr/>
+          <p:nvPr/>
+        </p:nvSpPr>
+        <p:spPr>
+          <a:xfrm>
+            <a:off x="6400800" y="1819656"/>
+            <a:ext cx="1920240" cy="658368"/>
+          </a:xfrm>
+          <a:prstGeom prst="rect">
+            <a:avLst/>
+          </a:prstGeom>
+          <a:noFill/>
+          <a:ln/>
+        </p:spPr>
+        <p:txBody>
+          <a:bodyPr wrap="square" lIns="0" tIns="0" rIns="0" bIns="0" rtlCol="0" anchor="ctr"/>
+          <a:lstStyle/>
+          <a:p>
+            <a:pPr indent="0" marL="0">
+              <a:buNone/>
+            </a:pPr>
+            <a:r>
+              <a:rPr lang="en-US" sz="1100" dirty="0">
+                <a:solidFill>
+                  <a:srgbClr val="6B6660"/>
+                </a:solidFill>
+                <a:latin typeface="Calibri" pitchFamily="34" charset="0"/>
+                <a:ea typeface="Calibri" pitchFamily="34" charset="-122"/>
+                <a:cs typeface="Calibri" pitchFamily="34" charset="-120"/>
+              </a:rPr>
+              <a:t>How particles are organised</a:t>
+            </a:r>
+            <a:endParaRPr lang="en-US" sz="1100" dirty="0"/>
+          </a:p>
+        </p:txBody>
+      </p:sp>
+      <p:sp>
+        <p:nvSpPr>
+          <p:cNvPr id="22" name="Shape 20"/>
+          <p:cNvSpPr/>
+          <p:nvPr/>
+        </p:nvSpPr>
+        <p:spPr>
+          <a:xfrm>
+            <a:off x="731520" y="2587752"/>
+            <a:ext cx="3657600" cy="658368"/>
+          </a:xfrm>
+          <a:prstGeom prst="rect">
+            <a:avLst/>
+          </a:prstGeom>
+          <a:solidFill>
+            <a:srgbClr val="FFFFFF"/>
+          </a:solidFill>
+          <a:ln/>
+          <a:effectLst>
+            <a:outerShdw sx="100000" sy="100000" kx="0" ky="0" algn="bl" rotWithShape="0" blurRad="50800" dist="25400" dir="8100000">
+              <a:srgbClr val="000000">
+                <a:alpha val="10000"/>
+              </a:srgbClr>
+            </a:outerShdw>
+          </a:effectLst>
+        </p:spPr>
+      </p:sp>
+      <p:sp>
+        <p:nvSpPr>
+          <p:cNvPr id="23" name="Shape 21"/>
+          <p:cNvSpPr/>
+          <p:nvPr/>
+        </p:nvSpPr>
+        <p:spPr>
+          <a:xfrm>
+            <a:off x="731520" y="2587752"/>
+            <a:ext cx="54864" cy="658368"/>
+          </a:xfrm>
+          <a:prstGeom prst="rect">
+            <a:avLst/>
+          </a:prstGeom>
+          <a:solidFill>
+            <a:srgbClr val="2A9D8F"/>
+          </a:solidFill>
+          <a:ln/>
+        </p:spPr>
+      </p:sp>
+      <p:sp>
+        <p:nvSpPr>
+          <p:cNvPr id="24" name="Text 22"/>
+          <p:cNvSpPr/>
+          <p:nvPr/>
+        </p:nvSpPr>
+        <p:spPr>
+          <a:xfrm>
+            <a:off x="914400" y="2587752"/>
+            <a:ext cx="1463040" cy="658368"/>
+          </a:xfrm>
+          <a:prstGeom prst="rect">
+            <a:avLst/>
+          </a:prstGeom>
+          <a:noFill/>
+          <a:ln/>
+        </p:spPr>
+        <p:txBody>
+          <a:bodyPr wrap="square" lIns="0" tIns="0" rIns="0" bIns="0" rtlCol="0" anchor="ctr"/>
+          <a:lstStyle/>
+          <a:p>
+            <a:pPr indent="0" marL="0">
+              <a:buNone/>
+            </a:pPr>
+            <a:r>
+              <a:rPr lang="en-US" sz="1300" b="1" dirty="0">
+                <a:solidFill>
+                  <a:srgbClr val="1B2A4A"/>
+                </a:solidFill>
+                <a:latin typeface="Georgia" pitchFamily="34" charset="0"/>
+                <a:ea typeface="Georgia" pitchFamily="34" charset="-122"/>
+                <a:cs typeface="Georgia" pitchFamily="34" charset="-120"/>
+              </a:rPr>
+              <a:t>Energy</a:t>
+            </a:r>
+            <a:endParaRPr lang="en-US" sz="1300" dirty="0"/>
+          </a:p>
+        </p:txBody>
+      </p:sp>
+      <p:sp>
+        <p:nvSpPr>
+          <p:cNvPr id="25" name="Text 23"/>
+          <p:cNvSpPr/>
+          <p:nvPr/>
+        </p:nvSpPr>
+        <p:spPr>
+          <a:xfrm>
+            <a:off x="2377440" y="2587752"/>
+            <a:ext cx="1920240" cy="658368"/>
+          </a:xfrm>
+          <a:prstGeom prst="rect">
+            <a:avLst/>
+          </a:prstGeom>
+          <a:noFill/>
+          <a:ln/>
+        </p:spPr>
+        <p:txBody>
+          <a:bodyPr wrap="square" lIns="0" tIns="0" rIns="0" bIns="0" rtlCol="0" anchor="ctr"/>
+          <a:lstStyle/>
+          <a:p>
+            <a:pPr indent="0" marL="0">
+              <a:buNone/>
+            </a:pPr>
+            <a:r>
+              <a:rPr lang="en-US" sz="1100" dirty="0">
+                <a:solidFill>
+                  <a:srgbClr val="6B6660"/>
+                </a:solidFill>
+                <a:latin typeface="Calibri" pitchFamily="34" charset="0"/>
+                <a:ea typeface="Calibri" pitchFamily="34" charset="-122"/>
+                <a:cs typeface="Calibri" pitchFamily="34" charset="-120"/>
+              </a:rPr>
+              <a:t>What makes particles move</a:t>
+            </a:r>
+            <a:endParaRPr lang="en-US" sz="1100" dirty="0"/>
+          </a:p>
+        </p:txBody>
+      </p:sp>
+      <p:sp>
+        <p:nvSpPr>
+          <p:cNvPr id="26" name="Shape 24"/>
+          <p:cNvSpPr/>
+          <p:nvPr/>
+        </p:nvSpPr>
+        <p:spPr>
+          <a:xfrm>
+            <a:off x="4754880" y="2587752"/>
+            <a:ext cx="3657600" cy="658368"/>
+          </a:xfrm>
+          <a:prstGeom prst="rect">
+            <a:avLst/>
+          </a:prstGeom>
+          <a:solidFill>
+            <a:srgbClr val="FFFFFF"/>
+          </a:solidFill>
+          <a:ln/>
+          <a:effectLst>
+            <a:outerShdw sx="100000" sy="100000" kx="0" ky="0" algn="bl" rotWithShape="0" blurRad="50800" dist="25400" dir="8100000">
+              <a:srgbClr val="000000">
+                <a:alpha val="10000"/>
+              </a:srgbClr>
+            </a:outerShdw>
+          </a:effectLst>
+        </p:spPr>
+      </p:sp>
+      <p:sp>
+        <p:nvSpPr>
+          <p:cNvPr id="27" name="Shape 25"/>
+          <p:cNvSpPr/>
+          <p:nvPr/>
+        </p:nvSpPr>
+        <p:spPr>
+          <a:xfrm>
+            <a:off x="4754880" y="2587752"/>
+            <a:ext cx="54864" cy="658368"/>
+          </a:xfrm>
+          <a:prstGeom prst="rect">
+            <a:avLst/>
+          </a:prstGeom>
+          <a:solidFill>
+            <a:srgbClr val="2A9D8F"/>
+          </a:solidFill>
+          <a:ln/>
+        </p:spPr>
+      </p:sp>
+      <p:sp>
+        <p:nvSpPr>
+          <p:cNvPr id="28" name="Text 26"/>
+          <p:cNvSpPr/>
+          <p:nvPr/>
+        </p:nvSpPr>
+        <p:spPr>
+          <a:xfrm>
+            <a:off x="4937760" y="2587752"/>
+            <a:ext cx="1463040" cy="658368"/>
+          </a:xfrm>
+          <a:prstGeom prst="rect">
+            <a:avLst/>
+          </a:prstGeom>
+          <a:noFill/>
+          <a:ln/>
+        </p:spPr>
+        <p:txBody>
+          <a:bodyPr wrap="square" lIns="0" tIns="0" rIns="0" bIns="0" rtlCol="0" anchor="ctr"/>
+          <a:lstStyle/>
+          <a:p>
+            <a:pPr indent="0" marL="0">
+              <a:buNone/>
+            </a:pPr>
+            <a:r>
+              <a:rPr lang="en-US" sz="1300" b="1" dirty="0">
+                <a:solidFill>
+                  <a:srgbClr val="1B2A4A"/>
+                </a:solidFill>
+                <a:latin typeface="Georgia" pitchFamily="34" charset="0"/>
+                <a:ea typeface="Georgia" pitchFamily="34" charset="-122"/>
+                <a:cs typeface="Georgia" pitchFamily="34" charset="-120"/>
+              </a:rPr>
+              <a:t>Temperature</a:t>
+            </a:r>
+            <a:endParaRPr lang="en-US" sz="1300" dirty="0"/>
+          </a:p>
+        </p:txBody>
+      </p:sp>
+      <p:sp>
+        <p:nvSpPr>
+          <p:cNvPr id="29" name="Text 27"/>
+          <p:cNvSpPr/>
+          <p:nvPr/>
+        </p:nvSpPr>
+        <p:spPr>
+          <a:xfrm>
+            <a:off x="6400800" y="2587752"/>
+            <a:ext cx="1920240" cy="658368"/>
+          </a:xfrm>
+          <a:prstGeom prst="rect">
+            <a:avLst/>
+          </a:prstGeom>
+          <a:noFill/>
+          <a:ln/>
+        </p:spPr>
+        <p:txBody>
+          <a:bodyPr wrap="square" lIns="0" tIns="0" rIns="0" bIns="0" rtlCol="0" anchor="ctr"/>
+          <a:lstStyle/>
+          <a:p>
+            <a:pPr indent="0" marL="0">
+              <a:buNone/>
+            </a:pPr>
+            <a:r>
+              <a:rPr lang="en-US" sz="1100" dirty="0">
+                <a:solidFill>
+                  <a:srgbClr val="6B6660"/>
+                </a:solidFill>
+                <a:latin typeface="Calibri" pitchFamily="34" charset="0"/>
+                <a:ea typeface="Calibri" pitchFamily="34" charset="-122"/>
+                <a:cs typeface="Calibri" pitchFamily="34" charset="-120"/>
+              </a:rPr>
+              <a:t>A measure of particle energy</a:t>
+            </a:r>
+            <a:endParaRPr lang="en-US" sz="1100" dirty="0"/>
           </a:p>
         </p:txBody>
       </p:sp>
@@ -1655,7 +2631,47 @@
         <p:spPr>
           <a:xfrm>
             <a:off x="0" y="0"/>
-            <a:ext cx="9144000" cy="54864"/>
+            <a:ext cx="9144000" cy="822960"/>
+          </a:xfrm>
+          <a:prstGeom prst="rect">
+            <a:avLst/>
+          </a:prstGeom>
+          <a:solidFill>
+            <a:srgbClr val="FFFFFF"/>
+          </a:solidFill>
+          <a:ln/>
+        </p:spPr>
+      </p:sp>
+      <p:sp>
+        <p:nvSpPr>
+          <p:cNvPr id="3" name="Shape 1"/>
+          <p:cNvSpPr/>
+          <p:nvPr/>
+        </p:nvSpPr>
+        <p:spPr>
+          <a:xfrm>
+            <a:off x="0" y="804672"/>
+            <a:ext cx="9144000" cy="27432"/>
+          </a:xfrm>
+          <a:prstGeom prst="rect">
+            <a:avLst/>
+          </a:prstGeom>
+          <a:solidFill>
+            <a:srgbClr val="E5E2DC"/>
+          </a:solidFill>
+          <a:ln/>
+        </p:spPr>
+      </p:sp>
+      <p:sp>
+        <p:nvSpPr>
+          <p:cNvPr id="4" name="Shape 2"/>
+          <p:cNvSpPr/>
+          <p:nvPr/>
+        </p:nvSpPr>
+        <p:spPr>
+          <a:xfrm>
+            <a:off x="548640" y="201168"/>
+            <a:ext cx="54864" cy="420624"/>
           </a:xfrm>
           <a:prstGeom prst="rect">
             <a:avLst/>
@@ -1668,14 +2684,14 @@
       </p:sp>
       <p:sp>
         <p:nvSpPr>
-          <p:cNvPr id="3" name="Text 1"/>
-          <p:cNvSpPr/>
-          <p:nvPr/>
-        </p:nvSpPr>
-        <p:spPr>
-          <a:xfrm>
-            <a:off x="7772400" y="4709160"/>
-            <a:ext cx="1097280" cy="320040"/>
+          <p:cNvPr id="5" name="Text 3"/>
+          <p:cNvSpPr/>
+          <p:nvPr/>
+        </p:nvSpPr>
+        <p:spPr>
+          <a:xfrm>
+            <a:off x="777240" y="137160"/>
+            <a:ext cx="7772400" cy="548640"/>
           </a:xfrm>
           <a:prstGeom prst="rect">
             <a:avLst/>
@@ -1684,89 +2700,193 @@
           <a:ln/>
         </p:spPr>
         <p:txBody>
-          <a:bodyPr wrap="square" rtlCol="0" anchor="ctr"/>
-          <a:lstStyle/>
-          <a:p>
-            <a:pPr algn="r" indent="0" marL="0">
+          <a:bodyPr wrap="square" lIns="0" tIns="0" rIns="0" bIns="0" rtlCol="0" anchor="ctr"/>
+          <a:lstStyle/>
+          <a:p>
+            <a:pPr indent="0" marL="0">
               <a:buNone/>
             </a:pPr>
             <a:r>
-              <a:rPr lang="en-US" sz="900" dirty="0">
-                <a:solidFill>
-                  <a:srgbClr val="6B6660"/>
+              <a:rPr lang="en-US" sz="2000" b="1" dirty="0">
+                <a:solidFill>
+                  <a:srgbClr val="1B2A4A"/>
+                </a:solidFill>
+                <a:latin typeface="Georgia" pitchFamily="34" charset="0"/>
+                <a:ea typeface="Georgia" pitchFamily="34" charset="-122"/>
+                <a:cs typeface="Georgia" pitchFamily="34" charset="-120"/>
+              </a:rPr>
+              <a:t>The Key Ideas of the Particle Model</a:t>
+            </a:r>
+            <a:endParaRPr lang="en-US" sz="2000" dirty="0"/>
+          </a:p>
+        </p:txBody>
+      </p:sp>
+      <p:sp>
+        <p:nvSpPr>
+          <p:cNvPr id="6" name="Text 4"/>
+          <p:cNvSpPr/>
+          <p:nvPr/>
+        </p:nvSpPr>
+        <p:spPr>
+          <a:xfrm>
+            <a:off x="731520" y="1051560"/>
+            <a:ext cx="7680960" cy="3108960"/>
+          </a:xfrm>
+          <a:prstGeom prst="rect">
+            <a:avLst/>
+          </a:prstGeom>
+          <a:noFill/>
+          <a:ln/>
+        </p:spPr>
+        <p:txBody>
+          <a:bodyPr wrap="square" rtlCol="0" anchor="t"/>
+          <a:lstStyle/>
+          <a:p>
+            <a:pPr marL="342900" indent="-342900">
+              <a:spcAft>
+                <a:spcPts val="800"/>
+              </a:spcAft>
+              <a:buSzPct val="100000"/>
+              <a:buChar char="•"/>
+            </a:pPr>
+            <a:r>
+              <a:rPr lang="en-US" sz="1500" dirty="0">
+                <a:solidFill>
+                  <a:srgbClr val="3D3A36"/>
                 </a:solidFill>
                 <a:latin typeface="Calibri" pitchFamily="34" charset="0"/>
                 <a:ea typeface="Calibri" pitchFamily="34" charset="-122"/>
                 <a:cs typeface="Calibri" pitchFamily="34" charset="-120"/>
               </a:rPr>
-              <a:t>3 / 5</a:t>
-            </a:r>
-            <a:endParaRPr lang="en-US" sz="900" dirty="0"/>
-          </a:p>
-        </p:txBody>
-      </p:sp>
-      <p:sp>
-        <p:nvSpPr>
-          <p:cNvPr id="4" name="Text 2"/>
-          <p:cNvSpPr/>
-          <p:nvPr/>
-        </p:nvSpPr>
-        <p:spPr>
-          <a:xfrm>
-            <a:off x="457200" y="274320"/>
-            <a:ext cx="8229600" cy="640080"/>
-          </a:xfrm>
-          <a:prstGeom prst="rect">
-            <a:avLst/>
-          </a:prstGeom>
-          <a:noFill/>
-          <a:ln/>
-        </p:spPr>
-        <p:txBody>
-          <a:bodyPr wrap="square" rtlCol="0" anchor="ctr"/>
-          <a:lstStyle/>
-          <a:p>
-            <a:pPr indent="0" marL="0">
-              <a:buNone/>
-            </a:pPr>
-            <a:r>
-              <a:rPr lang="en-US" sz="2600" b="1" dirty="0">
-                <a:solidFill>
-                  <a:srgbClr val="1B2A4A"/>
-                </a:solidFill>
-                <a:latin typeface="Georgia" pitchFamily="34" charset="0"/>
-                <a:ea typeface="Georgia" pitchFamily="34" charset="-122"/>
-                <a:cs typeface="Georgia" pitchFamily="34" charset="-120"/>
-              </a:rPr>
-              <a:t>Particles in Each State</a:t>
-            </a:r>
-            <a:endParaRPr lang="en-US" sz="2600" dirty="0"/>
-          </a:p>
-        </p:txBody>
-      </p:sp>
-      <p:sp>
-        <p:nvSpPr>
-          <p:cNvPr id="5" name="Shape 3"/>
-          <p:cNvSpPr/>
-          <p:nvPr/>
-        </p:nvSpPr>
-        <p:spPr>
-          <a:xfrm>
-            <a:off x="457200" y="1188720"/>
-            <a:ext cx="2560320" cy="1828800"/>
-          </a:xfrm>
-          <a:prstGeom prst="rect">
-            <a:avLst/>
-          </a:prstGeom>
-          <a:solidFill>
-            <a:srgbClr val="FFFFFF"/>
-          </a:solidFill>
-          <a:ln w="12700">
-            <a:solidFill>
-              <a:srgbClr val="E5E2DC"/>
-            </a:solidFill>
-            <a:prstDash val="solid"/>
-          </a:ln>
+              <a:t>ALL matter is made of very tiny particles (atoms and molecules).</a:t>
+            </a:r>
+            <a:endParaRPr lang="en-US" sz="1500" dirty="0"/>
+          </a:p>
+          <a:p>
+            <a:pPr marL="342900" indent="-342900">
+              <a:spcAft>
+                <a:spcPts val="800"/>
+              </a:spcAft>
+              <a:buSzPct val="100000"/>
+              <a:buChar char="•"/>
+            </a:pPr>
+            <a:r>
+              <a:rPr lang="en-US" sz="1500" dirty="0">
+                <a:solidFill>
+                  <a:srgbClr val="3D3A36"/>
+                </a:solidFill>
+                <a:latin typeface="Calibri" pitchFamily="34" charset="0"/>
+                <a:ea typeface="Calibri" pitchFamily="34" charset="-122"/>
+                <a:cs typeface="Calibri" pitchFamily="34" charset="-120"/>
+              </a:rPr>
+              <a:t>Particles are always MOVING — they never stop.</a:t>
+            </a:r>
+            <a:endParaRPr lang="en-US" sz="1500" dirty="0"/>
+          </a:p>
+          <a:p>
+            <a:pPr marL="342900" indent="-342900">
+              <a:spcAft>
+                <a:spcPts val="800"/>
+              </a:spcAft>
+              <a:buSzPct val="100000"/>
+              <a:buChar char="•"/>
+            </a:pPr>
+            <a:r>
+              <a:rPr lang="en-US" sz="1500" dirty="0">
+                <a:solidFill>
+                  <a:srgbClr val="3D3A36"/>
+                </a:solidFill>
+                <a:latin typeface="Calibri" pitchFamily="34" charset="0"/>
+                <a:ea typeface="Calibri" pitchFamily="34" charset="-122"/>
+                <a:cs typeface="Calibri" pitchFamily="34" charset="-120"/>
+              </a:rPr>
+              <a:t>Higher temperature = particles move FASTER.</a:t>
+            </a:r>
+            <a:endParaRPr lang="en-US" sz="1500" dirty="0"/>
+          </a:p>
+          <a:p>
+            <a:pPr marL="342900" indent="-342900">
+              <a:spcAft>
+                <a:spcPts val="800"/>
+              </a:spcAft>
+              <a:buSzPct val="100000"/>
+              <a:buChar char="•"/>
+            </a:pPr>
+            <a:r>
+              <a:rPr lang="en-US" sz="1500" dirty="0">
+                <a:solidFill>
+                  <a:srgbClr val="3D3A36"/>
+                </a:solidFill>
+                <a:latin typeface="Calibri" pitchFamily="34" charset="0"/>
+                <a:ea typeface="Calibri" pitchFamily="34" charset="-122"/>
+                <a:cs typeface="Calibri" pitchFamily="34" charset="-120"/>
+              </a:rPr>
+              <a:t>Particles have SPACES between them.</a:t>
+            </a:r>
+            <a:endParaRPr lang="en-US" sz="1500" dirty="0"/>
+          </a:p>
+          <a:p>
+            <a:pPr marL="342900" indent="-342900">
+              <a:spcAft>
+                <a:spcPts val="800"/>
+              </a:spcAft>
+              <a:buSzPct val="100000"/>
+              <a:buChar char="•"/>
+            </a:pPr>
+            <a:r>
+              <a:rPr lang="en-US" sz="1500" dirty="0">
+                <a:solidFill>
+                  <a:srgbClr val="3D3A36"/>
+                </a:solidFill>
+                <a:latin typeface="Calibri" pitchFamily="34" charset="0"/>
+                <a:ea typeface="Calibri" pitchFamily="34" charset="-122"/>
+                <a:cs typeface="Calibri" pitchFamily="34" charset="-120"/>
+              </a:rPr>
+              <a:t>Particles attract each other — this is why solids hold their shape.</a:t>
+            </a:r>
+            <a:endParaRPr lang="en-US" sz="1500" dirty="0"/>
+          </a:p>
+          <a:p>
+            <a:pPr marL="342900" indent="-342900">
+              <a:spcAft>
+                <a:spcPts val="800"/>
+              </a:spcAft>
+              <a:buSzPct val="100000"/>
+              <a:buChar char="•"/>
+            </a:pPr>
+            <a:r>
+              <a:rPr lang="en-US" sz="1500" dirty="0">
+                <a:solidFill>
+                  <a:srgbClr val="3D3A36"/>
+                </a:solidFill>
+                <a:latin typeface="Calibri" pitchFamily="34" charset="0"/>
+                <a:ea typeface="Calibri" pitchFamily="34" charset="-122"/>
+                <a:cs typeface="Calibri" pitchFamily="34" charset="-120"/>
+              </a:rPr>
+              <a:t>We cannot see individual particles — they are far too small.</a:t>
+            </a:r>
+            <a:endParaRPr lang="en-US" sz="1500" dirty="0"/>
+          </a:p>
+        </p:txBody>
+      </p:sp>
+      <p:sp>
+        <p:nvSpPr>
+          <p:cNvPr id="7" name="Shape 5"/>
+          <p:cNvSpPr/>
+          <p:nvPr/>
+        </p:nvSpPr>
+        <p:spPr>
+          <a:xfrm>
+            <a:off x="731520" y="4206240"/>
+            <a:ext cx="7680960" cy="640080"/>
+          </a:xfrm>
+          <a:prstGeom prst="rect">
+            <a:avLst/>
+          </a:prstGeom>
+          <a:solidFill>
+            <a:srgbClr val="E8F5F3"/>
+          </a:solidFill>
+          <a:ln/>
           <a:effectLst>
             <a:outerShdw sx="100000" sy="100000" kx="0" ky="0" algn="bl" rotWithShape="0" blurRad="50800" dist="25400" dir="8100000">
               <a:srgbClr val="000000">
@@ -1778,34 +2898,14 @@
       </p:sp>
       <p:sp>
         <p:nvSpPr>
-          <p:cNvPr id="6" name="Shape 4"/>
-          <p:cNvSpPr/>
-          <p:nvPr/>
-        </p:nvSpPr>
-        <p:spPr>
-          <a:xfrm>
-            <a:off x="457200" y="1188720"/>
-            <a:ext cx="2560320" cy="54864"/>
-          </a:xfrm>
-          <a:prstGeom prst="rect">
-            <a:avLst/>
-          </a:prstGeom>
-          <a:solidFill>
-            <a:srgbClr val="2A9D8F"/>
-          </a:solidFill>
-          <a:ln/>
-        </p:spPr>
-      </p:sp>
-      <p:sp>
-        <p:nvSpPr>
-          <p:cNvPr id="7" name="Text 5"/>
-          <p:cNvSpPr/>
-          <p:nvPr/>
-        </p:nvSpPr>
-        <p:spPr>
-          <a:xfrm>
-            <a:off x="594360" y="1325880"/>
-            <a:ext cx="2286000" cy="365760"/>
+          <p:cNvPr id="8" name="Text 6"/>
+          <p:cNvSpPr/>
+          <p:nvPr/>
+        </p:nvSpPr>
+        <p:spPr>
+          <a:xfrm>
+            <a:off x="914400" y="4251960"/>
+            <a:ext cx="7315200" cy="548640"/>
           </a:xfrm>
           <a:prstGeom prst="rect">
             <a:avLst/>
@@ -1821,46 +2921,21 @@
               <a:buNone/>
             </a:pPr>
             <a:r>
-              <a:rPr lang="en-US" sz="1400" b="1" dirty="0">
-                <a:solidFill>
-                  <a:srgbClr val="1B2A4A"/>
+              <a:rPr lang="en-US" sz="1200" b="1" dirty="0">
+                <a:solidFill>
+                  <a:srgbClr val="2A9D8F"/>
                 </a:solidFill>
                 <a:latin typeface="Calibri" pitchFamily="34" charset="0"/>
                 <a:ea typeface="Calibri" pitchFamily="34" charset="-122"/>
                 <a:cs typeface="Calibri" pitchFamily="34" charset="-120"/>
               </a:rPr>
-              <a:t>Solid</a:t>
-            </a:r>
-            <a:endParaRPr lang="en-US" sz="1400" dirty="0"/>
-          </a:p>
-        </p:txBody>
-      </p:sp>
-      <p:sp>
-        <p:nvSpPr>
-          <p:cNvPr id="8" name="Text 6"/>
-          <p:cNvSpPr/>
-          <p:nvPr/>
-        </p:nvSpPr>
-        <p:spPr>
-          <a:xfrm>
-            <a:off x="594360" y="1737360"/>
-            <a:ext cx="2286000" cy="1097280"/>
-          </a:xfrm>
-          <a:prstGeom prst="rect">
-            <a:avLst/>
-          </a:prstGeom>
-          <a:noFill/>
-          <a:ln/>
-        </p:spPr>
-        <p:txBody>
-          <a:bodyPr wrap="square" rtlCol="0" anchor="t"/>
-          <a:lstStyle/>
-          <a:p>
+              <a:t>Key Idea: </a:t>
+            </a:r>
             <a:pPr indent="0" marL="0">
               <a:buNone/>
             </a:pPr>
             <a:r>
-              <a:rPr lang="en-US" sz="1100" dirty="0">
+              <a:rPr lang="en-US" sz="1200" i="1" dirty="0">
                 <a:solidFill>
                   <a:srgbClr val="3D3A36"/>
                 </a:solidFill>
@@ -1868,269 +2943,9 @@
                 <a:ea typeface="Calibri" pitchFamily="34" charset="-122"/>
                 <a:cs typeface="Calibri" pitchFamily="34" charset="-120"/>
               </a:rPr>
-              <a:t>Particles packed tightly in a regular pattern. They vibrate in fixed positions but cannot move around. Strong forces hold them together. Fixed shape and volume.</a:t>
-            </a:r>
-            <a:endParaRPr lang="en-US" sz="1100" dirty="0"/>
-          </a:p>
-        </p:txBody>
-      </p:sp>
-      <p:sp>
-        <p:nvSpPr>
-          <p:cNvPr id="9" name="Shape 7"/>
-          <p:cNvSpPr/>
-          <p:nvPr/>
-        </p:nvSpPr>
-        <p:spPr>
-          <a:xfrm>
-            <a:off x="3291840" y="1188720"/>
-            <a:ext cx="2560320" cy="1828800"/>
-          </a:xfrm>
-          <a:prstGeom prst="rect">
-            <a:avLst/>
-          </a:prstGeom>
-          <a:solidFill>
-            <a:srgbClr val="FFFFFF"/>
-          </a:solidFill>
-          <a:ln w="12700">
-            <a:solidFill>
-              <a:srgbClr val="E5E2DC"/>
-            </a:solidFill>
-            <a:prstDash val="solid"/>
-          </a:ln>
-          <a:effectLst>
-            <a:outerShdw sx="100000" sy="100000" kx="0" ky="0" algn="bl" rotWithShape="0" blurRad="50800" dist="25400" dir="8100000">
-              <a:srgbClr val="000000">
-                <a:alpha val="10000"/>
-              </a:srgbClr>
-            </a:outerShdw>
-          </a:effectLst>
-        </p:spPr>
-      </p:sp>
-      <p:sp>
-        <p:nvSpPr>
-          <p:cNvPr id="10" name="Shape 8"/>
-          <p:cNvSpPr/>
-          <p:nvPr/>
-        </p:nvSpPr>
-        <p:spPr>
-          <a:xfrm>
-            <a:off x="3291840" y="1188720"/>
-            <a:ext cx="2560320" cy="54864"/>
-          </a:xfrm>
-          <a:prstGeom prst="rect">
-            <a:avLst/>
-          </a:prstGeom>
-          <a:solidFill>
-            <a:srgbClr val="2A9D8F"/>
-          </a:solidFill>
-          <a:ln/>
-        </p:spPr>
-      </p:sp>
-      <p:sp>
-        <p:nvSpPr>
-          <p:cNvPr id="11" name="Text 9"/>
-          <p:cNvSpPr/>
-          <p:nvPr/>
-        </p:nvSpPr>
-        <p:spPr>
-          <a:xfrm>
-            <a:off x="3429000" y="1325880"/>
-            <a:ext cx="2286000" cy="365760"/>
-          </a:xfrm>
-          <a:prstGeom prst="rect">
-            <a:avLst/>
-          </a:prstGeom>
-          <a:noFill/>
-          <a:ln/>
-        </p:spPr>
-        <p:txBody>
-          <a:bodyPr wrap="square" rtlCol="0" anchor="ctr"/>
-          <a:lstStyle/>
-          <a:p>
-            <a:pPr indent="0" marL="0">
-              <a:buNone/>
-            </a:pPr>
-            <a:r>
-              <a:rPr lang="en-US" sz="1400" b="1" dirty="0">
-                <a:solidFill>
-                  <a:srgbClr val="1B2A4A"/>
-                </a:solidFill>
-                <a:latin typeface="Calibri" pitchFamily="34" charset="0"/>
-                <a:ea typeface="Calibri" pitchFamily="34" charset="-122"/>
-                <a:cs typeface="Calibri" pitchFamily="34" charset="-120"/>
-              </a:rPr>
-              <a:t>Liquid</a:t>
-            </a:r>
-            <a:endParaRPr lang="en-US" sz="1400" dirty="0"/>
-          </a:p>
-        </p:txBody>
-      </p:sp>
-      <p:sp>
-        <p:nvSpPr>
-          <p:cNvPr id="12" name="Text 10"/>
-          <p:cNvSpPr/>
-          <p:nvPr/>
-        </p:nvSpPr>
-        <p:spPr>
-          <a:xfrm>
-            <a:off x="3429000" y="1737360"/>
-            <a:ext cx="2286000" cy="1097280"/>
-          </a:xfrm>
-          <a:prstGeom prst="rect">
-            <a:avLst/>
-          </a:prstGeom>
-          <a:noFill/>
-          <a:ln/>
-        </p:spPr>
-        <p:txBody>
-          <a:bodyPr wrap="square" rtlCol="0" anchor="t"/>
-          <a:lstStyle/>
-          <a:p>
-            <a:pPr indent="0" marL="0">
-              <a:buNone/>
-            </a:pPr>
-            <a:r>
-              <a:rPr lang="en-US" sz="1100" dirty="0">
-                <a:solidFill>
-                  <a:srgbClr val="3D3A36"/>
-                </a:solidFill>
-                <a:latin typeface="Calibri" pitchFamily="34" charset="0"/>
-                <a:ea typeface="Calibri" pitchFamily="34" charset="-122"/>
-                <a:cs typeface="Calibri" pitchFamily="34" charset="-120"/>
-              </a:rPr>
-              <a:t>Particles close together but arranged randomly. They can slide past each other. Weaker forces than solids. Fixed volume but takes the shape of the container.</a:t>
-            </a:r>
-            <a:endParaRPr lang="en-US" sz="1100" dirty="0"/>
-          </a:p>
-        </p:txBody>
-      </p:sp>
-      <p:sp>
-        <p:nvSpPr>
-          <p:cNvPr id="13" name="Shape 11"/>
-          <p:cNvSpPr/>
-          <p:nvPr/>
-        </p:nvSpPr>
-        <p:spPr>
-          <a:xfrm>
-            <a:off x="6126480" y="1188720"/>
-            <a:ext cx="2560320" cy="1828800"/>
-          </a:xfrm>
-          <a:prstGeom prst="rect">
-            <a:avLst/>
-          </a:prstGeom>
-          <a:solidFill>
-            <a:srgbClr val="FFFFFF"/>
-          </a:solidFill>
-          <a:ln w="12700">
-            <a:solidFill>
-              <a:srgbClr val="E5E2DC"/>
-            </a:solidFill>
-            <a:prstDash val="solid"/>
-          </a:ln>
-          <a:effectLst>
-            <a:outerShdw sx="100000" sy="100000" kx="0" ky="0" algn="bl" rotWithShape="0" blurRad="50800" dist="25400" dir="8100000">
-              <a:srgbClr val="000000">
-                <a:alpha val="10000"/>
-              </a:srgbClr>
-            </a:outerShdw>
-          </a:effectLst>
-        </p:spPr>
-      </p:sp>
-      <p:sp>
-        <p:nvSpPr>
-          <p:cNvPr id="14" name="Shape 12"/>
-          <p:cNvSpPr/>
-          <p:nvPr/>
-        </p:nvSpPr>
-        <p:spPr>
-          <a:xfrm>
-            <a:off x="6126480" y="1188720"/>
-            <a:ext cx="2560320" cy="54864"/>
-          </a:xfrm>
-          <a:prstGeom prst="rect">
-            <a:avLst/>
-          </a:prstGeom>
-          <a:solidFill>
-            <a:srgbClr val="2A9D8F"/>
-          </a:solidFill>
-          <a:ln/>
-        </p:spPr>
-      </p:sp>
-      <p:sp>
-        <p:nvSpPr>
-          <p:cNvPr id="15" name="Text 13"/>
-          <p:cNvSpPr/>
-          <p:nvPr/>
-        </p:nvSpPr>
-        <p:spPr>
-          <a:xfrm>
-            <a:off x="6263640" y="1325880"/>
-            <a:ext cx="2286000" cy="365760"/>
-          </a:xfrm>
-          <a:prstGeom prst="rect">
-            <a:avLst/>
-          </a:prstGeom>
-          <a:noFill/>
-          <a:ln/>
-        </p:spPr>
-        <p:txBody>
-          <a:bodyPr wrap="square" rtlCol="0" anchor="ctr"/>
-          <a:lstStyle/>
-          <a:p>
-            <a:pPr indent="0" marL="0">
-              <a:buNone/>
-            </a:pPr>
-            <a:r>
-              <a:rPr lang="en-US" sz="1400" b="1" dirty="0">
-                <a:solidFill>
-                  <a:srgbClr val="1B2A4A"/>
-                </a:solidFill>
-                <a:latin typeface="Calibri" pitchFamily="34" charset="0"/>
-                <a:ea typeface="Calibri" pitchFamily="34" charset="-122"/>
-                <a:cs typeface="Calibri" pitchFamily="34" charset="-120"/>
-              </a:rPr>
-              <a:t>Gas</a:t>
-            </a:r>
-            <a:endParaRPr lang="en-US" sz="1400" dirty="0"/>
-          </a:p>
-        </p:txBody>
-      </p:sp>
-      <p:sp>
-        <p:nvSpPr>
-          <p:cNvPr id="16" name="Text 14"/>
-          <p:cNvSpPr/>
-          <p:nvPr/>
-        </p:nvSpPr>
-        <p:spPr>
-          <a:xfrm>
-            <a:off x="6263640" y="1737360"/>
-            <a:ext cx="2286000" cy="1097280"/>
-          </a:xfrm>
-          <a:prstGeom prst="rect">
-            <a:avLst/>
-          </a:prstGeom>
-          <a:noFill/>
-          <a:ln/>
-        </p:spPr>
-        <p:txBody>
-          <a:bodyPr wrap="square" rtlCol="0" anchor="t"/>
-          <a:lstStyle/>
-          <a:p>
-            <a:pPr indent="0" marL="0">
-              <a:buNone/>
-            </a:pPr>
-            <a:r>
-              <a:rPr lang="en-US" sz="1100" dirty="0">
-                <a:solidFill>
-                  <a:srgbClr val="3D3A36"/>
-                </a:solidFill>
-                <a:latin typeface="Calibri" pitchFamily="34" charset="0"/>
-                <a:ea typeface="Calibri" pitchFamily="34" charset="-122"/>
-                <a:cs typeface="Calibri" pitchFamily="34" charset="-120"/>
-              </a:rPr>
-              <a:t>Particles far apart, moving quickly in all directions. Very weak forces between them. No fixed shape or volume — fills the entire container.</a:t>
-            </a:r>
-            <a:endParaRPr lang="en-US" sz="1100" dirty="0"/>
+              <a:t>The particle model explains WHY matter behaves the way it does.</a:t>
+            </a:r>
+            <a:endParaRPr lang="en-US" sz="1200" dirty="0"/>
           </a:p>
         </p:txBody>
       </p:sp>
@@ -2175,7 +2990,47 @@
         <p:spPr>
           <a:xfrm>
             <a:off x="0" y="0"/>
-            <a:ext cx="9144000" cy="54864"/>
+            <a:ext cx="9144000" cy="822960"/>
+          </a:xfrm>
+          <a:prstGeom prst="rect">
+            <a:avLst/>
+          </a:prstGeom>
+          <a:solidFill>
+            <a:srgbClr val="FFFFFF"/>
+          </a:solidFill>
+          <a:ln/>
+        </p:spPr>
+      </p:sp>
+      <p:sp>
+        <p:nvSpPr>
+          <p:cNvPr id="3" name="Shape 1"/>
+          <p:cNvSpPr/>
+          <p:nvPr/>
+        </p:nvSpPr>
+        <p:spPr>
+          <a:xfrm>
+            <a:off x="0" y="804672"/>
+            <a:ext cx="9144000" cy="27432"/>
+          </a:xfrm>
+          <a:prstGeom prst="rect">
+            <a:avLst/>
+          </a:prstGeom>
+          <a:solidFill>
+            <a:srgbClr val="E5E2DC"/>
+          </a:solidFill>
+          <a:ln/>
+        </p:spPr>
+      </p:sp>
+      <p:sp>
+        <p:nvSpPr>
+          <p:cNvPr id="4" name="Shape 2"/>
+          <p:cNvSpPr/>
+          <p:nvPr/>
+        </p:nvSpPr>
+        <p:spPr>
+          <a:xfrm>
+            <a:off x="548640" y="201168"/>
+            <a:ext cx="54864" cy="420624"/>
           </a:xfrm>
           <a:prstGeom prst="rect">
             <a:avLst/>
@@ -2188,14 +3043,14 @@
       </p:sp>
       <p:sp>
         <p:nvSpPr>
-          <p:cNvPr id="3" name="Text 1"/>
-          <p:cNvSpPr/>
-          <p:nvPr/>
-        </p:nvSpPr>
-        <p:spPr>
-          <a:xfrm>
-            <a:off x="7772400" y="4709160"/>
-            <a:ext cx="1097280" cy="320040"/>
+          <p:cNvPr id="5" name="Text 3"/>
+          <p:cNvSpPr/>
+          <p:nvPr/>
+        </p:nvSpPr>
+        <p:spPr>
+          <a:xfrm>
+            <a:off x="777240" y="137160"/>
+            <a:ext cx="7772400" cy="548640"/>
           </a:xfrm>
           <a:prstGeom prst="rect">
             <a:avLst/>
@@ -2204,53 +3059,14 @@
           <a:ln/>
         </p:spPr>
         <p:txBody>
-          <a:bodyPr wrap="square" rtlCol="0" anchor="ctr"/>
-          <a:lstStyle/>
-          <a:p>
-            <a:pPr algn="r" indent="0" marL="0">
-              <a:buNone/>
-            </a:pPr>
-            <a:r>
-              <a:rPr lang="en-US" sz="900" dirty="0">
-                <a:solidFill>
-                  <a:srgbClr val="6B6660"/>
-                </a:solidFill>
-                <a:latin typeface="Calibri" pitchFamily="34" charset="0"/>
-                <a:ea typeface="Calibri" pitchFamily="34" charset="-122"/>
-                <a:cs typeface="Calibri" pitchFamily="34" charset="-120"/>
-              </a:rPr>
-              <a:t>4 / 5</a:t>
-            </a:r>
-            <a:endParaRPr lang="en-US" sz="900" dirty="0"/>
-          </a:p>
-        </p:txBody>
-      </p:sp>
-      <p:sp>
-        <p:nvSpPr>
-          <p:cNvPr id="4" name="Text 2"/>
-          <p:cNvSpPr/>
-          <p:nvPr/>
-        </p:nvSpPr>
-        <p:spPr>
-          <a:xfrm>
-            <a:off x="457200" y="274320"/>
-            <a:ext cx="8229600" cy="640080"/>
-          </a:xfrm>
-          <a:prstGeom prst="rect">
-            <a:avLst/>
-          </a:prstGeom>
-          <a:noFill/>
-          <a:ln/>
-        </p:spPr>
-        <p:txBody>
-          <a:bodyPr wrap="square" rtlCol="0" anchor="ctr"/>
+          <a:bodyPr wrap="square" lIns="0" tIns="0" rIns="0" bIns="0" rtlCol="0" anchor="ctr"/>
           <a:lstStyle/>
           <a:p>
             <a:pPr indent="0" marL="0">
               <a:buNone/>
             </a:pPr>
             <a:r>
-              <a:rPr lang="en-US" sz="2600" b="1" dirty="0">
+              <a:rPr lang="en-US" sz="2000" b="1" dirty="0">
                 <a:solidFill>
                   <a:srgbClr val="1B2A4A"/>
                 </a:solidFill>
@@ -2258,136 +3074,9 @@
                 <a:ea typeface="Georgia" pitchFamily="34" charset="-122"/>
                 <a:cs typeface="Georgia" pitchFamily="34" charset="-120"/>
               </a:rPr>
-              <a:t>Particle Properties</a:t>
-            </a:r>
-            <a:endParaRPr lang="en-US" sz="2600" dirty="0"/>
-          </a:p>
-        </p:txBody>
-      </p:sp>
-      <p:sp>
-        <p:nvSpPr>
-          <p:cNvPr id="5" name="Text 3"/>
-          <p:cNvSpPr/>
-          <p:nvPr/>
-        </p:nvSpPr>
-        <p:spPr>
-          <a:xfrm>
-            <a:off x="457200" y="1188720"/>
-            <a:ext cx="3840480" cy="3474720"/>
-          </a:xfrm>
-          <a:prstGeom prst="rect">
-            <a:avLst/>
-          </a:prstGeom>
-          <a:noFill/>
-          <a:ln/>
-        </p:spPr>
-        <p:txBody>
-          <a:bodyPr wrap="square" rtlCol="0" anchor="t"/>
-          <a:lstStyle/>
-          <a:p>
-            <a:pPr marL="342900" indent="-342900">
-              <a:spcAft>
-                <a:spcPts val="600"/>
-              </a:spcAft>
-              <a:buSzPct val="100000"/>
-              <a:buChar char="•"/>
-            </a:pPr>
-            <a:r>
-              <a:rPr lang="en-US" sz="1400" dirty="0">
-                <a:solidFill>
-                  <a:srgbClr val="3D3A36"/>
-                </a:solidFill>
-                <a:latin typeface="Calibri" pitchFamily="34" charset="0"/>
-                <a:ea typeface="Calibri" pitchFamily="34" charset="-122"/>
-                <a:cs typeface="Calibri" pitchFamily="34" charset="-120"/>
-              </a:rPr>
-              <a:t>Particles in solids vibrate — they have kinetic energy</a:t>
-            </a:r>
-            <a:endParaRPr lang="en-US" sz="1400" dirty="0"/>
-          </a:p>
-          <a:p>
-            <a:pPr marL="342900" indent="-342900">
-              <a:spcAft>
-                <a:spcPts val="600"/>
-              </a:spcAft>
-              <a:buSzPct val="100000"/>
-              <a:buChar char="•"/>
-            </a:pPr>
-            <a:r>
-              <a:rPr lang="en-US" sz="1400" dirty="0">
-                <a:solidFill>
-                  <a:srgbClr val="3D3A36"/>
-                </a:solidFill>
-                <a:latin typeface="Calibri" pitchFamily="34" charset="0"/>
-                <a:ea typeface="Calibri" pitchFamily="34" charset="-122"/>
-                <a:cs typeface="Calibri" pitchFamily="34" charset="-120"/>
-              </a:rPr>
-              <a:t>Heating gives particles MORE energy — they move faster</a:t>
-            </a:r>
-            <a:endParaRPr lang="en-US" sz="1400" dirty="0"/>
-          </a:p>
-          <a:p>
-            <a:pPr marL="342900" indent="-342900">
-              <a:spcAft>
-                <a:spcPts val="600"/>
-              </a:spcAft>
-              <a:buSzPct val="100000"/>
-              <a:buChar char="•"/>
-            </a:pPr>
-            <a:r>
-              <a:rPr lang="en-US" sz="1400" dirty="0">
-                <a:solidFill>
-                  <a:srgbClr val="3D3A36"/>
-                </a:solidFill>
-                <a:latin typeface="Calibri" pitchFamily="34" charset="0"/>
-                <a:ea typeface="Calibri" pitchFamily="34" charset="-122"/>
-                <a:cs typeface="Calibri" pitchFamily="34" charset="-120"/>
-              </a:rPr>
-              <a:t>The higher the temperature, the faster the particles move</a:t>
-            </a:r>
-            <a:endParaRPr lang="en-US" sz="1400" dirty="0"/>
-          </a:p>
-          <a:p>
-            <a:pPr marL="342900" indent="-342900">
-              <a:spcAft>
-                <a:spcPts val="600"/>
-              </a:spcAft>
-              <a:buSzPct val="100000"/>
-              <a:buChar char="•"/>
-            </a:pPr>
-            <a:r>
-              <a:rPr lang="en-US" sz="1400" dirty="0">
-                <a:solidFill>
-                  <a:srgbClr val="3D3A36"/>
-                </a:solidFill>
-                <a:latin typeface="Calibri" pitchFamily="34" charset="0"/>
-                <a:ea typeface="Calibri" pitchFamily="34" charset="-122"/>
-                <a:cs typeface="Calibri" pitchFamily="34" charset="-120"/>
-              </a:rPr>
-              <a:t>Particles are too small to see, even with a microscope</a:t>
-            </a:r>
-            <a:endParaRPr lang="en-US" sz="1400" dirty="0"/>
-          </a:p>
-          <a:p>
-            <a:pPr marL="342900" indent="-342900">
-              <a:spcAft>
-                <a:spcPts val="600"/>
-              </a:spcAft>
-              <a:buSzPct val="100000"/>
-              <a:buChar char="•"/>
-            </a:pPr>
-            <a:r>
-              <a:rPr lang="en-US" sz="1400" dirty="0">
-                <a:solidFill>
-                  <a:srgbClr val="3D3A36"/>
-                </a:solidFill>
-                <a:latin typeface="Calibri" pitchFamily="34" charset="0"/>
-                <a:ea typeface="Calibri" pitchFamily="34" charset="-122"/>
-                <a:cs typeface="Calibri" pitchFamily="34" charset="-120"/>
-              </a:rPr>
-              <a:t>The spaces between gas particles are much larger than the particles themselves</a:t>
-            </a:r>
-            <a:endParaRPr lang="en-US" sz="1400" dirty="0"/>
+              <a:t>Particles in Three States</a:t>
+            </a:r>
+            <a:endParaRPr lang="en-US" sz="2000" dirty="0"/>
           </a:p>
         </p:txBody>
       </p:sp>
@@ -2399,8 +3088,8 @@
         </p:nvSpPr>
         <p:spPr>
           <a:xfrm>
-            <a:off x="4846320" y="1188720"/>
-            <a:ext cx="3840480" cy="3474720"/>
+            <a:off x="640080" y="1051560"/>
+            <a:ext cx="2468880" cy="3657600"/>
           </a:xfrm>
           <a:prstGeom prst="rect">
             <a:avLst/>
@@ -2408,12 +3097,7 @@
           <a:solidFill>
             <a:srgbClr val="FFFFFF"/>
           </a:solidFill>
-          <a:ln w="12700">
-            <a:solidFill>
-              <a:srgbClr val="E5E2DC"/>
-            </a:solidFill>
-            <a:prstDash val="solid"/>
-          </a:ln>
+          <a:ln/>
           <a:effectLst>
             <a:outerShdw sx="100000" sy="100000" kx="0" ky="0" algn="bl" rotWithShape="0" blurRad="50800" dist="25400" dir="8100000">
               <a:srgbClr val="000000">
@@ -2431,8 +3115,8 @@
         </p:nvSpPr>
         <p:spPr>
           <a:xfrm>
-            <a:off x="4846320" y="1188720"/>
-            <a:ext cx="3840480" cy="54864"/>
+            <a:off x="640080" y="1051560"/>
+            <a:ext cx="2468880" cy="54864"/>
           </a:xfrm>
           <a:prstGeom prst="rect">
             <a:avLst/>
@@ -2451,8 +3135,8 @@
         </p:nvSpPr>
         <p:spPr>
           <a:xfrm>
-            <a:off x="5120640" y="1371600"/>
-            <a:ext cx="3291840" cy="3108960"/>
+            <a:off x="777240" y="1234440"/>
+            <a:ext cx="2194560" cy="457200"/>
           </a:xfrm>
           <a:prstGeom prst="rect">
             <a:avLst/>
@@ -2461,136 +3145,577 @@
           <a:ln/>
         </p:spPr>
         <p:txBody>
+          <a:bodyPr wrap="square" rtlCol="0" anchor="ctr"/>
+          <a:lstStyle/>
+          <a:p>
+            <a:pPr algn="ctr" indent="0" marL="0">
+              <a:buNone/>
+            </a:pPr>
+            <a:r>
+              <a:rPr lang="en-US" sz="1400" b="1" dirty="0">
+                <a:solidFill>
+                  <a:srgbClr val="1B2A4A"/>
+                </a:solidFill>
+                <a:latin typeface="Georgia" pitchFamily="34" charset="0"/>
+                <a:ea typeface="Georgia" pitchFamily="34" charset="-122"/>
+                <a:cs typeface="Georgia" pitchFamily="34" charset="-120"/>
+              </a:rPr>
+              <a:t>Solid</a:t>
+            </a:r>
+            <a:endParaRPr lang="en-US" sz="1400" dirty="0"/>
+          </a:p>
+        </p:txBody>
+      </p:sp>
+      <p:sp>
+        <p:nvSpPr>
+          <p:cNvPr id="9" name="Text 7"/>
+          <p:cNvSpPr/>
+          <p:nvPr/>
+        </p:nvSpPr>
+        <p:spPr>
+          <a:xfrm>
+            <a:off x="777240" y="1737360"/>
+            <a:ext cx="2194560" cy="2834640"/>
+          </a:xfrm>
+          <a:prstGeom prst="rect">
+            <a:avLst/>
+          </a:prstGeom>
+          <a:noFill/>
+          <a:ln/>
+        </p:spPr>
+        <p:txBody>
           <a:bodyPr wrap="square" rtlCol="0" anchor="t"/>
           <a:lstStyle/>
           <a:p>
-            <a:pPr indent="0" marL="0">
+            <a:pPr marL="342900" indent="-342900">
               <a:spcAft>
                 <a:spcPts val="400"/>
               </a:spcAft>
-              <a:buNone/>
-            </a:pPr>
-            <a:r>
-              <a:rPr lang="en-US" sz="1600" b="1" dirty="0">
-                <a:solidFill>
-                  <a:srgbClr val="1B2A4A"/>
+              <a:buSzPct val="100000"/>
+              <a:buChar char="•"/>
+            </a:pPr>
+            <a:r>
+              <a:rPr lang="en-US" sz="1100" dirty="0">
+                <a:solidFill>
+                  <a:srgbClr val="6B6660"/>
                 </a:solidFill>
                 <a:latin typeface="Calibri" pitchFamily="34" charset="0"/>
                 <a:ea typeface="Calibri" pitchFamily="34" charset="-122"/>
                 <a:cs typeface="Calibri" pitchFamily="34" charset="-120"/>
               </a:rPr>
-              <a:t>Diffusion</a:t>
-            </a:r>
-            <a:endParaRPr lang="en-US" sz="1600" dirty="0"/>
-          </a:p>
-          <a:p>
-            <a:pPr indent="0" marL="0">
+              <a:t>Particles packed tightly together</a:t>
+            </a:r>
+            <a:endParaRPr lang="en-US" sz="1100" dirty="0"/>
+          </a:p>
+          <a:p>
+            <a:pPr marL="342900" indent="-342900">
               <a:spcAft>
                 <a:spcPts val="400"/>
               </a:spcAft>
-              <a:buNone/>
-            </a:pPr>
-            <a:endParaRPr lang="en-US" sz="1600" dirty="0"/>
-          </a:p>
-          <a:p>
-            <a:pPr indent="0" marL="0">
+              <a:buSzPct val="100000"/>
+              <a:buChar char="•"/>
+            </a:pPr>
+            <a:r>
+              <a:rPr lang="en-US" sz="1100" dirty="0">
+                <a:solidFill>
+                  <a:srgbClr val="6B6660"/>
+                </a:solidFill>
+                <a:latin typeface="Calibri" pitchFamily="34" charset="0"/>
+                <a:ea typeface="Calibri" pitchFamily="34" charset="-122"/>
+                <a:cs typeface="Calibri" pitchFamily="34" charset="-120"/>
+              </a:rPr>
+              <a:t>Vibrate in fixed positions</a:t>
+            </a:r>
+            <a:endParaRPr lang="en-US" sz="1100" dirty="0"/>
+          </a:p>
+          <a:p>
+            <a:pPr marL="342900" indent="-342900">
               <a:spcAft>
                 <a:spcPts val="400"/>
               </a:spcAft>
-              <a:buNone/>
-            </a:pPr>
-            <a:r>
-              <a:rPr lang="en-US" sz="1300" dirty="0">
-                <a:solidFill>
-                  <a:srgbClr val="3D3A36"/>
+              <a:buSzPct val="100000"/>
+              <a:buChar char="•"/>
+            </a:pPr>
+            <a:r>
+              <a:rPr lang="en-US" sz="1100" dirty="0">
+                <a:solidFill>
+                  <a:srgbClr val="6B6660"/>
                 </a:solidFill>
                 <a:latin typeface="Calibri" pitchFamily="34" charset="0"/>
                 <a:ea typeface="Calibri" pitchFamily="34" charset="-122"/>
                 <a:cs typeface="Calibri" pitchFamily="34" charset="-120"/>
               </a:rPr>
-              <a:t>Diffusion = particles spreading from high to low concentration</a:t>
-            </a:r>
-            <a:endParaRPr lang="en-US" sz="1600" dirty="0"/>
-          </a:p>
-          <a:p>
-            <a:pPr indent="0" marL="0">
+              <a:t>Strong forces between particles</a:t>
+            </a:r>
+            <a:endParaRPr lang="en-US" sz="1100" dirty="0"/>
+          </a:p>
+          <a:p>
+            <a:pPr marL="342900" indent="-342900">
               <a:spcAft>
                 <a:spcPts val="400"/>
               </a:spcAft>
-              <a:buNone/>
-            </a:pPr>
-            <a:r>
-              <a:rPr lang="en-US" sz="1300" dirty="0">
-                <a:solidFill>
-                  <a:srgbClr val="3D3A36"/>
+              <a:buSzPct val="100000"/>
+              <a:buChar char="•"/>
+            </a:pPr>
+            <a:r>
+              <a:rPr lang="en-US" sz="1100" dirty="0">
+                <a:solidFill>
+                  <a:srgbClr val="6B6660"/>
                 </a:solidFill>
                 <a:latin typeface="Calibri" pitchFamily="34" charset="0"/>
                 <a:ea typeface="Calibri" pitchFamily="34" charset="-122"/>
                 <a:cs typeface="Calibri" pitchFamily="34" charset="-120"/>
               </a:rPr>
-              <a:t>Example: smell of perfume spreads across a room</a:t>
-            </a:r>
-            <a:endParaRPr lang="en-US" sz="1600" dirty="0"/>
-          </a:p>
-          <a:p>
-            <a:pPr indent="0" marL="0">
+              <a:t>Fixed shape and volume</a:t>
+            </a:r>
+            <a:endParaRPr lang="en-US" sz="1100" dirty="0"/>
+          </a:p>
+          <a:p>
+            <a:pPr marL="342900" indent="-342900">
               <a:spcAft>
                 <a:spcPts val="400"/>
               </a:spcAft>
-              <a:buNone/>
-            </a:pPr>
-            <a:r>
-              <a:rPr lang="en-US" sz="1300" dirty="0">
-                <a:solidFill>
-                  <a:srgbClr val="3D3A36"/>
+              <a:buSzPct val="100000"/>
+              <a:buChar char="•"/>
+            </a:pPr>
+            <a:r>
+              <a:rPr lang="en-US" sz="1100" dirty="0">
+                <a:solidFill>
+                  <a:srgbClr val="6B6660"/>
                 </a:solidFill>
                 <a:latin typeface="Calibri" pitchFamily="34" charset="0"/>
                 <a:ea typeface="Calibri" pitchFamily="34" charset="-122"/>
                 <a:cs typeface="Calibri" pitchFamily="34" charset="-120"/>
               </a:rPr>
-              <a:t>Happens faster at higher temperatures (particles move faster)</a:t>
-            </a:r>
-            <a:endParaRPr lang="en-US" sz="1600" dirty="0"/>
-          </a:p>
-          <a:p>
-            <a:pPr indent="0" marL="0">
+              <a:t>Cannot be compressed</a:t>
+            </a:r>
+            <a:endParaRPr lang="en-US" sz="1100" dirty="0"/>
+          </a:p>
+        </p:txBody>
+      </p:sp>
+      <p:sp>
+        <p:nvSpPr>
+          <p:cNvPr id="10" name="Shape 8"/>
+          <p:cNvSpPr/>
+          <p:nvPr/>
+        </p:nvSpPr>
+        <p:spPr>
+          <a:xfrm>
+            <a:off x="3246120" y="1051560"/>
+            <a:ext cx="2468880" cy="3657600"/>
+          </a:xfrm>
+          <a:prstGeom prst="rect">
+            <a:avLst/>
+          </a:prstGeom>
+          <a:solidFill>
+            <a:srgbClr val="FFFFFF"/>
+          </a:solidFill>
+          <a:ln/>
+          <a:effectLst>
+            <a:outerShdw sx="100000" sy="100000" kx="0" ky="0" algn="bl" rotWithShape="0" blurRad="50800" dist="25400" dir="8100000">
+              <a:srgbClr val="000000">
+                <a:alpha val="10000"/>
+              </a:srgbClr>
+            </a:outerShdw>
+          </a:effectLst>
+        </p:spPr>
+      </p:sp>
+      <p:sp>
+        <p:nvSpPr>
+          <p:cNvPr id="11" name="Shape 9"/>
+          <p:cNvSpPr/>
+          <p:nvPr/>
+        </p:nvSpPr>
+        <p:spPr>
+          <a:xfrm>
+            <a:off x="3246120" y="1051560"/>
+            <a:ext cx="2468880" cy="54864"/>
+          </a:xfrm>
+          <a:prstGeom prst="rect">
+            <a:avLst/>
+          </a:prstGeom>
+          <a:solidFill>
+            <a:srgbClr val="E9C46A"/>
+          </a:solidFill>
+          <a:ln/>
+        </p:spPr>
+      </p:sp>
+      <p:sp>
+        <p:nvSpPr>
+          <p:cNvPr id="12" name="Text 10"/>
+          <p:cNvSpPr/>
+          <p:nvPr/>
+        </p:nvSpPr>
+        <p:spPr>
+          <a:xfrm>
+            <a:off x="3383280" y="1234440"/>
+            <a:ext cx="2194560" cy="457200"/>
+          </a:xfrm>
+          <a:prstGeom prst="rect">
+            <a:avLst/>
+          </a:prstGeom>
+          <a:noFill/>
+          <a:ln/>
+        </p:spPr>
+        <p:txBody>
+          <a:bodyPr wrap="square" rtlCol="0" anchor="ctr"/>
+          <a:lstStyle/>
+          <a:p>
+            <a:pPr algn="ctr" indent="0" marL="0">
+              <a:buNone/>
+            </a:pPr>
+            <a:r>
+              <a:rPr lang="en-US" sz="1400" b="1" dirty="0">
+                <a:solidFill>
+                  <a:srgbClr val="1B2A4A"/>
+                </a:solidFill>
+                <a:latin typeface="Georgia" pitchFamily="34" charset="0"/>
+                <a:ea typeface="Georgia" pitchFamily="34" charset="-122"/>
+                <a:cs typeface="Georgia" pitchFamily="34" charset="-120"/>
+              </a:rPr>
+              <a:t>Liquid</a:t>
+            </a:r>
+            <a:endParaRPr lang="en-US" sz="1400" dirty="0"/>
+          </a:p>
+        </p:txBody>
+      </p:sp>
+      <p:sp>
+        <p:nvSpPr>
+          <p:cNvPr id="13" name="Text 11"/>
+          <p:cNvSpPr/>
+          <p:nvPr/>
+        </p:nvSpPr>
+        <p:spPr>
+          <a:xfrm>
+            <a:off x="3383280" y="1737360"/>
+            <a:ext cx="2194560" cy="2834640"/>
+          </a:xfrm>
+          <a:prstGeom prst="rect">
+            <a:avLst/>
+          </a:prstGeom>
+          <a:noFill/>
+          <a:ln/>
+        </p:spPr>
+        <p:txBody>
+          <a:bodyPr wrap="square" rtlCol="0" anchor="t"/>
+          <a:lstStyle/>
+          <a:p>
+            <a:pPr marL="342900" indent="-342900">
               <a:spcAft>
                 <a:spcPts val="400"/>
               </a:spcAft>
-              <a:buNone/>
-            </a:pPr>
-            <a:r>
-              <a:rPr lang="en-US" sz="1300" dirty="0">
-                <a:solidFill>
-                  <a:srgbClr val="3D3A36"/>
+              <a:buSzPct val="100000"/>
+              <a:buChar char="•"/>
+            </a:pPr>
+            <a:r>
+              <a:rPr lang="en-US" sz="1100" dirty="0">
+                <a:solidFill>
+                  <a:srgbClr val="6B6660"/>
                 </a:solidFill>
                 <a:latin typeface="Calibri" pitchFamily="34" charset="0"/>
                 <a:ea typeface="Calibri" pitchFamily="34" charset="-122"/>
                 <a:cs typeface="Calibri" pitchFamily="34" charset="-120"/>
               </a:rPr>
-              <a:t>Happens in liquids and gases, NOT solids</a:t>
-            </a:r>
-            <a:endParaRPr lang="en-US" sz="1600" dirty="0"/>
-          </a:p>
-          <a:p>
-            <a:pPr indent="0" marL="0">
+              <a:t>Particles close but can slide past each other</a:t>
+            </a:r>
+            <a:endParaRPr lang="en-US" sz="1100" dirty="0"/>
+          </a:p>
+          <a:p>
+            <a:pPr marL="342900" indent="-342900">
               <a:spcAft>
                 <a:spcPts val="400"/>
               </a:spcAft>
-              <a:buNone/>
-            </a:pPr>
-            <a:r>
-              <a:rPr lang="en-US" sz="1300" dirty="0">
-                <a:solidFill>
-                  <a:srgbClr val="3D3A36"/>
+              <a:buSzPct val="100000"/>
+              <a:buChar char="•"/>
+            </a:pPr>
+            <a:r>
+              <a:rPr lang="en-US" sz="1100" dirty="0">
+                <a:solidFill>
+                  <a:srgbClr val="6B6660"/>
                 </a:solidFill>
                 <a:latin typeface="Calibri" pitchFamily="34" charset="0"/>
                 <a:ea typeface="Calibri" pitchFamily="34" charset="-122"/>
                 <a:cs typeface="Calibri" pitchFamily="34" charset="-120"/>
               </a:rPr>
-              <a:t>Evidence that particles are always moving randomly</a:t>
-            </a:r>
-            <a:endParaRPr lang="en-US" sz="1600" dirty="0"/>
+              <a:t>Move randomly</a:t>
+            </a:r>
+            <a:endParaRPr lang="en-US" sz="1100" dirty="0"/>
+          </a:p>
+          <a:p>
+            <a:pPr marL="342900" indent="-342900">
+              <a:spcAft>
+                <a:spcPts val="400"/>
+              </a:spcAft>
+              <a:buSzPct val="100000"/>
+              <a:buChar char="•"/>
+            </a:pPr>
+            <a:r>
+              <a:rPr lang="en-US" sz="1100" dirty="0">
+                <a:solidFill>
+                  <a:srgbClr val="6B6660"/>
+                </a:solidFill>
+                <a:latin typeface="Calibri" pitchFamily="34" charset="0"/>
+                <a:ea typeface="Calibri" pitchFamily="34" charset="-122"/>
+                <a:cs typeface="Calibri" pitchFamily="34" charset="-120"/>
+              </a:rPr>
+              <a:t>Weaker forces than solids</a:t>
+            </a:r>
+            <a:endParaRPr lang="en-US" sz="1100" dirty="0"/>
+          </a:p>
+          <a:p>
+            <a:pPr marL="342900" indent="-342900">
+              <a:spcAft>
+                <a:spcPts val="400"/>
+              </a:spcAft>
+              <a:buSzPct val="100000"/>
+              <a:buChar char="•"/>
+            </a:pPr>
+            <a:r>
+              <a:rPr lang="en-US" sz="1100" dirty="0">
+                <a:solidFill>
+                  <a:srgbClr val="6B6660"/>
+                </a:solidFill>
+                <a:latin typeface="Calibri" pitchFamily="34" charset="0"/>
+                <a:ea typeface="Calibri" pitchFamily="34" charset="-122"/>
+                <a:cs typeface="Calibri" pitchFamily="34" charset="-120"/>
+              </a:rPr>
+              <a:t>Fixed volume but takes shape of container</a:t>
+            </a:r>
+            <a:endParaRPr lang="en-US" sz="1100" dirty="0"/>
+          </a:p>
+          <a:p>
+            <a:pPr marL="342900" indent="-342900">
+              <a:spcAft>
+                <a:spcPts val="400"/>
+              </a:spcAft>
+              <a:buSzPct val="100000"/>
+              <a:buChar char="•"/>
+            </a:pPr>
+            <a:r>
+              <a:rPr lang="en-US" sz="1100" dirty="0">
+                <a:solidFill>
+                  <a:srgbClr val="6B6660"/>
+                </a:solidFill>
+                <a:latin typeface="Calibri" pitchFamily="34" charset="0"/>
+                <a:ea typeface="Calibri" pitchFamily="34" charset="-122"/>
+                <a:cs typeface="Calibri" pitchFamily="34" charset="-120"/>
+              </a:rPr>
+              <a:t>Cannot be compressed easily</a:t>
+            </a:r>
+            <a:endParaRPr lang="en-US" sz="1100" dirty="0"/>
+          </a:p>
+        </p:txBody>
+      </p:sp>
+      <p:sp>
+        <p:nvSpPr>
+          <p:cNvPr id="14" name="Shape 12"/>
+          <p:cNvSpPr/>
+          <p:nvPr/>
+        </p:nvSpPr>
+        <p:spPr>
+          <a:xfrm>
+            <a:off x="5852160" y="1051560"/>
+            <a:ext cx="2468880" cy="3657600"/>
+          </a:xfrm>
+          <a:prstGeom prst="rect">
+            <a:avLst/>
+          </a:prstGeom>
+          <a:solidFill>
+            <a:srgbClr val="FFFFFF"/>
+          </a:solidFill>
+          <a:ln/>
+          <a:effectLst>
+            <a:outerShdw sx="100000" sy="100000" kx="0" ky="0" algn="bl" rotWithShape="0" blurRad="50800" dist="25400" dir="8100000">
+              <a:srgbClr val="000000">
+                <a:alpha val="10000"/>
+              </a:srgbClr>
+            </a:outerShdw>
+          </a:effectLst>
+        </p:spPr>
+      </p:sp>
+      <p:sp>
+        <p:nvSpPr>
+          <p:cNvPr id="15" name="Shape 13"/>
+          <p:cNvSpPr/>
+          <p:nvPr/>
+        </p:nvSpPr>
+        <p:spPr>
+          <a:xfrm>
+            <a:off x="5852160" y="1051560"/>
+            <a:ext cx="2468880" cy="54864"/>
+          </a:xfrm>
+          <a:prstGeom prst="rect">
+            <a:avLst/>
+          </a:prstGeom>
+          <a:solidFill>
+            <a:srgbClr val="9B9690"/>
+          </a:solidFill>
+          <a:ln/>
+        </p:spPr>
+      </p:sp>
+      <p:sp>
+        <p:nvSpPr>
+          <p:cNvPr id="16" name="Text 14"/>
+          <p:cNvSpPr/>
+          <p:nvPr/>
+        </p:nvSpPr>
+        <p:spPr>
+          <a:xfrm>
+            <a:off x="5989320" y="1234440"/>
+            <a:ext cx="2194560" cy="457200"/>
+          </a:xfrm>
+          <a:prstGeom prst="rect">
+            <a:avLst/>
+          </a:prstGeom>
+          <a:noFill/>
+          <a:ln/>
+        </p:spPr>
+        <p:txBody>
+          <a:bodyPr wrap="square" rtlCol="0" anchor="ctr"/>
+          <a:lstStyle/>
+          <a:p>
+            <a:pPr algn="ctr" indent="0" marL="0">
+              <a:buNone/>
+            </a:pPr>
+            <a:r>
+              <a:rPr lang="en-US" sz="1400" b="1" dirty="0">
+                <a:solidFill>
+                  <a:srgbClr val="1B2A4A"/>
+                </a:solidFill>
+                <a:latin typeface="Georgia" pitchFamily="34" charset="0"/>
+                <a:ea typeface="Georgia" pitchFamily="34" charset="-122"/>
+                <a:cs typeface="Georgia" pitchFamily="34" charset="-120"/>
+              </a:rPr>
+              <a:t>Gas</a:t>
+            </a:r>
+            <a:endParaRPr lang="en-US" sz="1400" dirty="0"/>
+          </a:p>
+        </p:txBody>
+      </p:sp>
+      <p:sp>
+        <p:nvSpPr>
+          <p:cNvPr id="17" name="Text 15"/>
+          <p:cNvSpPr/>
+          <p:nvPr/>
+        </p:nvSpPr>
+        <p:spPr>
+          <a:xfrm>
+            <a:off x="5989320" y="1737360"/>
+            <a:ext cx="2194560" cy="2834640"/>
+          </a:xfrm>
+          <a:prstGeom prst="rect">
+            <a:avLst/>
+          </a:prstGeom>
+          <a:noFill/>
+          <a:ln/>
+        </p:spPr>
+        <p:txBody>
+          <a:bodyPr wrap="square" rtlCol="0" anchor="t"/>
+          <a:lstStyle/>
+          <a:p>
+            <a:pPr marL="342900" indent="-342900">
+              <a:spcAft>
+                <a:spcPts val="400"/>
+              </a:spcAft>
+              <a:buSzPct val="100000"/>
+              <a:buChar char="•"/>
+            </a:pPr>
+            <a:r>
+              <a:rPr lang="en-US" sz="1100" dirty="0">
+                <a:solidFill>
+                  <a:srgbClr val="6B6660"/>
+                </a:solidFill>
+                <a:latin typeface="Calibri" pitchFamily="34" charset="0"/>
+                <a:ea typeface="Calibri" pitchFamily="34" charset="-122"/>
+                <a:cs typeface="Calibri" pitchFamily="34" charset="-120"/>
+              </a:rPr>
+              <a:t>Particles spread far apart</a:t>
+            </a:r>
+            <a:endParaRPr lang="en-US" sz="1100" dirty="0"/>
+          </a:p>
+          <a:p>
+            <a:pPr marL="342900" indent="-342900">
+              <a:spcAft>
+                <a:spcPts val="400"/>
+              </a:spcAft>
+              <a:buSzPct val="100000"/>
+              <a:buChar char="•"/>
+            </a:pPr>
+            <a:r>
+              <a:rPr lang="en-US" sz="1100" dirty="0">
+                <a:solidFill>
+                  <a:srgbClr val="6B6660"/>
+                </a:solidFill>
+                <a:latin typeface="Calibri" pitchFamily="34" charset="0"/>
+                <a:ea typeface="Calibri" pitchFamily="34" charset="-122"/>
+                <a:cs typeface="Calibri" pitchFamily="34" charset="-120"/>
+              </a:rPr>
+              <a:t>Move fast in all directions</a:t>
+            </a:r>
+            <a:endParaRPr lang="en-US" sz="1100" dirty="0"/>
+          </a:p>
+          <a:p>
+            <a:pPr marL="342900" indent="-342900">
+              <a:spcAft>
+                <a:spcPts val="400"/>
+              </a:spcAft>
+              <a:buSzPct val="100000"/>
+              <a:buChar char="•"/>
+            </a:pPr>
+            <a:r>
+              <a:rPr lang="en-US" sz="1100" dirty="0">
+                <a:solidFill>
+                  <a:srgbClr val="6B6660"/>
+                </a:solidFill>
+                <a:latin typeface="Calibri" pitchFamily="34" charset="0"/>
+                <a:ea typeface="Calibri" pitchFamily="34" charset="-122"/>
+                <a:cs typeface="Calibri" pitchFamily="34" charset="-120"/>
+              </a:rPr>
+              <a:t>Very weak forces</a:t>
+            </a:r>
+            <a:endParaRPr lang="en-US" sz="1100" dirty="0"/>
+          </a:p>
+          <a:p>
+            <a:pPr marL="342900" indent="-342900">
+              <a:spcAft>
+                <a:spcPts val="400"/>
+              </a:spcAft>
+              <a:buSzPct val="100000"/>
+              <a:buChar char="•"/>
+            </a:pPr>
+            <a:r>
+              <a:rPr lang="en-US" sz="1100" dirty="0">
+                <a:solidFill>
+                  <a:srgbClr val="6B6660"/>
+                </a:solidFill>
+                <a:latin typeface="Calibri" pitchFamily="34" charset="0"/>
+                <a:ea typeface="Calibri" pitchFamily="34" charset="-122"/>
+                <a:cs typeface="Calibri" pitchFamily="34" charset="-120"/>
+              </a:rPr>
+              <a:t>No fixed shape or volume</a:t>
+            </a:r>
+            <a:endParaRPr lang="en-US" sz="1100" dirty="0"/>
+          </a:p>
+          <a:p>
+            <a:pPr marL="342900" indent="-342900">
+              <a:spcAft>
+                <a:spcPts val="400"/>
+              </a:spcAft>
+              <a:buSzPct val="100000"/>
+              <a:buChar char="•"/>
+            </a:pPr>
+            <a:r>
+              <a:rPr lang="en-US" sz="1100" dirty="0">
+                <a:solidFill>
+                  <a:srgbClr val="6B6660"/>
+                </a:solidFill>
+                <a:latin typeface="Calibri" pitchFamily="34" charset="0"/>
+                <a:ea typeface="Calibri" pitchFamily="34" charset="-122"/>
+                <a:cs typeface="Calibri" pitchFamily="34" charset="-120"/>
+              </a:rPr>
+              <a:t>Can be compressed easily</a:t>
+            </a:r>
+            <a:endParaRPr lang="en-US" sz="1100" dirty="0"/>
           </a:p>
         </p:txBody>
       </p:sp>
@@ -2608,7 +3733,7 @@
     <p:bg>
       <p:bgPr>
         <a:solidFill>
-          <a:srgbClr val="1B2A4A"/>
+          <a:srgbClr val="FAF8F5"/>
         </a:solidFill>
       </p:bgPr>
     </p:bg>
@@ -2635,27 +3760,67 @@
         <p:spPr>
           <a:xfrm>
             <a:off x="0" y="0"/>
-            <a:ext cx="109728" cy="5143500"/>
-          </a:xfrm>
-          <a:prstGeom prst="rect">
-            <a:avLst/>
-          </a:prstGeom>
-          <a:solidFill>
-            <a:srgbClr val="E9C46A"/>
-          </a:solidFill>
-          <a:ln/>
-        </p:spPr>
-      </p:sp>
-      <p:sp>
-        <p:nvSpPr>
-          <p:cNvPr id="3" name="Text 1"/>
-          <p:cNvSpPr/>
-          <p:nvPr/>
-        </p:nvSpPr>
-        <p:spPr>
-          <a:xfrm>
-            <a:off x="731520" y="457200"/>
-            <a:ext cx="7772400" cy="731520"/>
+            <a:ext cx="9144000" cy="822960"/>
+          </a:xfrm>
+          <a:prstGeom prst="rect">
+            <a:avLst/>
+          </a:prstGeom>
+          <a:solidFill>
+            <a:srgbClr val="FFFFFF"/>
+          </a:solidFill>
+          <a:ln/>
+        </p:spPr>
+      </p:sp>
+      <p:sp>
+        <p:nvSpPr>
+          <p:cNvPr id="3" name="Shape 1"/>
+          <p:cNvSpPr/>
+          <p:nvPr/>
+        </p:nvSpPr>
+        <p:spPr>
+          <a:xfrm>
+            <a:off x="0" y="804672"/>
+            <a:ext cx="9144000" cy="27432"/>
+          </a:xfrm>
+          <a:prstGeom prst="rect">
+            <a:avLst/>
+          </a:prstGeom>
+          <a:solidFill>
+            <a:srgbClr val="E5E2DC"/>
+          </a:solidFill>
+          <a:ln/>
+        </p:spPr>
+      </p:sp>
+      <p:sp>
+        <p:nvSpPr>
+          <p:cNvPr id="4" name="Shape 2"/>
+          <p:cNvSpPr/>
+          <p:nvPr/>
+        </p:nvSpPr>
+        <p:spPr>
+          <a:xfrm>
+            <a:off x="548640" y="201168"/>
+            <a:ext cx="54864" cy="420624"/>
+          </a:xfrm>
+          <a:prstGeom prst="rect">
+            <a:avLst/>
+          </a:prstGeom>
+          <a:solidFill>
+            <a:srgbClr val="2A9D8F"/>
+          </a:solidFill>
+          <a:ln/>
+        </p:spPr>
+      </p:sp>
+      <p:sp>
+        <p:nvSpPr>
+          <p:cNvPr id="5" name="Text 3"/>
+          <p:cNvSpPr/>
+          <p:nvPr/>
+        </p:nvSpPr>
+        <p:spPr>
+          <a:xfrm>
+            <a:off x="777240" y="137160"/>
+            <a:ext cx="7772400" cy="548640"/>
           </a:xfrm>
           <a:prstGeom prst="rect">
             <a:avLst/>
@@ -2664,37 +3829,123 @@
           <a:ln/>
         </p:spPr>
         <p:txBody>
-          <a:bodyPr wrap="square" rtlCol="0" anchor="ctr"/>
+          <a:bodyPr wrap="square" lIns="0" tIns="0" rIns="0" bIns="0" rtlCol="0" anchor="ctr"/>
           <a:lstStyle/>
           <a:p>
             <a:pPr indent="0" marL="0">
               <a:buNone/>
             </a:pPr>
             <a:r>
-              <a:rPr lang="en-US" sz="3200" b="1" dirty="0">
-                <a:solidFill>
-                  <a:srgbClr val="FFFFFF"/>
+              <a:rPr lang="en-US" sz="2000" b="1" dirty="0">
+                <a:solidFill>
+                  <a:srgbClr val="1B2A4A"/>
                 </a:solidFill>
                 <a:latin typeface="Georgia" pitchFamily="34" charset="0"/>
                 <a:ea typeface="Georgia" pitchFamily="34" charset="-122"/>
                 <a:cs typeface="Georgia" pitchFamily="34" charset="-120"/>
               </a:rPr>
-              <a:t>Key Takeaways</a:t>
-            </a:r>
-            <a:endParaRPr lang="en-US" sz="3200" dirty="0"/>
-          </a:p>
-        </p:txBody>
-      </p:sp>
-      <p:sp>
-        <p:nvSpPr>
-          <p:cNvPr id="4" name="Text 2"/>
-          <p:cNvSpPr/>
-          <p:nvPr/>
-        </p:nvSpPr>
-        <p:spPr>
-          <a:xfrm>
-            <a:off x="731520" y="1463040"/>
-            <a:ext cx="7772400" cy="3200400"/>
+              <a:t>What the Model Explains</a:t>
+            </a:r>
+            <a:endParaRPr lang="en-US" sz="2000" dirty="0"/>
+          </a:p>
+        </p:txBody>
+      </p:sp>
+      <p:sp>
+        <p:nvSpPr>
+          <p:cNvPr id="6" name="Shape 4"/>
+          <p:cNvSpPr/>
+          <p:nvPr/>
+        </p:nvSpPr>
+        <p:spPr>
+          <a:xfrm>
+            <a:off x="548640" y="1051560"/>
+            <a:ext cx="3840480" cy="3474720"/>
+          </a:xfrm>
+          <a:prstGeom prst="rect">
+            <a:avLst/>
+          </a:prstGeom>
+          <a:solidFill>
+            <a:srgbClr val="FFFFFF"/>
+          </a:solidFill>
+          <a:ln/>
+          <a:effectLst>
+            <a:outerShdw sx="100000" sy="100000" kx="0" ky="0" algn="bl" rotWithShape="0" blurRad="50800" dist="25400" dir="8100000">
+              <a:srgbClr val="000000">
+                <a:alpha val="10000"/>
+              </a:srgbClr>
+            </a:outerShdw>
+          </a:effectLst>
+        </p:spPr>
+      </p:sp>
+      <p:sp>
+        <p:nvSpPr>
+          <p:cNvPr id="7" name="Shape 5"/>
+          <p:cNvSpPr/>
+          <p:nvPr/>
+        </p:nvSpPr>
+        <p:spPr>
+          <a:xfrm>
+            <a:off x="548640" y="1051560"/>
+            <a:ext cx="3840480" cy="54864"/>
+          </a:xfrm>
+          <a:prstGeom prst="rect">
+            <a:avLst/>
+          </a:prstGeom>
+          <a:solidFill>
+            <a:srgbClr val="2A9D8F"/>
+          </a:solidFill>
+          <a:ln/>
+        </p:spPr>
+      </p:sp>
+      <p:sp>
+        <p:nvSpPr>
+          <p:cNvPr id="8" name="Text 6"/>
+          <p:cNvSpPr/>
+          <p:nvPr/>
+        </p:nvSpPr>
+        <p:spPr>
+          <a:xfrm>
+            <a:off x="777240" y="1188720"/>
+            <a:ext cx="3383280" cy="457200"/>
+          </a:xfrm>
+          <a:prstGeom prst="rect">
+            <a:avLst/>
+          </a:prstGeom>
+          <a:noFill/>
+          <a:ln/>
+        </p:spPr>
+        <p:txBody>
+          <a:bodyPr wrap="square" lIns="0" tIns="0" rIns="0" bIns="0" rtlCol="0" anchor="ctr"/>
+          <a:lstStyle/>
+          <a:p>
+            <a:pPr indent="0" marL="0">
+              <a:buNone/>
+            </a:pPr>
+            <a:r>
+              <a:rPr lang="en-US" sz="1500" b="1" dirty="0">
+                <a:solidFill>
+                  <a:srgbClr val="1B2A4A"/>
+                </a:solidFill>
+                <a:latin typeface="Georgia" pitchFamily="34" charset="0"/>
+                <a:ea typeface="Georgia" pitchFamily="34" charset="-122"/>
+                <a:cs typeface="Georgia" pitchFamily="34" charset="-120"/>
+              </a:rPr>
+              <a:t>Explains Well</a:t>
+            </a:r>
+            <a:endParaRPr lang="en-US" sz="1500" dirty="0"/>
+          </a:p>
+        </p:txBody>
+      </p:sp>
+      <p:sp>
+        <p:nvSpPr>
+          <p:cNvPr id="9" name="Text 7"/>
+          <p:cNvSpPr/>
+          <p:nvPr/>
+        </p:nvSpPr>
+        <p:spPr>
+          <a:xfrm>
+            <a:off x="777240" y="1691640"/>
+            <a:ext cx="3383280" cy="2651760"/>
           </a:xfrm>
           <a:prstGeom prst="rect">
             <a:avLst/>
@@ -2708,146 +3959,1506 @@
           <a:p>
             <a:pPr marL="342900" indent="-342900">
               <a:spcAft>
-                <a:spcPts val="1000"/>
+                <a:spcPts val="600"/>
               </a:spcAft>
               <a:buSzPct val="100000"/>
               <a:buChar char="•"/>
             </a:pPr>
             <a:r>
-              <a:rPr lang="en-US" sz="1500" dirty="0">
-                <a:solidFill>
-                  <a:srgbClr val="CADCFC"/>
+              <a:rPr lang="en-US" sz="1300" dirty="0">
+                <a:solidFill>
+                  <a:srgbClr val="3D3A36"/>
                 </a:solidFill>
                 <a:latin typeface="Calibri" pitchFamily="34" charset="0"/>
                 <a:ea typeface="Calibri" pitchFamily="34" charset="-122"/>
                 <a:cs typeface="Calibri" pitchFamily="34" charset="-120"/>
               </a:rPr>
-              <a:t>All matter is made of tiny, constantly moving particles</a:t>
-            </a:r>
-            <a:endParaRPr lang="en-US" sz="1500" dirty="0"/>
+              <a:t>Why solids hold their shape</a:t>
+            </a:r>
+            <a:endParaRPr lang="en-US" sz="1300" dirty="0"/>
           </a:p>
           <a:p>
             <a:pPr marL="342900" indent="-342900">
               <a:spcAft>
-                <a:spcPts val="1000"/>
+                <a:spcPts val="600"/>
               </a:spcAft>
               <a:buSzPct val="100000"/>
               <a:buChar char="•"/>
             </a:pPr>
             <a:r>
-              <a:rPr lang="en-US" sz="1500" dirty="0">
-                <a:solidFill>
-                  <a:srgbClr val="CADCFC"/>
+              <a:rPr lang="en-US" sz="1300" dirty="0">
+                <a:solidFill>
+                  <a:srgbClr val="3D3A36"/>
                 </a:solidFill>
                 <a:latin typeface="Calibri" pitchFamily="34" charset="0"/>
                 <a:ea typeface="Calibri" pitchFamily="34" charset="-122"/>
                 <a:cs typeface="Calibri" pitchFamily="34" charset="-120"/>
               </a:rPr>
-              <a:t>Solids: regular, vibrate in place. Liquids: close, slide past. Gases: far apart, fast</a:t>
-            </a:r>
-            <a:endParaRPr lang="en-US" sz="1500" dirty="0"/>
+              <a:t>Why liquids flow</a:t>
+            </a:r>
+            <a:endParaRPr lang="en-US" sz="1300" dirty="0"/>
           </a:p>
           <a:p>
             <a:pPr marL="342900" indent="-342900">
               <a:spcAft>
-                <a:spcPts val="1000"/>
+                <a:spcPts val="600"/>
               </a:spcAft>
               <a:buSzPct val="100000"/>
               <a:buChar char="•"/>
             </a:pPr>
             <a:r>
-              <a:rPr lang="en-US" sz="1500" dirty="0">
-                <a:solidFill>
-                  <a:srgbClr val="CADCFC"/>
+              <a:rPr lang="en-US" sz="1300" dirty="0">
+                <a:solidFill>
+                  <a:srgbClr val="3D3A36"/>
                 </a:solidFill>
                 <a:latin typeface="Calibri" pitchFamily="34" charset="0"/>
                 <a:ea typeface="Calibri" pitchFamily="34" charset="-122"/>
                 <a:cs typeface="Calibri" pitchFamily="34" charset="-120"/>
               </a:rPr>
-              <a:t>Heating increases particle energy and speed</a:t>
-            </a:r>
-            <a:endParaRPr lang="en-US" sz="1500" dirty="0"/>
+              <a:t>Why gases spread out</a:t>
+            </a:r>
+            <a:endParaRPr lang="en-US" sz="1300" dirty="0"/>
           </a:p>
           <a:p>
             <a:pPr marL="342900" indent="-342900">
               <a:spcAft>
-                <a:spcPts val="1000"/>
+                <a:spcPts val="600"/>
               </a:spcAft>
               <a:buSzPct val="100000"/>
               <a:buChar char="•"/>
             </a:pPr>
             <a:r>
-              <a:rPr lang="en-US" sz="1500" dirty="0">
-                <a:solidFill>
-                  <a:srgbClr val="CADCFC"/>
+              <a:rPr lang="en-US" sz="1300" dirty="0">
+                <a:solidFill>
+                  <a:srgbClr val="3D3A36"/>
                 </a:solidFill>
                 <a:latin typeface="Calibri" pitchFamily="34" charset="0"/>
                 <a:ea typeface="Calibri" pitchFamily="34" charset="-122"/>
                 <a:cs typeface="Calibri" pitchFamily="34" charset="-120"/>
               </a:rPr>
-              <a:t>Diffusion: particles spread from high to low concentration</a:t>
+              <a:t>Why heating makes things expand</a:t>
+            </a:r>
+            <a:endParaRPr lang="en-US" sz="1300" dirty="0"/>
+          </a:p>
+        </p:txBody>
+      </p:sp>
+      <p:sp>
+        <p:nvSpPr>
+          <p:cNvPr id="10" name="Shape 8"/>
+          <p:cNvSpPr/>
+          <p:nvPr/>
+        </p:nvSpPr>
+        <p:spPr>
+          <a:xfrm>
+            <a:off x="4754880" y="1051560"/>
+            <a:ext cx="3840480" cy="3474720"/>
+          </a:xfrm>
+          <a:prstGeom prst="rect">
+            <a:avLst/>
+          </a:prstGeom>
+          <a:solidFill>
+            <a:srgbClr val="FFFFFF"/>
+          </a:solidFill>
+          <a:ln/>
+          <a:effectLst>
+            <a:outerShdw sx="100000" sy="100000" kx="0" ky="0" algn="bl" rotWithShape="0" blurRad="50800" dist="25400" dir="8100000">
+              <a:srgbClr val="000000">
+                <a:alpha val="10000"/>
+              </a:srgbClr>
+            </a:outerShdw>
+          </a:effectLst>
+        </p:spPr>
+      </p:sp>
+      <p:sp>
+        <p:nvSpPr>
+          <p:cNvPr id="11" name="Shape 9"/>
+          <p:cNvSpPr/>
+          <p:nvPr/>
+        </p:nvSpPr>
+        <p:spPr>
+          <a:xfrm>
+            <a:off x="4754880" y="1051560"/>
+            <a:ext cx="3840480" cy="54864"/>
+          </a:xfrm>
+          <a:prstGeom prst="rect">
+            <a:avLst/>
+          </a:prstGeom>
+          <a:solidFill>
+            <a:srgbClr val="E9C46A"/>
+          </a:solidFill>
+          <a:ln/>
+        </p:spPr>
+      </p:sp>
+      <p:sp>
+        <p:nvSpPr>
+          <p:cNvPr id="12" name="Text 10"/>
+          <p:cNvSpPr/>
+          <p:nvPr/>
+        </p:nvSpPr>
+        <p:spPr>
+          <a:xfrm>
+            <a:off x="4983480" y="1188720"/>
+            <a:ext cx="3383280" cy="457200"/>
+          </a:xfrm>
+          <a:prstGeom prst="rect">
+            <a:avLst/>
+          </a:prstGeom>
+          <a:noFill/>
+          <a:ln/>
+        </p:spPr>
+        <p:txBody>
+          <a:bodyPr wrap="square" lIns="0" tIns="0" rIns="0" bIns="0" rtlCol="0" anchor="ctr"/>
+          <a:lstStyle/>
+          <a:p>
+            <a:pPr indent="0" marL="0">
+              <a:buNone/>
+            </a:pPr>
+            <a:r>
+              <a:rPr lang="en-US" sz="1500" b="1" dirty="0">
+                <a:solidFill>
+                  <a:srgbClr val="1B2A4A"/>
+                </a:solidFill>
+                <a:latin typeface="Georgia" pitchFamily="34" charset="0"/>
+                <a:ea typeface="Georgia" pitchFamily="34" charset="-122"/>
+                <a:cs typeface="Georgia" pitchFamily="34" charset="-120"/>
+              </a:rPr>
+              <a:t>Limitations</a:t>
             </a:r>
             <a:endParaRPr lang="en-US" sz="1500" dirty="0"/>
           </a:p>
+        </p:txBody>
+      </p:sp>
+      <p:sp>
+        <p:nvSpPr>
+          <p:cNvPr id="13" name="Text 11"/>
+          <p:cNvSpPr/>
+          <p:nvPr/>
+        </p:nvSpPr>
+        <p:spPr>
+          <a:xfrm>
+            <a:off x="4983480" y="1691640"/>
+            <a:ext cx="3383280" cy="2651760"/>
+          </a:xfrm>
+          <a:prstGeom prst="rect">
+            <a:avLst/>
+          </a:prstGeom>
+          <a:noFill/>
+          <a:ln/>
+        </p:spPr>
+        <p:txBody>
+          <a:bodyPr wrap="square" rtlCol="0" anchor="t"/>
+          <a:lstStyle/>
           <a:p>
             <a:pPr marL="342900" indent="-342900">
               <a:spcAft>
-                <a:spcPts val="1000"/>
+                <a:spcPts val="600"/>
               </a:spcAft>
               <a:buSzPct val="100000"/>
               <a:buChar char="•"/>
             </a:pPr>
             <a:r>
-              <a:rPr lang="en-US" sz="1500" dirty="0">
-                <a:solidFill>
-                  <a:srgbClr val="CADCFC"/>
+              <a:rPr lang="en-US" sz="1300" dirty="0">
+                <a:solidFill>
+                  <a:srgbClr val="3D3A36"/>
                 </a:solidFill>
                 <a:latin typeface="Calibri" pitchFamily="34" charset="0"/>
                 <a:ea typeface="Calibri" pitchFamily="34" charset="-122"/>
                 <a:cs typeface="Calibri" pitchFamily="34" charset="-120"/>
               </a:rPr>
-              <a:t>Diffusion is faster at higher temperatures</a:t>
-            </a:r>
-            <a:endParaRPr lang="en-US" sz="1500" dirty="0"/>
-          </a:p>
-        </p:txBody>
-      </p:sp>
-      <p:sp>
-        <p:nvSpPr>
-          <p:cNvPr id="5" name="Text 3"/>
-          <p:cNvSpPr/>
-          <p:nvPr/>
-        </p:nvSpPr>
-        <p:spPr>
-          <a:xfrm>
-            <a:off x="731520" y="4572000"/>
-            <a:ext cx="7772400" cy="365760"/>
-          </a:xfrm>
-          <a:prstGeom prst="rect">
-            <a:avLst/>
-          </a:prstGeom>
-          <a:noFill/>
-          <a:ln/>
-        </p:spPr>
-        <p:txBody>
-          <a:bodyPr wrap="square" rtlCol="0" anchor="ctr"/>
-          <a:lstStyle/>
-          <a:p>
-            <a:pPr indent="0" marL="0">
-              <a:buNone/>
-            </a:pPr>
-            <a:r>
-              <a:rPr lang="en-US" sz="1100" dirty="0">
-                <a:solidFill>
-                  <a:srgbClr val="E9C46A"/>
+              <a:t>Particles are not solid spheres</a:t>
+            </a:r>
+            <a:endParaRPr lang="en-US" sz="1300" dirty="0"/>
+          </a:p>
+          <a:p>
+            <a:pPr marL="342900" indent="-342900">
+              <a:spcAft>
+                <a:spcPts val="600"/>
+              </a:spcAft>
+              <a:buSzPct val="100000"/>
+              <a:buChar char="•"/>
+            </a:pPr>
+            <a:r>
+              <a:rPr lang="en-US" sz="1300" dirty="0">
+                <a:solidFill>
+                  <a:srgbClr val="3D3A36"/>
                 </a:solidFill>
                 <a:latin typeface="Calibri" pitchFamily="34" charset="0"/>
                 <a:ea typeface="Calibri" pitchFamily="34" charset="-122"/>
                 <a:cs typeface="Calibri" pitchFamily="34" charset="-120"/>
               </a:rPr>
+              <a:t>Real particles have different sizes</a:t>
+            </a:r>
+            <a:endParaRPr lang="en-US" sz="1300" dirty="0"/>
+          </a:p>
+          <a:p>
+            <a:pPr marL="342900" indent="-342900">
+              <a:spcAft>
+                <a:spcPts val="600"/>
+              </a:spcAft>
+              <a:buSzPct val="100000"/>
+              <a:buChar char="•"/>
+            </a:pPr>
+            <a:r>
+              <a:rPr lang="en-US" sz="1300" dirty="0">
+                <a:solidFill>
+                  <a:srgbClr val="3D3A36"/>
+                </a:solidFill>
+                <a:latin typeface="Calibri" pitchFamily="34" charset="0"/>
+                <a:ea typeface="Calibri" pitchFamily="34" charset="-122"/>
+                <a:cs typeface="Calibri" pitchFamily="34" charset="-120"/>
+              </a:rPr>
+              <a:t>The model is simplified</a:t>
+            </a:r>
+            <a:endParaRPr lang="en-US" sz="1300" dirty="0"/>
+          </a:p>
+          <a:p>
+            <a:pPr marL="342900" indent="-342900">
+              <a:spcAft>
+                <a:spcPts val="600"/>
+              </a:spcAft>
+              <a:buSzPct val="100000"/>
+              <a:buChar char="•"/>
+            </a:pPr>
+            <a:r>
+              <a:rPr lang="en-US" sz="1300" dirty="0">
+                <a:solidFill>
+                  <a:srgbClr val="3D3A36"/>
+                </a:solidFill>
+                <a:latin typeface="Calibri" pitchFamily="34" charset="0"/>
+                <a:ea typeface="Calibri" pitchFamily="34" charset="-122"/>
+                <a:cs typeface="Calibri" pitchFamily="34" charset="-120"/>
+              </a:rPr>
+              <a:t>It doesn't show molecular structure</a:t>
+            </a:r>
+            <a:endParaRPr lang="en-US" sz="1300" dirty="0"/>
+          </a:p>
+        </p:txBody>
+      </p:sp>
+    </p:spTree>
+  </p:cSld>
+  <p:clrMapOvr>
+    <a:masterClrMapping/>
+  </p:clrMapOvr>
+</p:sld>
+</file>
+
+<file path=ppt/slides/slide6.xml><?xml version="1.0" encoding="utf-8"?>
+<p:sld xmlns:a="http://schemas.openxmlformats.org/drawingml/2006/main" xmlns:r="http://schemas.openxmlformats.org/officeDocument/2006/relationships" xmlns:p="http://schemas.openxmlformats.org/presentationml/2006/main">
+  <p:cSld name="Slide 6">
+    <p:bg>
+      <p:bgPr>
+        <a:solidFill>
+          <a:srgbClr val="FAF8F5"/>
+        </a:solidFill>
+      </p:bgPr>
+    </p:bg>
+    <p:spTree>
+      <p:nvGrpSpPr>
+        <p:cNvPr id="1" name=""/>
+        <p:cNvGrpSpPr/>
+        <p:nvPr/>
+      </p:nvGrpSpPr>
+      <p:grpSpPr>
+        <a:xfrm>
+          <a:off x="0" y="0"/>
+          <a:ext cx="0" cy="0"/>
+          <a:chOff x="0" y="0"/>
+          <a:chExt cx="0" cy="0"/>
+        </a:xfrm>
+      </p:grpSpPr>
+      <p:sp>
+        <p:nvSpPr>
+          <p:cNvPr id="2" name="Shape 0"/>
+          <p:cNvSpPr/>
+          <p:nvPr/>
+        </p:nvSpPr>
+        <p:spPr>
+          <a:xfrm>
+            <a:off x="0" y="0"/>
+            <a:ext cx="9144000" cy="822960"/>
+          </a:xfrm>
+          <a:prstGeom prst="rect">
+            <a:avLst/>
+          </a:prstGeom>
+          <a:solidFill>
+            <a:srgbClr val="FFFFFF"/>
+          </a:solidFill>
+          <a:ln/>
+        </p:spPr>
+      </p:sp>
+      <p:sp>
+        <p:nvSpPr>
+          <p:cNvPr id="3" name="Shape 1"/>
+          <p:cNvSpPr/>
+          <p:nvPr/>
+        </p:nvSpPr>
+        <p:spPr>
+          <a:xfrm>
+            <a:off x="0" y="804672"/>
+            <a:ext cx="9144000" cy="27432"/>
+          </a:xfrm>
+          <a:prstGeom prst="rect">
+            <a:avLst/>
+          </a:prstGeom>
+          <a:solidFill>
+            <a:srgbClr val="E5E2DC"/>
+          </a:solidFill>
+          <a:ln/>
+        </p:spPr>
+      </p:sp>
+      <p:sp>
+        <p:nvSpPr>
+          <p:cNvPr id="4" name="Shape 2"/>
+          <p:cNvSpPr/>
+          <p:nvPr/>
+        </p:nvSpPr>
+        <p:spPr>
+          <a:xfrm>
+            <a:off x="548640" y="201168"/>
+            <a:ext cx="54864" cy="420624"/>
+          </a:xfrm>
+          <a:prstGeom prst="rect">
+            <a:avLst/>
+          </a:prstGeom>
+          <a:solidFill>
+            <a:srgbClr val="2A9D8F"/>
+          </a:solidFill>
+          <a:ln/>
+        </p:spPr>
+      </p:sp>
+      <p:sp>
+        <p:nvSpPr>
+          <p:cNvPr id="5" name="Text 3"/>
+          <p:cNvSpPr/>
+          <p:nvPr/>
+        </p:nvSpPr>
+        <p:spPr>
+          <a:xfrm>
+            <a:off x="777240" y="137160"/>
+            <a:ext cx="7772400" cy="548640"/>
+          </a:xfrm>
+          <a:prstGeom prst="rect">
+            <a:avLst/>
+          </a:prstGeom>
+          <a:noFill/>
+          <a:ln/>
+        </p:spPr>
+        <p:txBody>
+          <a:bodyPr wrap="square" lIns="0" tIns="0" rIns="0" bIns="0" rtlCol="0" anchor="ctr"/>
+          <a:lstStyle/>
+          <a:p>
+            <a:pPr indent="0" marL="0">
+              <a:buNone/>
+            </a:pPr>
+            <a:r>
+              <a:rPr lang="en-US" sz="2000" b="1" dirty="0">
+                <a:solidFill>
+                  <a:srgbClr val="1B2A4A"/>
+                </a:solidFill>
+                <a:latin typeface="Georgia" pitchFamily="34" charset="0"/>
+                <a:ea typeface="Georgia" pitchFamily="34" charset="-122"/>
+                <a:cs typeface="Georgia" pitchFamily="34" charset="-120"/>
+              </a:rPr>
+              <a:t>Particle Movement &amp; Temperature</a:t>
+            </a:r>
+            <a:endParaRPr lang="en-US" sz="2000" dirty="0"/>
+          </a:p>
+        </p:txBody>
+      </p:sp>
+      <p:sp>
+        <p:nvSpPr>
+          <p:cNvPr id="6" name="Text 4"/>
+          <p:cNvSpPr/>
+          <p:nvPr/>
+        </p:nvSpPr>
+        <p:spPr>
+          <a:xfrm>
+            <a:off x="731520" y="1051560"/>
+            <a:ext cx="7680960" cy="3108960"/>
+          </a:xfrm>
+          <a:prstGeom prst="rect">
+            <a:avLst/>
+          </a:prstGeom>
+          <a:noFill/>
+          <a:ln/>
+        </p:spPr>
+        <p:txBody>
+          <a:bodyPr wrap="square" rtlCol="0" anchor="t"/>
+          <a:lstStyle/>
+          <a:p>
+            <a:pPr marL="342900" indent="-342900">
+              <a:spcAft>
+                <a:spcPts val="800"/>
+              </a:spcAft>
+              <a:buSzPct val="100000"/>
+              <a:buChar char="•"/>
+            </a:pPr>
+            <a:r>
+              <a:rPr lang="en-US" sz="1500" dirty="0">
+                <a:solidFill>
+                  <a:srgbClr val="3D3A36"/>
+                </a:solidFill>
+                <a:latin typeface="Calibri" pitchFamily="34" charset="0"/>
+                <a:ea typeface="Calibri" pitchFamily="34" charset="-122"/>
+                <a:cs typeface="Calibri" pitchFamily="34" charset="-120"/>
+              </a:rPr>
+              <a:t>At higher temperatures, particles move FASTER and have MORE energy.</a:t>
+            </a:r>
+            <a:endParaRPr lang="en-US" sz="1500" dirty="0"/>
+          </a:p>
+          <a:p>
+            <a:pPr marL="342900" indent="-342900">
+              <a:spcAft>
+                <a:spcPts val="800"/>
+              </a:spcAft>
+              <a:buSzPct val="100000"/>
+              <a:buChar char="•"/>
+            </a:pPr>
+            <a:r>
+              <a:rPr lang="en-US" sz="1500" dirty="0">
+                <a:solidFill>
+                  <a:srgbClr val="3D3A36"/>
+                </a:solidFill>
+                <a:latin typeface="Calibri" pitchFamily="34" charset="0"/>
+                <a:ea typeface="Calibri" pitchFamily="34" charset="-122"/>
+                <a:cs typeface="Calibri" pitchFamily="34" charset="-120"/>
+              </a:rPr>
+              <a:t>At lower temperatures, particles slow down.</a:t>
+            </a:r>
+            <a:endParaRPr lang="en-US" sz="1500" dirty="0"/>
+          </a:p>
+          <a:p>
+            <a:pPr marL="342900" indent="-342900">
+              <a:spcAft>
+                <a:spcPts val="800"/>
+              </a:spcAft>
+              <a:buSzPct val="100000"/>
+              <a:buChar char="•"/>
+            </a:pPr>
+            <a:r>
+              <a:rPr lang="en-US" sz="1500" dirty="0">
+                <a:solidFill>
+                  <a:srgbClr val="3D3A36"/>
+                </a:solidFill>
+                <a:latin typeface="Calibri" pitchFamily="34" charset="0"/>
+                <a:ea typeface="Calibri" pitchFamily="34" charset="-122"/>
+                <a:cs typeface="Calibri" pitchFamily="34" charset="-120"/>
+              </a:rPr>
+              <a:t>At absolute zero (−273°C), particles have minimum energy.</a:t>
+            </a:r>
+            <a:endParaRPr lang="en-US" sz="1500" dirty="0"/>
+          </a:p>
+          <a:p>
+            <a:pPr marL="342900" indent="-342900">
+              <a:spcAft>
+                <a:spcPts val="800"/>
+              </a:spcAft>
+              <a:buSzPct val="100000"/>
+              <a:buChar char="•"/>
+            </a:pPr>
+            <a:r>
+              <a:rPr lang="en-US" sz="1500" dirty="0">
+                <a:solidFill>
+                  <a:srgbClr val="3D3A36"/>
+                </a:solidFill>
+                <a:latin typeface="Calibri" pitchFamily="34" charset="0"/>
+                <a:ea typeface="Calibri" pitchFamily="34" charset="-122"/>
+                <a:cs typeface="Calibri" pitchFamily="34" charset="-120"/>
+              </a:rPr>
+              <a:t>When you heat a solid, particles vibrate more until bonds break → it melts.</a:t>
+            </a:r>
+            <a:endParaRPr lang="en-US" sz="1500" dirty="0"/>
+          </a:p>
+          <a:p>
+            <a:pPr marL="342900" indent="-342900">
+              <a:spcAft>
+                <a:spcPts val="800"/>
+              </a:spcAft>
+              <a:buSzPct val="100000"/>
+              <a:buChar char="•"/>
+            </a:pPr>
+            <a:r>
+              <a:rPr lang="en-US" sz="1500" dirty="0">
+                <a:solidFill>
+                  <a:srgbClr val="3D3A36"/>
+                </a:solidFill>
+                <a:latin typeface="Calibri" pitchFamily="34" charset="0"/>
+                <a:ea typeface="Calibri" pitchFamily="34" charset="-122"/>
+                <a:cs typeface="Calibri" pitchFamily="34" charset="-120"/>
+              </a:rPr>
+              <a:t>When you heat a liquid, particles move faster until they escape → it evaporates.</a:t>
+            </a:r>
+            <a:endParaRPr lang="en-US" sz="1500" dirty="0"/>
+          </a:p>
+        </p:txBody>
+      </p:sp>
+      <p:sp>
+        <p:nvSpPr>
+          <p:cNvPr id="7" name="Shape 5"/>
+          <p:cNvSpPr/>
+          <p:nvPr/>
+        </p:nvSpPr>
+        <p:spPr>
+          <a:xfrm>
+            <a:off x="731520" y="4206240"/>
+            <a:ext cx="7680960" cy="640080"/>
+          </a:xfrm>
+          <a:prstGeom prst="rect">
+            <a:avLst/>
+          </a:prstGeom>
+          <a:solidFill>
+            <a:srgbClr val="E8F5F3"/>
+          </a:solidFill>
+          <a:ln/>
+          <a:effectLst>
+            <a:outerShdw sx="100000" sy="100000" kx="0" ky="0" algn="bl" rotWithShape="0" blurRad="50800" dist="25400" dir="8100000">
+              <a:srgbClr val="000000">
+                <a:alpha val="10000"/>
+              </a:srgbClr>
+            </a:outerShdw>
+          </a:effectLst>
+        </p:spPr>
+      </p:sp>
+      <p:sp>
+        <p:nvSpPr>
+          <p:cNvPr id="8" name="Text 6"/>
+          <p:cNvSpPr/>
+          <p:nvPr/>
+        </p:nvSpPr>
+        <p:spPr>
+          <a:xfrm>
+            <a:off x="914400" y="4251960"/>
+            <a:ext cx="7315200" cy="548640"/>
+          </a:xfrm>
+          <a:prstGeom prst="rect">
+            <a:avLst/>
+          </a:prstGeom>
+          <a:noFill/>
+          <a:ln/>
+        </p:spPr>
+        <p:txBody>
+          <a:bodyPr wrap="square" rtlCol="0" anchor="ctr"/>
+          <a:lstStyle/>
+          <a:p>
+            <a:pPr indent="0" marL="0">
+              <a:buNone/>
+            </a:pPr>
+            <a:r>
+              <a:rPr lang="en-US" sz="1200" b="1" dirty="0">
+                <a:solidFill>
+                  <a:srgbClr val="2A9D8F"/>
+                </a:solidFill>
+                <a:latin typeface="Calibri" pitchFamily="34" charset="0"/>
+                <a:ea typeface="Calibri" pitchFamily="34" charset="-122"/>
+                <a:cs typeface="Calibri" pitchFamily="34" charset="-120"/>
+              </a:rPr>
+              <a:t>Key Idea: </a:t>
+            </a:r>
+            <a:pPr indent="0" marL="0">
+              <a:buNone/>
+            </a:pPr>
+            <a:r>
+              <a:rPr lang="en-US" sz="1200" i="1" dirty="0">
+                <a:solidFill>
+                  <a:srgbClr val="3D3A36"/>
+                </a:solidFill>
+                <a:latin typeface="Calibri" pitchFamily="34" charset="0"/>
+                <a:ea typeface="Calibri" pitchFamily="34" charset="-122"/>
+                <a:cs typeface="Calibri" pitchFamily="34" charset="-120"/>
+              </a:rPr>
+              <a:t>Temperature is a measure of the average kinetic energy of particles.</a:t>
+            </a:r>
+            <a:endParaRPr lang="en-US" sz="1200" dirty="0"/>
+          </a:p>
+        </p:txBody>
+      </p:sp>
+    </p:spTree>
+  </p:cSld>
+  <p:clrMapOvr>
+    <a:masterClrMapping/>
+  </p:clrMapOvr>
+</p:sld>
+</file>
+
+<file path=ppt/slides/slide7.xml><?xml version="1.0" encoding="utf-8"?>
+<p:sld xmlns:a="http://schemas.openxmlformats.org/drawingml/2006/main" xmlns:r="http://schemas.openxmlformats.org/officeDocument/2006/relationships" xmlns:p="http://schemas.openxmlformats.org/presentationml/2006/main">
+  <p:cSld name="Slide 7">
+    <p:bg>
+      <p:bgPr>
+        <a:solidFill>
+          <a:srgbClr val="FAF8F5"/>
+        </a:solidFill>
+      </p:bgPr>
+    </p:bg>
+    <p:spTree>
+      <p:nvGrpSpPr>
+        <p:cNvPr id="1" name=""/>
+        <p:cNvGrpSpPr/>
+        <p:nvPr/>
+      </p:nvGrpSpPr>
+      <p:grpSpPr>
+        <a:xfrm>
+          <a:off x="0" y="0"/>
+          <a:ext cx="0" cy="0"/>
+          <a:chOff x="0" y="0"/>
+          <a:chExt cx="0" cy="0"/>
+        </a:xfrm>
+      </p:grpSpPr>
+      <p:sp>
+        <p:nvSpPr>
+          <p:cNvPr id="2" name="Shape 0"/>
+          <p:cNvSpPr/>
+          <p:nvPr/>
+        </p:nvSpPr>
+        <p:spPr>
+          <a:xfrm>
+            <a:off x="0" y="0"/>
+            <a:ext cx="9144000" cy="822960"/>
+          </a:xfrm>
+          <a:prstGeom prst="rect">
+            <a:avLst/>
+          </a:prstGeom>
+          <a:solidFill>
+            <a:srgbClr val="FFFFFF"/>
+          </a:solidFill>
+          <a:ln/>
+        </p:spPr>
+      </p:sp>
+      <p:sp>
+        <p:nvSpPr>
+          <p:cNvPr id="3" name="Shape 1"/>
+          <p:cNvSpPr/>
+          <p:nvPr/>
+        </p:nvSpPr>
+        <p:spPr>
+          <a:xfrm>
+            <a:off x="0" y="804672"/>
+            <a:ext cx="9144000" cy="27432"/>
+          </a:xfrm>
+          <a:prstGeom prst="rect">
+            <a:avLst/>
+          </a:prstGeom>
+          <a:solidFill>
+            <a:srgbClr val="E5E2DC"/>
+          </a:solidFill>
+          <a:ln/>
+        </p:spPr>
+      </p:sp>
+      <p:sp>
+        <p:nvSpPr>
+          <p:cNvPr id="4" name="Shape 2"/>
+          <p:cNvSpPr/>
+          <p:nvPr/>
+        </p:nvSpPr>
+        <p:spPr>
+          <a:xfrm>
+            <a:off x="548640" y="201168"/>
+            <a:ext cx="54864" cy="420624"/>
+          </a:xfrm>
+          <a:prstGeom prst="rect">
+            <a:avLst/>
+          </a:prstGeom>
+          <a:solidFill>
+            <a:srgbClr val="2A9D8F"/>
+          </a:solidFill>
+          <a:ln/>
+        </p:spPr>
+      </p:sp>
+      <p:sp>
+        <p:nvSpPr>
+          <p:cNvPr id="5" name="Text 3"/>
+          <p:cNvSpPr/>
+          <p:nvPr/>
+        </p:nvSpPr>
+        <p:spPr>
+          <a:xfrm>
+            <a:off x="777240" y="137160"/>
+            <a:ext cx="7772400" cy="548640"/>
+          </a:xfrm>
+          <a:prstGeom prst="rect">
+            <a:avLst/>
+          </a:prstGeom>
+          <a:noFill/>
+          <a:ln/>
+        </p:spPr>
+        <p:txBody>
+          <a:bodyPr wrap="square" lIns="0" tIns="0" rIns="0" bIns="0" rtlCol="0" anchor="ctr"/>
+          <a:lstStyle/>
+          <a:p>
+            <a:pPr indent="0" marL="0">
+              <a:buNone/>
+            </a:pPr>
+            <a:r>
+              <a:rPr lang="en-US" sz="2000" b="1" dirty="0">
+                <a:solidFill>
+                  <a:srgbClr val="1B2A4A"/>
+                </a:solidFill>
+                <a:latin typeface="Georgia" pitchFamily="34" charset="0"/>
+                <a:ea typeface="Georgia" pitchFamily="34" charset="-122"/>
+                <a:cs typeface="Georgia" pitchFamily="34" charset="-120"/>
+              </a:rPr>
+              <a:t>Check Your Understanding</a:t>
+            </a:r>
+            <a:endParaRPr lang="en-US" sz="2000" dirty="0"/>
+          </a:p>
+        </p:txBody>
+      </p:sp>
+      <p:sp>
+        <p:nvSpPr>
+          <p:cNvPr id="6" name="Shape 4"/>
+          <p:cNvSpPr/>
+          <p:nvPr/>
+        </p:nvSpPr>
+        <p:spPr>
+          <a:xfrm>
+            <a:off x="731520" y="1051560"/>
+            <a:ext cx="7680960" cy="438912"/>
+          </a:xfrm>
+          <a:prstGeom prst="rect">
+            <a:avLst/>
+          </a:prstGeom>
+          <a:solidFill>
+            <a:srgbClr val="FFFFFF"/>
+          </a:solidFill>
+          <a:ln/>
+        </p:spPr>
+      </p:sp>
+      <p:sp>
+        <p:nvSpPr>
+          <p:cNvPr id="7" name="Text 5"/>
+          <p:cNvSpPr/>
+          <p:nvPr/>
+        </p:nvSpPr>
+        <p:spPr>
+          <a:xfrm>
+            <a:off x="868680" y="1051560"/>
+            <a:ext cx="320040" cy="438912"/>
+          </a:xfrm>
+          <a:prstGeom prst="rect">
+            <a:avLst/>
+          </a:prstGeom>
+          <a:noFill/>
+          <a:ln/>
+        </p:spPr>
+        <p:txBody>
+          <a:bodyPr wrap="square" rtlCol="0" anchor="ctr"/>
+          <a:lstStyle/>
+          <a:p>
+            <a:pPr indent="0" marL="0">
+              <a:buNone/>
+            </a:pPr>
+            <a:r>
+              <a:rPr lang="en-US" sz="1400" dirty="0">
+                <a:solidFill>
+                  <a:srgbClr val="2A9D8F"/>
+                </a:solidFill>
+              </a:rPr>
+              <a:t>☐</a:t>
+            </a:r>
+            <a:endParaRPr lang="en-US" sz="1400" dirty="0"/>
+          </a:p>
+        </p:txBody>
+      </p:sp>
+      <p:sp>
+        <p:nvSpPr>
+          <p:cNvPr id="8" name="Text 6"/>
+          <p:cNvSpPr/>
+          <p:nvPr/>
+        </p:nvSpPr>
+        <p:spPr>
+          <a:xfrm>
+            <a:off x="1234440" y="1051560"/>
+            <a:ext cx="6949440" cy="438912"/>
+          </a:xfrm>
+          <a:prstGeom prst="rect">
+            <a:avLst/>
+          </a:prstGeom>
+          <a:noFill/>
+          <a:ln/>
+        </p:spPr>
+        <p:txBody>
+          <a:bodyPr wrap="square" rtlCol="0" anchor="ctr"/>
+          <a:lstStyle/>
+          <a:p>
+            <a:pPr indent="0" marL="0">
+              <a:buNone/>
+            </a:pPr>
+            <a:r>
+              <a:rPr lang="en-US" sz="1300" dirty="0">
+                <a:solidFill>
+                  <a:srgbClr val="3D3A36"/>
+                </a:solidFill>
+                <a:latin typeface="Calibri" pitchFamily="34" charset="0"/>
+                <a:ea typeface="Calibri" pitchFamily="34" charset="-122"/>
+                <a:cs typeface="Calibri" pitchFamily="34" charset="-120"/>
+              </a:rPr>
+              <a:t>I can describe particle arrangement in solids, liquids, and gases</a:t>
+            </a:r>
+            <a:endParaRPr lang="en-US" sz="1300" dirty="0"/>
+          </a:p>
+        </p:txBody>
+      </p:sp>
+      <p:sp>
+        <p:nvSpPr>
+          <p:cNvPr id="9" name="Shape 7"/>
+          <p:cNvSpPr/>
+          <p:nvPr/>
+        </p:nvSpPr>
+        <p:spPr>
+          <a:xfrm>
+            <a:off x="731520" y="1554480"/>
+            <a:ext cx="7680960" cy="438912"/>
+          </a:xfrm>
+          <a:prstGeom prst="rect">
+            <a:avLst/>
+          </a:prstGeom>
+          <a:solidFill>
+            <a:srgbClr val="F8F6F3"/>
+          </a:solidFill>
+          <a:ln/>
+        </p:spPr>
+      </p:sp>
+      <p:sp>
+        <p:nvSpPr>
+          <p:cNvPr id="10" name="Text 8"/>
+          <p:cNvSpPr/>
+          <p:nvPr/>
+        </p:nvSpPr>
+        <p:spPr>
+          <a:xfrm>
+            <a:off x="868680" y="1554480"/>
+            <a:ext cx="320040" cy="438912"/>
+          </a:xfrm>
+          <a:prstGeom prst="rect">
+            <a:avLst/>
+          </a:prstGeom>
+          <a:noFill/>
+          <a:ln/>
+        </p:spPr>
+        <p:txBody>
+          <a:bodyPr wrap="square" rtlCol="0" anchor="ctr"/>
+          <a:lstStyle/>
+          <a:p>
+            <a:pPr indent="0" marL="0">
+              <a:buNone/>
+            </a:pPr>
+            <a:r>
+              <a:rPr lang="en-US" sz="1400" dirty="0">
+                <a:solidFill>
+                  <a:srgbClr val="2A9D8F"/>
+                </a:solidFill>
+              </a:rPr>
+              <a:t>☐</a:t>
+            </a:r>
+            <a:endParaRPr lang="en-US" sz="1400" dirty="0"/>
+          </a:p>
+        </p:txBody>
+      </p:sp>
+      <p:sp>
+        <p:nvSpPr>
+          <p:cNvPr id="11" name="Text 9"/>
+          <p:cNvSpPr/>
+          <p:nvPr/>
+        </p:nvSpPr>
+        <p:spPr>
+          <a:xfrm>
+            <a:off x="1234440" y="1554480"/>
+            <a:ext cx="6949440" cy="438912"/>
+          </a:xfrm>
+          <a:prstGeom prst="rect">
+            <a:avLst/>
+          </a:prstGeom>
+          <a:noFill/>
+          <a:ln/>
+        </p:spPr>
+        <p:txBody>
+          <a:bodyPr wrap="square" rtlCol="0" anchor="ctr"/>
+          <a:lstStyle/>
+          <a:p>
+            <a:pPr indent="0" marL="0">
+              <a:buNone/>
+            </a:pPr>
+            <a:r>
+              <a:rPr lang="en-US" sz="1300" dirty="0">
+                <a:solidFill>
+                  <a:srgbClr val="3D3A36"/>
+                </a:solidFill>
+                <a:latin typeface="Calibri" pitchFamily="34" charset="0"/>
+                <a:ea typeface="Calibri" pitchFamily="34" charset="-122"/>
+                <a:cs typeface="Calibri" pitchFamily="34" charset="-120"/>
+              </a:rPr>
+              <a:t>I know that particles are always moving</a:t>
+            </a:r>
+            <a:endParaRPr lang="en-US" sz="1300" dirty="0"/>
+          </a:p>
+        </p:txBody>
+      </p:sp>
+      <p:sp>
+        <p:nvSpPr>
+          <p:cNvPr id="12" name="Shape 10"/>
+          <p:cNvSpPr/>
+          <p:nvPr/>
+        </p:nvSpPr>
+        <p:spPr>
+          <a:xfrm>
+            <a:off x="731520" y="2057400"/>
+            <a:ext cx="7680960" cy="438912"/>
+          </a:xfrm>
+          <a:prstGeom prst="rect">
+            <a:avLst/>
+          </a:prstGeom>
+          <a:solidFill>
+            <a:srgbClr val="FFFFFF"/>
+          </a:solidFill>
+          <a:ln/>
+        </p:spPr>
+      </p:sp>
+      <p:sp>
+        <p:nvSpPr>
+          <p:cNvPr id="13" name="Text 11"/>
+          <p:cNvSpPr/>
+          <p:nvPr/>
+        </p:nvSpPr>
+        <p:spPr>
+          <a:xfrm>
+            <a:off x="868680" y="2057400"/>
+            <a:ext cx="320040" cy="438912"/>
+          </a:xfrm>
+          <a:prstGeom prst="rect">
+            <a:avLst/>
+          </a:prstGeom>
+          <a:noFill/>
+          <a:ln/>
+        </p:spPr>
+        <p:txBody>
+          <a:bodyPr wrap="square" rtlCol="0" anchor="ctr"/>
+          <a:lstStyle/>
+          <a:p>
+            <a:pPr indent="0" marL="0">
+              <a:buNone/>
+            </a:pPr>
+            <a:r>
+              <a:rPr lang="en-US" sz="1400" dirty="0">
+                <a:solidFill>
+                  <a:srgbClr val="2A9D8F"/>
+                </a:solidFill>
+              </a:rPr>
+              <a:t>☐</a:t>
+            </a:r>
+            <a:endParaRPr lang="en-US" sz="1400" dirty="0"/>
+          </a:p>
+        </p:txBody>
+      </p:sp>
+      <p:sp>
+        <p:nvSpPr>
+          <p:cNvPr id="14" name="Text 12"/>
+          <p:cNvSpPr/>
+          <p:nvPr/>
+        </p:nvSpPr>
+        <p:spPr>
+          <a:xfrm>
+            <a:off x="1234440" y="2057400"/>
+            <a:ext cx="6949440" cy="438912"/>
+          </a:xfrm>
+          <a:prstGeom prst="rect">
+            <a:avLst/>
+          </a:prstGeom>
+          <a:noFill/>
+          <a:ln/>
+        </p:spPr>
+        <p:txBody>
+          <a:bodyPr wrap="square" rtlCol="0" anchor="ctr"/>
+          <a:lstStyle/>
+          <a:p>
+            <a:pPr indent="0" marL="0">
+              <a:buNone/>
+            </a:pPr>
+            <a:r>
+              <a:rPr lang="en-US" sz="1300" dirty="0">
+                <a:solidFill>
+                  <a:srgbClr val="3D3A36"/>
+                </a:solidFill>
+                <a:latin typeface="Calibri" pitchFamily="34" charset="0"/>
+                <a:ea typeface="Calibri" pitchFamily="34" charset="-122"/>
+                <a:cs typeface="Calibri" pitchFamily="34" charset="-120"/>
+              </a:rPr>
+              <a:t>I understand that higher temperature means faster particles</a:t>
+            </a:r>
+            <a:endParaRPr lang="en-US" sz="1300" dirty="0"/>
+          </a:p>
+        </p:txBody>
+      </p:sp>
+      <p:sp>
+        <p:nvSpPr>
+          <p:cNvPr id="15" name="Shape 13"/>
+          <p:cNvSpPr/>
+          <p:nvPr/>
+        </p:nvSpPr>
+        <p:spPr>
+          <a:xfrm>
+            <a:off x="731520" y="2560320"/>
+            <a:ext cx="7680960" cy="438912"/>
+          </a:xfrm>
+          <a:prstGeom prst="rect">
+            <a:avLst/>
+          </a:prstGeom>
+          <a:solidFill>
+            <a:srgbClr val="F8F6F3"/>
+          </a:solidFill>
+          <a:ln/>
+        </p:spPr>
+      </p:sp>
+      <p:sp>
+        <p:nvSpPr>
+          <p:cNvPr id="16" name="Text 14"/>
+          <p:cNvSpPr/>
+          <p:nvPr/>
+        </p:nvSpPr>
+        <p:spPr>
+          <a:xfrm>
+            <a:off x="868680" y="2560320"/>
+            <a:ext cx="320040" cy="438912"/>
+          </a:xfrm>
+          <a:prstGeom prst="rect">
+            <a:avLst/>
+          </a:prstGeom>
+          <a:noFill/>
+          <a:ln/>
+        </p:spPr>
+        <p:txBody>
+          <a:bodyPr wrap="square" rtlCol="0" anchor="ctr"/>
+          <a:lstStyle/>
+          <a:p>
+            <a:pPr indent="0" marL="0">
+              <a:buNone/>
+            </a:pPr>
+            <a:r>
+              <a:rPr lang="en-US" sz="1400" dirty="0">
+                <a:solidFill>
+                  <a:srgbClr val="2A9D8F"/>
+                </a:solidFill>
+              </a:rPr>
+              <a:t>☐</a:t>
+            </a:r>
+            <a:endParaRPr lang="en-US" sz="1400" dirty="0"/>
+          </a:p>
+        </p:txBody>
+      </p:sp>
+      <p:sp>
+        <p:nvSpPr>
+          <p:cNvPr id="17" name="Text 15"/>
+          <p:cNvSpPr/>
+          <p:nvPr/>
+        </p:nvSpPr>
+        <p:spPr>
+          <a:xfrm>
+            <a:off x="1234440" y="2560320"/>
+            <a:ext cx="6949440" cy="438912"/>
+          </a:xfrm>
+          <a:prstGeom prst="rect">
+            <a:avLst/>
+          </a:prstGeom>
+          <a:noFill/>
+          <a:ln/>
+        </p:spPr>
+        <p:txBody>
+          <a:bodyPr wrap="square" rtlCol="0" anchor="ctr"/>
+          <a:lstStyle/>
+          <a:p>
+            <a:pPr indent="0" marL="0">
+              <a:buNone/>
+            </a:pPr>
+            <a:r>
+              <a:rPr lang="en-US" sz="1300" dirty="0">
+                <a:solidFill>
+                  <a:srgbClr val="3D3A36"/>
+                </a:solidFill>
+                <a:latin typeface="Calibri" pitchFamily="34" charset="0"/>
+                <a:ea typeface="Calibri" pitchFamily="34" charset="-122"/>
+                <a:cs typeface="Calibri" pitchFamily="34" charset="-120"/>
+              </a:rPr>
+              <a:t>I can use the particle model to explain everyday observations</a:t>
+            </a:r>
+            <a:endParaRPr lang="en-US" sz="1300" dirty="0"/>
+          </a:p>
+        </p:txBody>
+      </p:sp>
+      <p:sp>
+        <p:nvSpPr>
+          <p:cNvPr id="18" name="Shape 16"/>
+          <p:cNvSpPr/>
+          <p:nvPr/>
+        </p:nvSpPr>
+        <p:spPr>
+          <a:xfrm>
+            <a:off x="731520" y="3063240"/>
+            <a:ext cx="7680960" cy="438912"/>
+          </a:xfrm>
+          <a:prstGeom prst="rect">
+            <a:avLst/>
+          </a:prstGeom>
+          <a:solidFill>
+            <a:srgbClr val="FFFFFF"/>
+          </a:solidFill>
+          <a:ln/>
+        </p:spPr>
+      </p:sp>
+      <p:sp>
+        <p:nvSpPr>
+          <p:cNvPr id="19" name="Text 17"/>
+          <p:cNvSpPr/>
+          <p:nvPr/>
+        </p:nvSpPr>
+        <p:spPr>
+          <a:xfrm>
+            <a:off x="868680" y="3063240"/>
+            <a:ext cx="320040" cy="438912"/>
+          </a:xfrm>
+          <a:prstGeom prst="rect">
+            <a:avLst/>
+          </a:prstGeom>
+          <a:noFill/>
+          <a:ln/>
+        </p:spPr>
+        <p:txBody>
+          <a:bodyPr wrap="square" rtlCol="0" anchor="ctr"/>
+          <a:lstStyle/>
+          <a:p>
+            <a:pPr indent="0" marL="0">
+              <a:buNone/>
+            </a:pPr>
+            <a:r>
+              <a:rPr lang="en-US" sz="1400" dirty="0">
+                <a:solidFill>
+                  <a:srgbClr val="2A9D8F"/>
+                </a:solidFill>
+              </a:rPr>
+              <a:t>☐</a:t>
+            </a:r>
+            <a:endParaRPr lang="en-US" sz="1400" dirty="0"/>
+          </a:p>
+        </p:txBody>
+      </p:sp>
+      <p:sp>
+        <p:nvSpPr>
+          <p:cNvPr id="20" name="Text 18"/>
+          <p:cNvSpPr/>
+          <p:nvPr/>
+        </p:nvSpPr>
+        <p:spPr>
+          <a:xfrm>
+            <a:off x="1234440" y="3063240"/>
+            <a:ext cx="6949440" cy="438912"/>
+          </a:xfrm>
+          <a:prstGeom prst="rect">
+            <a:avLst/>
+          </a:prstGeom>
+          <a:noFill/>
+          <a:ln/>
+        </p:spPr>
+        <p:txBody>
+          <a:bodyPr wrap="square" rtlCol="0" anchor="ctr"/>
+          <a:lstStyle/>
+          <a:p>
+            <a:pPr indent="0" marL="0">
+              <a:buNone/>
+            </a:pPr>
+            <a:r>
+              <a:rPr lang="en-US" sz="1300" dirty="0">
+                <a:solidFill>
+                  <a:srgbClr val="3D3A36"/>
+                </a:solidFill>
+                <a:latin typeface="Calibri" pitchFamily="34" charset="0"/>
+                <a:ea typeface="Calibri" pitchFamily="34" charset="-122"/>
+                <a:cs typeface="Calibri" pitchFamily="34" charset="-120"/>
+              </a:rPr>
+              <a:t>I know the limitations of the particle model</a:t>
+            </a:r>
+            <a:endParaRPr lang="en-US" sz="1300" dirty="0"/>
+          </a:p>
+        </p:txBody>
+      </p:sp>
+      <p:sp>
+        <p:nvSpPr>
+          <p:cNvPr id="21" name="Shape 19"/>
+          <p:cNvSpPr/>
+          <p:nvPr/>
+        </p:nvSpPr>
+        <p:spPr>
+          <a:xfrm>
+            <a:off x="731520" y="3749040"/>
+            <a:ext cx="7680960" cy="594360"/>
+          </a:xfrm>
+          <a:prstGeom prst="rect">
+            <a:avLst/>
+          </a:prstGeom>
+          <a:solidFill>
+            <a:srgbClr val="E8F5F3"/>
+          </a:solidFill>
+          <a:ln/>
+          <a:effectLst>
+            <a:outerShdw sx="100000" sy="100000" kx="0" ky="0" algn="bl" rotWithShape="0" blurRad="50800" dist="25400" dir="8100000">
+              <a:srgbClr val="000000">
+                <a:alpha val="10000"/>
+              </a:srgbClr>
+            </a:outerShdw>
+          </a:effectLst>
+        </p:spPr>
+      </p:sp>
+      <p:sp>
+        <p:nvSpPr>
+          <p:cNvPr id="22" name="Text 20"/>
+          <p:cNvSpPr/>
+          <p:nvPr/>
+        </p:nvSpPr>
+        <p:spPr>
+          <a:xfrm>
+            <a:off x="914400" y="3749040"/>
+            <a:ext cx="7315200" cy="594360"/>
+          </a:xfrm>
+          <a:prstGeom prst="rect">
+            <a:avLst/>
+          </a:prstGeom>
+          <a:noFill/>
+          <a:ln/>
+        </p:spPr>
+        <p:txBody>
+          <a:bodyPr wrap="square" rtlCol="0" anchor="ctr"/>
+          <a:lstStyle/>
+          <a:p>
+            <a:pPr indent="0" marL="0">
+              <a:buNone/>
+            </a:pPr>
+            <a:r>
+              <a:rPr lang="en-US" sz="1200" b="1" dirty="0">
+                <a:solidFill>
+                  <a:srgbClr val="2A9D8F"/>
+                </a:solidFill>
+                <a:latin typeface="Calibri" pitchFamily="34" charset="0"/>
+                <a:ea typeface="Calibri" pitchFamily="34" charset="-122"/>
+                <a:cs typeface="Calibri" pitchFamily="34" charset="-120"/>
+              </a:rPr>
+              <a:t>Key Idea: </a:t>
+            </a:r>
+            <a:pPr indent="0" marL="0">
+              <a:buNone/>
+            </a:pPr>
+            <a:r>
+              <a:rPr lang="en-US" sz="1200" i="1" dirty="0">
+                <a:solidFill>
+                  <a:srgbClr val="3D3A36"/>
+                </a:solidFill>
+                <a:latin typeface="Calibri" pitchFamily="34" charset="0"/>
+                <a:ea typeface="Calibri" pitchFamily="34" charset="-122"/>
+                <a:cs typeface="Calibri" pitchFamily="34" charset="-120"/>
+              </a:rPr>
+              <a:t>The particle model is one of the most important ideas in all of science.</a:t>
+            </a:r>
+            <a:endParaRPr lang="en-US" sz="1200" dirty="0"/>
+          </a:p>
+        </p:txBody>
+      </p:sp>
+    </p:spTree>
+  </p:cSld>
+  <p:clrMapOvr>
+    <a:masterClrMapping/>
+  </p:clrMapOvr>
+</p:sld>
+</file>
+
+<file path=ppt/slides/slide8.xml><?xml version="1.0" encoding="utf-8"?>
+<p:sld xmlns:a="http://schemas.openxmlformats.org/drawingml/2006/main" xmlns:r="http://schemas.openxmlformats.org/officeDocument/2006/relationships" xmlns:p="http://schemas.openxmlformats.org/presentationml/2006/main">
+  <p:cSld name="Slide 8">
+    <p:spTree>
+      <p:nvGrpSpPr>
+        <p:cNvPr id="1" name=""/>
+        <p:cNvGrpSpPr/>
+        <p:nvPr/>
+      </p:nvGrpSpPr>
+      <p:grpSpPr>
+        <a:xfrm>
+          <a:off x="0" y="0"/>
+          <a:ext cx="0" cy="0"/>
+          <a:chOff x="0" y="0"/>
+          <a:chExt cx="0" cy="0"/>
+        </a:xfrm>
+      </p:grpSpPr>
+      <p:sp>
+        <p:nvSpPr>
+          <p:cNvPr id="2" name="Shape 0"/>
+          <p:cNvSpPr/>
+          <p:nvPr/>
+        </p:nvSpPr>
+        <p:spPr>
+          <a:xfrm>
+            <a:off x="0" y="0"/>
+            <a:ext cx="9144000" cy="5143500"/>
+          </a:xfrm>
+          <a:prstGeom prst="rect">
+            <a:avLst/>
+          </a:prstGeom>
+          <a:solidFill>
+            <a:srgbClr val="1B2A4A"/>
+          </a:solidFill>
+          <a:ln/>
+        </p:spPr>
+      </p:sp>
+      <p:sp>
+        <p:nvSpPr>
+          <p:cNvPr id="3" name="Shape 1"/>
+          <p:cNvSpPr/>
+          <p:nvPr/>
+        </p:nvSpPr>
+        <p:spPr>
+          <a:xfrm>
+            <a:off x="0" y="4777740"/>
+            <a:ext cx="9144000" cy="365760"/>
+          </a:xfrm>
+          <a:prstGeom prst="rect">
+            <a:avLst/>
+          </a:prstGeom>
+          <a:solidFill>
+            <a:srgbClr val="2A9D8F"/>
+          </a:solidFill>
+          <a:ln/>
+        </p:spPr>
+      </p:sp>
+      <p:sp>
+        <p:nvSpPr>
+          <p:cNvPr id="4" name="Shape 2"/>
+          <p:cNvSpPr/>
+          <p:nvPr/>
+        </p:nvSpPr>
+        <p:spPr>
+          <a:xfrm>
+            <a:off x="-914400" y="-914400"/>
+            <a:ext cx="3657600" cy="3657600"/>
+          </a:xfrm>
+          <a:prstGeom prst="ellipse">
+            <a:avLst/>
+          </a:prstGeom>
+          <a:solidFill>
+            <a:srgbClr val="2A9D8F">
+              <a:alpha val="10000"/>
+            </a:srgbClr>
+          </a:solidFill>
+          <a:ln/>
+        </p:spPr>
+      </p:sp>
+      <p:sp>
+        <p:nvSpPr>
+          <p:cNvPr id="5" name="Text 3"/>
+          <p:cNvSpPr/>
+          <p:nvPr/>
+        </p:nvSpPr>
+        <p:spPr>
+          <a:xfrm>
+            <a:off x="731520" y="1463040"/>
+            <a:ext cx="7680960" cy="822960"/>
+          </a:xfrm>
+          <a:prstGeom prst="rect">
+            <a:avLst/>
+          </a:prstGeom>
+          <a:noFill/>
+          <a:ln/>
+        </p:spPr>
+        <p:txBody>
+          <a:bodyPr wrap="square" rtlCol="0" anchor="ctr"/>
+          <a:lstStyle/>
+          <a:p>
+            <a:pPr algn="ctr" indent="0" marL="0">
+              <a:buNone/>
+            </a:pPr>
+            <a:r>
+              <a:rPr lang="en-US" sz="3400" b="1" dirty="0">
+                <a:solidFill>
+                  <a:srgbClr val="FFFFFF"/>
+                </a:solidFill>
+                <a:latin typeface="Georgia" pitchFamily="34" charset="0"/>
+                <a:ea typeface="Georgia" pitchFamily="34" charset="-122"/>
+                <a:cs typeface="Georgia" pitchFamily="34" charset="-120"/>
+              </a:rPr>
+              <a:t>Review &amp; Practise</a:t>
+            </a:r>
+            <a:endParaRPr lang="en-US" sz="3400" dirty="0"/>
+          </a:p>
+        </p:txBody>
+      </p:sp>
+      <p:sp>
+        <p:nvSpPr>
+          <p:cNvPr id="6" name="Text 4"/>
+          <p:cNvSpPr/>
+          <p:nvPr/>
+        </p:nvSpPr>
+        <p:spPr>
+          <a:xfrm>
+            <a:off x="731520" y="2468880"/>
+            <a:ext cx="7680960" cy="457200"/>
+          </a:xfrm>
+          <a:prstGeom prst="rect">
+            <a:avLst/>
+          </a:prstGeom>
+          <a:noFill/>
+          <a:ln/>
+        </p:spPr>
+        <p:txBody>
+          <a:bodyPr wrap="square" rtlCol="0" anchor="ctr"/>
+          <a:lstStyle/>
+          <a:p>
+            <a:pPr algn="ctr" indent="0" marL="0">
+              <a:buNone/>
+            </a:pPr>
+            <a:r>
+              <a:rPr lang="en-US" sz="1800" dirty="0">
+                <a:solidFill>
+                  <a:srgbClr val="2A9D8F"/>
+                </a:solidFill>
+                <a:latin typeface="Calibri" pitchFamily="34" charset="0"/>
+                <a:ea typeface="Calibri" pitchFamily="34" charset="-122"/>
+                <a:cs typeface="Calibri" pitchFamily="34" charset="-120"/>
+              </a:rPr>
               <a:t>mrzocchi.com</a:t>
             </a:r>
-            <a:endParaRPr lang="en-US" sz="1100" dirty="0"/>
+            <a:endParaRPr lang="en-US" sz="1800" dirty="0"/>
+          </a:p>
+        </p:txBody>
+      </p:sp>
+      <p:sp>
+        <p:nvSpPr>
+          <p:cNvPr id="7" name="Text 5"/>
+          <p:cNvSpPr/>
+          <p:nvPr/>
+        </p:nvSpPr>
+        <p:spPr>
+          <a:xfrm>
+            <a:off x="731520" y="3108960"/>
+            <a:ext cx="7680960" cy="457200"/>
+          </a:xfrm>
+          <a:prstGeom prst="rect">
+            <a:avLst/>
+          </a:prstGeom>
+          <a:noFill/>
+          <a:ln/>
+        </p:spPr>
+        <p:txBody>
+          <a:bodyPr wrap="square" rtlCol="0" anchor="ctr"/>
+          <a:lstStyle/>
+          <a:p>
+            <a:pPr algn="ctr" indent="0" marL="0">
+              <a:buNone/>
+            </a:pPr>
+            <a:r>
+              <a:rPr lang="en-US" sz="1300" dirty="0">
+                <a:solidFill>
+                  <a:srgbClr val="9B9690"/>
+                </a:solidFill>
+                <a:latin typeface="Calibri" pitchFamily="34" charset="0"/>
+                <a:ea typeface="Calibri" pitchFamily="34" charset="-122"/>
+                <a:cs typeface="Calibri" pitchFamily="34" charset="-120"/>
+              </a:rPr>
+              <a:t>Use the Self-Quiz, Review Games, and Practice Builder to test yourself.</a:t>
+            </a:r>
+            <a:endParaRPr lang="en-US" sz="1300" dirty="0"/>
           </a:p>
         </p:txBody>
       </p:sp>

--- a/static/ppts/G6_Sci_T2_Particle_Model.pptx
+++ b/static/ppts/G6_Sci_T2_Particle_Model.pptx
@@ -12,13 +12,12 @@
     <p:sldId id="260" r:id="rId6"/>
     <p:sldId id="261" r:id="rId7"/>
     <p:sldId id="262" r:id="rId8"/>
-    <p:sldId id="263" r:id="rId9"/>
   </p:sldIdLst>
   <p:notesMasterIdLst>
-    <p:notesMasterId r:id="rId10"/>
+    <p:notesMasterId r:id="rId9"/>
   </p:notesMasterIdLst>
-  <p:sldSz cx="9144000" cy="5143500"/>
-  <p:notesSz cx="5143500" cy="9144000"/>
+  <p:sldSz cx="12192000" cy="6858000"/>
+  <p:notesSz cx="6858000" cy="12192000"/>
   <p:defaultTextStyle>
     <a:lvl1pPr marL="0" algn="l" defTabSz="914400" rtl="0" eaLnBrk="1" latinLnBrk="0" hangingPunct="1">
       <a:defRPr sz="1800" kern="1200">
@@ -1061,94 +1060,6 @@
             <a:fld id="{F7021451-1387-4CA6-816F-3879F97B5CBC}" type="slidenum">
               <a:rPr lang="en-US"/>
               <a:t>7</a:t>
-            </a:fld>
-            <a:endParaRPr lang="en-US"/>
-          </a:p>
-        </p:txBody>
-      </p:sp>
-    </p:spTree>
-    <p:extLst>
-      <p:ext uri="{BB962C8B-B14F-4D97-AF65-F5344CB8AC3E}">
-        <p14:creationId xmlns:p14="http://schemas.microsoft.com/office/powerpoint/2010/main" val="1024086991"/>
-      </p:ext>
-    </p:extLst>
-  </p:cSld>
-  <p:clrMapOvr>
-    <a:masterClrMapping/>
-  </p:clrMapOvr>
-</p:notes>
-</file>
-
-<file path=ppt/notesSlides/notesSlide8.xml><?xml version="1.0" encoding="utf-8"?>
-<p:notes xmlns:a="http://schemas.openxmlformats.org/drawingml/2006/main" xmlns:r="http://schemas.openxmlformats.org/officeDocument/2006/relationships" xmlns:p="http://schemas.openxmlformats.org/presentationml/2006/main">
-  <p:cSld>
-    <p:spTree>
-      <p:nvGrpSpPr>
-        <p:cNvPr id="1" name=""/>
-        <p:cNvGrpSpPr/>
-        <p:nvPr/>
-      </p:nvGrpSpPr>
-      <p:grpSpPr>
-        <a:xfrm>
-          <a:off x="0" y="0"/>
-          <a:ext cx="0" cy="0"/>
-          <a:chOff x="0" y="0"/>
-          <a:chExt cx="0" cy="0"/>
-        </a:xfrm>
-      </p:grpSpPr>
-      <p:sp>
-        <p:nvSpPr>
-          <p:cNvPr id="2" name="Slide Image Placeholder 1"/>
-          <p:cNvSpPr>
-            <a:spLocks noGrp="1" noRot="1" noChangeAspect="1"/>
-          </p:cNvSpPr>
-          <p:nvPr>
-            <p:ph type="sldImg"/>
-          </p:nvPr>
-        </p:nvSpPr>
-        <p:spPr/>
-      </p:sp>
-      <p:sp>
-        <p:nvSpPr>
-          <p:cNvPr id="3" name="Notes Placeholder 2"/>
-          <p:cNvSpPr>
-            <a:spLocks noGrp="1"/>
-          </p:cNvSpPr>
-          <p:nvPr>
-            <p:ph type="body" idx="1"/>
-          </p:nvPr>
-        </p:nvSpPr>
-        <p:spPr/>
-        <p:txBody>
-          <a:bodyPr/>
-          <a:lstStyle/>
-          <a:p>
-            <a:r>
-              <a:rPr lang="en-US" dirty="0"/>
-              <a:t/>
-            </a:r>
-            <a:endParaRPr lang="en-US" dirty="0"/>
-          </a:p>
-        </p:txBody>
-      </p:sp>
-      <p:sp>
-        <p:nvSpPr>
-          <p:cNvPr id="4" name="Slide Number Placeholder 3"/>
-          <p:cNvSpPr>
-            <a:spLocks noGrp="1"/>
-          </p:cNvSpPr>
-          <p:nvPr>
-            <p:ph type="sldNum" sz="quarter" idx="10"/>
-          </p:nvPr>
-        </p:nvSpPr>
-        <p:spPr/>
-        <p:txBody>
-          <a:bodyPr/>
-          <a:lstStyle/>
-          <a:p>
-            <a:fld id="{F7021451-1387-4CA6-816F-3879F97B5CBC}" type="slidenum">
-              <a:rPr lang="en-US"/>
-              <a:t>8</a:t>
             </a:fld>
             <a:endParaRPr lang="en-US"/>
           </a:p>
@@ -1477,6 +1388,13 @@
 <file path=ppt/slides/slide1.xml><?xml version="1.0" encoding="utf-8"?>
 <p:sld xmlns:a="http://schemas.openxmlformats.org/drawingml/2006/main" xmlns:r="http://schemas.openxmlformats.org/officeDocument/2006/relationships" xmlns:p="http://schemas.openxmlformats.org/presentationml/2006/main">
   <p:cSld name="Slide 1">
+    <p:bg>
+      <p:bgPr>
+        <a:solidFill>
+          <a:srgbClr val="2A9D8F"/>
+        </a:solidFill>
+      </p:bgPr>
+    </p:bg>
     <p:spTree>
       <p:nvGrpSpPr>
         <p:cNvPr id="1" name=""/>
@@ -1499,55 +1417,15 @@
         </p:nvSpPr>
         <p:spPr>
           <a:xfrm>
-            <a:off x="0" y="0"/>
-            <a:ext cx="9144000" cy="5143500"/>
-          </a:xfrm>
-          <a:prstGeom prst="rect">
-            <a:avLst/>
-          </a:prstGeom>
-          <a:solidFill>
-            <a:srgbClr val="1B2A4A"/>
-          </a:solidFill>
-          <a:ln/>
-        </p:spPr>
-      </p:sp>
-      <p:sp>
-        <p:nvSpPr>
-          <p:cNvPr id="3" name="Shape 1"/>
-          <p:cNvSpPr/>
-          <p:nvPr/>
-        </p:nvSpPr>
-        <p:spPr>
-          <a:xfrm>
-            <a:off x="0" y="4777740"/>
-            <a:ext cx="9144000" cy="365760"/>
-          </a:xfrm>
-          <a:prstGeom prst="rect">
-            <a:avLst/>
-          </a:prstGeom>
-          <a:solidFill>
-            <a:srgbClr val="2A9D8F"/>
-          </a:solidFill>
-          <a:ln/>
-        </p:spPr>
-      </p:sp>
-      <p:sp>
-        <p:nvSpPr>
-          <p:cNvPr id="4" name="Shape 2"/>
-          <p:cNvSpPr/>
-          <p:nvPr/>
-        </p:nvSpPr>
-        <p:spPr>
-          <a:xfrm>
-            <a:off x="6858000" y="-1371600"/>
-            <a:ext cx="4572000" cy="4572000"/>
+            <a:off x="7772400" y="-914400"/>
+            <a:ext cx="3657600" cy="3657600"/>
           </a:xfrm>
           <a:prstGeom prst="ellipse">
             <a:avLst/>
           </a:prstGeom>
           <a:solidFill>
-            <a:srgbClr val="2A9D8F">
-              <a:alpha val="12000"/>
+            <a:srgbClr val="FFFFFF">
+              <a:alpha val="8000"/>
             </a:srgbClr>
           </a:solidFill>
           <a:ln/>
@@ -1555,14 +1433,14 @@
       </p:sp>
       <p:sp>
         <p:nvSpPr>
-          <p:cNvPr id="5" name="Text 3"/>
+          <p:cNvPr id="3" name="Text 1"/>
           <p:cNvSpPr/>
           <p:nvPr/>
         </p:nvSpPr>
         <p:spPr>
           <a:xfrm>
-            <a:off x="731520" y="914400"/>
-            <a:ext cx="7680960" cy="457200"/>
+            <a:off x="731520" y="548640"/>
+            <a:ext cx="7315200" cy="365760"/>
           </a:xfrm>
           <a:prstGeom prst="rect">
             <a:avLst/>
@@ -1578,30 +1456,30 @@
               <a:buNone/>
             </a:pPr>
             <a:r>
-              <a:rPr lang="en-US" sz="1300" b="1" spc="500" kern="0" dirty="0">
+              <a:rPr lang="en-US" sz="1100" b="1" dirty="0">
                 <a:solidFill>
-                  <a:srgbClr val="2A9D8F"/>
+                  <a:srgbClr val="F2D68A"/>
                 </a:solidFill>
-                <a:latin typeface="Calibri" pitchFamily="34" charset="0"/>
-                <a:ea typeface="Calibri" pitchFamily="34" charset="-122"/>
-                <a:cs typeface="Calibri" pitchFamily="34" charset="-120"/>
+                <a:latin typeface="Arial" pitchFamily="34" charset="0"/>
+                <a:ea typeface="Arial" pitchFamily="34" charset="-122"/>
+                <a:cs typeface="Arial" pitchFamily="34" charset="-120"/>
               </a:rPr>
               <a:t>GRADE 6 SCIENCE</a:t>
             </a:r>
-            <a:endParaRPr lang="en-US" sz="1300" dirty="0"/>
+            <a:endParaRPr lang="en-US" sz="1100" dirty="0"/>
           </a:p>
         </p:txBody>
       </p:sp>
       <p:sp>
         <p:nvSpPr>
-          <p:cNvPr id="6" name="Text 4"/>
+          <p:cNvPr id="4" name="Text 2"/>
           <p:cNvSpPr/>
           <p:nvPr/>
         </p:nvSpPr>
         <p:spPr>
           <a:xfrm>
-            <a:off x="731520" y="1463040"/>
-            <a:ext cx="6858000" cy="1645920"/>
+            <a:off x="731520" y="1371600"/>
+            <a:ext cx="9144000" cy="1645920"/>
           </a:xfrm>
           <a:prstGeom prst="rect">
             <a:avLst/>
@@ -1610,14 +1488,17 @@
           <a:ln/>
         </p:spPr>
         <p:txBody>
-          <a:bodyPr wrap="square" rtlCol="0" anchor="t"/>
+          <a:bodyPr wrap="square" rtlCol="0" anchor="ctr"/>
           <a:lstStyle/>
           <a:p>
             <a:pPr indent="0" marL="0">
+              <a:lnSpc>
+                <a:spcPct val="110000"/>
+              </a:lnSpc>
               <a:buNone/>
             </a:pPr>
             <a:r>
-              <a:rPr lang="en-US" sz="3800" b="1" dirty="0">
+              <a:rPr lang="en-US" sz="3600" b="1" dirty="0">
                 <a:solidFill>
                   <a:srgbClr val="FFFFFF"/>
                 </a:solidFill>
@@ -1627,20 +1508,20 @@
               </a:rPr>
               <a:t>The Particle Model</a:t>
             </a:r>
-            <a:endParaRPr lang="en-US" sz="3800" dirty="0"/>
+            <a:endParaRPr lang="en-US" sz="3600" dirty="0"/>
           </a:p>
         </p:txBody>
       </p:sp>
       <p:sp>
         <p:nvSpPr>
-          <p:cNvPr id="7" name="Text 5"/>
+          <p:cNvPr id="5" name="Text 3"/>
           <p:cNvSpPr/>
           <p:nvPr/>
         </p:nvSpPr>
         <p:spPr>
           <a:xfrm>
             <a:off x="731520" y="3200400"/>
-            <a:ext cx="6400800" cy="548640"/>
+            <a:ext cx="7315200" cy="548640"/>
           </a:xfrm>
           <a:prstGeom prst="rect">
             <a:avLst/>
@@ -1656,13 +1537,15 @@
               <a:buNone/>
             </a:pPr>
             <a:r>
-              <a:rPr lang="en-US" sz="1600" i="1" dirty="0">
+              <a:rPr lang="en-US" sz="1600" dirty="0">
                 <a:solidFill>
-                  <a:srgbClr val="9B9690"/>
+                  <a:srgbClr val="FFFFFF">
+                    <a:alpha val="65000"/>
+                  </a:srgbClr>
                 </a:solidFill>
-                <a:latin typeface="Calibri" pitchFamily="34" charset="0"/>
-                <a:ea typeface="Calibri" pitchFamily="34" charset="-122"/>
-                <a:cs typeface="Calibri" pitchFamily="34" charset="-120"/>
+                <a:latin typeface="Arial" pitchFamily="34" charset="0"/>
+                <a:ea typeface="Arial" pitchFamily="34" charset="-122"/>
+                <a:cs typeface="Arial" pitchFamily="34" charset="-120"/>
               </a:rPr>
               <a:t>Everything is made of tiny particles</a:t>
             </a:r>
@@ -1672,14 +1555,14 @@
       </p:sp>
       <p:sp>
         <p:nvSpPr>
-          <p:cNvPr id="8" name="Text 6"/>
+          <p:cNvPr id="6" name="Text 4"/>
           <p:cNvSpPr/>
           <p:nvPr/>
         </p:nvSpPr>
         <p:spPr>
           <a:xfrm>
-            <a:off x="731520" y="4297680"/>
-            <a:ext cx="2743200" cy="365760"/>
+            <a:off x="731520" y="4389120"/>
+            <a:ext cx="2743200" cy="320040"/>
           </a:xfrm>
           <a:prstGeom prst="rect">
             <a:avLst/>
@@ -1695,17 +1578,19 @@
               <a:buNone/>
             </a:pPr>
             <a:r>
-              <a:rPr lang="en-US" sz="1100" dirty="0">
+              <a:rPr lang="en-US" sz="1000" dirty="0">
                 <a:solidFill>
-                  <a:srgbClr val="9B9690"/>
+                  <a:srgbClr val="FFFFFF">
+                    <a:alpha val="40000"/>
+                  </a:srgbClr>
                 </a:solidFill>
-                <a:latin typeface="Calibri" pitchFamily="34" charset="0"/>
-                <a:ea typeface="Calibri" pitchFamily="34" charset="-122"/>
-                <a:cs typeface="Calibri" pitchFamily="34" charset="-120"/>
+                <a:latin typeface="Arial" pitchFamily="34" charset="0"/>
+                <a:ea typeface="Arial" pitchFamily="34" charset="-122"/>
+                <a:cs typeface="Arial" pitchFamily="34" charset="-120"/>
               </a:rPr>
               <a:t>mrzocchi.com</a:t>
             </a:r>
-            <a:endParaRPr lang="en-US" sz="1100" dirty="0"/>
+            <a:endParaRPr lang="en-US" sz="1000" dirty="0"/>
           </a:p>
         </p:txBody>
       </p:sp>
@@ -1750,47 +1635,7 @@
         <p:spPr>
           <a:xfrm>
             <a:off x="0" y="0"/>
-            <a:ext cx="9144000" cy="822960"/>
-          </a:xfrm>
-          <a:prstGeom prst="rect">
-            <a:avLst/>
-          </a:prstGeom>
-          <a:solidFill>
-            <a:srgbClr val="FFFFFF"/>
-          </a:solidFill>
-          <a:ln/>
-        </p:spPr>
-      </p:sp>
-      <p:sp>
-        <p:nvSpPr>
-          <p:cNvPr id="3" name="Shape 1"/>
-          <p:cNvSpPr/>
-          <p:nvPr/>
-        </p:nvSpPr>
-        <p:spPr>
-          <a:xfrm>
-            <a:off x="0" y="804672"/>
-            <a:ext cx="9144000" cy="27432"/>
-          </a:xfrm>
-          <a:prstGeom prst="rect">
-            <a:avLst/>
-          </a:prstGeom>
-          <a:solidFill>
-            <a:srgbClr val="E5E2DC"/>
-          </a:solidFill>
-          <a:ln/>
-        </p:spPr>
-      </p:sp>
-      <p:sp>
-        <p:nvSpPr>
-          <p:cNvPr id="4" name="Shape 2"/>
-          <p:cNvSpPr/>
-          <p:nvPr/>
-        </p:nvSpPr>
-        <p:spPr>
-          <a:xfrm>
-            <a:off x="548640" y="201168"/>
-            <a:ext cx="54864" cy="420624"/>
+            <a:ext cx="73152" cy="5148072"/>
           </a:xfrm>
           <a:prstGeom prst="rect">
             <a:avLst/>
@@ -1803,14 +1648,14 @@
       </p:sp>
       <p:sp>
         <p:nvSpPr>
-          <p:cNvPr id="5" name="Text 3"/>
+          <p:cNvPr id="3" name="Text 1"/>
           <p:cNvSpPr/>
           <p:nvPr/>
         </p:nvSpPr>
         <p:spPr>
           <a:xfrm>
-            <a:off x="777240" y="137160"/>
-            <a:ext cx="7772400" cy="548640"/>
+            <a:off x="548640" y="274320"/>
+            <a:ext cx="9144000" cy="640080"/>
           </a:xfrm>
           <a:prstGeom prst="rect">
             <a:avLst/>
@@ -1819,14 +1664,14 @@
           <a:ln/>
         </p:spPr>
         <p:txBody>
-          <a:bodyPr wrap="square" lIns="0" tIns="0" rIns="0" bIns="0" rtlCol="0" anchor="ctr"/>
+          <a:bodyPr wrap="square" rtlCol="0" anchor="ctr"/>
           <a:lstStyle/>
           <a:p>
             <a:pPr indent="0" marL="0">
               <a:buNone/>
             </a:pPr>
             <a:r>
-              <a:rPr lang="en-US" sz="2000" b="1" dirty="0">
+              <a:rPr lang="en-US" sz="2400" b="1" dirty="0">
                 <a:solidFill>
                   <a:srgbClr val="1B2A4A"/>
                 </a:solidFill>
@@ -1836,47 +1681,20 @@
               </a:rPr>
               <a:t>Key Vocabulary</a:t>
             </a:r>
-            <a:endParaRPr lang="en-US" sz="2000" dirty="0"/>
+            <a:endParaRPr lang="en-US" sz="2400" dirty="0"/>
           </a:p>
         </p:txBody>
       </p:sp>
       <p:sp>
         <p:nvSpPr>
-          <p:cNvPr id="6" name="Shape 4"/>
+          <p:cNvPr id="4" name="Shape 2"/>
           <p:cNvSpPr/>
           <p:nvPr/>
         </p:nvSpPr>
         <p:spPr>
           <a:xfrm>
-            <a:off x="731520" y="1051560"/>
-            <a:ext cx="3657600" cy="658368"/>
-          </a:xfrm>
-          <a:prstGeom prst="rect">
-            <a:avLst/>
-          </a:prstGeom>
-          <a:solidFill>
-            <a:srgbClr val="FFFFFF"/>
-          </a:solidFill>
-          <a:ln/>
-          <a:effectLst>
-            <a:outerShdw sx="100000" sy="100000" kx="0" ky="0" algn="bl" rotWithShape="0" blurRad="50800" dist="25400" dir="8100000">
-              <a:srgbClr val="000000">
-                <a:alpha val="10000"/>
-              </a:srgbClr>
-            </a:outerShdw>
-          </a:effectLst>
-        </p:spPr>
-      </p:sp>
-      <p:sp>
-        <p:nvSpPr>
-          <p:cNvPr id="7" name="Shape 5"/>
-          <p:cNvSpPr/>
-          <p:nvPr/>
-        </p:nvSpPr>
-        <p:spPr>
-          <a:xfrm>
-            <a:off x="731520" y="1051560"/>
-            <a:ext cx="54864" cy="658368"/>
+            <a:off x="548640" y="960120"/>
+            <a:ext cx="2286000" cy="36576"/>
           </a:xfrm>
           <a:prstGeom prst="rect">
             <a:avLst/>
@@ -1889,14 +1707,41 @@
       </p:sp>
       <p:sp>
         <p:nvSpPr>
-          <p:cNvPr id="8" name="Text 6"/>
+          <p:cNvPr id="5" name="Shape 3"/>
           <p:cNvSpPr/>
           <p:nvPr/>
         </p:nvSpPr>
         <p:spPr>
           <a:xfrm>
-            <a:off x="914400" y="1051560"/>
-            <a:ext cx="1463040" cy="658368"/>
+            <a:off x="548640" y="1234440"/>
+            <a:ext cx="3200400" cy="914400"/>
+          </a:xfrm>
+          <a:prstGeom prst="roundRect">
+            <a:avLst>
+              <a:gd name="adj" fmla="val 10000"/>
+            </a:avLst>
+          </a:prstGeom>
+          <a:solidFill>
+            <a:srgbClr val="FFFFFF"/>
+          </a:solidFill>
+          <a:ln w="9525">
+            <a:solidFill>
+              <a:srgbClr val="E5E2DC"/>
+            </a:solidFill>
+            <a:prstDash val="solid"/>
+          </a:ln>
+        </p:spPr>
+      </p:sp>
+      <p:sp>
+        <p:nvSpPr>
+          <p:cNvPr id="6" name="Text 4"/>
+          <p:cNvSpPr/>
+          <p:nvPr/>
+        </p:nvSpPr>
+        <p:spPr>
+          <a:xfrm>
+            <a:off x="685800" y="1307592"/>
+            <a:ext cx="2926080" cy="320040"/>
           </a:xfrm>
           <a:prstGeom prst="rect">
             <a:avLst/>
@@ -1905,16 +1750,16 @@
           <a:ln/>
         </p:spPr>
         <p:txBody>
-          <a:bodyPr wrap="square" lIns="0" tIns="0" rIns="0" bIns="0" rtlCol="0" anchor="ctr"/>
+          <a:bodyPr wrap="square" rtlCol="0" anchor="ctr"/>
           <a:lstStyle/>
           <a:p>
             <a:pPr indent="0" marL="0">
               <a:buNone/>
             </a:pPr>
             <a:r>
-              <a:rPr lang="en-US" sz="1300" b="1" dirty="0">
+              <a:rPr lang="en-US" sz="1400" b="1" dirty="0">
                 <a:solidFill>
-                  <a:srgbClr val="1B2A4A"/>
+                  <a:srgbClr val="2A9D8F"/>
                 </a:solidFill>
                 <a:latin typeface="Georgia" pitchFamily="34" charset="0"/>
                 <a:ea typeface="Georgia" pitchFamily="34" charset="-122"/>
@@ -1922,20 +1767,20 @@
               </a:rPr>
               <a:t>Particle</a:t>
             </a:r>
-            <a:endParaRPr lang="en-US" sz="1300" dirty="0"/>
+            <a:endParaRPr lang="en-US" sz="1400" dirty="0"/>
           </a:p>
         </p:txBody>
       </p:sp>
       <p:sp>
         <p:nvSpPr>
-          <p:cNvPr id="9" name="Text 7"/>
+          <p:cNvPr id="7" name="Text 5"/>
           <p:cNvSpPr/>
           <p:nvPr/>
         </p:nvSpPr>
         <p:spPr>
           <a:xfrm>
-            <a:off x="2377440" y="1051560"/>
-            <a:ext cx="1920240" cy="658368"/>
+            <a:off x="685800" y="1645920"/>
+            <a:ext cx="2926080" cy="457200"/>
           </a:xfrm>
           <a:prstGeom prst="rect">
             <a:avLst/>
@@ -1944,10 +1789,13 @@
           <a:ln/>
         </p:spPr>
         <p:txBody>
-          <a:bodyPr wrap="square" lIns="0" tIns="0" rIns="0" bIns="0" rtlCol="0" anchor="ctr"/>
+          <a:bodyPr wrap="square" rtlCol="0" anchor="ctr"/>
           <a:lstStyle/>
           <a:p>
             <a:pPr indent="0" marL="0">
+              <a:lnSpc>
+                <a:spcPct val="130000"/>
+              </a:lnSpc>
               <a:buNone/>
             </a:pPr>
             <a:r>
@@ -1955,11 +1803,11 @@
                 <a:solidFill>
                   <a:srgbClr val="6B6660"/>
                 </a:solidFill>
-                <a:latin typeface="Calibri" pitchFamily="34" charset="0"/>
-                <a:ea typeface="Calibri" pitchFamily="34" charset="-122"/>
-                <a:cs typeface="Calibri" pitchFamily="34" charset="-120"/>
+                <a:latin typeface="Arial" pitchFamily="34" charset="0"/>
+                <a:ea typeface="Arial" pitchFamily="34" charset="-122"/>
+                <a:cs typeface="Arial" pitchFamily="34" charset="-120"/>
               </a:rPr>
-              <a:t>Tiny piece of matter (atom or molecule)</a:t>
+              <a:t>A tiny piece of matter — too small to see.</a:t>
             </a:r>
             <a:endParaRPr lang="en-US" sz="1100" dirty="0"/>
           </a:p>
@@ -1967,329 +1815,59 @@
       </p:sp>
       <p:sp>
         <p:nvSpPr>
-          <p:cNvPr id="10" name="Shape 8"/>
+          <p:cNvPr id="8" name="Shape 6"/>
           <p:cNvSpPr/>
           <p:nvPr/>
         </p:nvSpPr>
         <p:spPr>
           <a:xfrm>
-            <a:off x="4754880" y="1051560"/>
-            <a:ext cx="3657600" cy="658368"/>
-          </a:xfrm>
-          <a:prstGeom prst="rect">
-            <a:avLst/>
+            <a:off x="4023360" y="1234440"/>
+            <a:ext cx="3200400" cy="914400"/>
+          </a:xfrm>
+          <a:prstGeom prst="roundRect">
+            <a:avLst>
+              <a:gd name="adj" fmla="val 10000"/>
+            </a:avLst>
           </a:prstGeom>
           <a:solidFill>
             <a:srgbClr val="FFFFFF"/>
           </a:solidFill>
-          <a:ln/>
-          <a:effectLst>
-            <a:outerShdw sx="100000" sy="100000" kx="0" ky="0" algn="bl" rotWithShape="0" blurRad="50800" dist="25400" dir="8100000">
-              <a:srgbClr val="000000">
-                <a:alpha val="10000"/>
-              </a:srgbClr>
-            </a:outerShdw>
-          </a:effectLst>
-        </p:spPr>
-      </p:sp>
-      <p:sp>
-        <p:nvSpPr>
-          <p:cNvPr id="11" name="Shape 9"/>
+          <a:ln w="9525">
+            <a:solidFill>
+              <a:srgbClr val="E5E2DC"/>
+            </a:solidFill>
+            <a:prstDash val="solid"/>
+          </a:ln>
+        </p:spPr>
+      </p:sp>
+      <p:sp>
+        <p:nvSpPr>
+          <p:cNvPr id="9" name="Text 7"/>
           <p:cNvSpPr/>
           <p:nvPr/>
         </p:nvSpPr>
         <p:spPr>
           <a:xfrm>
-            <a:off x="4754880" y="1051560"/>
-            <a:ext cx="54864" cy="658368"/>
+            <a:off x="4160520" y="1307592"/>
+            <a:ext cx="2926080" cy="320040"/>
           </a:xfrm>
           <a:prstGeom prst="rect">
             <a:avLst/>
           </a:prstGeom>
-          <a:solidFill>
-            <a:srgbClr val="2A9D8F"/>
-          </a:solidFill>
-          <a:ln/>
-        </p:spPr>
-      </p:sp>
-      <p:sp>
-        <p:nvSpPr>
-          <p:cNvPr id="12" name="Text 10"/>
-          <p:cNvSpPr/>
-          <p:nvPr/>
-        </p:nvSpPr>
-        <p:spPr>
-          <a:xfrm>
-            <a:off x="4937760" y="1051560"/>
-            <a:ext cx="1463040" cy="658368"/>
-          </a:xfrm>
-          <a:prstGeom prst="rect">
-            <a:avLst/>
-          </a:prstGeom>
           <a:noFill/>
           <a:ln/>
         </p:spPr>
         <p:txBody>
-          <a:bodyPr wrap="square" lIns="0" tIns="0" rIns="0" bIns="0" rtlCol="0" anchor="ctr"/>
+          <a:bodyPr wrap="square" rtlCol="0" anchor="ctr"/>
           <a:lstStyle/>
           <a:p>
             <a:pPr indent="0" marL="0">
               <a:buNone/>
             </a:pPr>
             <a:r>
-              <a:rPr lang="en-US" sz="1300" b="1" dirty="0">
+              <a:rPr lang="en-US" sz="1400" b="1" dirty="0">
                 <a:solidFill>
-                  <a:srgbClr val="1B2A4A"/>
-                </a:solidFill>
-                <a:latin typeface="Georgia" pitchFamily="34" charset="0"/>
-                <a:ea typeface="Georgia" pitchFamily="34" charset="-122"/>
-                <a:cs typeface="Georgia" pitchFamily="34" charset="-120"/>
-              </a:rPr>
-              <a:t>Matter</a:t>
-            </a:r>
-            <a:endParaRPr lang="en-US" sz="1300" dirty="0"/>
-          </a:p>
-        </p:txBody>
-      </p:sp>
-      <p:sp>
-        <p:nvSpPr>
-          <p:cNvPr id="13" name="Text 11"/>
-          <p:cNvSpPr/>
-          <p:nvPr/>
-        </p:nvSpPr>
-        <p:spPr>
-          <a:xfrm>
-            <a:off x="6400800" y="1051560"/>
-            <a:ext cx="1920240" cy="658368"/>
-          </a:xfrm>
-          <a:prstGeom prst="rect">
-            <a:avLst/>
-          </a:prstGeom>
-          <a:noFill/>
-          <a:ln/>
-        </p:spPr>
-        <p:txBody>
-          <a:bodyPr wrap="square" lIns="0" tIns="0" rIns="0" bIns="0" rtlCol="0" anchor="ctr"/>
-          <a:lstStyle/>
-          <a:p>
-            <a:pPr indent="0" marL="0">
-              <a:buNone/>
-            </a:pPr>
-            <a:r>
-              <a:rPr lang="en-US" sz="1100" dirty="0">
-                <a:solidFill>
-                  <a:srgbClr val="6B6660"/>
-                </a:solidFill>
-                <a:latin typeface="Calibri" pitchFamily="34" charset="0"/>
-                <a:ea typeface="Calibri" pitchFamily="34" charset="-122"/>
-                <a:cs typeface="Calibri" pitchFamily="34" charset="-120"/>
-              </a:rPr>
-              <a:t>Anything that has mass and takes up space</a:t>
-            </a:r>
-            <a:endParaRPr lang="en-US" sz="1100" dirty="0"/>
-          </a:p>
-        </p:txBody>
-      </p:sp>
-      <p:sp>
-        <p:nvSpPr>
-          <p:cNvPr id="14" name="Shape 12"/>
-          <p:cNvSpPr/>
-          <p:nvPr/>
-        </p:nvSpPr>
-        <p:spPr>
-          <a:xfrm>
-            <a:off x="731520" y="1819656"/>
-            <a:ext cx="3657600" cy="658368"/>
-          </a:xfrm>
-          <a:prstGeom prst="rect">
-            <a:avLst/>
-          </a:prstGeom>
-          <a:solidFill>
-            <a:srgbClr val="FFFFFF"/>
-          </a:solidFill>
-          <a:ln/>
-          <a:effectLst>
-            <a:outerShdw sx="100000" sy="100000" kx="0" ky="0" algn="bl" rotWithShape="0" blurRad="50800" dist="25400" dir="8100000">
-              <a:srgbClr val="000000">
-                <a:alpha val="10000"/>
-              </a:srgbClr>
-            </a:outerShdw>
-          </a:effectLst>
-        </p:spPr>
-      </p:sp>
-      <p:sp>
-        <p:nvSpPr>
-          <p:cNvPr id="15" name="Shape 13"/>
-          <p:cNvSpPr/>
-          <p:nvPr/>
-        </p:nvSpPr>
-        <p:spPr>
-          <a:xfrm>
-            <a:off x="731520" y="1819656"/>
-            <a:ext cx="54864" cy="658368"/>
-          </a:xfrm>
-          <a:prstGeom prst="rect">
-            <a:avLst/>
-          </a:prstGeom>
-          <a:solidFill>
-            <a:srgbClr val="2A9D8F"/>
-          </a:solidFill>
-          <a:ln/>
-        </p:spPr>
-      </p:sp>
-      <p:sp>
-        <p:nvSpPr>
-          <p:cNvPr id="16" name="Text 14"/>
-          <p:cNvSpPr/>
-          <p:nvPr/>
-        </p:nvSpPr>
-        <p:spPr>
-          <a:xfrm>
-            <a:off x="914400" y="1819656"/>
-            <a:ext cx="1463040" cy="658368"/>
-          </a:xfrm>
-          <a:prstGeom prst="rect">
-            <a:avLst/>
-          </a:prstGeom>
-          <a:noFill/>
-          <a:ln/>
-        </p:spPr>
-        <p:txBody>
-          <a:bodyPr wrap="square" lIns="0" tIns="0" rIns="0" bIns="0" rtlCol="0" anchor="ctr"/>
-          <a:lstStyle/>
-          <a:p>
-            <a:pPr indent="0" marL="0">
-              <a:buNone/>
-            </a:pPr>
-            <a:r>
-              <a:rPr lang="en-US" sz="1300" b="1" dirty="0">
-                <a:solidFill>
-                  <a:srgbClr val="1B2A4A"/>
-                </a:solidFill>
-                <a:latin typeface="Georgia" pitchFamily="34" charset="0"/>
-                <a:ea typeface="Georgia" pitchFamily="34" charset="-122"/>
-                <a:cs typeface="Georgia" pitchFamily="34" charset="-120"/>
-              </a:rPr>
-              <a:t>State</a:t>
-            </a:r>
-            <a:endParaRPr lang="en-US" sz="1300" dirty="0"/>
-          </a:p>
-        </p:txBody>
-      </p:sp>
-      <p:sp>
-        <p:nvSpPr>
-          <p:cNvPr id="17" name="Text 15"/>
-          <p:cNvSpPr/>
-          <p:nvPr/>
-        </p:nvSpPr>
-        <p:spPr>
-          <a:xfrm>
-            <a:off x="2377440" y="1819656"/>
-            <a:ext cx="1920240" cy="658368"/>
-          </a:xfrm>
-          <a:prstGeom prst="rect">
-            <a:avLst/>
-          </a:prstGeom>
-          <a:noFill/>
-          <a:ln/>
-        </p:spPr>
-        <p:txBody>
-          <a:bodyPr wrap="square" lIns="0" tIns="0" rIns="0" bIns="0" rtlCol="0" anchor="ctr"/>
-          <a:lstStyle/>
-          <a:p>
-            <a:pPr indent="0" marL="0">
-              <a:buNone/>
-            </a:pPr>
-            <a:r>
-              <a:rPr lang="en-US" sz="1100" dirty="0">
-                <a:solidFill>
-                  <a:srgbClr val="6B6660"/>
-                </a:solidFill>
-                <a:latin typeface="Calibri" pitchFamily="34" charset="0"/>
-                <a:ea typeface="Calibri" pitchFamily="34" charset="-122"/>
-                <a:cs typeface="Calibri" pitchFamily="34" charset="-120"/>
-              </a:rPr>
-              <a:t>Solid, liquid, or gas</a:t>
-            </a:r>
-            <a:endParaRPr lang="en-US" sz="1100" dirty="0"/>
-          </a:p>
-        </p:txBody>
-      </p:sp>
-      <p:sp>
-        <p:nvSpPr>
-          <p:cNvPr id="18" name="Shape 16"/>
-          <p:cNvSpPr/>
-          <p:nvPr/>
-        </p:nvSpPr>
-        <p:spPr>
-          <a:xfrm>
-            <a:off x="4754880" y="1819656"/>
-            <a:ext cx="3657600" cy="658368"/>
-          </a:xfrm>
-          <a:prstGeom prst="rect">
-            <a:avLst/>
-          </a:prstGeom>
-          <a:solidFill>
-            <a:srgbClr val="FFFFFF"/>
-          </a:solidFill>
-          <a:ln/>
-          <a:effectLst>
-            <a:outerShdw sx="100000" sy="100000" kx="0" ky="0" algn="bl" rotWithShape="0" blurRad="50800" dist="25400" dir="8100000">
-              <a:srgbClr val="000000">
-                <a:alpha val="10000"/>
-              </a:srgbClr>
-            </a:outerShdw>
-          </a:effectLst>
-        </p:spPr>
-      </p:sp>
-      <p:sp>
-        <p:nvSpPr>
-          <p:cNvPr id="19" name="Shape 17"/>
-          <p:cNvSpPr/>
-          <p:nvPr/>
-        </p:nvSpPr>
-        <p:spPr>
-          <a:xfrm>
-            <a:off x="4754880" y="1819656"/>
-            <a:ext cx="54864" cy="658368"/>
-          </a:xfrm>
-          <a:prstGeom prst="rect">
-            <a:avLst/>
-          </a:prstGeom>
-          <a:solidFill>
-            <a:srgbClr val="2A9D8F"/>
-          </a:solidFill>
-          <a:ln/>
-        </p:spPr>
-      </p:sp>
-      <p:sp>
-        <p:nvSpPr>
-          <p:cNvPr id="20" name="Text 18"/>
-          <p:cNvSpPr/>
-          <p:nvPr/>
-        </p:nvSpPr>
-        <p:spPr>
-          <a:xfrm>
-            <a:off x="4937760" y="1819656"/>
-            <a:ext cx="1463040" cy="658368"/>
-          </a:xfrm>
-          <a:prstGeom prst="rect">
-            <a:avLst/>
-          </a:prstGeom>
-          <a:noFill/>
-          <a:ln/>
-        </p:spPr>
-        <p:txBody>
-          <a:bodyPr wrap="square" lIns="0" tIns="0" rIns="0" bIns="0" rtlCol="0" anchor="ctr"/>
-          <a:lstStyle/>
-          <a:p>
-            <a:pPr indent="0" marL="0">
-              <a:buNone/>
-            </a:pPr>
-            <a:r>
-              <a:rPr lang="en-US" sz="1300" b="1" dirty="0">
-                <a:solidFill>
-                  <a:srgbClr val="1B2A4A"/>
+                  <a:srgbClr val="2A9D8F"/>
                 </a:solidFill>
                 <a:latin typeface="Georgia" pitchFamily="34" charset="0"/>
                 <a:ea typeface="Georgia" pitchFamily="34" charset="-122"/>
@@ -2297,20 +1875,20 @@
               </a:rPr>
               <a:t>Arrangement</a:t>
             </a:r>
-            <a:endParaRPr lang="en-US" sz="1300" dirty="0"/>
+            <a:endParaRPr lang="en-US" sz="1400" dirty="0"/>
           </a:p>
         </p:txBody>
       </p:sp>
       <p:sp>
         <p:nvSpPr>
-          <p:cNvPr id="21" name="Text 19"/>
+          <p:cNvPr id="10" name="Text 8"/>
           <p:cNvSpPr/>
           <p:nvPr/>
         </p:nvSpPr>
         <p:spPr>
           <a:xfrm>
-            <a:off x="6400800" y="1819656"/>
-            <a:ext cx="1920240" cy="658368"/>
+            <a:off x="4160520" y="1645920"/>
+            <a:ext cx="2926080" cy="457200"/>
           </a:xfrm>
           <a:prstGeom prst="rect">
             <a:avLst/>
@@ -2319,10 +1897,13 @@
           <a:ln/>
         </p:spPr>
         <p:txBody>
-          <a:bodyPr wrap="square" lIns="0" tIns="0" rIns="0" bIns="0" rtlCol="0" anchor="ctr"/>
+          <a:bodyPr wrap="square" rtlCol="0" anchor="ctr"/>
           <a:lstStyle/>
           <a:p>
             <a:pPr indent="0" marL="0">
+              <a:lnSpc>
+                <a:spcPct val="130000"/>
+              </a:lnSpc>
               <a:buNone/>
             </a:pPr>
             <a:r>
@@ -2330,11 +1911,11 @@
                 <a:solidFill>
                   <a:srgbClr val="6B6660"/>
                 </a:solidFill>
-                <a:latin typeface="Calibri" pitchFamily="34" charset="0"/>
-                <a:ea typeface="Calibri" pitchFamily="34" charset="-122"/>
-                <a:cs typeface="Calibri" pitchFamily="34" charset="-120"/>
+                <a:latin typeface="Arial" pitchFamily="34" charset="0"/>
+                <a:ea typeface="Arial" pitchFamily="34" charset="-122"/>
+                <a:cs typeface="Arial" pitchFamily="34" charset="-120"/>
               </a:rPr>
-              <a:t>How particles are organised</a:t>
+              <a:t>How particles are organised — regular or random.</a:t>
             </a:r>
             <a:endParaRPr lang="en-US" sz="1100" dirty="0"/>
           </a:p>
@@ -2342,100 +1923,80 @@
       </p:sp>
       <p:sp>
         <p:nvSpPr>
-          <p:cNvPr id="22" name="Shape 20"/>
+          <p:cNvPr id="11" name="Shape 9"/>
           <p:cNvSpPr/>
           <p:nvPr/>
         </p:nvSpPr>
         <p:spPr>
           <a:xfrm>
-            <a:off x="731520" y="2587752"/>
-            <a:ext cx="3657600" cy="658368"/>
-          </a:xfrm>
-          <a:prstGeom prst="rect">
-            <a:avLst/>
+            <a:off x="7498080" y="1234440"/>
+            <a:ext cx="3200400" cy="914400"/>
+          </a:xfrm>
+          <a:prstGeom prst="roundRect">
+            <a:avLst>
+              <a:gd name="adj" fmla="val 10000"/>
+            </a:avLst>
           </a:prstGeom>
           <a:solidFill>
             <a:srgbClr val="FFFFFF"/>
           </a:solidFill>
-          <a:ln/>
-          <a:effectLst>
-            <a:outerShdw sx="100000" sy="100000" kx="0" ky="0" algn="bl" rotWithShape="0" blurRad="50800" dist="25400" dir="8100000">
-              <a:srgbClr val="000000">
-                <a:alpha val="10000"/>
-              </a:srgbClr>
-            </a:outerShdw>
-          </a:effectLst>
-        </p:spPr>
-      </p:sp>
-      <p:sp>
-        <p:nvSpPr>
-          <p:cNvPr id="23" name="Shape 21"/>
+          <a:ln w="9525">
+            <a:solidFill>
+              <a:srgbClr val="E5E2DC"/>
+            </a:solidFill>
+            <a:prstDash val="solid"/>
+          </a:ln>
+        </p:spPr>
+      </p:sp>
+      <p:sp>
+        <p:nvSpPr>
+          <p:cNvPr id="12" name="Text 10"/>
           <p:cNvSpPr/>
           <p:nvPr/>
         </p:nvSpPr>
         <p:spPr>
           <a:xfrm>
-            <a:off x="731520" y="2587752"/>
-            <a:ext cx="54864" cy="658368"/>
+            <a:off x="7635240" y="1307592"/>
+            <a:ext cx="2926080" cy="320040"/>
           </a:xfrm>
           <a:prstGeom prst="rect">
             <a:avLst/>
           </a:prstGeom>
-          <a:solidFill>
-            <a:srgbClr val="2A9D8F"/>
-          </a:solidFill>
-          <a:ln/>
-        </p:spPr>
-      </p:sp>
-      <p:sp>
-        <p:nvSpPr>
-          <p:cNvPr id="24" name="Text 22"/>
-          <p:cNvSpPr/>
-          <p:nvPr/>
-        </p:nvSpPr>
-        <p:spPr>
-          <a:xfrm>
-            <a:off x="914400" y="2587752"/>
-            <a:ext cx="1463040" cy="658368"/>
-          </a:xfrm>
-          <a:prstGeom prst="rect">
-            <a:avLst/>
-          </a:prstGeom>
           <a:noFill/>
           <a:ln/>
         </p:spPr>
         <p:txBody>
-          <a:bodyPr wrap="square" lIns="0" tIns="0" rIns="0" bIns="0" rtlCol="0" anchor="ctr"/>
+          <a:bodyPr wrap="square" rtlCol="0" anchor="ctr"/>
           <a:lstStyle/>
           <a:p>
             <a:pPr indent="0" marL="0">
               <a:buNone/>
             </a:pPr>
             <a:r>
-              <a:rPr lang="en-US" sz="1300" b="1" dirty="0">
+              <a:rPr lang="en-US" sz="1400" b="1" dirty="0">
                 <a:solidFill>
-                  <a:srgbClr val="1B2A4A"/>
+                  <a:srgbClr val="2A9D8F"/>
                 </a:solidFill>
                 <a:latin typeface="Georgia" pitchFamily="34" charset="0"/>
                 <a:ea typeface="Georgia" pitchFamily="34" charset="-122"/>
                 <a:cs typeface="Georgia" pitchFamily="34" charset="-120"/>
               </a:rPr>
-              <a:t>Energy</a:t>
-            </a:r>
-            <a:endParaRPr lang="en-US" sz="1300" dirty="0"/>
+              <a:t>Vibrate</a:t>
+            </a:r>
+            <a:endParaRPr lang="en-US" sz="1400" dirty="0"/>
           </a:p>
         </p:txBody>
       </p:sp>
       <p:sp>
         <p:nvSpPr>
-          <p:cNvPr id="25" name="Text 23"/>
+          <p:cNvPr id="13" name="Text 11"/>
           <p:cNvSpPr/>
           <p:nvPr/>
         </p:nvSpPr>
         <p:spPr>
           <a:xfrm>
-            <a:off x="2377440" y="2587752"/>
-            <a:ext cx="1920240" cy="658368"/>
+            <a:off x="7635240" y="1645920"/>
+            <a:ext cx="2926080" cy="457200"/>
           </a:xfrm>
           <a:prstGeom prst="rect">
             <a:avLst/>
@@ -2444,10 +2005,13 @@
           <a:ln/>
         </p:spPr>
         <p:txBody>
-          <a:bodyPr wrap="square" lIns="0" tIns="0" rIns="0" bIns="0" rtlCol="0" anchor="ctr"/>
+          <a:bodyPr wrap="square" rtlCol="0" anchor="ctr"/>
           <a:lstStyle/>
           <a:p>
             <a:pPr indent="0" marL="0">
+              <a:lnSpc>
+                <a:spcPct val="130000"/>
+              </a:lnSpc>
               <a:buNone/>
             </a:pPr>
             <a:r>
@@ -2455,11 +2019,11 @@
                 <a:solidFill>
                   <a:srgbClr val="6B6660"/>
                 </a:solidFill>
-                <a:latin typeface="Calibri" pitchFamily="34" charset="0"/>
-                <a:ea typeface="Calibri" pitchFamily="34" charset="-122"/>
-                <a:cs typeface="Calibri" pitchFamily="34" charset="-120"/>
+                <a:latin typeface="Arial" pitchFamily="34" charset="0"/>
+                <a:ea typeface="Arial" pitchFamily="34" charset="-122"/>
+                <a:cs typeface="Arial" pitchFamily="34" charset="-120"/>
               </a:rPr>
-              <a:t>What makes particles move</a:t>
+              <a:t>Particles shaking back and forth in position.</a:t>
             </a:r>
             <a:endParaRPr lang="en-US" sz="1100" dirty="0"/>
           </a:p>
@@ -2467,100 +2031,80 @@
       </p:sp>
       <p:sp>
         <p:nvSpPr>
-          <p:cNvPr id="26" name="Shape 24"/>
+          <p:cNvPr id="14" name="Shape 12"/>
           <p:cNvSpPr/>
           <p:nvPr/>
         </p:nvSpPr>
         <p:spPr>
           <a:xfrm>
-            <a:off x="4754880" y="2587752"/>
-            <a:ext cx="3657600" cy="658368"/>
-          </a:xfrm>
-          <a:prstGeom prst="rect">
-            <a:avLst/>
+            <a:off x="548640" y="2286000"/>
+            <a:ext cx="3200400" cy="914400"/>
+          </a:xfrm>
+          <a:prstGeom prst="roundRect">
+            <a:avLst>
+              <a:gd name="adj" fmla="val 10000"/>
+            </a:avLst>
           </a:prstGeom>
           <a:solidFill>
             <a:srgbClr val="FFFFFF"/>
           </a:solidFill>
-          <a:ln/>
-          <a:effectLst>
-            <a:outerShdw sx="100000" sy="100000" kx="0" ky="0" algn="bl" rotWithShape="0" blurRad="50800" dist="25400" dir="8100000">
-              <a:srgbClr val="000000">
-                <a:alpha val="10000"/>
-              </a:srgbClr>
-            </a:outerShdw>
-          </a:effectLst>
-        </p:spPr>
-      </p:sp>
-      <p:sp>
-        <p:nvSpPr>
-          <p:cNvPr id="27" name="Shape 25"/>
+          <a:ln w="9525">
+            <a:solidFill>
+              <a:srgbClr val="E5E2DC"/>
+            </a:solidFill>
+            <a:prstDash val="solid"/>
+          </a:ln>
+        </p:spPr>
+      </p:sp>
+      <p:sp>
+        <p:nvSpPr>
+          <p:cNvPr id="15" name="Text 13"/>
           <p:cNvSpPr/>
           <p:nvPr/>
         </p:nvSpPr>
         <p:spPr>
           <a:xfrm>
-            <a:off x="4754880" y="2587752"/>
-            <a:ext cx="54864" cy="658368"/>
+            <a:off x="685800" y="2359152"/>
+            <a:ext cx="2926080" cy="320040"/>
           </a:xfrm>
           <a:prstGeom prst="rect">
             <a:avLst/>
           </a:prstGeom>
-          <a:solidFill>
-            <a:srgbClr val="2A9D8F"/>
-          </a:solidFill>
-          <a:ln/>
-        </p:spPr>
-      </p:sp>
-      <p:sp>
-        <p:nvSpPr>
-          <p:cNvPr id="28" name="Text 26"/>
-          <p:cNvSpPr/>
-          <p:nvPr/>
-        </p:nvSpPr>
-        <p:spPr>
-          <a:xfrm>
-            <a:off x="4937760" y="2587752"/>
-            <a:ext cx="1463040" cy="658368"/>
-          </a:xfrm>
-          <a:prstGeom prst="rect">
-            <a:avLst/>
-          </a:prstGeom>
           <a:noFill/>
           <a:ln/>
         </p:spPr>
         <p:txBody>
-          <a:bodyPr wrap="square" lIns="0" tIns="0" rIns="0" bIns="0" rtlCol="0" anchor="ctr"/>
+          <a:bodyPr wrap="square" rtlCol="0" anchor="ctr"/>
           <a:lstStyle/>
           <a:p>
             <a:pPr indent="0" marL="0">
               <a:buNone/>
             </a:pPr>
             <a:r>
-              <a:rPr lang="en-US" sz="1300" b="1" dirty="0">
+              <a:rPr lang="en-US" sz="1400" b="1" dirty="0">
                 <a:solidFill>
-                  <a:srgbClr val="1B2A4A"/>
+                  <a:srgbClr val="2A9D8F"/>
                 </a:solidFill>
                 <a:latin typeface="Georgia" pitchFamily="34" charset="0"/>
                 <a:ea typeface="Georgia" pitchFamily="34" charset="-122"/>
                 <a:cs typeface="Georgia" pitchFamily="34" charset="-120"/>
               </a:rPr>
-              <a:t>Temperature</a:t>
-            </a:r>
-            <a:endParaRPr lang="en-US" sz="1300" dirty="0"/>
+              <a:t>Kinetic Energy</a:t>
+            </a:r>
+            <a:endParaRPr lang="en-US" sz="1400" dirty="0"/>
           </a:p>
         </p:txBody>
       </p:sp>
       <p:sp>
         <p:nvSpPr>
-          <p:cNvPr id="29" name="Text 27"/>
+          <p:cNvPr id="16" name="Text 14"/>
           <p:cNvSpPr/>
           <p:nvPr/>
         </p:nvSpPr>
         <p:spPr>
           <a:xfrm>
-            <a:off x="6400800" y="2587752"/>
-            <a:ext cx="1920240" cy="658368"/>
+            <a:off x="685800" y="2697480"/>
+            <a:ext cx="2926080" cy="457200"/>
           </a:xfrm>
           <a:prstGeom prst="rect">
             <a:avLst/>
@@ -2569,10 +2113,13 @@
           <a:ln/>
         </p:spPr>
         <p:txBody>
-          <a:bodyPr wrap="square" lIns="0" tIns="0" rIns="0" bIns="0" rtlCol="0" anchor="ctr"/>
+          <a:bodyPr wrap="square" rtlCol="0" anchor="ctr"/>
           <a:lstStyle/>
           <a:p>
             <a:pPr indent="0" marL="0">
+              <a:lnSpc>
+                <a:spcPct val="130000"/>
+              </a:lnSpc>
               <a:buNone/>
             </a:pPr>
             <a:r>
@@ -2580,11 +2127,227 @@
                 <a:solidFill>
                   <a:srgbClr val="6B6660"/>
                 </a:solidFill>
-                <a:latin typeface="Calibri" pitchFamily="34" charset="0"/>
-                <a:ea typeface="Calibri" pitchFamily="34" charset="-122"/>
-                <a:cs typeface="Calibri" pitchFamily="34" charset="-120"/>
+                <a:latin typeface="Arial" pitchFamily="34" charset="0"/>
+                <a:ea typeface="Arial" pitchFamily="34" charset="-122"/>
+                <a:cs typeface="Arial" pitchFamily="34" charset="-120"/>
               </a:rPr>
-              <a:t>A measure of particle energy</a:t>
+              <a:t>The energy of movement — hotter = more energy.</a:t>
+            </a:r>
+            <a:endParaRPr lang="en-US" sz="1100" dirty="0"/>
+          </a:p>
+        </p:txBody>
+      </p:sp>
+      <p:sp>
+        <p:nvSpPr>
+          <p:cNvPr id="17" name="Shape 15"/>
+          <p:cNvSpPr/>
+          <p:nvPr/>
+        </p:nvSpPr>
+        <p:spPr>
+          <a:xfrm>
+            <a:off x="4023360" y="2286000"/>
+            <a:ext cx="3200400" cy="914400"/>
+          </a:xfrm>
+          <a:prstGeom prst="roundRect">
+            <a:avLst>
+              <a:gd name="adj" fmla="val 10000"/>
+            </a:avLst>
+          </a:prstGeom>
+          <a:solidFill>
+            <a:srgbClr val="FFFFFF"/>
+          </a:solidFill>
+          <a:ln w="9525">
+            <a:solidFill>
+              <a:srgbClr val="E5E2DC"/>
+            </a:solidFill>
+            <a:prstDash val="solid"/>
+          </a:ln>
+        </p:spPr>
+      </p:sp>
+      <p:sp>
+        <p:nvSpPr>
+          <p:cNvPr id="18" name="Text 16"/>
+          <p:cNvSpPr/>
+          <p:nvPr/>
+        </p:nvSpPr>
+        <p:spPr>
+          <a:xfrm>
+            <a:off x="4160520" y="2359152"/>
+            <a:ext cx="2926080" cy="320040"/>
+          </a:xfrm>
+          <a:prstGeom prst="rect">
+            <a:avLst/>
+          </a:prstGeom>
+          <a:noFill/>
+          <a:ln/>
+        </p:spPr>
+        <p:txBody>
+          <a:bodyPr wrap="square" rtlCol="0" anchor="ctr"/>
+          <a:lstStyle/>
+          <a:p>
+            <a:pPr indent="0" marL="0">
+              <a:buNone/>
+            </a:pPr>
+            <a:r>
+              <a:rPr lang="en-US" sz="1400" b="1" dirty="0">
+                <a:solidFill>
+                  <a:srgbClr val="2A9D8F"/>
+                </a:solidFill>
+                <a:latin typeface="Georgia" pitchFamily="34" charset="0"/>
+                <a:ea typeface="Georgia" pitchFamily="34" charset="-122"/>
+                <a:cs typeface="Georgia" pitchFamily="34" charset="-120"/>
+              </a:rPr>
+              <a:t>Attraction</a:t>
+            </a:r>
+            <a:endParaRPr lang="en-US" sz="1400" dirty="0"/>
+          </a:p>
+        </p:txBody>
+      </p:sp>
+      <p:sp>
+        <p:nvSpPr>
+          <p:cNvPr id="19" name="Text 17"/>
+          <p:cNvSpPr/>
+          <p:nvPr/>
+        </p:nvSpPr>
+        <p:spPr>
+          <a:xfrm>
+            <a:off x="4160520" y="2697480"/>
+            <a:ext cx="2926080" cy="457200"/>
+          </a:xfrm>
+          <a:prstGeom prst="rect">
+            <a:avLst/>
+          </a:prstGeom>
+          <a:noFill/>
+          <a:ln/>
+        </p:spPr>
+        <p:txBody>
+          <a:bodyPr wrap="square" rtlCol="0" anchor="ctr"/>
+          <a:lstStyle/>
+          <a:p>
+            <a:pPr indent="0" marL="0">
+              <a:lnSpc>
+                <a:spcPct val="130000"/>
+              </a:lnSpc>
+              <a:buNone/>
+            </a:pPr>
+            <a:r>
+              <a:rPr lang="en-US" sz="1100" dirty="0">
+                <a:solidFill>
+                  <a:srgbClr val="6B6660"/>
+                </a:solidFill>
+                <a:latin typeface="Arial" pitchFamily="34" charset="0"/>
+                <a:ea typeface="Arial" pitchFamily="34" charset="-122"/>
+                <a:cs typeface="Arial" pitchFamily="34" charset="-120"/>
+              </a:rPr>
+              <a:t>Forces that hold particles together.</a:t>
+            </a:r>
+            <a:endParaRPr lang="en-US" sz="1100" dirty="0"/>
+          </a:p>
+        </p:txBody>
+      </p:sp>
+      <p:sp>
+        <p:nvSpPr>
+          <p:cNvPr id="20" name="Shape 18"/>
+          <p:cNvSpPr/>
+          <p:nvPr/>
+        </p:nvSpPr>
+        <p:spPr>
+          <a:xfrm>
+            <a:off x="7498080" y="2286000"/>
+            <a:ext cx="3200400" cy="914400"/>
+          </a:xfrm>
+          <a:prstGeom prst="roundRect">
+            <a:avLst>
+              <a:gd name="adj" fmla="val 10000"/>
+            </a:avLst>
+          </a:prstGeom>
+          <a:solidFill>
+            <a:srgbClr val="FFFFFF"/>
+          </a:solidFill>
+          <a:ln w="9525">
+            <a:solidFill>
+              <a:srgbClr val="E5E2DC"/>
+            </a:solidFill>
+            <a:prstDash val="solid"/>
+          </a:ln>
+        </p:spPr>
+      </p:sp>
+      <p:sp>
+        <p:nvSpPr>
+          <p:cNvPr id="21" name="Text 19"/>
+          <p:cNvSpPr/>
+          <p:nvPr/>
+        </p:nvSpPr>
+        <p:spPr>
+          <a:xfrm>
+            <a:off x="7635240" y="2359152"/>
+            <a:ext cx="2926080" cy="320040"/>
+          </a:xfrm>
+          <a:prstGeom prst="rect">
+            <a:avLst/>
+          </a:prstGeom>
+          <a:noFill/>
+          <a:ln/>
+        </p:spPr>
+        <p:txBody>
+          <a:bodyPr wrap="square" rtlCol="0" anchor="ctr"/>
+          <a:lstStyle/>
+          <a:p>
+            <a:pPr indent="0" marL="0">
+              <a:buNone/>
+            </a:pPr>
+            <a:r>
+              <a:rPr lang="en-US" sz="1400" b="1" dirty="0">
+                <a:solidFill>
+                  <a:srgbClr val="2A9D8F"/>
+                </a:solidFill>
+                <a:latin typeface="Georgia" pitchFamily="34" charset="0"/>
+                <a:ea typeface="Georgia" pitchFamily="34" charset="-122"/>
+                <a:cs typeface="Georgia" pitchFamily="34" charset="-120"/>
+              </a:rPr>
+              <a:t>Model</a:t>
+            </a:r>
+            <a:endParaRPr lang="en-US" sz="1400" dirty="0"/>
+          </a:p>
+        </p:txBody>
+      </p:sp>
+      <p:sp>
+        <p:nvSpPr>
+          <p:cNvPr id="22" name="Text 20"/>
+          <p:cNvSpPr/>
+          <p:nvPr/>
+        </p:nvSpPr>
+        <p:spPr>
+          <a:xfrm>
+            <a:off x="7635240" y="2697480"/>
+            <a:ext cx="2926080" cy="457200"/>
+          </a:xfrm>
+          <a:prstGeom prst="rect">
+            <a:avLst/>
+          </a:prstGeom>
+          <a:noFill/>
+          <a:ln/>
+        </p:spPr>
+        <p:txBody>
+          <a:bodyPr wrap="square" rtlCol="0" anchor="ctr"/>
+          <a:lstStyle/>
+          <a:p>
+            <a:pPr indent="0" marL="0">
+              <a:lnSpc>
+                <a:spcPct val="130000"/>
+              </a:lnSpc>
+              <a:buNone/>
+            </a:pPr>
+            <a:r>
+              <a:rPr lang="en-US" sz="1100" dirty="0">
+                <a:solidFill>
+                  <a:srgbClr val="6B6660"/>
+                </a:solidFill>
+                <a:latin typeface="Arial" pitchFamily="34" charset="0"/>
+                <a:ea typeface="Arial" pitchFamily="34" charset="-122"/>
+                <a:cs typeface="Arial" pitchFamily="34" charset="-120"/>
+              </a:rPr>
+              <a:t>A simplified way to explain something complex.</a:t>
             </a:r>
             <a:endParaRPr lang="en-US" sz="1100" dirty="0"/>
           </a:p>
@@ -2631,47 +2394,7 @@
         <p:spPr>
           <a:xfrm>
             <a:off x="0" y="0"/>
-            <a:ext cx="9144000" cy="822960"/>
-          </a:xfrm>
-          <a:prstGeom prst="rect">
-            <a:avLst/>
-          </a:prstGeom>
-          <a:solidFill>
-            <a:srgbClr val="FFFFFF"/>
-          </a:solidFill>
-          <a:ln/>
-        </p:spPr>
-      </p:sp>
-      <p:sp>
-        <p:nvSpPr>
-          <p:cNvPr id="3" name="Shape 1"/>
-          <p:cNvSpPr/>
-          <p:nvPr/>
-        </p:nvSpPr>
-        <p:spPr>
-          <a:xfrm>
-            <a:off x="0" y="804672"/>
-            <a:ext cx="9144000" cy="27432"/>
-          </a:xfrm>
-          <a:prstGeom prst="rect">
-            <a:avLst/>
-          </a:prstGeom>
-          <a:solidFill>
-            <a:srgbClr val="E5E2DC"/>
-          </a:solidFill>
-          <a:ln/>
-        </p:spPr>
-      </p:sp>
-      <p:sp>
-        <p:nvSpPr>
-          <p:cNvPr id="4" name="Shape 2"/>
-          <p:cNvSpPr/>
-          <p:nvPr/>
-        </p:nvSpPr>
-        <p:spPr>
-          <a:xfrm>
-            <a:off x="548640" y="201168"/>
-            <a:ext cx="54864" cy="420624"/>
+            <a:ext cx="73152" cy="5148072"/>
           </a:xfrm>
           <a:prstGeom prst="rect">
             <a:avLst/>
@@ -2684,14 +2407,14 @@
       </p:sp>
       <p:sp>
         <p:nvSpPr>
-          <p:cNvPr id="5" name="Text 3"/>
+          <p:cNvPr id="3" name="Text 1"/>
           <p:cNvSpPr/>
           <p:nvPr/>
         </p:nvSpPr>
         <p:spPr>
           <a:xfrm>
-            <a:off x="777240" y="137160"/>
-            <a:ext cx="7772400" cy="548640"/>
+            <a:off x="548640" y="274320"/>
+            <a:ext cx="9144000" cy="640080"/>
           </a:xfrm>
           <a:prstGeom prst="rect">
             <a:avLst/>
@@ -2700,14 +2423,14 @@
           <a:ln/>
         </p:spPr>
         <p:txBody>
-          <a:bodyPr wrap="square" lIns="0" tIns="0" rIns="0" bIns="0" rtlCol="0" anchor="ctr"/>
+          <a:bodyPr wrap="square" rtlCol="0" anchor="ctr"/>
           <a:lstStyle/>
           <a:p>
             <a:pPr indent="0" marL="0">
               <a:buNone/>
             </a:pPr>
             <a:r>
-              <a:rPr lang="en-US" sz="2000" b="1" dirty="0">
+              <a:rPr lang="en-US" sz="2400" b="1" dirty="0">
                 <a:solidFill>
                   <a:srgbClr val="1B2A4A"/>
                 </a:solidFill>
@@ -2715,22 +2438,42 @@
                 <a:ea typeface="Georgia" pitchFamily="34" charset="-122"/>
                 <a:cs typeface="Georgia" pitchFamily="34" charset="-120"/>
               </a:rPr>
-              <a:t>The Key Ideas of the Particle Model</a:t>
-            </a:r>
-            <a:endParaRPr lang="en-US" sz="2000" dirty="0"/>
+              <a:t>The Particle Model — What Is It?</a:t>
+            </a:r>
+            <a:endParaRPr lang="en-US" sz="2400" dirty="0"/>
           </a:p>
         </p:txBody>
       </p:sp>
       <p:sp>
         <p:nvSpPr>
-          <p:cNvPr id="6" name="Text 4"/>
+          <p:cNvPr id="4" name="Shape 2"/>
           <p:cNvSpPr/>
           <p:nvPr/>
         </p:nvSpPr>
         <p:spPr>
           <a:xfrm>
-            <a:off x="731520" y="1051560"/>
-            <a:ext cx="7680960" cy="3108960"/>
+            <a:off x="548640" y="960120"/>
+            <a:ext cx="2286000" cy="36576"/>
+          </a:xfrm>
+          <a:prstGeom prst="rect">
+            <a:avLst/>
+          </a:prstGeom>
+          <a:solidFill>
+            <a:srgbClr val="2A9D8F"/>
+          </a:solidFill>
+          <a:ln/>
+        </p:spPr>
+      </p:sp>
+      <p:sp>
+        <p:nvSpPr>
+          <p:cNvPr id="5" name="Text 3"/>
+          <p:cNvSpPr/>
+          <p:nvPr/>
+        </p:nvSpPr>
+        <p:spPr>
+          <a:xfrm>
+            <a:off x="548640" y="1188720"/>
+            <a:ext cx="10058400" cy="3474720"/>
           </a:xfrm>
           <a:prstGeom prst="rect">
             <a:avLst/>
@@ -2742,210 +2485,114 @@
           <a:bodyPr wrap="square" rtlCol="0" anchor="t"/>
           <a:lstStyle/>
           <a:p>
-            <a:pPr marL="342900" indent="-342900">
+            <a:pPr>
+              <a:lnSpc>
+                <a:spcPct val="150000"/>
+              </a:lnSpc>
               <a:spcAft>
-                <a:spcPts val="800"/>
+                <a:spcPts val="600"/>
               </a:spcAft>
-              <a:buSzPct val="100000"/>
-              <a:buChar char="•"/>
             </a:pPr>
             <a:r>
               <a:rPr lang="en-US" sz="1500" dirty="0">
                 <a:solidFill>
                   <a:srgbClr val="3D3A36"/>
                 </a:solidFill>
-                <a:latin typeface="Calibri" pitchFamily="34" charset="0"/>
-                <a:ea typeface="Calibri" pitchFamily="34" charset="-122"/>
-                <a:cs typeface="Calibri" pitchFamily="34" charset="-120"/>
+                <a:latin typeface="Arial" pitchFamily="34" charset="0"/>
+                <a:ea typeface="Arial" pitchFamily="34" charset="-122"/>
+                <a:cs typeface="Arial" pitchFamily="34" charset="-120"/>
               </a:rPr>
-              <a:t>ALL matter is made of very tiny particles (atoms and molecules).</a:t>
+              <a:t>All matter is made of tiny particles (atoms or molecules).</a:t>
             </a:r>
             <a:endParaRPr lang="en-US" sz="1500" dirty="0"/>
           </a:p>
           <a:p>
-            <a:pPr marL="342900" indent="-342900">
+            <a:pPr>
+              <a:lnSpc>
+                <a:spcPct val="150000"/>
+              </a:lnSpc>
               <a:spcAft>
-                <a:spcPts val="800"/>
+                <a:spcPts val="600"/>
               </a:spcAft>
-              <a:buSzPct val="100000"/>
-              <a:buChar char="•"/>
             </a:pPr>
             <a:r>
               <a:rPr lang="en-US" sz="1500" dirty="0">
                 <a:solidFill>
                   <a:srgbClr val="3D3A36"/>
                 </a:solidFill>
-                <a:latin typeface="Calibri" pitchFamily="34" charset="0"/>
-                <a:ea typeface="Calibri" pitchFamily="34" charset="-122"/>
-                <a:cs typeface="Calibri" pitchFamily="34" charset="-120"/>
+                <a:latin typeface="Arial" pitchFamily="34" charset="0"/>
+                <a:ea typeface="Arial" pitchFamily="34" charset="-122"/>
+                <a:cs typeface="Arial" pitchFamily="34" charset="-120"/>
               </a:rPr>
-              <a:t>Particles are always MOVING — they never stop.</a:t>
+              <a:t>Particles are ALWAYS moving — they never stop completely.</a:t>
             </a:r>
             <a:endParaRPr lang="en-US" sz="1500" dirty="0"/>
           </a:p>
           <a:p>
-            <a:pPr marL="342900" indent="-342900">
+            <a:pPr>
+              <a:lnSpc>
+                <a:spcPct val="150000"/>
+              </a:lnSpc>
               <a:spcAft>
-                <a:spcPts val="800"/>
+                <a:spcPts val="600"/>
               </a:spcAft>
-              <a:buSzPct val="100000"/>
-              <a:buChar char="•"/>
             </a:pPr>
             <a:r>
               <a:rPr lang="en-US" sz="1500" dirty="0">
                 <a:solidFill>
                   <a:srgbClr val="3D3A36"/>
                 </a:solidFill>
-                <a:latin typeface="Calibri" pitchFamily="34" charset="0"/>
-                <a:ea typeface="Calibri" pitchFamily="34" charset="-122"/>
-                <a:cs typeface="Calibri" pitchFamily="34" charset="-120"/>
+                <a:latin typeface="Arial" pitchFamily="34" charset="0"/>
+                <a:ea typeface="Arial" pitchFamily="34" charset="-122"/>
+                <a:cs typeface="Arial" pitchFamily="34" charset="-120"/>
               </a:rPr>
-              <a:t>Higher temperature = particles move FASTER.</a:t>
+              <a:t>Higher temperature = particles move FASTER (more kinetic energy).</a:t>
             </a:r>
             <a:endParaRPr lang="en-US" sz="1500" dirty="0"/>
           </a:p>
           <a:p>
-            <a:pPr marL="342900" indent="-342900">
+            <a:pPr>
+              <a:lnSpc>
+                <a:spcPct val="150000"/>
+              </a:lnSpc>
               <a:spcAft>
-                <a:spcPts val="800"/>
+                <a:spcPts val="600"/>
               </a:spcAft>
-              <a:buSzPct val="100000"/>
-              <a:buChar char="•"/>
             </a:pPr>
             <a:r>
               <a:rPr lang="en-US" sz="1500" dirty="0">
                 <a:solidFill>
                   <a:srgbClr val="3D3A36"/>
                 </a:solidFill>
-                <a:latin typeface="Calibri" pitchFamily="34" charset="0"/>
-                <a:ea typeface="Calibri" pitchFamily="34" charset="-122"/>
-                <a:cs typeface="Calibri" pitchFamily="34" charset="-120"/>
+                <a:latin typeface="Arial" pitchFamily="34" charset="0"/>
+                <a:ea typeface="Arial" pitchFamily="34" charset="-122"/>
+                <a:cs typeface="Arial" pitchFamily="34" charset="-120"/>
               </a:rPr>
-              <a:t>Particles have SPACES between them.</a:t>
+              <a:t>There are forces of ATTRACTION between particles.</a:t>
             </a:r>
             <a:endParaRPr lang="en-US" sz="1500" dirty="0"/>
           </a:p>
           <a:p>
-            <a:pPr marL="342900" indent="-342900">
+            <a:pPr>
+              <a:lnSpc>
+                <a:spcPct val="150000"/>
+              </a:lnSpc>
               <a:spcAft>
-                <a:spcPts val="800"/>
+                <a:spcPts val="600"/>
               </a:spcAft>
-              <a:buSzPct val="100000"/>
-              <a:buChar char="•"/>
             </a:pPr>
             <a:r>
               <a:rPr lang="en-US" sz="1500" dirty="0">
                 <a:solidFill>
                   <a:srgbClr val="3D3A36"/>
                 </a:solidFill>
-                <a:latin typeface="Calibri" pitchFamily="34" charset="0"/>
-                <a:ea typeface="Calibri" pitchFamily="34" charset="-122"/>
-                <a:cs typeface="Calibri" pitchFamily="34" charset="-120"/>
+                <a:latin typeface="Arial" pitchFamily="34" charset="0"/>
+                <a:ea typeface="Arial" pitchFamily="34" charset="-122"/>
+                <a:cs typeface="Arial" pitchFamily="34" charset="-120"/>
               </a:rPr>
-              <a:t>Particles attract each other — this is why solids hold their shape.</a:t>
+              <a:t>The particle model helps explain solids, liquids, and gases.</a:t>
             </a:r>
             <a:endParaRPr lang="en-US" sz="1500" dirty="0"/>
-          </a:p>
-          <a:p>
-            <a:pPr marL="342900" indent="-342900">
-              <a:spcAft>
-                <a:spcPts val="800"/>
-              </a:spcAft>
-              <a:buSzPct val="100000"/>
-              <a:buChar char="•"/>
-            </a:pPr>
-            <a:r>
-              <a:rPr lang="en-US" sz="1500" dirty="0">
-                <a:solidFill>
-                  <a:srgbClr val="3D3A36"/>
-                </a:solidFill>
-                <a:latin typeface="Calibri" pitchFamily="34" charset="0"/>
-                <a:ea typeface="Calibri" pitchFamily="34" charset="-122"/>
-                <a:cs typeface="Calibri" pitchFamily="34" charset="-120"/>
-              </a:rPr>
-              <a:t>We cannot see individual particles — they are far too small.</a:t>
-            </a:r>
-            <a:endParaRPr lang="en-US" sz="1500" dirty="0"/>
-          </a:p>
-        </p:txBody>
-      </p:sp>
-      <p:sp>
-        <p:nvSpPr>
-          <p:cNvPr id="7" name="Shape 5"/>
-          <p:cNvSpPr/>
-          <p:nvPr/>
-        </p:nvSpPr>
-        <p:spPr>
-          <a:xfrm>
-            <a:off x="731520" y="4206240"/>
-            <a:ext cx="7680960" cy="640080"/>
-          </a:xfrm>
-          <a:prstGeom prst="rect">
-            <a:avLst/>
-          </a:prstGeom>
-          <a:solidFill>
-            <a:srgbClr val="E8F5F3"/>
-          </a:solidFill>
-          <a:ln/>
-          <a:effectLst>
-            <a:outerShdw sx="100000" sy="100000" kx="0" ky="0" algn="bl" rotWithShape="0" blurRad="50800" dist="25400" dir="8100000">
-              <a:srgbClr val="000000">
-                <a:alpha val="10000"/>
-              </a:srgbClr>
-            </a:outerShdw>
-          </a:effectLst>
-        </p:spPr>
-      </p:sp>
-      <p:sp>
-        <p:nvSpPr>
-          <p:cNvPr id="8" name="Text 6"/>
-          <p:cNvSpPr/>
-          <p:nvPr/>
-        </p:nvSpPr>
-        <p:spPr>
-          <a:xfrm>
-            <a:off x="914400" y="4251960"/>
-            <a:ext cx="7315200" cy="548640"/>
-          </a:xfrm>
-          <a:prstGeom prst="rect">
-            <a:avLst/>
-          </a:prstGeom>
-          <a:noFill/>
-          <a:ln/>
-        </p:spPr>
-        <p:txBody>
-          <a:bodyPr wrap="square" rtlCol="0" anchor="ctr"/>
-          <a:lstStyle/>
-          <a:p>
-            <a:pPr indent="0" marL="0">
-              <a:buNone/>
-            </a:pPr>
-            <a:r>
-              <a:rPr lang="en-US" sz="1200" b="1" dirty="0">
-                <a:solidFill>
-                  <a:srgbClr val="2A9D8F"/>
-                </a:solidFill>
-                <a:latin typeface="Calibri" pitchFamily="34" charset="0"/>
-                <a:ea typeface="Calibri" pitchFamily="34" charset="-122"/>
-                <a:cs typeface="Calibri" pitchFamily="34" charset="-120"/>
-              </a:rPr>
-              <a:t>Key Idea: </a:t>
-            </a:r>
-            <a:pPr indent="0" marL="0">
-              <a:buNone/>
-            </a:pPr>
-            <a:r>
-              <a:rPr lang="en-US" sz="1200" i="1" dirty="0">
-                <a:solidFill>
-                  <a:srgbClr val="3D3A36"/>
-                </a:solidFill>
-                <a:latin typeface="Calibri" pitchFamily="34" charset="0"/>
-                <a:ea typeface="Calibri" pitchFamily="34" charset="-122"/>
-                <a:cs typeface="Calibri" pitchFamily="34" charset="-120"/>
-              </a:rPr>
-              <a:t>The particle model explains WHY matter behaves the way it does.</a:t>
-            </a:r>
-            <a:endParaRPr lang="en-US" sz="1200" dirty="0"/>
           </a:p>
         </p:txBody>
       </p:sp>
@@ -2990,47 +2637,7 @@
         <p:spPr>
           <a:xfrm>
             <a:off x="0" y="0"/>
-            <a:ext cx="9144000" cy="822960"/>
-          </a:xfrm>
-          <a:prstGeom prst="rect">
-            <a:avLst/>
-          </a:prstGeom>
-          <a:solidFill>
-            <a:srgbClr val="FFFFFF"/>
-          </a:solidFill>
-          <a:ln/>
-        </p:spPr>
-      </p:sp>
-      <p:sp>
-        <p:nvSpPr>
-          <p:cNvPr id="3" name="Shape 1"/>
-          <p:cNvSpPr/>
-          <p:nvPr/>
-        </p:nvSpPr>
-        <p:spPr>
-          <a:xfrm>
-            <a:off x="0" y="804672"/>
-            <a:ext cx="9144000" cy="27432"/>
-          </a:xfrm>
-          <a:prstGeom prst="rect">
-            <a:avLst/>
-          </a:prstGeom>
-          <a:solidFill>
-            <a:srgbClr val="E5E2DC"/>
-          </a:solidFill>
-          <a:ln/>
-        </p:spPr>
-      </p:sp>
-      <p:sp>
-        <p:nvSpPr>
-          <p:cNvPr id="4" name="Shape 2"/>
-          <p:cNvSpPr/>
-          <p:nvPr/>
-        </p:nvSpPr>
-        <p:spPr>
-          <a:xfrm>
-            <a:off x="548640" y="201168"/>
-            <a:ext cx="54864" cy="420624"/>
+            <a:ext cx="73152" cy="5148072"/>
           </a:xfrm>
           <a:prstGeom prst="rect">
             <a:avLst/>
@@ -3043,14 +2650,14 @@
       </p:sp>
       <p:sp>
         <p:nvSpPr>
-          <p:cNvPr id="5" name="Text 3"/>
+          <p:cNvPr id="3" name="Text 1"/>
           <p:cNvSpPr/>
           <p:nvPr/>
         </p:nvSpPr>
         <p:spPr>
           <a:xfrm>
-            <a:off x="777240" y="137160"/>
-            <a:ext cx="7772400" cy="548640"/>
+            <a:off x="548640" y="274320"/>
+            <a:ext cx="9144000" cy="640080"/>
           </a:xfrm>
           <a:prstGeom prst="rect">
             <a:avLst/>
@@ -3059,14 +2666,14 @@
           <a:ln/>
         </p:spPr>
         <p:txBody>
-          <a:bodyPr wrap="square" lIns="0" tIns="0" rIns="0" bIns="0" rtlCol="0" anchor="ctr"/>
+          <a:bodyPr wrap="square" rtlCol="0" anchor="ctr"/>
           <a:lstStyle/>
           <a:p>
             <a:pPr indent="0" marL="0">
               <a:buNone/>
             </a:pPr>
             <a:r>
-              <a:rPr lang="en-US" sz="2000" b="1" dirty="0">
+              <a:rPr lang="en-US" sz="2400" b="1" dirty="0">
                 <a:solidFill>
                   <a:srgbClr val="1B2A4A"/>
                 </a:solidFill>
@@ -3074,651 +2681,1688 @@
                 <a:ea typeface="Georgia" pitchFamily="34" charset="-122"/>
                 <a:cs typeface="Georgia" pitchFamily="34" charset="-120"/>
               </a:rPr>
-              <a:t>Particles in Three States</a:t>
-            </a:r>
-            <a:endParaRPr lang="en-US" sz="2000" dirty="0"/>
+              <a:t>Comparing Solids, Liquids, and Gases</a:t>
+            </a:r>
+            <a:endParaRPr lang="en-US" sz="2400" dirty="0"/>
           </a:p>
         </p:txBody>
       </p:sp>
-      <p:sp>
-        <p:nvSpPr>
-          <p:cNvPr id="6" name="Shape 4"/>
-          <p:cNvSpPr/>
-          <p:nvPr/>
-        </p:nvSpPr>
-        <p:spPr>
-          <a:xfrm>
-            <a:off x="640080" y="1051560"/>
-            <a:ext cx="2468880" cy="3657600"/>
-          </a:xfrm>
-          <a:prstGeom prst="rect">
-            <a:avLst/>
-          </a:prstGeom>
-          <a:solidFill>
-            <a:srgbClr val="FFFFFF"/>
-          </a:solidFill>
-          <a:ln/>
-          <a:effectLst>
-            <a:outerShdw sx="100000" sy="100000" kx="0" ky="0" algn="bl" rotWithShape="0" blurRad="50800" dist="25400" dir="8100000">
-              <a:srgbClr val="000000">
-                <a:alpha val="10000"/>
-              </a:srgbClr>
-            </a:outerShdw>
-          </a:effectLst>
-        </p:spPr>
-      </p:sp>
-      <p:sp>
-        <p:nvSpPr>
-          <p:cNvPr id="7" name="Shape 5"/>
-          <p:cNvSpPr/>
-          <p:nvPr/>
-        </p:nvSpPr>
-        <p:spPr>
-          <a:xfrm>
-            <a:off x="640080" y="1051560"/>
-            <a:ext cx="2468880" cy="54864"/>
-          </a:xfrm>
-          <a:prstGeom prst="rect">
-            <a:avLst/>
-          </a:prstGeom>
-          <a:solidFill>
-            <a:srgbClr val="2A9D8F"/>
-          </a:solidFill>
-          <a:ln/>
-        </p:spPr>
-      </p:sp>
-      <p:sp>
-        <p:nvSpPr>
-          <p:cNvPr id="8" name="Text 6"/>
-          <p:cNvSpPr/>
-          <p:nvPr/>
-        </p:nvSpPr>
-        <p:spPr>
-          <a:xfrm>
-            <a:off x="777240" y="1234440"/>
-            <a:ext cx="2194560" cy="457200"/>
-          </a:xfrm>
-          <a:prstGeom prst="rect">
-            <a:avLst/>
-          </a:prstGeom>
-          <a:noFill/>
-          <a:ln/>
-        </p:spPr>
-        <p:txBody>
-          <a:bodyPr wrap="square" rtlCol="0" anchor="ctr"/>
-          <a:lstStyle/>
-          <a:p>
-            <a:pPr algn="ctr" indent="0" marL="0">
-              <a:buNone/>
-            </a:pPr>
-            <a:r>
-              <a:rPr lang="en-US" sz="1400" b="1" dirty="0">
-                <a:solidFill>
-                  <a:srgbClr val="1B2A4A"/>
-                </a:solidFill>
-                <a:latin typeface="Georgia" pitchFamily="34" charset="0"/>
-                <a:ea typeface="Georgia" pitchFamily="34" charset="-122"/>
-                <a:cs typeface="Georgia" pitchFamily="34" charset="-120"/>
-              </a:rPr>
-              <a:t>Solid</a:t>
-            </a:r>
-            <a:endParaRPr lang="en-US" sz="1400" dirty="0"/>
-          </a:p>
-        </p:txBody>
-      </p:sp>
-      <p:sp>
-        <p:nvSpPr>
-          <p:cNvPr id="9" name="Text 7"/>
-          <p:cNvSpPr/>
-          <p:nvPr/>
-        </p:nvSpPr>
-        <p:spPr>
-          <a:xfrm>
-            <a:off x="777240" y="1737360"/>
-            <a:ext cx="2194560" cy="2834640"/>
-          </a:xfrm>
-          <a:prstGeom prst="rect">
-            <a:avLst/>
-          </a:prstGeom>
-          <a:noFill/>
-          <a:ln/>
-        </p:spPr>
-        <p:txBody>
-          <a:bodyPr wrap="square" rtlCol="0" anchor="t"/>
-          <a:lstStyle/>
-          <a:p>
-            <a:pPr marL="342900" indent="-342900">
-              <a:spcAft>
-                <a:spcPts val="400"/>
-              </a:spcAft>
-              <a:buSzPct val="100000"/>
-              <a:buChar char="•"/>
-            </a:pPr>
-            <a:r>
-              <a:rPr lang="en-US" sz="1100" dirty="0">
-                <a:solidFill>
-                  <a:srgbClr val="6B6660"/>
-                </a:solidFill>
-                <a:latin typeface="Calibri" pitchFamily="34" charset="0"/>
-                <a:ea typeface="Calibri" pitchFamily="34" charset="-122"/>
-                <a:cs typeface="Calibri" pitchFamily="34" charset="-120"/>
-              </a:rPr>
-              <a:t>Particles packed tightly together</a:t>
-            </a:r>
-            <a:endParaRPr lang="en-US" sz="1100" dirty="0"/>
-          </a:p>
-          <a:p>
-            <a:pPr marL="342900" indent="-342900">
-              <a:spcAft>
-                <a:spcPts val="400"/>
-              </a:spcAft>
-              <a:buSzPct val="100000"/>
-              <a:buChar char="•"/>
-            </a:pPr>
-            <a:r>
-              <a:rPr lang="en-US" sz="1100" dirty="0">
-                <a:solidFill>
-                  <a:srgbClr val="6B6660"/>
-                </a:solidFill>
-                <a:latin typeface="Calibri" pitchFamily="34" charset="0"/>
-                <a:ea typeface="Calibri" pitchFamily="34" charset="-122"/>
-                <a:cs typeface="Calibri" pitchFamily="34" charset="-120"/>
-              </a:rPr>
-              <a:t>Vibrate in fixed positions</a:t>
-            </a:r>
-            <a:endParaRPr lang="en-US" sz="1100" dirty="0"/>
-          </a:p>
-          <a:p>
-            <a:pPr marL="342900" indent="-342900">
-              <a:spcAft>
-                <a:spcPts val="400"/>
-              </a:spcAft>
-              <a:buSzPct val="100000"/>
-              <a:buChar char="•"/>
-            </a:pPr>
-            <a:r>
-              <a:rPr lang="en-US" sz="1100" dirty="0">
-                <a:solidFill>
-                  <a:srgbClr val="6B6660"/>
-                </a:solidFill>
-                <a:latin typeface="Calibri" pitchFamily="34" charset="0"/>
-                <a:ea typeface="Calibri" pitchFamily="34" charset="-122"/>
-                <a:cs typeface="Calibri" pitchFamily="34" charset="-120"/>
-              </a:rPr>
-              <a:t>Strong forces between particles</a:t>
-            </a:r>
-            <a:endParaRPr lang="en-US" sz="1100" dirty="0"/>
-          </a:p>
-          <a:p>
-            <a:pPr marL="342900" indent="-342900">
-              <a:spcAft>
-                <a:spcPts val="400"/>
-              </a:spcAft>
-              <a:buSzPct val="100000"/>
-              <a:buChar char="•"/>
-            </a:pPr>
-            <a:r>
-              <a:rPr lang="en-US" sz="1100" dirty="0">
-                <a:solidFill>
-                  <a:srgbClr val="6B6660"/>
-                </a:solidFill>
-                <a:latin typeface="Calibri" pitchFamily="34" charset="0"/>
-                <a:ea typeface="Calibri" pitchFamily="34" charset="-122"/>
-                <a:cs typeface="Calibri" pitchFamily="34" charset="-120"/>
-              </a:rPr>
-              <a:t>Fixed shape and volume</a:t>
-            </a:r>
-            <a:endParaRPr lang="en-US" sz="1100" dirty="0"/>
-          </a:p>
-          <a:p>
-            <a:pPr marL="342900" indent="-342900">
-              <a:spcAft>
-                <a:spcPts val="400"/>
-              </a:spcAft>
-              <a:buSzPct val="100000"/>
-              <a:buChar char="•"/>
-            </a:pPr>
-            <a:r>
-              <a:rPr lang="en-US" sz="1100" dirty="0">
-                <a:solidFill>
-                  <a:srgbClr val="6B6660"/>
-                </a:solidFill>
-                <a:latin typeface="Calibri" pitchFamily="34" charset="0"/>
-                <a:ea typeface="Calibri" pitchFamily="34" charset="-122"/>
-                <a:cs typeface="Calibri" pitchFamily="34" charset="-120"/>
-              </a:rPr>
-              <a:t>Cannot be compressed</a:t>
-            </a:r>
-            <a:endParaRPr lang="en-US" sz="1100" dirty="0"/>
-          </a:p>
-        </p:txBody>
-      </p:sp>
-      <p:sp>
-        <p:nvSpPr>
-          <p:cNvPr id="10" name="Shape 8"/>
-          <p:cNvSpPr/>
-          <p:nvPr/>
-        </p:nvSpPr>
-        <p:spPr>
-          <a:xfrm>
-            <a:off x="3246120" y="1051560"/>
-            <a:ext cx="2468880" cy="3657600"/>
-          </a:xfrm>
-          <a:prstGeom prst="rect">
-            <a:avLst/>
-          </a:prstGeom>
-          <a:solidFill>
-            <a:srgbClr val="FFFFFF"/>
-          </a:solidFill>
-          <a:ln/>
-          <a:effectLst>
-            <a:outerShdw sx="100000" sy="100000" kx="0" ky="0" algn="bl" rotWithShape="0" blurRad="50800" dist="25400" dir="8100000">
-              <a:srgbClr val="000000">
-                <a:alpha val="10000"/>
-              </a:srgbClr>
-            </a:outerShdw>
-          </a:effectLst>
-        </p:spPr>
-      </p:sp>
-      <p:sp>
-        <p:nvSpPr>
-          <p:cNvPr id="11" name="Shape 9"/>
-          <p:cNvSpPr/>
-          <p:nvPr/>
-        </p:nvSpPr>
-        <p:spPr>
-          <a:xfrm>
-            <a:off x="3246120" y="1051560"/>
-            <a:ext cx="2468880" cy="54864"/>
-          </a:xfrm>
-          <a:prstGeom prst="rect">
-            <a:avLst/>
-          </a:prstGeom>
-          <a:solidFill>
-            <a:srgbClr val="E9C46A"/>
-          </a:solidFill>
-          <a:ln/>
-        </p:spPr>
-      </p:sp>
-      <p:sp>
-        <p:nvSpPr>
-          <p:cNvPr id="12" name="Text 10"/>
-          <p:cNvSpPr/>
-          <p:nvPr/>
-        </p:nvSpPr>
-        <p:spPr>
-          <a:xfrm>
-            <a:off x="3383280" y="1234440"/>
-            <a:ext cx="2194560" cy="457200"/>
-          </a:xfrm>
-          <a:prstGeom prst="rect">
-            <a:avLst/>
-          </a:prstGeom>
-          <a:noFill/>
-          <a:ln/>
-        </p:spPr>
-        <p:txBody>
-          <a:bodyPr wrap="square" rtlCol="0" anchor="ctr"/>
-          <a:lstStyle/>
-          <a:p>
-            <a:pPr algn="ctr" indent="0" marL="0">
-              <a:buNone/>
-            </a:pPr>
-            <a:r>
-              <a:rPr lang="en-US" sz="1400" b="1" dirty="0">
-                <a:solidFill>
-                  <a:srgbClr val="1B2A4A"/>
-                </a:solidFill>
-                <a:latin typeface="Georgia" pitchFamily="34" charset="0"/>
-                <a:ea typeface="Georgia" pitchFamily="34" charset="-122"/>
-                <a:cs typeface="Georgia" pitchFamily="34" charset="-120"/>
-              </a:rPr>
-              <a:t>Liquid</a:t>
-            </a:r>
-            <a:endParaRPr lang="en-US" sz="1400" dirty="0"/>
-          </a:p>
-        </p:txBody>
-      </p:sp>
-      <p:sp>
-        <p:nvSpPr>
-          <p:cNvPr id="13" name="Text 11"/>
-          <p:cNvSpPr/>
-          <p:nvPr/>
-        </p:nvSpPr>
-        <p:spPr>
-          <a:xfrm>
-            <a:off x="3383280" y="1737360"/>
-            <a:ext cx="2194560" cy="2834640"/>
-          </a:xfrm>
-          <a:prstGeom prst="rect">
-            <a:avLst/>
-          </a:prstGeom>
-          <a:noFill/>
-          <a:ln/>
-        </p:spPr>
-        <p:txBody>
-          <a:bodyPr wrap="square" rtlCol="0" anchor="t"/>
-          <a:lstStyle/>
-          <a:p>
-            <a:pPr marL="342900" indent="-342900">
-              <a:spcAft>
-                <a:spcPts val="400"/>
-              </a:spcAft>
-              <a:buSzPct val="100000"/>
-              <a:buChar char="•"/>
-            </a:pPr>
-            <a:r>
-              <a:rPr lang="en-US" sz="1100" dirty="0">
-                <a:solidFill>
-                  <a:srgbClr val="6B6660"/>
-                </a:solidFill>
-                <a:latin typeface="Calibri" pitchFamily="34" charset="0"/>
-                <a:ea typeface="Calibri" pitchFamily="34" charset="-122"/>
-                <a:cs typeface="Calibri" pitchFamily="34" charset="-120"/>
-              </a:rPr>
-              <a:t>Particles close but can slide past each other</a:t>
-            </a:r>
-            <a:endParaRPr lang="en-US" sz="1100" dirty="0"/>
-          </a:p>
-          <a:p>
-            <a:pPr marL="342900" indent="-342900">
-              <a:spcAft>
-                <a:spcPts val="400"/>
-              </a:spcAft>
-              <a:buSzPct val="100000"/>
-              <a:buChar char="•"/>
-            </a:pPr>
-            <a:r>
-              <a:rPr lang="en-US" sz="1100" dirty="0">
-                <a:solidFill>
-                  <a:srgbClr val="6B6660"/>
-                </a:solidFill>
-                <a:latin typeface="Calibri" pitchFamily="34" charset="0"/>
-                <a:ea typeface="Calibri" pitchFamily="34" charset="-122"/>
-                <a:cs typeface="Calibri" pitchFamily="34" charset="-120"/>
-              </a:rPr>
-              <a:t>Move randomly</a:t>
-            </a:r>
-            <a:endParaRPr lang="en-US" sz="1100" dirty="0"/>
-          </a:p>
-          <a:p>
-            <a:pPr marL="342900" indent="-342900">
-              <a:spcAft>
-                <a:spcPts val="400"/>
-              </a:spcAft>
-              <a:buSzPct val="100000"/>
-              <a:buChar char="•"/>
-            </a:pPr>
-            <a:r>
-              <a:rPr lang="en-US" sz="1100" dirty="0">
-                <a:solidFill>
-                  <a:srgbClr val="6B6660"/>
-                </a:solidFill>
-                <a:latin typeface="Calibri" pitchFamily="34" charset="0"/>
-                <a:ea typeface="Calibri" pitchFamily="34" charset="-122"/>
-                <a:cs typeface="Calibri" pitchFamily="34" charset="-120"/>
-              </a:rPr>
-              <a:t>Weaker forces than solids</a:t>
-            </a:r>
-            <a:endParaRPr lang="en-US" sz="1100" dirty="0"/>
-          </a:p>
-          <a:p>
-            <a:pPr marL="342900" indent="-342900">
-              <a:spcAft>
-                <a:spcPts val="400"/>
-              </a:spcAft>
-              <a:buSzPct val="100000"/>
-              <a:buChar char="•"/>
-            </a:pPr>
-            <a:r>
-              <a:rPr lang="en-US" sz="1100" dirty="0">
-                <a:solidFill>
-                  <a:srgbClr val="6B6660"/>
-                </a:solidFill>
-                <a:latin typeface="Calibri" pitchFamily="34" charset="0"/>
-                <a:ea typeface="Calibri" pitchFamily="34" charset="-122"/>
-                <a:cs typeface="Calibri" pitchFamily="34" charset="-120"/>
-              </a:rPr>
-              <a:t>Fixed volume but takes shape of container</a:t>
-            </a:r>
-            <a:endParaRPr lang="en-US" sz="1100" dirty="0"/>
-          </a:p>
-          <a:p>
-            <a:pPr marL="342900" indent="-342900">
-              <a:spcAft>
-                <a:spcPts val="400"/>
-              </a:spcAft>
-              <a:buSzPct val="100000"/>
-              <a:buChar char="•"/>
-            </a:pPr>
-            <a:r>
-              <a:rPr lang="en-US" sz="1100" dirty="0">
-                <a:solidFill>
-                  <a:srgbClr val="6B6660"/>
-                </a:solidFill>
-                <a:latin typeface="Calibri" pitchFamily="34" charset="0"/>
-                <a:ea typeface="Calibri" pitchFamily="34" charset="-122"/>
-                <a:cs typeface="Calibri" pitchFamily="34" charset="-120"/>
-              </a:rPr>
-              <a:t>Cannot be compressed easily</a:t>
-            </a:r>
-            <a:endParaRPr lang="en-US" sz="1100" dirty="0"/>
-          </a:p>
-        </p:txBody>
-      </p:sp>
-      <p:sp>
-        <p:nvSpPr>
-          <p:cNvPr id="14" name="Shape 12"/>
-          <p:cNvSpPr/>
-          <p:nvPr/>
-        </p:nvSpPr>
-        <p:spPr>
-          <a:xfrm>
-            <a:off x="5852160" y="1051560"/>
-            <a:ext cx="2468880" cy="3657600"/>
-          </a:xfrm>
-          <a:prstGeom prst="rect">
-            <a:avLst/>
-          </a:prstGeom>
-          <a:solidFill>
-            <a:srgbClr val="FFFFFF"/>
-          </a:solidFill>
-          <a:ln/>
-          <a:effectLst>
-            <a:outerShdw sx="100000" sy="100000" kx="0" ky="0" algn="bl" rotWithShape="0" blurRad="50800" dist="25400" dir="8100000">
-              <a:srgbClr val="000000">
-                <a:alpha val="10000"/>
-              </a:srgbClr>
-            </a:outerShdw>
-          </a:effectLst>
-        </p:spPr>
-      </p:sp>
-      <p:sp>
-        <p:nvSpPr>
-          <p:cNvPr id="15" name="Shape 13"/>
-          <p:cNvSpPr/>
-          <p:nvPr/>
-        </p:nvSpPr>
-        <p:spPr>
-          <a:xfrm>
-            <a:off x="5852160" y="1051560"/>
-            <a:ext cx="2468880" cy="54864"/>
-          </a:xfrm>
-          <a:prstGeom prst="rect">
-            <a:avLst/>
-          </a:prstGeom>
-          <a:solidFill>
-            <a:srgbClr val="9B9690"/>
-          </a:solidFill>
-          <a:ln/>
-        </p:spPr>
-      </p:sp>
-      <p:sp>
-        <p:nvSpPr>
-          <p:cNvPr id="16" name="Text 14"/>
-          <p:cNvSpPr/>
-          <p:nvPr/>
-        </p:nvSpPr>
-        <p:spPr>
-          <a:xfrm>
-            <a:off x="5989320" y="1234440"/>
-            <a:ext cx="2194560" cy="457200"/>
-          </a:xfrm>
-          <a:prstGeom prst="rect">
-            <a:avLst/>
-          </a:prstGeom>
-          <a:noFill/>
-          <a:ln/>
-        </p:spPr>
-        <p:txBody>
-          <a:bodyPr wrap="square" rtlCol="0" anchor="ctr"/>
-          <a:lstStyle/>
-          <a:p>
-            <a:pPr algn="ctr" indent="0" marL="0">
-              <a:buNone/>
-            </a:pPr>
-            <a:r>
-              <a:rPr lang="en-US" sz="1400" b="1" dirty="0">
-                <a:solidFill>
-                  <a:srgbClr val="1B2A4A"/>
-                </a:solidFill>
-                <a:latin typeface="Georgia" pitchFamily="34" charset="0"/>
-                <a:ea typeface="Georgia" pitchFamily="34" charset="-122"/>
-                <a:cs typeface="Georgia" pitchFamily="34" charset="-120"/>
-              </a:rPr>
-              <a:t>Gas</a:t>
-            </a:r>
-            <a:endParaRPr lang="en-US" sz="1400" dirty="0"/>
-          </a:p>
-        </p:txBody>
-      </p:sp>
-      <p:sp>
-        <p:nvSpPr>
-          <p:cNvPr id="17" name="Text 15"/>
-          <p:cNvSpPr/>
-          <p:nvPr/>
-        </p:nvSpPr>
-        <p:spPr>
-          <a:xfrm>
-            <a:off x="5989320" y="1737360"/>
-            <a:ext cx="2194560" cy="2834640"/>
-          </a:xfrm>
-          <a:prstGeom prst="rect">
-            <a:avLst/>
-          </a:prstGeom>
-          <a:noFill/>
-          <a:ln/>
-        </p:spPr>
-        <p:txBody>
-          <a:bodyPr wrap="square" rtlCol="0" anchor="t"/>
-          <a:lstStyle/>
-          <a:p>
-            <a:pPr marL="342900" indent="-342900">
-              <a:spcAft>
-                <a:spcPts val="400"/>
-              </a:spcAft>
-              <a:buSzPct val="100000"/>
-              <a:buChar char="•"/>
-            </a:pPr>
-            <a:r>
-              <a:rPr lang="en-US" sz="1100" dirty="0">
-                <a:solidFill>
-                  <a:srgbClr val="6B6660"/>
-                </a:solidFill>
-                <a:latin typeface="Calibri" pitchFamily="34" charset="0"/>
-                <a:ea typeface="Calibri" pitchFamily="34" charset="-122"/>
-                <a:cs typeface="Calibri" pitchFamily="34" charset="-120"/>
-              </a:rPr>
-              <a:t>Particles spread far apart</a:t>
-            </a:r>
-            <a:endParaRPr lang="en-US" sz="1100" dirty="0"/>
-          </a:p>
-          <a:p>
-            <a:pPr marL="342900" indent="-342900">
-              <a:spcAft>
-                <a:spcPts val="400"/>
-              </a:spcAft>
-              <a:buSzPct val="100000"/>
-              <a:buChar char="•"/>
-            </a:pPr>
-            <a:r>
-              <a:rPr lang="en-US" sz="1100" dirty="0">
-                <a:solidFill>
-                  <a:srgbClr val="6B6660"/>
-                </a:solidFill>
-                <a:latin typeface="Calibri" pitchFamily="34" charset="0"/>
-                <a:ea typeface="Calibri" pitchFamily="34" charset="-122"/>
-                <a:cs typeface="Calibri" pitchFamily="34" charset="-120"/>
-              </a:rPr>
-              <a:t>Move fast in all directions</a:t>
-            </a:r>
-            <a:endParaRPr lang="en-US" sz="1100" dirty="0"/>
-          </a:p>
-          <a:p>
-            <a:pPr marL="342900" indent="-342900">
-              <a:spcAft>
-                <a:spcPts val="400"/>
-              </a:spcAft>
-              <a:buSzPct val="100000"/>
-              <a:buChar char="•"/>
-            </a:pPr>
-            <a:r>
-              <a:rPr lang="en-US" sz="1100" dirty="0">
-                <a:solidFill>
-                  <a:srgbClr val="6B6660"/>
-                </a:solidFill>
-                <a:latin typeface="Calibri" pitchFamily="34" charset="0"/>
-                <a:ea typeface="Calibri" pitchFamily="34" charset="-122"/>
-                <a:cs typeface="Calibri" pitchFamily="34" charset="-120"/>
-              </a:rPr>
-              <a:t>Very weak forces</a:t>
-            </a:r>
-            <a:endParaRPr lang="en-US" sz="1100" dirty="0"/>
-          </a:p>
-          <a:p>
-            <a:pPr marL="342900" indent="-342900">
-              <a:spcAft>
-                <a:spcPts val="400"/>
-              </a:spcAft>
-              <a:buSzPct val="100000"/>
-              <a:buChar char="•"/>
-            </a:pPr>
-            <a:r>
-              <a:rPr lang="en-US" sz="1100" dirty="0">
-                <a:solidFill>
-                  <a:srgbClr val="6B6660"/>
-                </a:solidFill>
-                <a:latin typeface="Calibri" pitchFamily="34" charset="0"/>
-                <a:ea typeface="Calibri" pitchFamily="34" charset="-122"/>
-                <a:cs typeface="Calibri" pitchFamily="34" charset="-120"/>
-              </a:rPr>
-              <a:t>No fixed shape or volume</a:t>
-            </a:r>
-            <a:endParaRPr lang="en-US" sz="1100" dirty="0"/>
-          </a:p>
-          <a:p>
-            <a:pPr marL="342900" indent="-342900">
-              <a:spcAft>
-                <a:spcPts val="400"/>
-              </a:spcAft>
-              <a:buSzPct val="100000"/>
-              <a:buChar char="•"/>
-            </a:pPr>
-            <a:r>
-              <a:rPr lang="en-US" sz="1100" dirty="0">
-                <a:solidFill>
-                  <a:srgbClr val="6B6660"/>
-                </a:solidFill>
-                <a:latin typeface="Calibri" pitchFamily="34" charset="0"/>
-                <a:ea typeface="Calibri" pitchFamily="34" charset="-122"/>
-                <a:cs typeface="Calibri" pitchFamily="34" charset="-120"/>
-              </a:rPr>
-              <a:t>Can be compressed easily</a:t>
-            </a:r>
-            <a:endParaRPr lang="en-US" sz="1100" dirty="0"/>
-          </a:p>
-        </p:txBody>
-      </p:sp>
+      <p:graphicFrame>
+        <p:nvGraphicFramePr>
+          <p:cNvPr id="5" name="Table 0"/>
+          <p:cNvGraphicFramePr>
+            <a:graphicFrameLocks noGrp="1"/>
+          </p:cNvGraphicFramePr>
+          <p:nvPr>
+            <p:extLst>
+              <p:ext uri="{D42A27DB-BD31-4B8C-83A1-F6EECF244321}">
+                <p14:modId xmlns:p14="http://schemas.microsoft.com/office/powerpoint/2010/main" val="1579011935"/>
+              </p:ext>
+            </p:extLst>
+          </p:nvPr>
+        </p:nvGraphicFramePr>
+        <p:xfrm>
+          <a:off x="548640" y="1097280"/>
+          <a:ext cx="9144000" cy="914400"/>
+        </p:xfrm>
+        <a:graphic>
+          <a:graphicData uri="http://schemas.openxmlformats.org/drawingml/2006/table">
+            <a:tbl>
+              <a:tblPr/>
+              <a:tblGrid>
+                <a:gridCol w="2286000"/>
+                <a:gridCol w="2286000"/>
+                <a:gridCol w="2286000"/>
+                <a:gridCol w="2286000"/>
+              </a:tblGrid>
+              <a:tr h="411480">
+                <a:tc>
+                  <a:txBody>
+                    <a:bodyPr/>
+                    <a:lstStyle/>
+                    <a:p>
+                      <a:pPr algn="ctr" indent="0" marL="0">
+                        <a:buNone/>
+                      </a:pPr>
+                      <a:r>
+                        <a:rPr lang="en-US" sz="1200" b="1" dirty="0">
+                          <a:solidFill>
+                            <a:srgbClr val="FFFFFF"/>
+                          </a:solidFill>
+                          <a:latin typeface="Arial" pitchFamily="34" charset="0"/>
+                          <a:ea typeface="Arial" pitchFamily="34" charset="-122"/>
+                          <a:cs typeface="Arial" pitchFamily="34" charset="-120"/>
+                        </a:rPr>
+                        <a:t>Property</a:t>
+                      </a:r>
+                      <a:endParaRPr lang="en-US" sz="1200" dirty="0">
+                        <a:latin typeface="Arial" charset="0"/>
+                        <a:ea typeface="Arial" charset="0"/>
+                        <a:cs typeface="Arial" charset="0"/>
+                      </a:endParaRPr>
+                    </a:p>
+                  </a:txBody>
+                  <a:tcPr marL="101600" marR="101600" marT="50800" marB="50800" anchor="ctr">
+                    <a:lnL w="6350" cap="flat" cmpd="sng" algn="ctr">
+                      <a:solidFill>
+                        <a:srgbClr val="E5E2DC"/>
+                      </a:solidFill>
+                      <a:prstDash val="solid"/>
+                      <a:round/>
+                      <a:headEnd type="none" w="med" len="med"/>
+                      <a:tailEnd type="none" w="med" len="med"/>
+                    </a:lnL>
+                    <a:lnR w="6350" cap="flat" cmpd="sng" algn="ctr">
+                      <a:solidFill>
+                        <a:srgbClr val="E5E2DC"/>
+                      </a:solidFill>
+                      <a:prstDash val="solid"/>
+                      <a:round/>
+                      <a:headEnd type="none" w="med" len="med"/>
+                      <a:tailEnd type="none" w="med" len="med"/>
+                    </a:lnR>
+                    <a:lnT w="6350" cap="flat" cmpd="sng" algn="ctr">
+                      <a:solidFill>
+                        <a:srgbClr val="E5E2DC"/>
+                      </a:solidFill>
+                      <a:prstDash val="solid"/>
+                      <a:round/>
+                      <a:headEnd type="none" w="med" len="med"/>
+                      <a:tailEnd type="none" w="med" len="med"/>
+                    </a:lnT>
+                    <a:lnB w="6350" cap="flat" cmpd="sng" algn="ctr">
+                      <a:solidFill>
+                        <a:srgbClr val="E5E2DC"/>
+                      </a:solidFill>
+                      <a:prstDash val="solid"/>
+                      <a:round/>
+                      <a:headEnd type="none" w="med" len="med"/>
+                      <a:tailEnd type="none" w="med" len="med"/>
+                    </a:lnB>
+                    <a:solidFill>
+                      <a:srgbClr val="2A9D8F"/>
+                    </a:solidFill>
+                  </a:tcPr>
+                </a:tc>
+                <a:tc>
+                  <a:txBody>
+                    <a:bodyPr/>
+                    <a:lstStyle/>
+                    <a:p>
+                      <a:pPr algn="ctr" indent="0" marL="0">
+                        <a:buNone/>
+                      </a:pPr>
+                      <a:r>
+                        <a:rPr lang="en-US" sz="1200" b="1" dirty="0">
+                          <a:solidFill>
+                            <a:srgbClr val="FFFFFF"/>
+                          </a:solidFill>
+                          <a:latin typeface="Arial" pitchFamily="34" charset="0"/>
+                          <a:ea typeface="Arial" pitchFamily="34" charset="-122"/>
+                          <a:cs typeface="Arial" pitchFamily="34" charset="-120"/>
+                        </a:rPr>
+                        <a:t>Solid</a:t>
+                      </a:r>
+                      <a:endParaRPr lang="en-US" sz="1200" dirty="0">
+                        <a:latin typeface="Arial" charset="0"/>
+                        <a:ea typeface="Arial" charset="0"/>
+                        <a:cs typeface="Arial" charset="0"/>
+                      </a:endParaRPr>
+                    </a:p>
+                  </a:txBody>
+                  <a:tcPr marL="101600" marR="101600" marT="50800" marB="50800" anchor="ctr">
+                    <a:lnL w="6350" cap="flat" cmpd="sng" algn="ctr">
+                      <a:solidFill>
+                        <a:srgbClr val="E5E2DC"/>
+                      </a:solidFill>
+                      <a:prstDash val="solid"/>
+                      <a:round/>
+                      <a:headEnd type="none" w="med" len="med"/>
+                      <a:tailEnd type="none" w="med" len="med"/>
+                    </a:lnL>
+                    <a:lnR w="6350" cap="flat" cmpd="sng" algn="ctr">
+                      <a:solidFill>
+                        <a:srgbClr val="E5E2DC"/>
+                      </a:solidFill>
+                      <a:prstDash val="solid"/>
+                      <a:round/>
+                      <a:headEnd type="none" w="med" len="med"/>
+                      <a:tailEnd type="none" w="med" len="med"/>
+                    </a:lnR>
+                    <a:lnT w="6350" cap="flat" cmpd="sng" algn="ctr">
+                      <a:solidFill>
+                        <a:srgbClr val="E5E2DC"/>
+                      </a:solidFill>
+                      <a:prstDash val="solid"/>
+                      <a:round/>
+                      <a:headEnd type="none" w="med" len="med"/>
+                      <a:tailEnd type="none" w="med" len="med"/>
+                    </a:lnT>
+                    <a:lnB w="6350" cap="flat" cmpd="sng" algn="ctr">
+                      <a:solidFill>
+                        <a:srgbClr val="E5E2DC"/>
+                      </a:solidFill>
+                      <a:prstDash val="solid"/>
+                      <a:round/>
+                      <a:headEnd type="none" w="med" len="med"/>
+                      <a:tailEnd type="none" w="med" len="med"/>
+                    </a:lnB>
+                    <a:solidFill>
+                      <a:srgbClr val="2A9D8F"/>
+                    </a:solidFill>
+                  </a:tcPr>
+                </a:tc>
+                <a:tc>
+                  <a:txBody>
+                    <a:bodyPr/>
+                    <a:lstStyle/>
+                    <a:p>
+                      <a:pPr algn="ctr" indent="0" marL="0">
+                        <a:buNone/>
+                      </a:pPr>
+                      <a:r>
+                        <a:rPr lang="en-US" sz="1200" b="1" dirty="0">
+                          <a:solidFill>
+                            <a:srgbClr val="FFFFFF"/>
+                          </a:solidFill>
+                          <a:latin typeface="Arial" pitchFamily="34" charset="0"/>
+                          <a:ea typeface="Arial" pitchFamily="34" charset="-122"/>
+                          <a:cs typeface="Arial" pitchFamily="34" charset="-120"/>
+                        </a:rPr>
+                        <a:t>Liquid</a:t>
+                      </a:r>
+                      <a:endParaRPr lang="en-US" sz="1200" dirty="0">
+                        <a:latin typeface="Arial" charset="0"/>
+                        <a:ea typeface="Arial" charset="0"/>
+                        <a:cs typeface="Arial" charset="0"/>
+                      </a:endParaRPr>
+                    </a:p>
+                  </a:txBody>
+                  <a:tcPr marL="101600" marR="101600" marT="50800" marB="50800" anchor="ctr">
+                    <a:lnL w="6350" cap="flat" cmpd="sng" algn="ctr">
+                      <a:solidFill>
+                        <a:srgbClr val="E5E2DC"/>
+                      </a:solidFill>
+                      <a:prstDash val="solid"/>
+                      <a:round/>
+                      <a:headEnd type="none" w="med" len="med"/>
+                      <a:tailEnd type="none" w="med" len="med"/>
+                    </a:lnL>
+                    <a:lnR w="6350" cap="flat" cmpd="sng" algn="ctr">
+                      <a:solidFill>
+                        <a:srgbClr val="E5E2DC"/>
+                      </a:solidFill>
+                      <a:prstDash val="solid"/>
+                      <a:round/>
+                      <a:headEnd type="none" w="med" len="med"/>
+                      <a:tailEnd type="none" w="med" len="med"/>
+                    </a:lnR>
+                    <a:lnT w="6350" cap="flat" cmpd="sng" algn="ctr">
+                      <a:solidFill>
+                        <a:srgbClr val="E5E2DC"/>
+                      </a:solidFill>
+                      <a:prstDash val="solid"/>
+                      <a:round/>
+                      <a:headEnd type="none" w="med" len="med"/>
+                      <a:tailEnd type="none" w="med" len="med"/>
+                    </a:lnT>
+                    <a:lnB w="6350" cap="flat" cmpd="sng" algn="ctr">
+                      <a:solidFill>
+                        <a:srgbClr val="E5E2DC"/>
+                      </a:solidFill>
+                      <a:prstDash val="solid"/>
+                      <a:round/>
+                      <a:headEnd type="none" w="med" len="med"/>
+                      <a:tailEnd type="none" w="med" len="med"/>
+                    </a:lnB>
+                    <a:solidFill>
+                      <a:srgbClr val="2A9D8F"/>
+                    </a:solidFill>
+                  </a:tcPr>
+                </a:tc>
+                <a:tc>
+                  <a:txBody>
+                    <a:bodyPr/>
+                    <a:lstStyle/>
+                    <a:p>
+                      <a:pPr algn="ctr" indent="0" marL="0">
+                        <a:buNone/>
+                      </a:pPr>
+                      <a:r>
+                        <a:rPr lang="en-US" sz="1200" b="1" dirty="0">
+                          <a:solidFill>
+                            <a:srgbClr val="FFFFFF"/>
+                          </a:solidFill>
+                          <a:latin typeface="Arial" pitchFamily="34" charset="0"/>
+                          <a:ea typeface="Arial" pitchFamily="34" charset="-122"/>
+                          <a:cs typeface="Arial" pitchFamily="34" charset="-120"/>
+                        </a:rPr>
+                        <a:t>Gas</a:t>
+                      </a:r>
+                      <a:endParaRPr lang="en-US" sz="1200" dirty="0">
+                        <a:latin typeface="Arial" charset="0"/>
+                        <a:ea typeface="Arial" charset="0"/>
+                        <a:cs typeface="Arial" charset="0"/>
+                      </a:endParaRPr>
+                    </a:p>
+                  </a:txBody>
+                  <a:tcPr marL="101600" marR="101600" marT="50800" marB="50800" anchor="ctr">
+                    <a:lnL w="6350" cap="flat" cmpd="sng" algn="ctr">
+                      <a:solidFill>
+                        <a:srgbClr val="E5E2DC"/>
+                      </a:solidFill>
+                      <a:prstDash val="solid"/>
+                      <a:round/>
+                      <a:headEnd type="none" w="med" len="med"/>
+                      <a:tailEnd type="none" w="med" len="med"/>
+                    </a:lnL>
+                    <a:lnR w="6350" cap="flat" cmpd="sng" algn="ctr">
+                      <a:solidFill>
+                        <a:srgbClr val="E5E2DC"/>
+                      </a:solidFill>
+                      <a:prstDash val="solid"/>
+                      <a:round/>
+                      <a:headEnd type="none" w="med" len="med"/>
+                      <a:tailEnd type="none" w="med" len="med"/>
+                    </a:lnR>
+                    <a:lnT w="6350" cap="flat" cmpd="sng" algn="ctr">
+                      <a:solidFill>
+                        <a:srgbClr val="E5E2DC"/>
+                      </a:solidFill>
+                      <a:prstDash val="solid"/>
+                      <a:round/>
+                      <a:headEnd type="none" w="med" len="med"/>
+                      <a:tailEnd type="none" w="med" len="med"/>
+                    </a:lnT>
+                    <a:lnB w="6350" cap="flat" cmpd="sng" algn="ctr">
+                      <a:solidFill>
+                        <a:srgbClr val="E5E2DC"/>
+                      </a:solidFill>
+                      <a:prstDash val="solid"/>
+                      <a:round/>
+                      <a:headEnd type="none" w="med" len="med"/>
+                      <a:tailEnd type="none" w="med" len="med"/>
+                    </a:lnB>
+                    <a:solidFill>
+                      <a:srgbClr val="2A9D8F"/>
+                    </a:solidFill>
+                  </a:tcPr>
+                </a:tc>
+              </a:tr>
+              <a:tr h="365760">
+                <a:tc>
+                  <a:txBody>
+                    <a:bodyPr/>
+                    <a:lstStyle/>
+                    <a:p>
+                      <a:pPr indent="0" marL="0">
+                        <a:buNone/>
+                      </a:pPr>
+                      <a:r>
+                        <a:rPr lang="en-US" sz="1200" dirty="0">
+                          <a:solidFill>
+                            <a:srgbClr val="3D3A36"/>
+                          </a:solidFill>
+                          <a:latin typeface="Arial" pitchFamily="34" charset="0"/>
+                          <a:ea typeface="Arial" pitchFamily="34" charset="-122"/>
+                          <a:cs typeface="Arial" pitchFamily="34" charset="-120"/>
+                        </a:rPr>
+                        <a:t>Arrangement</a:t>
+                      </a:r>
+                      <a:endParaRPr lang="en-US" sz="1200" dirty="0">
+                        <a:latin typeface="Arial" charset="0"/>
+                        <a:ea typeface="Arial" charset="0"/>
+                        <a:cs typeface="Arial" charset="0"/>
+                      </a:endParaRPr>
+                    </a:p>
+                  </a:txBody>
+                  <a:tcPr marL="101600" marR="101600" marT="50800" marB="50800" anchor="ctr">
+                    <a:lnL w="6350" cap="flat" cmpd="sng" algn="ctr">
+                      <a:solidFill>
+                        <a:srgbClr val="E5E2DC"/>
+                      </a:solidFill>
+                      <a:prstDash val="solid"/>
+                      <a:round/>
+                      <a:headEnd type="none" w="med" len="med"/>
+                      <a:tailEnd type="none" w="med" len="med"/>
+                    </a:lnL>
+                    <a:lnR w="6350" cap="flat" cmpd="sng" algn="ctr">
+                      <a:solidFill>
+                        <a:srgbClr val="E5E2DC"/>
+                      </a:solidFill>
+                      <a:prstDash val="solid"/>
+                      <a:round/>
+                      <a:headEnd type="none" w="med" len="med"/>
+                      <a:tailEnd type="none" w="med" len="med"/>
+                    </a:lnR>
+                    <a:lnT w="6350" cap="flat" cmpd="sng" algn="ctr">
+                      <a:solidFill>
+                        <a:srgbClr val="E5E2DC"/>
+                      </a:solidFill>
+                      <a:prstDash val="solid"/>
+                      <a:round/>
+                      <a:headEnd type="none" w="med" len="med"/>
+                      <a:tailEnd type="none" w="med" len="med"/>
+                    </a:lnT>
+                    <a:lnB w="6350" cap="flat" cmpd="sng" algn="ctr">
+                      <a:solidFill>
+                        <a:srgbClr val="E5E2DC"/>
+                      </a:solidFill>
+                      <a:prstDash val="solid"/>
+                      <a:round/>
+                      <a:headEnd type="none" w="med" len="med"/>
+                      <a:tailEnd type="none" w="med" len="med"/>
+                    </a:lnB>
+                    <a:solidFill>
+                      <a:srgbClr val="FFFFFF"/>
+                    </a:solidFill>
+                  </a:tcPr>
+                </a:tc>
+                <a:tc>
+                  <a:txBody>
+                    <a:bodyPr/>
+                    <a:lstStyle/>
+                    <a:p>
+                      <a:pPr indent="0" marL="0">
+                        <a:buNone/>
+                      </a:pPr>
+                      <a:r>
+                        <a:rPr lang="en-US" sz="1200" dirty="0">
+                          <a:solidFill>
+                            <a:srgbClr val="3D3A36"/>
+                          </a:solidFill>
+                          <a:latin typeface="Arial" pitchFamily="34" charset="0"/>
+                          <a:ea typeface="Arial" pitchFamily="34" charset="-122"/>
+                          <a:cs typeface="Arial" pitchFamily="34" charset="-120"/>
+                        </a:rPr>
+                        <a:t>Regular, close</a:t>
+                      </a:r>
+                      <a:endParaRPr lang="en-US" sz="1200" dirty="0">
+                        <a:latin typeface="Arial" charset="0"/>
+                        <a:ea typeface="Arial" charset="0"/>
+                        <a:cs typeface="Arial" charset="0"/>
+                      </a:endParaRPr>
+                    </a:p>
+                  </a:txBody>
+                  <a:tcPr marL="101600" marR="101600" marT="50800" marB="50800" anchor="ctr">
+                    <a:lnL w="6350" cap="flat" cmpd="sng" algn="ctr">
+                      <a:solidFill>
+                        <a:srgbClr val="E5E2DC"/>
+                      </a:solidFill>
+                      <a:prstDash val="solid"/>
+                      <a:round/>
+                      <a:headEnd type="none" w="med" len="med"/>
+                      <a:tailEnd type="none" w="med" len="med"/>
+                    </a:lnL>
+                    <a:lnR w="6350" cap="flat" cmpd="sng" algn="ctr">
+                      <a:solidFill>
+                        <a:srgbClr val="E5E2DC"/>
+                      </a:solidFill>
+                      <a:prstDash val="solid"/>
+                      <a:round/>
+                      <a:headEnd type="none" w="med" len="med"/>
+                      <a:tailEnd type="none" w="med" len="med"/>
+                    </a:lnR>
+                    <a:lnT w="6350" cap="flat" cmpd="sng" algn="ctr">
+                      <a:solidFill>
+                        <a:srgbClr val="E5E2DC"/>
+                      </a:solidFill>
+                      <a:prstDash val="solid"/>
+                      <a:round/>
+                      <a:headEnd type="none" w="med" len="med"/>
+                      <a:tailEnd type="none" w="med" len="med"/>
+                    </a:lnT>
+                    <a:lnB w="6350" cap="flat" cmpd="sng" algn="ctr">
+                      <a:solidFill>
+                        <a:srgbClr val="E5E2DC"/>
+                      </a:solidFill>
+                      <a:prstDash val="solid"/>
+                      <a:round/>
+                      <a:headEnd type="none" w="med" len="med"/>
+                      <a:tailEnd type="none" w="med" len="med"/>
+                    </a:lnB>
+                    <a:solidFill>
+                      <a:srgbClr val="FFFFFF"/>
+                    </a:solidFill>
+                  </a:tcPr>
+                </a:tc>
+                <a:tc>
+                  <a:txBody>
+                    <a:bodyPr/>
+                    <a:lstStyle/>
+                    <a:p>
+                      <a:pPr indent="0" marL="0">
+                        <a:buNone/>
+                      </a:pPr>
+                      <a:r>
+                        <a:rPr lang="en-US" sz="1200" dirty="0">
+                          <a:solidFill>
+                            <a:srgbClr val="3D3A36"/>
+                          </a:solidFill>
+                          <a:latin typeface="Arial" pitchFamily="34" charset="0"/>
+                          <a:ea typeface="Arial" pitchFamily="34" charset="-122"/>
+                          <a:cs typeface="Arial" pitchFamily="34" charset="-120"/>
+                        </a:rPr>
+                        <a:t>Random, close</a:t>
+                      </a:r>
+                      <a:endParaRPr lang="en-US" sz="1200" dirty="0">
+                        <a:latin typeface="Arial" charset="0"/>
+                        <a:ea typeface="Arial" charset="0"/>
+                        <a:cs typeface="Arial" charset="0"/>
+                      </a:endParaRPr>
+                    </a:p>
+                  </a:txBody>
+                  <a:tcPr marL="101600" marR="101600" marT="50800" marB="50800" anchor="ctr">
+                    <a:lnL w="6350" cap="flat" cmpd="sng" algn="ctr">
+                      <a:solidFill>
+                        <a:srgbClr val="E5E2DC"/>
+                      </a:solidFill>
+                      <a:prstDash val="solid"/>
+                      <a:round/>
+                      <a:headEnd type="none" w="med" len="med"/>
+                      <a:tailEnd type="none" w="med" len="med"/>
+                    </a:lnL>
+                    <a:lnR w="6350" cap="flat" cmpd="sng" algn="ctr">
+                      <a:solidFill>
+                        <a:srgbClr val="E5E2DC"/>
+                      </a:solidFill>
+                      <a:prstDash val="solid"/>
+                      <a:round/>
+                      <a:headEnd type="none" w="med" len="med"/>
+                      <a:tailEnd type="none" w="med" len="med"/>
+                    </a:lnR>
+                    <a:lnT w="6350" cap="flat" cmpd="sng" algn="ctr">
+                      <a:solidFill>
+                        <a:srgbClr val="E5E2DC"/>
+                      </a:solidFill>
+                      <a:prstDash val="solid"/>
+                      <a:round/>
+                      <a:headEnd type="none" w="med" len="med"/>
+                      <a:tailEnd type="none" w="med" len="med"/>
+                    </a:lnT>
+                    <a:lnB w="6350" cap="flat" cmpd="sng" algn="ctr">
+                      <a:solidFill>
+                        <a:srgbClr val="E5E2DC"/>
+                      </a:solidFill>
+                      <a:prstDash val="solid"/>
+                      <a:round/>
+                      <a:headEnd type="none" w="med" len="med"/>
+                      <a:tailEnd type="none" w="med" len="med"/>
+                    </a:lnB>
+                    <a:solidFill>
+                      <a:srgbClr val="FFFFFF"/>
+                    </a:solidFill>
+                  </a:tcPr>
+                </a:tc>
+                <a:tc>
+                  <a:txBody>
+                    <a:bodyPr/>
+                    <a:lstStyle/>
+                    <a:p>
+                      <a:pPr indent="0" marL="0">
+                        <a:buNone/>
+                      </a:pPr>
+                      <a:r>
+                        <a:rPr lang="en-US" sz="1200" dirty="0">
+                          <a:solidFill>
+                            <a:srgbClr val="3D3A36"/>
+                          </a:solidFill>
+                          <a:latin typeface="Arial" pitchFamily="34" charset="0"/>
+                          <a:ea typeface="Arial" pitchFamily="34" charset="-122"/>
+                          <a:cs typeface="Arial" pitchFamily="34" charset="-120"/>
+                        </a:rPr>
+                        <a:t>Random, far apart</a:t>
+                      </a:r>
+                      <a:endParaRPr lang="en-US" sz="1200" dirty="0">
+                        <a:latin typeface="Arial" charset="0"/>
+                        <a:ea typeface="Arial" charset="0"/>
+                        <a:cs typeface="Arial" charset="0"/>
+                      </a:endParaRPr>
+                    </a:p>
+                  </a:txBody>
+                  <a:tcPr marL="101600" marR="101600" marT="50800" marB="50800" anchor="ctr">
+                    <a:lnL w="6350" cap="flat" cmpd="sng" algn="ctr">
+                      <a:solidFill>
+                        <a:srgbClr val="E5E2DC"/>
+                      </a:solidFill>
+                      <a:prstDash val="solid"/>
+                      <a:round/>
+                      <a:headEnd type="none" w="med" len="med"/>
+                      <a:tailEnd type="none" w="med" len="med"/>
+                    </a:lnL>
+                    <a:lnR w="6350" cap="flat" cmpd="sng" algn="ctr">
+                      <a:solidFill>
+                        <a:srgbClr val="E5E2DC"/>
+                      </a:solidFill>
+                      <a:prstDash val="solid"/>
+                      <a:round/>
+                      <a:headEnd type="none" w="med" len="med"/>
+                      <a:tailEnd type="none" w="med" len="med"/>
+                    </a:lnR>
+                    <a:lnT w="6350" cap="flat" cmpd="sng" algn="ctr">
+                      <a:solidFill>
+                        <a:srgbClr val="E5E2DC"/>
+                      </a:solidFill>
+                      <a:prstDash val="solid"/>
+                      <a:round/>
+                      <a:headEnd type="none" w="med" len="med"/>
+                      <a:tailEnd type="none" w="med" len="med"/>
+                    </a:lnT>
+                    <a:lnB w="6350" cap="flat" cmpd="sng" algn="ctr">
+                      <a:solidFill>
+                        <a:srgbClr val="E5E2DC"/>
+                      </a:solidFill>
+                      <a:prstDash val="solid"/>
+                      <a:round/>
+                      <a:headEnd type="none" w="med" len="med"/>
+                      <a:tailEnd type="none" w="med" len="med"/>
+                    </a:lnB>
+                    <a:solidFill>
+                      <a:srgbClr val="FFFFFF"/>
+                    </a:solidFill>
+                  </a:tcPr>
+                </a:tc>
+              </a:tr>
+              <a:tr h="365760">
+                <a:tc>
+                  <a:txBody>
+                    <a:bodyPr/>
+                    <a:lstStyle/>
+                    <a:p>
+                      <a:pPr indent="0" marL="0">
+                        <a:buNone/>
+                      </a:pPr>
+                      <a:r>
+                        <a:rPr lang="en-US" sz="1200" dirty="0">
+                          <a:solidFill>
+                            <a:srgbClr val="3D3A36"/>
+                          </a:solidFill>
+                          <a:latin typeface="Arial" pitchFamily="34" charset="0"/>
+                          <a:ea typeface="Arial" pitchFamily="34" charset="-122"/>
+                          <a:cs typeface="Arial" pitchFamily="34" charset="-120"/>
+                        </a:rPr>
+                        <a:t>Movement</a:t>
+                      </a:r>
+                      <a:endParaRPr lang="en-US" sz="1200" dirty="0">
+                        <a:latin typeface="Arial" charset="0"/>
+                        <a:ea typeface="Arial" charset="0"/>
+                        <a:cs typeface="Arial" charset="0"/>
+                      </a:endParaRPr>
+                    </a:p>
+                  </a:txBody>
+                  <a:tcPr marL="101600" marR="101600" marT="50800" marB="50800" anchor="ctr">
+                    <a:lnL w="6350" cap="flat" cmpd="sng" algn="ctr">
+                      <a:solidFill>
+                        <a:srgbClr val="E5E2DC"/>
+                      </a:solidFill>
+                      <a:prstDash val="solid"/>
+                      <a:round/>
+                      <a:headEnd type="none" w="med" len="med"/>
+                      <a:tailEnd type="none" w="med" len="med"/>
+                    </a:lnL>
+                    <a:lnR w="6350" cap="flat" cmpd="sng" algn="ctr">
+                      <a:solidFill>
+                        <a:srgbClr val="E5E2DC"/>
+                      </a:solidFill>
+                      <a:prstDash val="solid"/>
+                      <a:round/>
+                      <a:headEnd type="none" w="med" len="med"/>
+                      <a:tailEnd type="none" w="med" len="med"/>
+                    </a:lnR>
+                    <a:lnT w="6350" cap="flat" cmpd="sng" algn="ctr">
+                      <a:solidFill>
+                        <a:srgbClr val="E5E2DC"/>
+                      </a:solidFill>
+                      <a:prstDash val="solid"/>
+                      <a:round/>
+                      <a:headEnd type="none" w="med" len="med"/>
+                      <a:tailEnd type="none" w="med" len="med"/>
+                    </a:lnT>
+                    <a:lnB w="6350" cap="flat" cmpd="sng" algn="ctr">
+                      <a:solidFill>
+                        <a:srgbClr val="E5E2DC"/>
+                      </a:solidFill>
+                      <a:prstDash val="solid"/>
+                      <a:round/>
+                      <a:headEnd type="none" w="med" len="med"/>
+                      <a:tailEnd type="none" w="med" len="med"/>
+                    </a:lnB>
+                    <a:solidFill>
+                      <a:srgbClr val="F8F6F3"/>
+                    </a:solidFill>
+                  </a:tcPr>
+                </a:tc>
+                <a:tc>
+                  <a:txBody>
+                    <a:bodyPr/>
+                    <a:lstStyle/>
+                    <a:p>
+                      <a:pPr indent="0" marL="0">
+                        <a:buNone/>
+                      </a:pPr>
+                      <a:r>
+                        <a:rPr lang="en-US" sz="1200" dirty="0">
+                          <a:solidFill>
+                            <a:srgbClr val="3D3A36"/>
+                          </a:solidFill>
+                          <a:latin typeface="Arial" pitchFamily="34" charset="0"/>
+                          <a:ea typeface="Arial" pitchFamily="34" charset="-122"/>
+                          <a:cs typeface="Arial" pitchFamily="34" charset="-120"/>
+                        </a:rPr>
+                        <a:t>Vibrate in place</a:t>
+                      </a:r>
+                      <a:endParaRPr lang="en-US" sz="1200" dirty="0">
+                        <a:latin typeface="Arial" charset="0"/>
+                        <a:ea typeface="Arial" charset="0"/>
+                        <a:cs typeface="Arial" charset="0"/>
+                      </a:endParaRPr>
+                    </a:p>
+                  </a:txBody>
+                  <a:tcPr marL="101600" marR="101600" marT="50800" marB="50800" anchor="ctr">
+                    <a:lnL w="6350" cap="flat" cmpd="sng" algn="ctr">
+                      <a:solidFill>
+                        <a:srgbClr val="E5E2DC"/>
+                      </a:solidFill>
+                      <a:prstDash val="solid"/>
+                      <a:round/>
+                      <a:headEnd type="none" w="med" len="med"/>
+                      <a:tailEnd type="none" w="med" len="med"/>
+                    </a:lnL>
+                    <a:lnR w="6350" cap="flat" cmpd="sng" algn="ctr">
+                      <a:solidFill>
+                        <a:srgbClr val="E5E2DC"/>
+                      </a:solidFill>
+                      <a:prstDash val="solid"/>
+                      <a:round/>
+                      <a:headEnd type="none" w="med" len="med"/>
+                      <a:tailEnd type="none" w="med" len="med"/>
+                    </a:lnR>
+                    <a:lnT w="6350" cap="flat" cmpd="sng" algn="ctr">
+                      <a:solidFill>
+                        <a:srgbClr val="E5E2DC"/>
+                      </a:solidFill>
+                      <a:prstDash val="solid"/>
+                      <a:round/>
+                      <a:headEnd type="none" w="med" len="med"/>
+                      <a:tailEnd type="none" w="med" len="med"/>
+                    </a:lnT>
+                    <a:lnB w="6350" cap="flat" cmpd="sng" algn="ctr">
+                      <a:solidFill>
+                        <a:srgbClr val="E5E2DC"/>
+                      </a:solidFill>
+                      <a:prstDash val="solid"/>
+                      <a:round/>
+                      <a:headEnd type="none" w="med" len="med"/>
+                      <a:tailEnd type="none" w="med" len="med"/>
+                    </a:lnB>
+                    <a:solidFill>
+                      <a:srgbClr val="F8F6F3"/>
+                    </a:solidFill>
+                  </a:tcPr>
+                </a:tc>
+                <a:tc>
+                  <a:txBody>
+                    <a:bodyPr/>
+                    <a:lstStyle/>
+                    <a:p>
+                      <a:pPr indent="0" marL="0">
+                        <a:buNone/>
+                      </a:pPr>
+                      <a:r>
+                        <a:rPr lang="en-US" sz="1200" dirty="0">
+                          <a:solidFill>
+                            <a:srgbClr val="3D3A36"/>
+                          </a:solidFill>
+                          <a:latin typeface="Arial" pitchFamily="34" charset="0"/>
+                          <a:ea typeface="Arial" pitchFamily="34" charset="-122"/>
+                          <a:cs typeface="Arial" pitchFamily="34" charset="-120"/>
+                        </a:rPr>
+                        <a:t>Slide over each other</a:t>
+                      </a:r>
+                      <a:endParaRPr lang="en-US" sz="1200" dirty="0">
+                        <a:latin typeface="Arial" charset="0"/>
+                        <a:ea typeface="Arial" charset="0"/>
+                        <a:cs typeface="Arial" charset="0"/>
+                      </a:endParaRPr>
+                    </a:p>
+                  </a:txBody>
+                  <a:tcPr marL="101600" marR="101600" marT="50800" marB="50800" anchor="ctr">
+                    <a:lnL w="6350" cap="flat" cmpd="sng" algn="ctr">
+                      <a:solidFill>
+                        <a:srgbClr val="E5E2DC"/>
+                      </a:solidFill>
+                      <a:prstDash val="solid"/>
+                      <a:round/>
+                      <a:headEnd type="none" w="med" len="med"/>
+                      <a:tailEnd type="none" w="med" len="med"/>
+                    </a:lnL>
+                    <a:lnR w="6350" cap="flat" cmpd="sng" algn="ctr">
+                      <a:solidFill>
+                        <a:srgbClr val="E5E2DC"/>
+                      </a:solidFill>
+                      <a:prstDash val="solid"/>
+                      <a:round/>
+                      <a:headEnd type="none" w="med" len="med"/>
+                      <a:tailEnd type="none" w="med" len="med"/>
+                    </a:lnR>
+                    <a:lnT w="6350" cap="flat" cmpd="sng" algn="ctr">
+                      <a:solidFill>
+                        <a:srgbClr val="E5E2DC"/>
+                      </a:solidFill>
+                      <a:prstDash val="solid"/>
+                      <a:round/>
+                      <a:headEnd type="none" w="med" len="med"/>
+                      <a:tailEnd type="none" w="med" len="med"/>
+                    </a:lnT>
+                    <a:lnB w="6350" cap="flat" cmpd="sng" algn="ctr">
+                      <a:solidFill>
+                        <a:srgbClr val="E5E2DC"/>
+                      </a:solidFill>
+                      <a:prstDash val="solid"/>
+                      <a:round/>
+                      <a:headEnd type="none" w="med" len="med"/>
+                      <a:tailEnd type="none" w="med" len="med"/>
+                    </a:lnB>
+                    <a:solidFill>
+                      <a:srgbClr val="F8F6F3"/>
+                    </a:solidFill>
+                  </a:tcPr>
+                </a:tc>
+                <a:tc>
+                  <a:txBody>
+                    <a:bodyPr/>
+                    <a:lstStyle/>
+                    <a:p>
+                      <a:pPr indent="0" marL="0">
+                        <a:buNone/>
+                      </a:pPr>
+                      <a:r>
+                        <a:rPr lang="en-US" sz="1200" dirty="0">
+                          <a:solidFill>
+                            <a:srgbClr val="3D3A36"/>
+                          </a:solidFill>
+                          <a:latin typeface="Arial" pitchFamily="34" charset="0"/>
+                          <a:ea typeface="Arial" pitchFamily="34" charset="-122"/>
+                          <a:cs typeface="Arial" pitchFamily="34" charset="-120"/>
+                        </a:rPr>
+                        <a:t>Move freely, fast</a:t>
+                      </a:r>
+                      <a:endParaRPr lang="en-US" sz="1200" dirty="0">
+                        <a:latin typeface="Arial" charset="0"/>
+                        <a:ea typeface="Arial" charset="0"/>
+                        <a:cs typeface="Arial" charset="0"/>
+                      </a:endParaRPr>
+                    </a:p>
+                  </a:txBody>
+                  <a:tcPr marL="101600" marR="101600" marT="50800" marB="50800" anchor="ctr">
+                    <a:lnL w="6350" cap="flat" cmpd="sng" algn="ctr">
+                      <a:solidFill>
+                        <a:srgbClr val="E5E2DC"/>
+                      </a:solidFill>
+                      <a:prstDash val="solid"/>
+                      <a:round/>
+                      <a:headEnd type="none" w="med" len="med"/>
+                      <a:tailEnd type="none" w="med" len="med"/>
+                    </a:lnL>
+                    <a:lnR w="6350" cap="flat" cmpd="sng" algn="ctr">
+                      <a:solidFill>
+                        <a:srgbClr val="E5E2DC"/>
+                      </a:solidFill>
+                      <a:prstDash val="solid"/>
+                      <a:round/>
+                      <a:headEnd type="none" w="med" len="med"/>
+                      <a:tailEnd type="none" w="med" len="med"/>
+                    </a:lnR>
+                    <a:lnT w="6350" cap="flat" cmpd="sng" algn="ctr">
+                      <a:solidFill>
+                        <a:srgbClr val="E5E2DC"/>
+                      </a:solidFill>
+                      <a:prstDash val="solid"/>
+                      <a:round/>
+                      <a:headEnd type="none" w="med" len="med"/>
+                      <a:tailEnd type="none" w="med" len="med"/>
+                    </a:lnT>
+                    <a:lnB w="6350" cap="flat" cmpd="sng" algn="ctr">
+                      <a:solidFill>
+                        <a:srgbClr val="E5E2DC"/>
+                      </a:solidFill>
+                      <a:prstDash val="solid"/>
+                      <a:round/>
+                      <a:headEnd type="none" w="med" len="med"/>
+                      <a:tailEnd type="none" w="med" len="med"/>
+                    </a:lnB>
+                    <a:solidFill>
+                      <a:srgbClr val="F8F6F3"/>
+                    </a:solidFill>
+                  </a:tcPr>
+                </a:tc>
+              </a:tr>
+              <a:tr h="365760">
+                <a:tc>
+                  <a:txBody>
+                    <a:bodyPr/>
+                    <a:lstStyle/>
+                    <a:p>
+                      <a:pPr indent="0" marL="0">
+                        <a:buNone/>
+                      </a:pPr>
+                      <a:r>
+                        <a:rPr lang="en-US" sz="1200" dirty="0">
+                          <a:solidFill>
+                            <a:srgbClr val="3D3A36"/>
+                          </a:solidFill>
+                          <a:latin typeface="Arial" pitchFamily="34" charset="0"/>
+                          <a:ea typeface="Arial" pitchFamily="34" charset="-122"/>
+                          <a:cs typeface="Arial" pitchFamily="34" charset="-120"/>
+                        </a:rPr>
+                        <a:t>Shape</a:t>
+                      </a:r>
+                      <a:endParaRPr lang="en-US" sz="1200" dirty="0">
+                        <a:latin typeface="Arial" charset="0"/>
+                        <a:ea typeface="Arial" charset="0"/>
+                        <a:cs typeface="Arial" charset="0"/>
+                      </a:endParaRPr>
+                    </a:p>
+                  </a:txBody>
+                  <a:tcPr marL="101600" marR="101600" marT="50800" marB="50800" anchor="ctr">
+                    <a:lnL w="6350" cap="flat" cmpd="sng" algn="ctr">
+                      <a:solidFill>
+                        <a:srgbClr val="E5E2DC"/>
+                      </a:solidFill>
+                      <a:prstDash val="solid"/>
+                      <a:round/>
+                      <a:headEnd type="none" w="med" len="med"/>
+                      <a:tailEnd type="none" w="med" len="med"/>
+                    </a:lnL>
+                    <a:lnR w="6350" cap="flat" cmpd="sng" algn="ctr">
+                      <a:solidFill>
+                        <a:srgbClr val="E5E2DC"/>
+                      </a:solidFill>
+                      <a:prstDash val="solid"/>
+                      <a:round/>
+                      <a:headEnd type="none" w="med" len="med"/>
+                      <a:tailEnd type="none" w="med" len="med"/>
+                    </a:lnR>
+                    <a:lnT w="6350" cap="flat" cmpd="sng" algn="ctr">
+                      <a:solidFill>
+                        <a:srgbClr val="E5E2DC"/>
+                      </a:solidFill>
+                      <a:prstDash val="solid"/>
+                      <a:round/>
+                      <a:headEnd type="none" w="med" len="med"/>
+                      <a:tailEnd type="none" w="med" len="med"/>
+                    </a:lnT>
+                    <a:lnB w="6350" cap="flat" cmpd="sng" algn="ctr">
+                      <a:solidFill>
+                        <a:srgbClr val="E5E2DC"/>
+                      </a:solidFill>
+                      <a:prstDash val="solid"/>
+                      <a:round/>
+                      <a:headEnd type="none" w="med" len="med"/>
+                      <a:tailEnd type="none" w="med" len="med"/>
+                    </a:lnB>
+                    <a:solidFill>
+                      <a:srgbClr val="FFFFFF"/>
+                    </a:solidFill>
+                  </a:tcPr>
+                </a:tc>
+                <a:tc>
+                  <a:txBody>
+                    <a:bodyPr/>
+                    <a:lstStyle/>
+                    <a:p>
+                      <a:pPr indent="0" marL="0">
+                        <a:buNone/>
+                      </a:pPr>
+                      <a:r>
+                        <a:rPr lang="en-US" sz="1200" dirty="0">
+                          <a:solidFill>
+                            <a:srgbClr val="3D3A36"/>
+                          </a:solidFill>
+                          <a:latin typeface="Arial" pitchFamily="34" charset="0"/>
+                          <a:ea typeface="Arial" pitchFamily="34" charset="-122"/>
+                          <a:cs typeface="Arial" pitchFamily="34" charset="-120"/>
+                        </a:rPr>
+                        <a:t>Fixed shape</a:t>
+                      </a:r>
+                      <a:endParaRPr lang="en-US" sz="1200" dirty="0">
+                        <a:latin typeface="Arial" charset="0"/>
+                        <a:ea typeface="Arial" charset="0"/>
+                        <a:cs typeface="Arial" charset="0"/>
+                      </a:endParaRPr>
+                    </a:p>
+                  </a:txBody>
+                  <a:tcPr marL="101600" marR="101600" marT="50800" marB="50800" anchor="ctr">
+                    <a:lnL w="6350" cap="flat" cmpd="sng" algn="ctr">
+                      <a:solidFill>
+                        <a:srgbClr val="E5E2DC"/>
+                      </a:solidFill>
+                      <a:prstDash val="solid"/>
+                      <a:round/>
+                      <a:headEnd type="none" w="med" len="med"/>
+                      <a:tailEnd type="none" w="med" len="med"/>
+                    </a:lnL>
+                    <a:lnR w="6350" cap="flat" cmpd="sng" algn="ctr">
+                      <a:solidFill>
+                        <a:srgbClr val="E5E2DC"/>
+                      </a:solidFill>
+                      <a:prstDash val="solid"/>
+                      <a:round/>
+                      <a:headEnd type="none" w="med" len="med"/>
+                      <a:tailEnd type="none" w="med" len="med"/>
+                    </a:lnR>
+                    <a:lnT w="6350" cap="flat" cmpd="sng" algn="ctr">
+                      <a:solidFill>
+                        <a:srgbClr val="E5E2DC"/>
+                      </a:solidFill>
+                      <a:prstDash val="solid"/>
+                      <a:round/>
+                      <a:headEnd type="none" w="med" len="med"/>
+                      <a:tailEnd type="none" w="med" len="med"/>
+                    </a:lnT>
+                    <a:lnB w="6350" cap="flat" cmpd="sng" algn="ctr">
+                      <a:solidFill>
+                        <a:srgbClr val="E5E2DC"/>
+                      </a:solidFill>
+                      <a:prstDash val="solid"/>
+                      <a:round/>
+                      <a:headEnd type="none" w="med" len="med"/>
+                      <a:tailEnd type="none" w="med" len="med"/>
+                    </a:lnB>
+                    <a:solidFill>
+                      <a:srgbClr val="FFFFFF"/>
+                    </a:solidFill>
+                  </a:tcPr>
+                </a:tc>
+                <a:tc>
+                  <a:txBody>
+                    <a:bodyPr/>
+                    <a:lstStyle/>
+                    <a:p>
+                      <a:pPr indent="0" marL="0">
+                        <a:buNone/>
+                      </a:pPr>
+                      <a:r>
+                        <a:rPr lang="en-US" sz="1200" dirty="0">
+                          <a:solidFill>
+                            <a:srgbClr val="3D3A36"/>
+                          </a:solidFill>
+                          <a:latin typeface="Arial" pitchFamily="34" charset="0"/>
+                          <a:ea typeface="Arial" pitchFamily="34" charset="-122"/>
+                          <a:cs typeface="Arial" pitchFamily="34" charset="-120"/>
+                        </a:rPr>
+                        <a:t>Takes shape of container</a:t>
+                      </a:r>
+                      <a:endParaRPr lang="en-US" sz="1200" dirty="0">
+                        <a:latin typeface="Arial" charset="0"/>
+                        <a:ea typeface="Arial" charset="0"/>
+                        <a:cs typeface="Arial" charset="0"/>
+                      </a:endParaRPr>
+                    </a:p>
+                  </a:txBody>
+                  <a:tcPr marL="101600" marR="101600" marT="50800" marB="50800" anchor="ctr">
+                    <a:lnL w="6350" cap="flat" cmpd="sng" algn="ctr">
+                      <a:solidFill>
+                        <a:srgbClr val="E5E2DC"/>
+                      </a:solidFill>
+                      <a:prstDash val="solid"/>
+                      <a:round/>
+                      <a:headEnd type="none" w="med" len="med"/>
+                      <a:tailEnd type="none" w="med" len="med"/>
+                    </a:lnL>
+                    <a:lnR w="6350" cap="flat" cmpd="sng" algn="ctr">
+                      <a:solidFill>
+                        <a:srgbClr val="E5E2DC"/>
+                      </a:solidFill>
+                      <a:prstDash val="solid"/>
+                      <a:round/>
+                      <a:headEnd type="none" w="med" len="med"/>
+                      <a:tailEnd type="none" w="med" len="med"/>
+                    </a:lnR>
+                    <a:lnT w="6350" cap="flat" cmpd="sng" algn="ctr">
+                      <a:solidFill>
+                        <a:srgbClr val="E5E2DC"/>
+                      </a:solidFill>
+                      <a:prstDash val="solid"/>
+                      <a:round/>
+                      <a:headEnd type="none" w="med" len="med"/>
+                      <a:tailEnd type="none" w="med" len="med"/>
+                    </a:lnT>
+                    <a:lnB w="6350" cap="flat" cmpd="sng" algn="ctr">
+                      <a:solidFill>
+                        <a:srgbClr val="E5E2DC"/>
+                      </a:solidFill>
+                      <a:prstDash val="solid"/>
+                      <a:round/>
+                      <a:headEnd type="none" w="med" len="med"/>
+                      <a:tailEnd type="none" w="med" len="med"/>
+                    </a:lnB>
+                    <a:solidFill>
+                      <a:srgbClr val="FFFFFF"/>
+                    </a:solidFill>
+                  </a:tcPr>
+                </a:tc>
+                <a:tc>
+                  <a:txBody>
+                    <a:bodyPr/>
+                    <a:lstStyle/>
+                    <a:p>
+                      <a:pPr indent="0" marL="0">
+                        <a:buNone/>
+                      </a:pPr>
+                      <a:r>
+                        <a:rPr lang="en-US" sz="1200" dirty="0">
+                          <a:solidFill>
+                            <a:srgbClr val="3D3A36"/>
+                          </a:solidFill>
+                          <a:latin typeface="Arial" pitchFamily="34" charset="0"/>
+                          <a:ea typeface="Arial" pitchFamily="34" charset="-122"/>
+                          <a:cs typeface="Arial" pitchFamily="34" charset="-120"/>
+                        </a:rPr>
+                        <a:t>Fills the container</a:t>
+                      </a:r>
+                      <a:endParaRPr lang="en-US" sz="1200" dirty="0">
+                        <a:latin typeface="Arial" charset="0"/>
+                        <a:ea typeface="Arial" charset="0"/>
+                        <a:cs typeface="Arial" charset="0"/>
+                      </a:endParaRPr>
+                    </a:p>
+                  </a:txBody>
+                  <a:tcPr marL="101600" marR="101600" marT="50800" marB="50800" anchor="ctr">
+                    <a:lnL w="6350" cap="flat" cmpd="sng" algn="ctr">
+                      <a:solidFill>
+                        <a:srgbClr val="E5E2DC"/>
+                      </a:solidFill>
+                      <a:prstDash val="solid"/>
+                      <a:round/>
+                      <a:headEnd type="none" w="med" len="med"/>
+                      <a:tailEnd type="none" w="med" len="med"/>
+                    </a:lnL>
+                    <a:lnR w="6350" cap="flat" cmpd="sng" algn="ctr">
+                      <a:solidFill>
+                        <a:srgbClr val="E5E2DC"/>
+                      </a:solidFill>
+                      <a:prstDash val="solid"/>
+                      <a:round/>
+                      <a:headEnd type="none" w="med" len="med"/>
+                      <a:tailEnd type="none" w="med" len="med"/>
+                    </a:lnR>
+                    <a:lnT w="6350" cap="flat" cmpd="sng" algn="ctr">
+                      <a:solidFill>
+                        <a:srgbClr val="E5E2DC"/>
+                      </a:solidFill>
+                      <a:prstDash val="solid"/>
+                      <a:round/>
+                      <a:headEnd type="none" w="med" len="med"/>
+                      <a:tailEnd type="none" w="med" len="med"/>
+                    </a:lnT>
+                    <a:lnB w="6350" cap="flat" cmpd="sng" algn="ctr">
+                      <a:solidFill>
+                        <a:srgbClr val="E5E2DC"/>
+                      </a:solidFill>
+                      <a:prstDash val="solid"/>
+                      <a:round/>
+                      <a:headEnd type="none" w="med" len="med"/>
+                      <a:tailEnd type="none" w="med" len="med"/>
+                    </a:lnB>
+                    <a:solidFill>
+                      <a:srgbClr val="FFFFFF"/>
+                    </a:solidFill>
+                  </a:tcPr>
+                </a:tc>
+              </a:tr>
+              <a:tr h="365760">
+                <a:tc>
+                  <a:txBody>
+                    <a:bodyPr/>
+                    <a:lstStyle/>
+                    <a:p>
+                      <a:pPr indent="0" marL="0">
+                        <a:buNone/>
+                      </a:pPr>
+                      <a:r>
+                        <a:rPr lang="en-US" sz="1200" dirty="0">
+                          <a:solidFill>
+                            <a:srgbClr val="3D3A36"/>
+                          </a:solidFill>
+                          <a:latin typeface="Arial" pitchFamily="34" charset="0"/>
+                          <a:ea typeface="Arial" pitchFamily="34" charset="-122"/>
+                          <a:cs typeface="Arial" pitchFamily="34" charset="-120"/>
+                        </a:rPr>
+                        <a:t>Volume</a:t>
+                      </a:r>
+                      <a:endParaRPr lang="en-US" sz="1200" dirty="0">
+                        <a:latin typeface="Arial" charset="0"/>
+                        <a:ea typeface="Arial" charset="0"/>
+                        <a:cs typeface="Arial" charset="0"/>
+                      </a:endParaRPr>
+                    </a:p>
+                  </a:txBody>
+                  <a:tcPr marL="101600" marR="101600" marT="50800" marB="50800" anchor="ctr">
+                    <a:lnL w="6350" cap="flat" cmpd="sng" algn="ctr">
+                      <a:solidFill>
+                        <a:srgbClr val="E5E2DC"/>
+                      </a:solidFill>
+                      <a:prstDash val="solid"/>
+                      <a:round/>
+                      <a:headEnd type="none" w="med" len="med"/>
+                      <a:tailEnd type="none" w="med" len="med"/>
+                    </a:lnL>
+                    <a:lnR w="6350" cap="flat" cmpd="sng" algn="ctr">
+                      <a:solidFill>
+                        <a:srgbClr val="E5E2DC"/>
+                      </a:solidFill>
+                      <a:prstDash val="solid"/>
+                      <a:round/>
+                      <a:headEnd type="none" w="med" len="med"/>
+                      <a:tailEnd type="none" w="med" len="med"/>
+                    </a:lnR>
+                    <a:lnT w="6350" cap="flat" cmpd="sng" algn="ctr">
+                      <a:solidFill>
+                        <a:srgbClr val="E5E2DC"/>
+                      </a:solidFill>
+                      <a:prstDash val="solid"/>
+                      <a:round/>
+                      <a:headEnd type="none" w="med" len="med"/>
+                      <a:tailEnd type="none" w="med" len="med"/>
+                    </a:lnT>
+                    <a:lnB w="6350" cap="flat" cmpd="sng" algn="ctr">
+                      <a:solidFill>
+                        <a:srgbClr val="E5E2DC"/>
+                      </a:solidFill>
+                      <a:prstDash val="solid"/>
+                      <a:round/>
+                      <a:headEnd type="none" w="med" len="med"/>
+                      <a:tailEnd type="none" w="med" len="med"/>
+                    </a:lnB>
+                    <a:solidFill>
+                      <a:srgbClr val="F8F6F3"/>
+                    </a:solidFill>
+                  </a:tcPr>
+                </a:tc>
+                <a:tc>
+                  <a:txBody>
+                    <a:bodyPr/>
+                    <a:lstStyle/>
+                    <a:p>
+                      <a:pPr indent="0" marL="0">
+                        <a:buNone/>
+                      </a:pPr>
+                      <a:r>
+                        <a:rPr lang="en-US" sz="1200" dirty="0">
+                          <a:solidFill>
+                            <a:srgbClr val="3D3A36"/>
+                          </a:solidFill>
+                          <a:latin typeface="Arial" pitchFamily="34" charset="0"/>
+                          <a:ea typeface="Arial" pitchFamily="34" charset="-122"/>
+                          <a:cs typeface="Arial" pitchFamily="34" charset="-120"/>
+                        </a:rPr>
+                        <a:t>Fixed volume</a:t>
+                      </a:r>
+                      <a:endParaRPr lang="en-US" sz="1200" dirty="0">
+                        <a:latin typeface="Arial" charset="0"/>
+                        <a:ea typeface="Arial" charset="0"/>
+                        <a:cs typeface="Arial" charset="0"/>
+                      </a:endParaRPr>
+                    </a:p>
+                  </a:txBody>
+                  <a:tcPr marL="101600" marR="101600" marT="50800" marB="50800" anchor="ctr">
+                    <a:lnL w="6350" cap="flat" cmpd="sng" algn="ctr">
+                      <a:solidFill>
+                        <a:srgbClr val="E5E2DC"/>
+                      </a:solidFill>
+                      <a:prstDash val="solid"/>
+                      <a:round/>
+                      <a:headEnd type="none" w="med" len="med"/>
+                      <a:tailEnd type="none" w="med" len="med"/>
+                    </a:lnL>
+                    <a:lnR w="6350" cap="flat" cmpd="sng" algn="ctr">
+                      <a:solidFill>
+                        <a:srgbClr val="E5E2DC"/>
+                      </a:solidFill>
+                      <a:prstDash val="solid"/>
+                      <a:round/>
+                      <a:headEnd type="none" w="med" len="med"/>
+                      <a:tailEnd type="none" w="med" len="med"/>
+                    </a:lnR>
+                    <a:lnT w="6350" cap="flat" cmpd="sng" algn="ctr">
+                      <a:solidFill>
+                        <a:srgbClr val="E5E2DC"/>
+                      </a:solidFill>
+                      <a:prstDash val="solid"/>
+                      <a:round/>
+                      <a:headEnd type="none" w="med" len="med"/>
+                      <a:tailEnd type="none" w="med" len="med"/>
+                    </a:lnT>
+                    <a:lnB w="6350" cap="flat" cmpd="sng" algn="ctr">
+                      <a:solidFill>
+                        <a:srgbClr val="E5E2DC"/>
+                      </a:solidFill>
+                      <a:prstDash val="solid"/>
+                      <a:round/>
+                      <a:headEnd type="none" w="med" len="med"/>
+                      <a:tailEnd type="none" w="med" len="med"/>
+                    </a:lnB>
+                    <a:solidFill>
+                      <a:srgbClr val="F8F6F3"/>
+                    </a:solidFill>
+                  </a:tcPr>
+                </a:tc>
+                <a:tc>
+                  <a:txBody>
+                    <a:bodyPr/>
+                    <a:lstStyle/>
+                    <a:p>
+                      <a:pPr indent="0" marL="0">
+                        <a:buNone/>
+                      </a:pPr>
+                      <a:r>
+                        <a:rPr lang="en-US" sz="1200" dirty="0">
+                          <a:solidFill>
+                            <a:srgbClr val="3D3A36"/>
+                          </a:solidFill>
+                          <a:latin typeface="Arial" pitchFamily="34" charset="0"/>
+                          <a:ea typeface="Arial" pitchFamily="34" charset="-122"/>
+                          <a:cs typeface="Arial" pitchFamily="34" charset="-120"/>
+                        </a:rPr>
+                        <a:t>Fixed volume</a:t>
+                      </a:r>
+                      <a:endParaRPr lang="en-US" sz="1200" dirty="0">
+                        <a:latin typeface="Arial" charset="0"/>
+                        <a:ea typeface="Arial" charset="0"/>
+                        <a:cs typeface="Arial" charset="0"/>
+                      </a:endParaRPr>
+                    </a:p>
+                  </a:txBody>
+                  <a:tcPr marL="101600" marR="101600" marT="50800" marB="50800" anchor="ctr">
+                    <a:lnL w="6350" cap="flat" cmpd="sng" algn="ctr">
+                      <a:solidFill>
+                        <a:srgbClr val="E5E2DC"/>
+                      </a:solidFill>
+                      <a:prstDash val="solid"/>
+                      <a:round/>
+                      <a:headEnd type="none" w="med" len="med"/>
+                      <a:tailEnd type="none" w="med" len="med"/>
+                    </a:lnL>
+                    <a:lnR w="6350" cap="flat" cmpd="sng" algn="ctr">
+                      <a:solidFill>
+                        <a:srgbClr val="E5E2DC"/>
+                      </a:solidFill>
+                      <a:prstDash val="solid"/>
+                      <a:round/>
+                      <a:headEnd type="none" w="med" len="med"/>
+                      <a:tailEnd type="none" w="med" len="med"/>
+                    </a:lnR>
+                    <a:lnT w="6350" cap="flat" cmpd="sng" algn="ctr">
+                      <a:solidFill>
+                        <a:srgbClr val="E5E2DC"/>
+                      </a:solidFill>
+                      <a:prstDash val="solid"/>
+                      <a:round/>
+                      <a:headEnd type="none" w="med" len="med"/>
+                      <a:tailEnd type="none" w="med" len="med"/>
+                    </a:lnT>
+                    <a:lnB w="6350" cap="flat" cmpd="sng" algn="ctr">
+                      <a:solidFill>
+                        <a:srgbClr val="E5E2DC"/>
+                      </a:solidFill>
+                      <a:prstDash val="solid"/>
+                      <a:round/>
+                      <a:headEnd type="none" w="med" len="med"/>
+                      <a:tailEnd type="none" w="med" len="med"/>
+                    </a:lnB>
+                    <a:solidFill>
+                      <a:srgbClr val="F8F6F3"/>
+                    </a:solidFill>
+                  </a:tcPr>
+                </a:tc>
+                <a:tc>
+                  <a:txBody>
+                    <a:bodyPr/>
+                    <a:lstStyle/>
+                    <a:p>
+                      <a:pPr indent="0" marL="0">
+                        <a:buNone/>
+                      </a:pPr>
+                      <a:r>
+                        <a:rPr lang="en-US" sz="1200" dirty="0">
+                          <a:solidFill>
+                            <a:srgbClr val="3D3A36"/>
+                          </a:solidFill>
+                          <a:latin typeface="Arial" pitchFamily="34" charset="0"/>
+                          <a:ea typeface="Arial" pitchFamily="34" charset="-122"/>
+                          <a:cs typeface="Arial" pitchFamily="34" charset="-120"/>
+                        </a:rPr>
+                        <a:t>Can be compressed</a:t>
+                      </a:r>
+                      <a:endParaRPr lang="en-US" sz="1200" dirty="0">
+                        <a:latin typeface="Arial" charset="0"/>
+                        <a:ea typeface="Arial" charset="0"/>
+                        <a:cs typeface="Arial" charset="0"/>
+                      </a:endParaRPr>
+                    </a:p>
+                  </a:txBody>
+                  <a:tcPr marL="101600" marR="101600" marT="50800" marB="50800" anchor="ctr">
+                    <a:lnL w="6350" cap="flat" cmpd="sng" algn="ctr">
+                      <a:solidFill>
+                        <a:srgbClr val="E5E2DC"/>
+                      </a:solidFill>
+                      <a:prstDash val="solid"/>
+                      <a:round/>
+                      <a:headEnd type="none" w="med" len="med"/>
+                      <a:tailEnd type="none" w="med" len="med"/>
+                    </a:lnL>
+                    <a:lnR w="6350" cap="flat" cmpd="sng" algn="ctr">
+                      <a:solidFill>
+                        <a:srgbClr val="E5E2DC"/>
+                      </a:solidFill>
+                      <a:prstDash val="solid"/>
+                      <a:round/>
+                      <a:headEnd type="none" w="med" len="med"/>
+                      <a:tailEnd type="none" w="med" len="med"/>
+                    </a:lnR>
+                    <a:lnT w="6350" cap="flat" cmpd="sng" algn="ctr">
+                      <a:solidFill>
+                        <a:srgbClr val="E5E2DC"/>
+                      </a:solidFill>
+                      <a:prstDash val="solid"/>
+                      <a:round/>
+                      <a:headEnd type="none" w="med" len="med"/>
+                      <a:tailEnd type="none" w="med" len="med"/>
+                    </a:lnT>
+                    <a:lnB w="6350" cap="flat" cmpd="sng" algn="ctr">
+                      <a:solidFill>
+                        <a:srgbClr val="E5E2DC"/>
+                      </a:solidFill>
+                      <a:prstDash val="solid"/>
+                      <a:round/>
+                      <a:headEnd type="none" w="med" len="med"/>
+                      <a:tailEnd type="none" w="med" len="med"/>
+                    </a:lnB>
+                    <a:solidFill>
+                      <a:srgbClr val="F8F6F3"/>
+                    </a:solidFill>
+                  </a:tcPr>
+                </a:tc>
+              </a:tr>
+              <a:tr h="365760">
+                <a:tc>
+                  <a:txBody>
+                    <a:bodyPr/>
+                    <a:lstStyle/>
+                    <a:p>
+                      <a:pPr indent="0" marL="0">
+                        <a:buNone/>
+                      </a:pPr>
+                      <a:r>
+                        <a:rPr lang="en-US" sz="1200" dirty="0">
+                          <a:solidFill>
+                            <a:srgbClr val="3D3A36"/>
+                          </a:solidFill>
+                          <a:latin typeface="Arial" pitchFamily="34" charset="0"/>
+                          <a:ea typeface="Arial" pitchFamily="34" charset="-122"/>
+                          <a:cs typeface="Arial" pitchFamily="34" charset="-120"/>
+                        </a:rPr>
+                        <a:t>Forces</a:t>
+                      </a:r>
+                      <a:endParaRPr lang="en-US" sz="1200" dirty="0">
+                        <a:latin typeface="Arial" charset="0"/>
+                        <a:ea typeface="Arial" charset="0"/>
+                        <a:cs typeface="Arial" charset="0"/>
+                      </a:endParaRPr>
+                    </a:p>
+                  </a:txBody>
+                  <a:tcPr marL="101600" marR="101600" marT="50800" marB="50800" anchor="ctr">
+                    <a:lnL w="6350" cap="flat" cmpd="sng" algn="ctr">
+                      <a:solidFill>
+                        <a:srgbClr val="E5E2DC"/>
+                      </a:solidFill>
+                      <a:prstDash val="solid"/>
+                      <a:round/>
+                      <a:headEnd type="none" w="med" len="med"/>
+                      <a:tailEnd type="none" w="med" len="med"/>
+                    </a:lnL>
+                    <a:lnR w="6350" cap="flat" cmpd="sng" algn="ctr">
+                      <a:solidFill>
+                        <a:srgbClr val="E5E2DC"/>
+                      </a:solidFill>
+                      <a:prstDash val="solid"/>
+                      <a:round/>
+                      <a:headEnd type="none" w="med" len="med"/>
+                      <a:tailEnd type="none" w="med" len="med"/>
+                    </a:lnR>
+                    <a:lnT w="6350" cap="flat" cmpd="sng" algn="ctr">
+                      <a:solidFill>
+                        <a:srgbClr val="E5E2DC"/>
+                      </a:solidFill>
+                      <a:prstDash val="solid"/>
+                      <a:round/>
+                      <a:headEnd type="none" w="med" len="med"/>
+                      <a:tailEnd type="none" w="med" len="med"/>
+                    </a:lnT>
+                    <a:lnB w="6350" cap="flat" cmpd="sng" algn="ctr">
+                      <a:solidFill>
+                        <a:srgbClr val="E5E2DC"/>
+                      </a:solidFill>
+                      <a:prstDash val="solid"/>
+                      <a:round/>
+                      <a:headEnd type="none" w="med" len="med"/>
+                      <a:tailEnd type="none" w="med" len="med"/>
+                    </a:lnB>
+                    <a:solidFill>
+                      <a:srgbClr val="FFFFFF"/>
+                    </a:solidFill>
+                  </a:tcPr>
+                </a:tc>
+                <a:tc>
+                  <a:txBody>
+                    <a:bodyPr/>
+                    <a:lstStyle/>
+                    <a:p>
+                      <a:pPr indent="0" marL="0">
+                        <a:buNone/>
+                      </a:pPr>
+                      <a:r>
+                        <a:rPr lang="en-US" sz="1200" dirty="0">
+                          <a:solidFill>
+                            <a:srgbClr val="3D3A36"/>
+                          </a:solidFill>
+                          <a:latin typeface="Arial" pitchFamily="34" charset="0"/>
+                          <a:ea typeface="Arial" pitchFamily="34" charset="-122"/>
+                          <a:cs typeface="Arial" pitchFamily="34" charset="-120"/>
+                        </a:rPr>
+                        <a:t>Strong attractions</a:t>
+                      </a:r>
+                      <a:endParaRPr lang="en-US" sz="1200" dirty="0">
+                        <a:latin typeface="Arial" charset="0"/>
+                        <a:ea typeface="Arial" charset="0"/>
+                        <a:cs typeface="Arial" charset="0"/>
+                      </a:endParaRPr>
+                    </a:p>
+                  </a:txBody>
+                  <a:tcPr marL="101600" marR="101600" marT="50800" marB="50800" anchor="ctr">
+                    <a:lnL w="6350" cap="flat" cmpd="sng" algn="ctr">
+                      <a:solidFill>
+                        <a:srgbClr val="E5E2DC"/>
+                      </a:solidFill>
+                      <a:prstDash val="solid"/>
+                      <a:round/>
+                      <a:headEnd type="none" w="med" len="med"/>
+                      <a:tailEnd type="none" w="med" len="med"/>
+                    </a:lnL>
+                    <a:lnR w="6350" cap="flat" cmpd="sng" algn="ctr">
+                      <a:solidFill>
+                        <a:srgbClr val="E5E2DC"/>
+                      </a:solidFill>
+                      <a:prstDash val="solid"/>
+                      <a:round/>
+                      <a:headEnd type="none" w="med" len="med"/>
+                      <a:tailEnd type="none" w="med" len="med"/>
+                    </a:lnR>
+                    <a:lnT w="6350" cap="flat" cmpd="sng" algn="ctr">
+                      <a:solidFill>
+                        <a:srgbClr val="E5E2DC"/>
+                      </a:solidFill>
+                      <a:prstDash val="solid"/>
+                      <a:round/>
+                      <a:headEnd type="none" w="med" len="med"/>
+                      <a:tailEnd type="none" w="med" len="med"/>
+                    </a:lnT>
+                    <a:lnB w="6350" cap="flat" cmpd="sng" algn="ctr">
+                      <a:solidFill>
+                        <a:srgbClr val="E5E2DC"/>
+                      </a:solidFill>
+                      <a:prstDash val="solid"/>
+                      <a:round/>
+                      <a:headEnd type="none" w="med" len="med"/>
+                      <a:tailEnd type="none" w="med" len="med"/>
+                    </a:lnB>
+                    <a:solidFill>
+                      <a:srgbClr val="FFFFFF"/>
+                    </a:solidFill>
+                  </a:tcPr>
+                </a:tc>
+                <a:tc>
+                  <a:txBody>
+                    <a:bodyPr/>
+                    <a:lstStyle/>
+                    <a:p>
+                      <a:pPr indent="0" marL="0">
+                        <a:buNone/>
+                      </a:pPr>
+                      <a:r>
+                        <a:rPr lang="en-US" sz="1200" dirty="0">
+                          <a:solidFill>
+                            <a:srgbClr val="3D3A36"/>
+                          </a:solidFill>
+                          <a:latin typeface="Arial" pitchFamily="34" charset="0"/>
+                          <a:ea typeface="Arial" pitchFamily="34" charset="-122"/>
+                          <a:cs typeface="Arial" pitchFamily="34" charset="-120"/>
+                        </a:rPr>
+                        <a:t>Moderate attractions</a:t>
+                      </a:r>
+                      <a:endParaRPr lang="en-US" sz="1200" dirty="0">
+                        <a:latin typeface="Arial" charset="0"/>
+                        <a:ea typeface="Arial" charset="0"/>
+                        <a:cs typeface="Arial" charset="0"/>
+                      </a:endParaRPr>
+                    </a:p>
+                  </a:txBody>
+                  <a:tcPr marL="101600" marR="101600" marT="50800" marB="50800" anchor="ctr">
+                    <a:lnL w="6350" cap="flat" cmpd="sng" algn="ctr">
+                      <a:solidFill>
+                        <a:srgbClr val="E5E2DC"/>
+                      </a:solidFill>
+                      <a:prstDash val="solid"/>
+                      <a:round/>
+                      <a:headEnd type="none" w="med" len="med"/>
+                      <a:tailEnd type="none" w="med" len="med"/>
+                    </a:lnL>
+                    <a:lnR w="6350" cap="flat" cmpd="sng" algn="ctr">
+                      <a:solidFill>
+                        <a:srgbClr val="E5E2DC"/>
+                      </a:solidFill>
+                      <a:prstDash val="solid"/>
+                      <a:round/>
+                      <a:headEnd type="none" w="med" len="med"/>
+                      <a:tailEnd type="none" w="med" len="med"/>
+                    </a:lnR>
+                    <a:lnT w="6350" cap="flat" cmpd="sng" algn="ctr">
+                      <a:solidFill>
+                        <a:srgbClr val="E5E2DC"/>
+                      </a:solidFill>
+                      <a:prstDash val="solid"/>
+                      <a:round/>
+                      <a:headEnd type="none" w="med" len="med"/>
+                      <a:tailEnd type="none" w="med" len="med"/>
+                    </a:lnT>
+                    <a:lnB w="6350" cap="flat" cmpd="sng" algn="ctr">
+                      <a:solidFill>
+                        <a:srgbClr val="E5E2DC"/>
+                      </a:solidFill>
+                      <a:prstDash val="solid"/>
+                      <a:round/>
+                      <a:headEnd type="none" w="med" len="med"/>
+                      <a:tailEnd type="none" w="med" len="med"/>
+                    </a:lnB>
+                    <a:solidFill>
+                      <a:srgbClr val="FFFFFF"/>
+                    </a:solidFill>
+                  </a:tcPr>
+                </a:tc>
+                <a:tc>
+                  <a:txBody>
+                    <a:bodyPr/>
+                    <a:lstStyle/>
+                    <a:p>
+                      <a:pPr indent="0" marL="0">
+                        <a:buNone/>
+                      </a:pPr>
+                      <a:r>
+                        <a:rPr lang="en-US" sz="1200" dirty="0">
+                          <a:solidFill>
+                            <a:srgbClr val="3D3A36"/>
+                          </a:solidFill>
+                          <a:latin typeface="Arial" pitchFamily="34" charset="0"/>
+                          <a:ea typeface="Arial" pitchFamily="34" charset="-122"/>
+                          <a:cs typeface="Arial" pitchFamily="34" charset="-120"/>
+                        </a:rPr>
+                        <a:t>Very weak attractions</a:t>
+                      </a:r>
+                      <a:endParaRPr lang="en-US" sz="1200" dirty="0">
+                        <a:latin typeface="Arial" charset="0"/>
+                        <a:ea typeface="Arial" charset="0"/>
+                        <a:cs typeface="Arial" charset="0"/>
+                      </a:endParaRPr>
+                    </a:p>
+                  </a:txBody>
+                  <a:tcPr marL="101600" marR="101600" marT="50800" marB="50800" anchor="ctr">
+                    <a:lnL w="6350" cap="flat" cmpd="sng" algn="ctr">
+                      <a:solidFill>
+                        <a:srgbClr val="E5E2DC"/>
+                      </a:solidFill>
+                      <a:prstDash val="solid"/>
+                      <a:round/>
+                      <a:headEnd type="none" w="med" len="med"/>
+                      <a:tailEnd type="none" w="med" len="med"/>
+                    </a:lnL>
+                    <a:lnR w="6350" cap="flat" cmpd="sng" algn="ctr">
+                      <a:solidFill>
+                        <a:srgbClr val="E5E2DC"/>
+                      </a:solidFill>
+                      <a:prstDash val="solid"/>
+                      <a:round/>
+                      <a:headEnd type="none" w="med" len="med"/>
+                      <a:tailEnd type="none" w="med" len="med"/>
+                    </a:lnR>
+                    <a:lnT w="6350" cap="flat" cmpd="sng" algn="ctr">
+                      <a:solidFill>
+                        <a:srgbClr val="E5E2DC"/>
+                      </a:solidFill>
+                      <a:prstDash val="solid"/>
+                      <a:round/>
+                      <a:headEnd type="none" w="med" len="med"/>
+                      <a:tailEnd type="none" w="med" len="med"/>
+                    </a:lnT>
+                    <a:lnB w="6350" cap="flat" cmpd="sng" algn="ctr">
+                      <a:solidFill>
+                        <a:srgbClr val="E5E2DC"/>
+                      </a:solidFill>
+                      <a:prstDash val="solid"/>
+                      <a:round/>
+                      <a:headEnd type="none" w="med" len="med"/>
+                      <a:tailEnd type="none" w="med" len="med"/>
+                    </a:lnB>
+                    <a:solidFill>
+                      <a:srgbClr val="FFFFFF"/>
+                    </a:solidFill>
+                  </a:tcPr>
+                </a:tc>
+              </a:tr>
+            </a:tbl>
+          </a:graphicData>
+        </a:graphic>
+      </p:graphicFrame>
     </p:spTree>
   </p:cSld>
   <p:clrMapOvr>
@@ -3760,47 +4404,7 @@
         <p:spPr>
           <a:xfrm>
             <a:off x="0" y="0"/>
-            <a:ext cx="9144000" cy="822960"/>
-          </a:xfrm>
-          <a:prstGeom prst="rect">
-            <a:avLst/>
-          </a:prstGeom>
-          <a:solidFill>
-            <a:srgbClr val="FFFFFF"/>
-          </a:solidFill>
-          <a:ln/>
-        </p:spPr>
-      </p:sp>
-      <p:sp>
-        <p:nvSpPr>
-          <p:cNvPr id="3" name="Shape 1"/>
-          <p:cNvSpPr/>
-          <p:nvPr/>
-        </p:nvSpPr>
-        <p:spPr>
-          <a:xfrm>
-            <a:off x="0" y="804672"/>
-            <a:ext cx="9144000" cy="27432"/>
-          </a:xfrm>
-          <a:prstGeom prst="rect">
-            <a:avLst/>
-          </a:prstGeom>
-          <a:solidFill>
-            <a:srgbClr val="E5E2DC"/>
-          </a:solidFill>
-          <a:ln/>
-        </p:spPr>
-      </p:sp>
-      <p:sp>
-        <p:nvSpPr>
-          <p:cNvPr id="4" name="Shape 2"/>
-          <p:cNvSpPr/>
-          <p:nvPr/>
-        </p:nvSpPr>
-        <p:spPr>
-          <a:xfrm>
-            <a:off x="548640" y="201168"/>
-            <a:ext cx="54864" cy="420624"/>
+            <a:ext cx="73152" cy="5148072"/>
           </a:xfrm>
           <a:prstGeom prst="rect">
             <a:avLst/>
@@ -3813,14 +4417,14 @@
       </p:sp>
       <p:sp>
         <p:nvSpPr>
-          <p:cNvPr id="5" name="Text 3"/>
+          <p:cNvPr id="3" name="Text 1"/>
           <p:cNvSpPr/>
           <p:nvPr/>
         </p:nvSpPr>
         <p:spPr>
           <a:xfrm>
-            <a:off x="777240" y="137160"/>
-            <a:ext cx="7772400" cy="548640"/>
+            <a:off x="548640" y="274320"/>
+            <a:ext cx="9144000" cy="640080"/>
           </a:xfrm>
           <a:prstGeom prst="rect">
             <a:avLst/>
@@ -3829,14 +4433,14 @@
           <a:ln/>
         </p:spPr>
         <p:txBody>
-          <a:bodyPr wrap="square" lIns="0" tIns="0" rIns="0" bIns="0" rtlCol="0" anchor="ctr"/>
+          <a:bodyPr wrap="square" rtlCol="0" anchor="ctr"/>
           <a:lstStyle/>
           <a:p>
             <a:pPr indent="0" marL="0">
               <a:buNone/>
             </a:pPr>
             <a:r>
-              <a:rPr lang="en-US" sz="2000" b="1" dirty="0">
+              <a:rPr lang="en-US" sz="2400" b="1" dirty="0">
                 <a:solidFill>
                   <a:srgbClr val="1B2A4A"/>
                 </a:solidFill>
@@ -3844,49 +4448,22 @@
                 <a:ea typeface="Georgia" pitchFamily="34" charset="-122"/>
                 <a:cs typeface="Georgia" pitchFamily="34" charset="-120"/>
               </a:rPr>
-              <a:t>What the Model Explains</a:t>
-            </a:r>
-            <a:endParaRPr lang="en-US" sz="2000" dirty="0"/>
+              <a:t>Real-World Examples</a:t>
+            </a:r>
+            <a:endParaRPr lang="en-US" sz="2400" dirty="0"/>
           </a:p>
         </p:txBody>
       </p:sp>
       <p:sp>
         <p:nvSpPr>
-          <p:cNvPr id="6" name="Shape 4"/>
+          <p:cNvPr id="4" name="Shape 2"/>
           <p:cNvSpPr/>
           <p:nvPr/>
         </p:nvSpPr>
         <p:spPr>
           <a:xfrm>
-            <a:off x="548640" y="1051560"/>
-            <a:ext cx="3840480" cy="3474720"/>
-          </a:xfrm>
-          <a:prstGeom prst="rect">
-            <a:avLst/>
-          </a:prstGeom>
-          <a:solidFill>
-            <a:srgbClr val="FFFFFF"/>
-          </a:solidFill>
-          <a:ln/>
-          <a:effectLst>
-            <a:outerShdw sx="100000" sy="100000" kx="0" ky="0" algn="bl" rotWithShape="0" blurRad="50800" dist="25400" dir="8100000">
-              <a:srgbClr val="000000">
-                <a:alpha val="10000"/>
-              </a:srgbClr>
-            </a:outerShdw>
-          </a:effectLst>
-        </p:spPr>
-      </p:sp>
-      <p:sp>
-        <p:nvSpPr>
-          <p:cNvPr id="7" name="Shape 5"/>
-          <p:cNvSpPr/>
-          <p:nvPr/>
-        </p:nvSpPr>
-        <p:spPr>
-          <a:xfrm>
-            <a:off x="548640" y="1051560"/>
-            <a:ext cx="3840480" cy="54864"/>
+            <a:off x="548640" y="960120"/>
+            <a:ext cx="2286000" cy="36576"/>
           </a:xfrm>
           <a:prstGeom prst="rect">
             <a:avLst/>
@@ -3899,14 +4476,41 @@
       </p:sp>
       <p:sp>
         <p:nvSpPr>
-          <p:cNvPr id="8" name="Text 6"/>
+          <p:cNvPr id="5" name="Shape 3"/>
           <p:cNvSpPr/>
           <p:nvPr/>
         </p:nvSpPr>
         <p:spPr>
           <a:xfrm>
-            <a:off x="777240" y="1188720"/>
-            <a:ext cx="3383280" cy="457200"/>
+            <a:off x="548640" y="1188720"/>
+            <a:ext cx="5029200" cy="3474720"/>
+          </a:xfrm>
+          <a:prstGeom prst="roundRect">
+            <a:avLst>
+              <a:gd name="adj" fmla="val 3158"/>
+            </a:avLst>
+          </a:prstGeom>
+          <a:solidFill>
+            <a:srgbClr val="FFFFFF"/>
+          </a:solidFill>
+          <a:ln w="9525">
+            <a:solidFill>
+              <a:srgbClr val="E5E2DC"/>
+            </a:solidFill>
+            <a:prstDash val="solid"/>
+          </a:ln>
+        </p:spPr>
+      </p:sp>
+      <p:sp>
+        <p:nvSpPr>
+          <p:cNvPr id="6" name="Text 4"/>
+          <p:cNvSpPr/>
+          <p:nvPr/>
+        </p:nvSpPr>
+        <p:spPr>
+          <a:xfrm>
+            <a:off x="777240" y="1325880"/>
+            <a:ext cx="4572000" cy="365760"/>
           </a:xfrm>
           <a:prstGeom prst="rect">
             <a:avLst/>
@@ -3915,7 +4519,7 @@
           <a:ln/>
         </p:spPr>
         <p:txBody>
-          <a:bodyPr wrap="square" lIns="0" tIns="0" rIns="0" bIns="0" rtlCol="0" anchor="ctr"/>
+          <a:bodyPr wrap="square" rtlCol="0" anchor="ctr"/>
           <a:lstStyle/>
           <a:p>
             <a:pPr indent="0" marL="0">
@@ -3924,13 +4528,13 @@
             <a:r>
               <a:rPr lang="en-US" sz="1500" b="1" dirty="0">
                 <a:solidFill>
-                  <a:srgbClr val="1B2A4A"/>
+                  <a:srgbClr val="2A9D8F"/>
                 </a:solidFill>
                 <a:latin typeface="Georgia" pitchFamily="34" charset="0"/>
                 <a:ea typeface="Georgia" pitchFamily="34" charset="-122"/>
                 <a:cs typeface="Georgia" pitchFamily="34" charset="-120"/>
               </a:rPr>
-              <a:t>Explains Well</a:t>
+              <a:t>Everyday Solids, Liquids, Gases</a:t>
             </a:r>
             <a:endParaRPr lang="en-US" sz="1500" dirty="0"/>
           </a:p>
@@ -3938,14 +4542,14 @@
       </p:sp>
       <p:sp>
         <p:nvSpPr>
-          <p:cNvPr id="9" name="Text 7"/>
+          <p:cNvPr id="7" name="Text 5"/>
           <p:cNvSpPr/>
           <p:nvPr/>
         </p:nvSpPr>
         <p:spPr>
           <a:xfrm>
-            <a:off x="777240" y="1691640"/>
-            <a:ext cx="3383280" cy="2651760"/>
+            <a:off x="777240" y="1783080"/>
+            <a:ext cx="4572000" cy="2651760"/>
           </a:xfrm>
           <a:prstGeom prst="rect">
             <a:avLst/>
@@ -3957,86 +4561,90 @@
           <a:bodyPr wrap="square" rtlCol="0" anchor="t"/>
           <a:lstStyle/>
           <a:p>
-            <a:pPr marL="342900" indent="-342900">
+            <a:pPr>
+              <a:lnSpc>
+                <a:spcPct val="140000"/>
+              </a:lnSpc>
               <a:spcAft>
-                <a:spcPts val="600"/>
+                <a:spcPts val="400"/>
               </a:spcAft>
-              <a:buSzPct val="100000"/>
-              <a:buChar char="•"/>
             </a:pPr>
             <a:r>
               <a:rPr lang="en-US" sz="1300" dirty="0">
                 <a:solidFill>
                   <a:srgbClr val="3D3A36"/>
                 </a:solidFill>
-                <a:latin typeface="Calibri" pitchFamily="34" charset="0"/>
-                <a:ea typeface="Calibri" pitchFamily="34" charset="-122"/>
-                <a:cs typeface="Calibri" pitchFamily="34" charset="-120"/>
+                <a:latin typeface="Arial" pitchFamily="34" charset="0"/>
+                <a:ea typeface="Arial" pitchFamily="34" charset="-122"/>
+                <a:cs typeface="Arial" pitchFamily="34" charset="-120"/>
               </a:rPr>
-              <a:t>Why solids hold their shape</a:t>
+              <a:t>Ice cube = solid (fixed shape, hard)</a:t>
             </a:r>
             <a:endParaRPr lang="en-US" sz="1300" dirty="0"/>
           </a:p>
           <a:p>
-            <a:pPr marL="342900" indent="-342900">
+            <a:pPr>
+              <a:lnSpc>
+                <a:spcPct val="140000"/>
+              </a:lnSpc>
               <a:spcAft>
-                <a:spcPts val="600"/>
+                <a:spcPts val="400"/>
               </a:spcAft>
-              <a:buSzPct val="100000"/>
-              <a:buChar char="•"/>
             </a:pPr>
             <a:r>
               <a:rPr lang="en-US" sz="1300" dirty="0">
                 <a:solidFill>
                   <a:srgbClr val="3D3A36"/>
                 </a:solidFill>
-                <a:latin typeface="Calibri" pitchFamily="34" charset="0"/>
-                <a:ea typeface="Calibri" pitchFamily="34" charset="-122"/>
-                <a:cs typeface="Calibri" pitchFamily="34" charset="-120"/>
+                <a:latin typeface="Arial" pitchFamily="34" charset="0"/>
+                <a:ea typeface="Arial" pitchFamily="34" charset="-122"/>
+                <a:cs typeface="Arial" pitchFamily="34" charset="-120"/>
               </a:rPr>
-              <a:t>Why liquids flow</a:t>
+              <a:t>Water = liquid (flows, takes shape of glass)</a:t>
             </a:r>
             <a:endParaRPr lang="en-US" sz="1300" dirty="0"/>
           </a:p>
           <a:p>
-            <a:pPr marL="342900" indent="-342900">
+            <a:pPr>
+              <a:lnSpc>
+                <a:spcPct val="140000"/>
+              </a:lnSpc>
               <a:spcAft>
-                <a:spcPts val="600"/>
+                <a:spcPts val="400"/>
               </a:spcAft>
-              <a:buSzPct val="100000"/>
-              <a:buChar char="•"/>
             </a:pPr>
             <a:r>
               <a:rPr lang="en-US" sz="1300" dirty="0">
                 <a:solidFill>
                   <a:srgbClr val="3D3A36"/>
                 </a:solidFill>
-                <a:latin typeface="Calibri" pitchFamily="34" charset="0"/>
-                <a:ea typeface="Calibri" pitchFamily="34" charset="-122"/>
-                <a:cs typeface="Calibri" pitchFamily="34" charset="-120"/>
+                <a:latin typeface="Arial" pitchFamily="34" charset="0"/>
+                <a:ea typeface="Arial" pitchFamily="34" charset="-122"/>
+                <a:cs typeface="Arial" pitchFamily="34" charset="-120"/>
               </a:rPr>
-              <a:t>Why gases spread out</a:t>
+              <a:t>Steam = gas (invisible, fills the room)</a:t>
             </a:r>
             <a:endParaRPr lang="en-US" sz="1300" dirty="0"/>
           </a:p>
           <a:p>
-            <a:pPr marL="342900" indent="-342900">
+            <a:pPr>
+              <a:lnSpc>
+                <a:spcPct val="140000"/>
+              </a:lnSpc>
               <a:spcAft>
-                <a:spcPts val="600"/>
+                <a:spcPts val="400"/>
               </a:spcAft>
-              <a:buSzPct val="100000"/>
-              <a:buChar char="•"/>
             </a:pPr>
             <a:r>
               <a:rPr lang="en-US" sz="1300" dirty="0">
                 <a:solidFill>
                   <a:srgbClr val="3D3A36"/>
                 </a:solidFill>
-                <a:latin typeface="Calibri" pitchFamily="34" charset="0"/>
-                <a:ea typeface="Calibri" pitchFamily="34" charset="-122"/>
-                <a:cs typeface="Calibri" pitchFamily="34" charset="-120"/>
+                <a:latin typeface="Arial" pitchFamily="34" charset="0"/>
+                <a:ea typeface="Arial" pitchFamily="34" charset="-122"/>
+                <a:cs typeface="Arial" pitchFamily="34" charset="-120"/>
               </a:rPr>
-              <a:t>Why heating makes things expand</a:t>
+              <a:t>Air = mixture of gases (oxygen + nitrogen)</a:t>
             </a:r>
             <a:endParaRPr lang="en-US" sz="1300" dirty="0"/>
           </a:p>
@@ -4044,70 +4652,50 @@
       </p:sp>
       <p:sp>
         <p:nvSpPr>
-          <p:cNvPr id="10" name="Shape 8"/>
+          <p:cNvPr id="8" name="Shape 6"/>
           <p:cNvSpPr/>
           <p:nvPr/>
         </p:nvSpPr>
         <p:spPr>
           <a:xfrm>
-            <a:off x="4754880" y="1051560"/>
-            <a:ext cx="3840480" cy="3474720"/>
-          </a:xfrm>
-          <a:prstGeom prst="rect">
-            <a:avLst/>
+            <a:off x="5852160" y="1188720"/>
+            <a:ext cx="5029200" cy="3474720"/>
+          </a:xfrm>
+          <a:prstGeom prst="roundRect">
+            <a:avLst>
+              <a:gd name="adj" fmla="val 3158"/>
+            </a:avLst>
           </a:prstGeom>
           <a:solidFill>
             <a:srgbClr val="FFFFFF"/>
           </a:solidFill>
-          <a:ln/>
-          <a:effectLst>
-            <a:outerShdw sx="100000" sy="100000" kx="0" ky="0" algn="bl" rotWithShape="0" blurRad="50800" dist="25400" dir="8100000">
-              <a:srgbClr val="000000">
-                <a:alpha val="10000"/>
-              </a:srgbClr>
-            </a:outerShdw>
-          </a:effectLst>
-        </p:spPr>
-      </p:sp>
-      <p:sp>
-        <p:nvSpPr>
-          <p:cNvPr id="11" name="Shape 9"/>
+          <a:ln w="9525">
+            <a:solidFill>
+              <a:srgbClr val="E5E2DC"/>
+            </a:solidFill>
+            <a:prstDash val="solid"/>
+          </a:ln>
+        </p:spPr>
+      </p:sp>
+      <p:sp>
+        <p:nvSpPr>
+          <p:cNvPr id="9" name="Text 7"/>
           <p:cNvSpPr/>
           <p:nvPr/>
         </p:nvSpPr>
         <p:spPr>
           <a:xfrm>
-            <a:off x="4754880" y="1051560"/>
-            <a:ext cx="3840480" cy="54864"/>
+            <a:off x="6080760" y="1325880"/>
+            <a:ext cx="4572000" cy="365760"/>
           </a:xfrm>
           <a:prstGeom prst="rect">
             <a:avLst/>
           </a:prstGeom>
-          <a:solidFill>
-            <a:srgbClr val="E9C46A"/>
-          </a:solidFill>
-          <a:ln/>
-        </p:spPr>
-      </p:sp>
-      <p:sp>
-        <p:nvSpPr>
-          <p:cNvPr id="12" name="Text 10"/>
-          <p:cNvSpPr/>
-          <p:nvPr/>
-        </p:nvSpPr>
-        <p:spPr>
-          <a:xfrm>
-            <a:off x="4983480" y="1188720"/>
-            <a:ext cx="3383280" cy="457200"/>
-          </a:xfrm>
-          <a:prstGeom prst="rect">
-            <a:avLst/>
-          </a:prstGeom>
           <a:noFill/>
           <a:ln/>
         </p:spPr>
         <p:txBody>
-          <a:bodyPr wrap="square" lIns="0" tIns="0" rIns="0" bIns="0" rtlCol="0" anchor="ctr"/>
+          <a:bodyPr wrap="square" rtlCol="0" anchor="ctr"/>
           <a:lstStyle/>
           <a:p>
             <a:pPr indent="0" marL="0">
@@ -4116,13 +4704,13 @@
             <a:r>
               <a:rPr lang="en-US" sz="1500" b="1" dirty="0">
                 <a:solidFill>
-                  <a:srgbClr val="1B2A4A"/>
+                  <a:srgbClr val="E9C46A"/>
                 </a:solidFill>
                 <a:latin typeface="Georgia" pitchFamily="34" charset="0"/>
                 <a:ea typeface="Georgia" pitchFamily="34" charset="-122"/>
                 <a:cs typeface="Georgia" pitchFamily="34" charset="-120"/>
               </a:rPr>
-              <a:t>Limitations</a:t>
+              <a:t>Why This Matters</a:t>
             </a:r>
             <a:endParaRPr lang="en-US" sz="1500" dirty="0"/>
           </a:p>
@@ -4130,14 +4718,14 @@
       </p:sp>
       <p:sp>
         <p:nvSpPr>
-          <p:cNvPr id="13" name="Text 11"/>
+          <p:cNvPr id="10" name="Text 8"/>
           <p:cNvSpPr/>
           <p:nvPr/>
         </p:nvSpPr>
         <p:spPr>
           <a:xfrm>
-            <a:off x="4983480" y="1691640"/>
-            <a:ext cx="3383280" cy="2651760"/>
+            <a:off x="6080760" y="1783080"/>
+            <a:ext cx="4572000" cy="2651760"/>
           </a:xfrm>
           <a:prstGeom prst="rect">
             <a:avLst/>
@@ -4149,86 +4737,90 @@
           <a:bodyPr wrap="square" rtlCol="0" anchor="t"/>
           <a:lstStyle/>
           <a:p>
-            <a:pPr marL="342900" indent="-342900">
+            <a:pPr>
+              <a:lnSpc>
+                <a:spcPct val="140000"/>
+              </a:lnSpc>
               <a:spcAft>
-                <a:spcPts val="600"/>
+                <a:spcPts val="400"/>
               </a:spcAft>
-              <a:buSzPct val="100000"/>
-              <a:buChar char="•"/>
             </a:pPr>
             <a:r>
               <a:rPr lang="en-US" sz="1300" dirty="0">
                 <a:solidFill>
                   <a:srgbClr val="3D3A36"/>
                 </a:solidFill>
-                <a:latin typeface="Calibri" pitchFamily="34" charset="0"/>
-                <a:ea typeface="Calibri" pitchFamily="34" charset="-122"/>
-                <a:cs typeface="Calibri" pitchFamily="34" charset="-120"/>
+                <a:latin typeface="Arial" pitchFamily="34" charset="0"/>
+                <a:ea typeface="Arial" pitchFamily="34" charset="-122"/>
+                <a:cs typeface="Arial" pitchFamily="34" charset="-120"/>
               </a:rPr>
-              <a:t>Particles are not solid spheres</a:t>
+              <a:t>Explains why solids are hard to compress</a:t>
             </a:r>
             <a:endParaRPr lang="en-US" sz="1300" dirty="0"/>
           </a:p>
           <a:p>
-            <a:pPr marL="342900" indent="-342900">
+            <a:pPr>
+              <a:lnSpc>
+                <a:spcPct val="140000"/>
+              </a:lnSpc>
               <a:spcAft>
-                <a:spcPts val="600"/>
+                <a:spcPts val="400"/>
               </a:spcAft>
-              <a:buSzPct val="100000"/>
-              <a:buChar char="•"/>
             </a:pPr>
             <a:r>
               <a:rPr lang="en-US" sz="1300" dirty="0">
                 <a:solidFill>
                   <a:srgbClr val="3D3A36"/>
                 </a:solidFill>
-                <a:latin typeface="Calibri" pitchFamily="34" charset="0"/>
-                <a:ea typeface="Calibri" pitchFamily="34" charset="-122"/>
-                <a:cs typeface="Calibri" pitchFamily="34" charset="-120"/>
+                <a:latin typeface="Arial" pitchFamily="34" charset="0"/>
+                <a:ea typeface="Arial" pitchFamily="34" charset="-122"/>
+                <a:cs typeface="Arial" pitchFamily="34" charset="-120"/>
               </a:rPr>
-              <a:t>Real particles have different sizes</a:t>
+              <a:t>Explains why liquids flow</a:t>
             </a:r>
             <a:endParaRPr lang="en-US" sz="1300" dirty="0"/>
           </a:p>
           <a:p>
-            <a:pPr marL="342900" indent="-342900">
+            <a:pPr>
+              <a:lnSpc>
+                <a:spcPct val="140000"/>
+              </a:lnSpc>
               <a:spcAft>
-                <a:spcPts val="600"/>
+                <a:spcPts val="400"/>
               </a:spcAft>
-              <a:buSzPct val="100000"/>
-              <a:buChar char="•"/>
             </a:pPr>
             <a:r>
               <a:rPr lang="en-US" sz="1300" dirty="0">
                 <a:solidFill>
                   <a:srgbClr val="3D3A36"/>
                 </a:solidFill>
-                <a:latin typeface="Calibri" pitchFamily="34" charset="0"/>
-                <a:ea typeface="Calibri" pitchFamily="34" charset="-122"/>
-                <a:cs typeface="Calibri" pitchFamily="34" charset="-120"/>
+                <a:latin typeface="Arial" pitchFamily="34" charset="0"/>
+                <a:ea typeface="Arial" pitchFamily="34" charset="-122"/>
+                <a:cs typeface="Arial" pitchFamily="34" charset="-120"/>
               </a:rPr>
-              <a:t>The model is simplified</a:t>
+              <a:t>Explains why gases spread out (diffusion)</a:t>
             </a:r>
             <a:endParaRPr lang="en-US" sz="1300" dirty="0"/>
           </a:p>
           <a:p>
-            <a:pPr marL="342900" indent="-342900">
+            <a:pPr>
+              <a:lnSpc>
+                <a:spcPct val="140000"/>
+              </a:lnSpc>
               <a:spcAft>
-                <a:spcPts val="600"/>
+                <a:spcPts val="400"/>
               </a:spcAft>
-              <a:buSzPct val="100000"/>
-              <a:buChar char="•"/>
             </a:pPr>
             <a:r>
               <a:rPr lang="en-US" sz="1300" dirty="0">
                 <a:solidFill>
                   <a:srgbClr val="3D3A36"/>
                 </a:solidFill>
-                <a:latin typeface="Calibri" pitchFamily="34" charset="0"/>
-                <a:ea typeface="Calibri" pitchFamily="34" charset="-122"/>
-                <a:cs typeface="Calibri" pitchFamily="34" charset="-120"/>
+                <a:latin typeface="Arial" pitchFamily="34" charset="0"/>
+                <a:ea typeface="Arial" pitchFamily="34" charset="-122"/>
+                <a:cs typeface="Arial" pitchFamily="34" charset="-120"/>
               </a:rPr>
-              <a:t>It doesn't show molecular structure</a:t>
+              <a:t>Used in engineering, cooking, medicine</a:t>
             </a:r>
             <a:endParaRPr lang="en-US" sz="1300" dirty="0"/>
           </a:p>
@@ -4275,47 +4867,7 @@
         <p:spPr>
           <a:xfrm>
             <a:off x="0" y="0"/>
-            <a:ext cx="9144000" cy="822960"/>
-          </a:xfrm>
-          <a:prstGeom prst="rect">
-            <a:avLst/>
-          </a:prstGeom>
-          <a:solidFill>
-            <a:srgbClr val="FFFFFF"/>
-          </a:solidFill>
-          <a:ln/>
-        </p:spPr>
-      </p:sp>
-      <p:sp>
-        <p:nvSpPr>
-          <p:cNvPr id="3" name="Shape 1"/>
-          <p:cNvSpPr/>
-          <p:nvPr/>
-        </p:nvSpPr>
-        <p:spPr>
-          <a:xfrm>
-            <a:off x="0" y="804672"/>
-            <a:ext cx="9144000" cy="27432"/>
-          </a:xfrm>
-          <a:prstGeom prst="rect">
-            <a:avLst/>
-          </a:prstGeom>
-          <a:solidFill>
-            <a:srgbClr val="E5E2DC"/>
-          </a:solidFill>
-          <a:ln/>
-        </p:spPr>
-      </p:sp>
-      <p:sp>
-        <p:nvSpPr>
-          <p:cNvPr id="4" name="Shape 2"/>
-          <p:cNvSpPr/>
-          <p:nvPr/>
-        </p:nvSpPr>
-        <p:spPr>
-          <a:xfrm>
-            <a:off x="548640" y="201168"/>
-            <a:ext cx="54864" cy="420624"/>
+            <a:ext cx="73152" cy="5148072"/>
           </a:xfrm>
           <a:prstGeom prst="rect">
             <a:avLst/>
@@ -4328,14 +4880,14 @@
       </p:sp>
       <p:sp>
         <p:nvSpPr>
-          <p:cNvPr id="5" name="Text 3"/>
+          <p:cNvPr id="3" name="Text 1"/>
           <p:cNvSpPr/>
           <p:nvPr/>
         </p:nvSpPr>
         <p:spPr>
           <a:xfrm>
-            <a:off x="777240" y="137160"/>
-            <a:ext cx="7772400" cy="548640"/>
+            <a:off x="548640" y="274320"/>
+            <a:ext cx="9144000" cy="640080"/>
           </a:xfrm>
           <a:prstGeom prst="rect">
             <a:avLst/>
@@ -4344,14 +4896,14 @@
           <a:ln/>
         </p:spPr>
         <p:txBody>
-          <a:bodyPr wrap="square" lIns="0" tIns="0" rIns="0" bIns="0" rtlCol="0" anchor="ctr"/>
+          <a:bodyPr wrap="square" rtlCol="0" anchor="ctr"/>
           <a:lstStyle/>
           <a:p>
             <a:pPr indent="0" marL="0">
               <a:buNone/>
             </a:pPr>
             <a:r>
-              <a:rPr lang="en-US" sz="2000" b="1" dirty="0">
+              <a:rPr lang="en-US" sz="2400" b="1" dirty="0">
                 <a:solidFill>
                   <a:srgbClr val="1B2A4A"/>
                 </a:solidFill>
@@ -4359,9 +4911,68 @@
                 <a:ea typeface="Georgia" pitchFamily="34" charset="-122"/>
                 <a:cs typeface="Georgia" pitchFamily="34" charset="-120"/>
               </a:rPr>
-              <a:t>Particle Movement &amp; Temperature</a:t>
-            </a:r>
-            <a:endParaRPr lang="en-US" sz="2000" dirty="0"/>
+              <a:t>Check Your Understanding</a:t>
+            </a:r>
+            <a:endParaRPr lang="en-US" sz="2400" dirty="0"/>
+          </a:p>
+        </p:txBody>
+      </p:sp>
+      <p:sp>
+        <p:nvSpPr>
+          <p:cNvPr id="4" name="Shape 2"/>
+          <p:cNvSpPr/>
+          <p:nvPr/>
+        </p:nvSpPr>
+        <p:spPr>
+          <a:xfrm>
+            <a:off x="548640" y="960120"/>
+            <a:ext cx="2286000" cy="36576"/>
+          </a:xfrm>
+          <a:prstGeom prst="rect">
+            <a:avLst/>
+          </a:prstGeom>
+          <a:solidFill>
+            <a:srgbClr val="2A9D8F"/>
+          </a:solidFill>
+          <a:ln/>
+        </p:spPr>
+      </p:sp>
+      <p:sp>
+        <p:nvSpPr>
+          <p:cNvPr id="5" name="Text 3"/>
+          <p:cNvSpPr/>
+          <p:nvPr/>
+        </p:nvSpPr>
+        <p:spPr>
+          <a:xfrm>
+            <a:off x="548640" y="1188720"/>
+            <a:ext cx="365760" cy="457200"/>
+          </a:xfrm>
+          <a:prstGeom prst="rect">
+            <a:avLst/>
+          </a:prstGeom>
+          <a:noFill/>
+          <a:ln/>
+        </p:spPr>
+        <p:txBody>
+          <a:bodyPr wrap="square" rtlCol="0" anchor="ctr"/>
+          <a:lstStyle/>
+          <a:p>
+            <a:pPr indent="0" marL="0">
+              <a:buNone/>
+            </a:pPr>
+            <a:r>
+              <a:rPr lang="en-US" sz="1600" dirty="0">
+                <a:solidFill>
+                  <a:srgbClr val="2A9D8F"/>
+                </a:solidFill>
+                <a:latin typeface="Arial" pitchFamily="34" charset="0"/>
+                <a:ea typeface="Arial" pitchFamily="34" charset="-122"/>
+                <a:cs typeface="Arial" pitchFamily="34" charset="-120"/>
+              </a:rPr>
+              <a:t>☐</a:t>
+            </a:r>
+            <a:endParaRPr lang="en-US" sz="1600" dirty="0"/>
           </a:p>
         </p:txBody>
       </p:sp>
@@ -4373,8 +4984,8 @@
         </p:nvSpPr>
         <p:spPr>
           <a:xfrm>
-            <a:off x="731520" y="1051560"/>
-            <a:ext cx="7680960" cy="3108960"/>
+            <a:off x="1005840" y="1188720"/>
+            <a:ext cx="9601200" cy="457200"/>
           </a:xfrm>
           <a:prstGeom prst="rect">
             <a:avLst/>
@@ -4383,192 +4994,270 @@
           <a:ln/>
         </p:spPr>
         <p:txBody>
-          <a:bodyPr wrap="square" rtlCol="0" anchor="t"/>
+          <a:bodyPr wrap="square" rtlCol="0" anchor="ctr"/>
           <a:lstStyle/>
           <a:p>
-            <a:pPr marL="342900" indent="-342900">
-              <a:spcAft>
-                <a:spcPts val="800"/>
-              </a:spcAft>
-              <a:buSzPct val="100000"/>
-              <a:buChar char="•"/>
+            <a:pPr indent="0" marL="0">
+              <a:lnSpc>
+                <a:spcPct val="130000"/>
+              </a:lnSpc>
+              <a:buNone/>
             </a:pPr>
             <a:r>
-              <a:rPr lang="en-US" sz="1500" dirty="0">
+              <a:rPr lang="en-US" sz="1400" dirty="0">
                 <a:solidFill>
                   <a:srgbClr val="3D3A36"/>
                 </a:solidFill>
-                <a:latin typeface="Calibri" pitchFamily="34" charset="0"/>
-                <a:ea typeface="Calibri" pitchFamily="34" charset="-122"/>
-                <a:cs typeface="Calibri" pitchFamily="34" charset="-120"/>
+                <a:latin typeface="Arial" pitchFamily="34" charset="0"/>
+                <a:ea typeface="Arial" pitchFamily="34" charset="-122"/>
+                <a:cs typeface="Arial" pitchFamily="34" charset="-120"/>
               </a:rPr>
-              <a:t>At higher temperatures, particles move FASTER and have MORE energy.</a:t>
-            </a:r>
-            <a:endParaRPr lang="en-US" sz="1500" dirty="0"/>
-          </a:p>
-          <a:p>
-            <a:pPr marL="342900" indent="-342900">
-              <a:spcAft>
-                <a:spcPts val="800"/>
-              </a:spcAft>
-              <a:buSzPct val="100000"/>
-              <a:buChar char="•"/>
+              <a:t>I can describe the arrangement and movement of particles in solids, liquids, and gases.</a:t>
+            </a:r>
+            <a:endParaRPr lang="en-US" sz="1400" dirty="0"/>
+          </a:p>
+        </p:txBody>
+      </p:sp>
+      <p:sp>
+        <p:nvSpPr>
+          <p:cNvPr id="7" name="Text 5"/>
+          <p:cNvSpPr/>
+          <p:nvPr/>
+        </p:nvSpPr>
+        <p:spPr>
+          <a:xfrm>
+            <a:off x="548640" y="1783080"/>
+            <a:ext cx="365760" cy="457200"/>
+          </a:xfrm>
+          <a:prstGeom prst="rect">
+            <a:avLst/>
+          </a:prstGeom>
+          <a:noFill/>
+          <a:ln/>
+        </p:spPr>
+        <p:txBody>
+          <a:bodyPr wrap="square" rtlCol="0" anchor="ctr"/>
+          <a:lstStyle/>
+          <a:p>
+            <a:pPr indent="0" marL="0">
+              <a:buNone/>
             </a:pPr>
             <a:r>
-              <a:rPr lang="en-US" sz="1500" dirty="0">
+              <a:rPr lang="en-US" sz="1600" dirty="0">
+                <a:solidFill>
+                  <a:srgbClr val="2A9D8F"/>
+                </a:solidFill>
+                <a:latin typeface="Arial" pitchFamily="34" charset="0"/>
+                <a:ea typeface="Arial" pitchFamily="34" charset="-122"/>
+                <a:cs typeface="Arial" pitchFamily="34" charset="-120"/>
+              </a:rPr>
+              <a:t>☐</a:t>
+            </a:r>
+            <a:endParaRPr lang="en-US" sz="1600" dirty="0"/>
+          </a:p>
+        </p:txBody>
+      </p:sp>
+      <p:sp>
+        <p:nvSpPr>
+          <p:cNvPr id="8" name="Text 6"/>
+          <p:cNvSpPr/>
+          <p:nvPr/>
+        </p:nvSpPr>
+        <p:spPr>
+          <a:xfrm>
+            <a:off x="1005840" y="1783080"/>
+            <a:ext cx="9601200" cy="457200"/>
+          </a:xfrm>
+          <a:prstGeom prst="rect">
+            <a:avLst/>
+          </a:prstGeom>
+          <a:noFill/>
+          <a:ln/>
+        </p:spPr>
+        <p:txBody>
+          <a:bodyPr wrap="square" rtlCol="0" anchor="ctr"/>
+          <a:lstStyle/>
+          <a:p>
+            <a:pPr indent="0" marL="0">
+              <a:lnSpc>
+                <a:spcPct val="130000"/>
+              </a:lnSpc>
+              <a:buNone/>
+            </a:pPr>
+            <a:r>
+              <a:rPr lang="en-US" sz="1400" dirty="0">
                 <a:solidFill>
                   <a:srgbClr val="3D3A36"/>
                 </a:solidFill>
-                <a:latin typeface="Calibri" pitchFamily="34" charset="0"/>
-                <a:ea typeface="Calibri" pitchFamily="34" charset="-122"/>
-                <a:cs typeface="Calibri" pitchFamily="34" charset="-120"/>
+                <a:latin typeface="Arial" pitchFamily="34" charset="0"/>
+                <a:ea typeface="Arial" pitchFamily="34" charset="-122"/>
+                <a:cs typeface="Arial" pitchFamily="34" charset="-120"/>
               </a:rPr>
-              <a:t>At lower temperatures, particles slow down.</a:t>
-            </a:r>
-            <a:endParaRPr lang="en-US" sz="1500" dirty="0"/>
-          </a:p>
-          <a:p>
-            <a:pPr marL="342900" indent="-342900">
-              <a:spcAft>
-                <a:spcPts val="800"/>
-              </a:spcAft>
-              <a:buSzPct val="100000"/>
-              <a:buChar char="•"/>
+              <a:t>I can explain why gases can be compressed but solids cannot.</a:t>
+            </a:r>
+            <a:endParaRPr lang="en-US" sz="1400" dirty="0"/>
+          </a:p>
+        </p:txBody>
+      </p:sp>
+      <p:sp>
+        <p:nvSpPr>
+          <p:cNvPr id="9" name="Text 7"/>
+          <p:cNvSpPr/>
+          <p:nvPr/>
+        </p:nvSpPr>
+        <p:spPr>
+          <a:xfrm>
+            <a:off x="548640" y="2377440"/>
+            <a:ext cx="365760" cy="457200"/>
+          </a:xfrm>
+          <a:prstGeom prst="rect">
+            <a:avLst/>
+          </a:prstGeom>
+          <a:noFill/>
+          <a:ln/>
+        </p:spPr>
+        <p:txBody>
+          <a:bodyPr wrap="square" rtlCol="0" anchor="ctr"/>
+          <a:lstStyle/>
+          <a:p>
+            <a:pPr indent="0" marL="0">
+              <a:buNone/>
             </a:pPr>
             <a:r>
-              <a:rPr lang="en-US" sz="1500" dirty="0">
+              <a:rPr lang="en-US" sz="1600" dirty="0">
+                <a:solidFill>
+                  <a:srgbClr val="2A9D8F"/>
+                </a:solidFill>
+                <a:latin typeface="Arial" pitchFamily="34" charset="0"/>
+                <a:ea typeface="Arial" pitchFamily="34" charset="-122"/>
+                <a:cs typeface="Arial" pitchFamily="34" charset="-120"/>
+              </a:rPr>
+              <a:t>☐</a:t>
+            </a:r>
+            <a:endParaRPr lang="en-US" sz="1600" dirty="0"/>
+          </a:p>
+        </p:txBody>
+      </p:sp>
+      <p:sp>
+        <p:nvSpPr>
+          <p:cNvPr id="10" name="Text 8"/>
+          <p:cNvSpPr/>
+          <p:nvPr/>
+        </p:nvSpPr>
+        <p:spPr>
+          <a:xfrm>
+            <a:off x="1005840" y="2377440"/>
+            <a:ext cx="9601200" cy="457200"/>
+          </a:xfrm>
+          <a:prstGeom prst="rect">
+            <a:avLst/>
+          </a:prstGeom>
+          <a:noFill/>
+          <a:ln/>
+        </p:spPr>
+        <p:txBody>
+          <a:bodyPr wrap="square" rtlCol="0" anchor="ctr"/>
+          <a:lstStyle/>
+          <a:p>
+            <a:pPr indent="0" marL="0">
+              <a:lnSpc>
+                <a:spcPct val="130000"/>
+              </a:lnSpc>
+              <a:buNone/>
+            </a:pPr>
+            <a:r>
+              <a:rPr lang="en-US" sz="1400" dirty="0">
                 <a:solidFill>
                   <a:srgbClr val="3D3A36"/>
                 </a:solidFill>
-                <a:latin typeface="Calibri" pitchFamily="34" charset="0"/>
-                <a:ea typeface="Calibri" pitchFamily="34" charset="-122"/>
-                <a:cs typeface="Calibri" pitchFamily="34" charset="-120"/>
+                <a:latin typeface="Arial" pitchFamily="34" charset="0"/>
+                <a:ea typeface="Arial" pitchFamily="34" charset="-122"/>
+                <a:cs typeface="Arial" pitchFamily="34" charset="-120"/>
               </a:rPr>
-              <a:t>At absolute zero (−273°C), particles have minimum energy.</a:t>
-            </a:r>
-            <a:endParaRPr lang="en-US" sz="1500" dirty="0"/>
-          </a:p>
-          <a:p>
-            <a:pPr marL="342900" indent="-342900">
-              <a:spcAft>
-                <a:spcPts val="800"/>
-              </a:spcAft>
-              <a:buSzPct val="100000"/>
-              <a:buChar char="•"/>
+              <a:t>I can state that higher temperature means faster particle movement.</a:t>
+            </a:r>
+            <a:endParaRPr lang="en-US" sz="1400" dirty="0"/>
+          </a:p>
+        </p:txBody>
+      </p:sp>
+      <p:sp>
+        <p:nvSpPr>
+          <p:cNvPr id="11" name="Text 9"/>
+          <p:cNvSpPr/>
+          <p:nvPr/>
+        </p:nvSpPr>
+        <p:spPr>
+          <a:xfrm>
+            <a:off x="548640" y="2971800"/>
+            <a:ext cx="365760" cy="457200"/>
+          </a:xfrm>
+          <a:prstGeom prst="rect">
+            <a:avLst/>
+          </a:prstGeom>
+          <a:noFill/>
+          <a:ln/>
+        </p:spPr>
+        <p:txBody>
+          <a:bodyPr wrap="square" rtlCol="0" anchor="ctr"/>
+          <a:lstStyle/>
+          <a:p>
+            <a:pPr indent="0" marL="0">
+              <a:buNone/>
             </a:pPr>
             <a:r>
-              <a:rPr lang="en-US" sz="1500" dirty="0">
+              <a:rPr lang="en-US" sz="1600" dirty="0">
+                <a:solidFill>
+                  <a:srgbClr val="2A9D8F"/>
+                </a:solidFill>
+                <a:latin typeface="Arial" pitchFamily="34" charset="0"/>
+                <a:ea typeface="Arial" pitchFamily="34" charset="-122"/>
+                <a:cs typeface="Arial" pitchFamily="34" charset="-120"/>
+              </a:rPr>
+              <a:t>☐</a:t>
+            </a:r>
+            <a:endParaRPr lang="en-US" sz="1600" dirty="0"/>
+          </a:p>
+        </p:txBody>
+      </p:sp>
+      <p:sp>
+        <p:nvSpPr>
+          <p:cNvPr id="12" name="Text 10"/>
+          <p:cNvSpPr/>
+          <p:nvPr/>
+        </p:nvSpPr>
+        <p:spPr>
+          <a:xfrm>
+            <a:off x="1005840" y="2971800"/>
+            <a:ext cx="9601200" cy="457200"/>
+          </a:xfrm>
+          <a:prstGeom prst="rect">
+            <a:avLst/>
+          </a:prstGeom>
+          <a:noFill/>
+          <a:ln/>
+        </p:spPr>
+        <p:txBody>
+          <a:bodyPr wrap="square" rtlCol="0" anchor="ctr"/>
+          <a:lstStyle/>
+          <a:p>
+            <a:pPr indent="0" marL="0">
+              <a:lnSpc>
+                <a:spcPct val="130000"/>
+              </a:lnSpc>
+              <a:buNone/>
+            </a:pPr>
+            <a:r>
+              <a:rPr lang="en-US" sz="1400" dirty="0">
                 <a:solidFill>
                   <a:srgbClr val="3D3A36"/>
                 </a:solidFill>
-                <a:latin typeface="Calibri" pitchFamily="34" charset="0"/>
-                <a:ea typeface="Calibri" pitchFamily="34" charset="-122"/>
-                <a:cs typeface="Calibri" pitchFamily="34" charset="-120"/>
+                <a:latin typeface="Arial" pitchFamily="34" charset="0"/>
+                <a:ea typeface="Arial" pitchFamily="34" charset="-122"/>
+                <a:cs typeface="Arial" pitchFamily="34" charset="-120"/>
               </a:rPr>
-              <a:t>When you heat a solid, particles vibrate more until bonds break → it melts.</a:t>
-            </a:r>
-            <a:endParaRPr lang="en-US" sz="1500" dirty="0"/>
-          </a:p>
-          <a:p>
-            <a:pPr marL="342900" indent="-342900">
-              <a:spcAft>
-                <a:spcPts val="800"/>
-              </a:spcAft>
-              <a:buSzPct val="100000"/>
-              <a:buChar char="•"/>
-            </a:pPr>
-            <a:r>
-              <a:rPr lang="en-US" sz="1500" dirty="0">
-                <a:solidFill>
-                  <a:srgbClr val="3D3A36"/>
-                </a:solidFill>
-                <a:latin typeface="Calibri" pitchFamily="34" charset="0"/>
-                <a:ea typeface="Calibri" pitchFamily="34" charset="-122"/>
-                <a:cs typeface="Calibri" pitchFamily="34" charset="-120"/>
-              </a:rPr>
-              <a:t>When you heat a liquid, particles move faster until they escape → it evaporates.</a:t>
-            </a:r>
-            <a:endParaRPr lang="en-US" sz="1500" dirty="0"/>
-          </a:p>
-        </p:txBody>
-      </p:sp>
-      <p:sp>
-        <p:nvSpPr>
-          <p:cNvPr id="7" name="Shape 5"/>
-          <p:cNvSpPr/>
-          <p:nvPr/>
-        </p:nvSpPr>
-        <p:spPr>
-          <a:xfrm>
-            <a:off x="731520" y="4206240"/>
-            <a:ext cx="7680960" cy="640080"/>
-          </a:xfrm>
-          <a:prstGeom prst="rect">
-            <a:avLst/>
-          </a:prstGeom>
-          <a:solidFill>
-            <a:srgbClr val="E8F5F3"/>
-          </a:solidFill>
-          <a:ln/>
-          <a:effectLst>
-            <a:outerShdw sx="100000" sy="100000" kx="0" ky="0" algn="bl" rotWithShape="0" blurRad="50800" dist="25400" dir="8100000">
-              <a:srgbClr val="000000">
-                <a:alpha val="10000"/>
-              </a:srgbClr>
-            </a:outerShdw>
-          </a:effectLst>
-        </p:spPr>
-      </p:sp>
-      <p:sp>
-        <p:nvSpPr>
-          <p:cNvPr id="8" name="Text 6"/>
-          <p:cNvSpPr/>
-          <p:nvPr/>
-        </p:nvSpPr>
-        <p:spPr>
-          <a:xfrm>
-            <a:off x="914400" y="4251960"/>
-            <a:ext cx="7315200" cy="548640"/>
-          </a:xfrm>
-          <a:prstGeom prst="rect">
-            <a:avLst/>
-          </a:prstGeom>
-          <a:noFill/>
-          <a:ln/>
-        </p:spPr>
-        <p:txBody>
-          <a:bodyPr wrap="square" rtlCol="0" anchor="ctr"/>
-          <a:lstStyle/>
-          <a:p>
-            <a:pPr indent="0" marL="0">
-              <a:buNone/>
-            </a:pPr>
-            <a:r>
-              <a:rPr lang="en-US" sz="1200" b="1" dirty="0">
-                <a:solidFill>
-                  <a:srgbClr val="2A9D8F"/>
-                </a:solidFill>
-                <a:latin typeface="Calibri" pitchFamily="34" charset="0"/>
-                <a:ea typeface="Calibri" pitchFamily="34" charset="-122"/>
-                <a:cs typeface="Calibri" pitchFamily="34" charset="-120"/>
-              </a:rPr>
-              <a:t>Key Idea: </a:t>
-            </a:r>
-            <a:pPr indent="0" marL="0">
-              <a:buNone/>
-            </a:pPr>
-            <a:r>
-              <a:rPr lang="en-US" sz="1200" i="1" dirty="0">
-                <a:solidFill>
-                  <a:srgbClr val="3D3A36"/>
-                </a:solidFill>
-                <a:latin typeface="Calibri" pitchFamily="34" charset="0"/>
-                <a:ea typeface="Calibri" pitchFamily="34" charset="-122"/>
-                <a:cs typeface="Calibri" pitchFamily="34" charset="-120"/>
-              </a:rPr>
-              <a:t>Temperature is a measure of the average kinetic energy of particles.</a:t>
-            </a:r>
-            <a:endParaRPr lang="en-US" sz="1200" dirty="0"/>
+              <a:t>I can use the particle model to explain an everyday observation.</a:t>
+            </a:r>
+            <a:endParaRPr lang="en-US" sz="1400" dirty="0"/>
           </a:p>
         </p:txBody>
       </p:sp>
@@ -4586,7 +5275,7 @@
     <p:bg>
       <p:bgPr>
         <a:solidFill>
-          <a:srgbClr val="FAF8F5"/>
+          <a:srgbClr val="111D35"/>
         </a:solidFill>
       </p:bgPr>
     </p:bg>
@@ -4606,771 +5295,30 @@
       </p:grpSpPr>
       <p:sp>
         <p:nvSpPr>
-          <p:cNvPr id="2" name="Shape 0"/>
+          <p:cNvPr id="2" name="Text 0"/>
           <p:cNvSpPr/>
           <p:nvPr/>
         </p:nvSpPr>
         <p:spPr>
           <a:xfrm>
-            <a:off x="0" y="0"/>
-            <a:ext cx="9144000" cy="822960"/>
+            <a:off x="731520" y="1371600"/>
+            <a:ext cx="9144000" cy="914400"/>
           </a:xfrm>
           <a:prstGeom prst="rect">
             <a:avLst/>
           </a:prstGeom>
-          <a:solidFill>
-            <a:srgbClr val="FFFFFF"/>
-          </a:solidFill>
-          <a:ln/>
-        </p:spPr>
-      </p:sp>
-      <p:sp>
-        <p:nvSpPr>
-          <p:cNvPr id="3" name="Shape 1"/>
-          <p:cNvSpPr/>
-          <p:nvPr/>
-        </p:nvSpPr>
-        <p:spPr>
-          <a:xfrm>
-            <a:off x="0" y="804672"/>
-            <a:ext cx="9144000" cy="27432"/>
-          </a:xfrm>
-          <a:prstGeom prst="rect">
-            <a:avLst/>
-          </a:prstGeom>
-          <a:solidFill>
-            <a:srgbClr val="E5E2DC"/>
-          </a:solidFill>
-          <a:ln/>
-        </p:spPr>
-      </p:sp>
-      <p:sp>
-        <p:nvSpPr>
-          <p:cNvPr id="4" name="Shape 2"/>
-          <p:cNvSpPr/>
-          <p:nvPr/>
-        </p:nvSpPr>
-        <p:spPr>
-          <a:xfrm>
-            <a:off x="548640" y="201168"/>
-            <a:ext cx="54864" cy="420624"/>
-          </a:xfrm>
-          <a:prstGeom prst="rect">
-            <a:avLst/>
-          </a:prstGeom>
-          <a:solidFill>
-            <a:srgbClr val="2A9D8F"/>
-          </a:solidFill>
-          <a:ln/>
-        </p:spPr>
-      </p:sp>
-      <p:sp>
-        <p:nvSpPr>
-          <p:cNvPr id="5" name="Text 3"/>
-          <p:cNvSpPr/>
-          <p:nvPr/>
-        </p:nvSpPr>
-        <p:spPr>
-          <a:xfrm>
-            <a:off x="777240" y="137160"/>
-            <a:ext cx="7772400" cy="548640"/>
-          </a:xfrm>
-          <a:prstGeom prst="rect">
-            <a:avLst/>
-          </a:prstGeom>
           <a:noFill/>
           <a:ln/>
         </p:spPr>
         <p:txBody>
-          <a:bodyPr wrap="square" lIns="0" tIns="0" rIns="0" bIns="0" rtlCol="0" anchor="ctr"/>
+          <a:bodyPr wrap="square" rtlCol="0" anchor="ctr"/>
           <a:lstStyle/>
           <a:p>
             <a:pPr indent="0" marL="0">
               <a:buNone/>
             </a:pPr>
             <a:r>
-              <a:rPr lang="en-US" sz="2000" b="1" dirty="0">
-                <a:solidFill>
-                  <a:srgbClr val="1B2A4A"/>
-                </a:solidFill>
-                <a:latin typeface="Georgia" pitchFamily="34" charset="0"/>
-                <a:ea typeface="Georgia" pitchFamily="34" charset="-122"/>
-                <a:cs typeface="Georgia" pitchFamily="34" charset="-120"/>
-              </a:rPr>
-              <a:t>Check Your Understanding</a:t>
-            </a:r>
-            <a:endParaRPr lang="en-US" sz="2000" dirty="0"/>
-          </a:p>
-        </p:txBody>
-      </p:sp>
-      <p:sp>
-        <p:nvSpPr>
-          <p:cNvPr id="6" name="Shape 4"/>
-          <p:cNvSpPr/>
-          <p:nvPr/>
-        </p:nvSpPr>
-        <p:spPr>
-          <a:xfrm>
-            <a:off x="731520" y="1051560"/>
-            <a:ext cx="7680960" cy="438912"/>
-          </a:xfrm>
-          <a:prstGeom prst="rect">
-            <a:avLst/>
-          </a:prstGeom>
-          <a:solidFill>
-            <a:srgbClr val="FFFFFF"/>
-          </a:solidFill>
-          <a:ln/>
-        </p:spPr>
-      </p:sp>
-      <p:sp>
-        <p:nvSpPr>
-          <p:cNvPr id="7" name="Text 5"/>
-          <p:cNvSpPr/>
-          <p:nvPr/>
-        </p:nvSpPr>
-        <p:spPr>
-          <a:xfrm>
-            <a:off x="868680" y="1051560"/>
-            <a:ext cx="320040" cy="438912"/>
-          </a:xfrm>
-          <a:prstGeom prst="rect">
-            <a:avLst/>
-          </a:prstGeom>
-          <a:noFill/>
-          <a:ln/>
-        </p:spPr>
-        <p:txBody>
-          <a:bodyPr wrap="square" rtlCol="0" anchor="ctr"/>
-          <a:lstStyle/>
-          <a:p>
-            <a:pPr indent="0" marL="0">
-              <a:buNone/>
-            </a:pPr>
-            <a:r>
-              <a:rPr lang="en-US" sz="1400" dirty="0">
-                <a:solidFill>
-                  <a:srgbClr val="2A9D8F"/>
-                </a:solidFill>
-              </a:rPr>
-              <a:t>☐</a:t>
-            </a:r>
-            <a:endParaRPr lang="en-US" sz="1400" dirty="0"/>
-          </a:p>
-        </p:txBody>
-      </p:sp>
-      <p:sp>
-        <p:nvSpPr>
-          <p:cNvPr id="8" name="Text 6"/>
-          <p:cNvSpPr/>
-          <p:nvPr/>
-        </p:nvSpPr>
-        <p:spPr>
-          <a:xfrm>
-            <a:off x="1234440" y="1051560"/>
-            <a:ext cx="6949440" cy="438912"/>
-          </a:xfrm>
-          <a:prstGeom prst="rect">
-            <a:avLst/>
-          </a:prstGeom>
-          <a:noFill/>
-          <a:ln/>
-        </p:spPr>
-        <p:txBody>
-          <a:bodyPr wrap="square" rtlCol="0" anchor="ctr"/>
-          <a:lstStyle/>
-          <a:p>
-            <a:pPr indent="0" marL="0">
-              <a:buNone/>
-            </a:pPr>
-            <a:r>
-              <a:rPr lang="en-US" sz="1300" dirty="0">
-                <a:solidFill>
-                  <a:srgbClr val="3D3A36"/>
-                </a:solidFill>
-                <a:latin typeface="Calibri" pitchFamily="34" charset="0"/>
-                <a:ea typeface="Calibri" pitchFamily="34" charset="-122"/>
-                <a:cs typeface="Calibri" pitchFamily="34" charset="-120"/>
-              </a:rPr>
-              <a:t>I can describe particle arrangement in solids, liquids, and gases</a:t>
-            </a:r>
-            <a:endParaRPr lang="en-US" sz="1300" dirty="0"/>
-          </a:p>
-        </p:txBody>
-      </p:sp>
-      <p:sp>
-        <p:nvSpPr>
-          <p:cNvPr id="9" name="Shape 7"/>
-          <p:cNvSpPr/>
-          <p:nvPr/>
-        </p:nvSpPr>
-        <p:spPr>
-          <a:xfrm>
-            <a:off x="731520" y="1554480"/>
-            <a:ext cx="7680960" cy="438912"/>
-          </a:xfrm>
-          <a:prstGeom prst="rect">
-            <a:avLst/>
-          </a:prstGeom>
-          <a:solidFill>
-            <a:srgbClr val="F8F6F3"/>
-          </a:solidFill>
-          <a:ln/>
-        </p:spPr>
-      </p:sp>
-      <p:sp>
-        <p:nvSpPr>
-          <p:cNvPr id="10" name="Text 8"/>
-          <p:cNvSpPr/>
-          <p:nvPr/>
-        </p:nvSpPr>
-        <p:spPr>
-          <a:xfrm>
-            <a:off x="868680" y="1554480"/>
-            <a:ext cx="320040" cy="438912"/>
-          </a:xfrm>
-          <a:prstGeom prst="rect">
-            <a:avLst/>
-          </a:prstGeom>
-          <a:noFill/>
-          <a:ln/>
-        </p:spPr>
-        <p:txBody>
-          <a:bodyPr wrap="square" rtlCol="0" anchor="ctr"/>
-          <a:lstStyle/>
-          <a:p>
-            <a:pPr indent="0" marL="0">
-              <a:buNone/>
-            </a:pPr>
-            <a:r>
-              <a:rPr lang="en-US" sz="1400" dirty="0">
-                <a:solidFill>
-                  <a:srgbClr val="2A9D8F"/>
-                </a:solidFill>
-              </a:rPr>
-              <a:t>☐</a:t>
-            </a:r>
-            <a:endParaRPr lang="en-US" sz="1400" dirty="0"/>
-          </a:p>
-        </p:txBody>
-      </p:sp>
-      <p:sp>
-        <p:nvSpPr>
-          <p:cNvPr id="11" name="Text 9"/>
-          <p:cNvSpPr/>
-          <p:nvPr/>
-        </p:nvSpPr>
-        <p:spPr>
-          <a:xfrm>
-            <a:off x="1234440" y="1554480"/>
-            <a:ext cx="6949440" cy="438912"/>
-          </a:xfrm>
-          <a:prstGeom prst="rect">
-            <a:avLst/>
-          </a:prstGeom>
-          <a:noFill/>
-          <a:ln/>
-        </p:spPr>
-        <p:txBody>
-          <a:bodyPr wrap="square" rtlCol="0" anchor="ctr"/>
-          <a:lstStyle/>
-          <a:p>
-            <a:pPr indent="0" marL="0">
-              <a:buNone/>
-            </a:pPr>
-            <a:r>
-              <a:rPr lang="en-US" sz="1300" dirty="0">
-                <a:solidFill>
-                  <a:srgbClr val="3D3A36"/>
-                </a:solidFill>
-                <a:latin typeface="Calibri" pitchFamily="34" charset="0"/>
-                <a:ea typeface="Calibri" pitchFamily="34" charset="-122"/>
-                <a:cs typeface="Calibri" pitchFamily="34" charset="-120"/>
-              </a:rPr>
-              <a:t>I know that particles are always moving</a:t>
-            </a:r>
-            <a:endParaRPr lang="en-US" sz="1300" dirty="0"/>
-          </a:p>
-        </p:txBody>
-      </p:sp>
-      <p:sp>
-        <p:nvSpPr>
-          <p:cNvPr id="12" name="Shape 10"/>
-          <p:cNvSpPr/>
-          <p:nvPr/>
-        </p:nvSpPr>
-        <p:spPr>
-          <a:xfrm>
-            <a:off x="731520" y="2057400"/>
-            <a:ext cx="7680960" cy="438912"/>
-          </a:xfrm>
-          <a:prstGeom prst="rect">
-            <a:avLst/>
-          </a:prstGeom>
-          <a:solidFill>
-            <a:srgbClr val="FFFFFF"/>
-          </a:solidFill>
-          <a:ln/>
-        </p:spPr>
-      </p:sp>
-      <p:sp>
-        <p:nvSpPr>
-          <p:cNvPr id="13" name="Text 11"/>
-          <p:cNvSpPr/>
-          <p:nvPr/>
-        </p:nvSpPr>
-        <p:spPr>
-          <a:xfrm>
-            <a:off x="868680" y="2057400"/>
-            <a:ext cx="320040" cy="438912"/>
-          </a:xfrm>
-          <a:prstGeom prst="rect">
-            <a:avLst/>
-          </a:prstGeom>
-          <a:noFill/>
-          <a:ln/>
-        </p:spPr>
-        <p:txBody>
-          <a:bodyPr wrap="square" rtlCol="0" anchor="ctr"/>
-          <a:lstStyle/>
-          <a:p>
-            <a:pPr indent="0" marL="0">
-              <a:buNone/>
-            </a:pPr>
-            <a:r>
-              <a:rPr lang="en-US" sz="1400" dirty="0">
-                <a:solidFill>
-                  <a:srgbClr val="2A9D8F"/>
-                </a:solidFill>
-              </a:rPr>
-              <a:t>☐</a:t>
-            </a:r>
-            <a:endParaRPr lang="en-US" sz="1400" dirty="0"/>
-          </a:p>
-        </p:txBody>
-      </p:sp>
-      <p:sp>
-        <p:nvSpPr>
-          <p:cNvPr id="14" name="Text 12"/>
-          <p:cNvSpPr/>
-          <p:nvPr/>
-        </p:nvSpPr>
-        <p:spPr>
-          <a:xfrm>
-            <a:off x="1234440" y="2057400"/>
-            <a:ext cx="6949440" cy="438912"/>
-          </a:xfrm>
-          <a:prstGeom prst="rect">
-            <a:avLst/>
-          </a:prstGeom>
-          <a:noFill/>
-          <a:ln/>
-        </p:spPr>
-        <p:txBody>
-          <a:bodyPr wrap="square" rtlCol="0" anchor="ctr"/>
-          <a:lstStyle/>
-          <a:p>
-            <a:pPr indent="0" marL="0">
-              <a:buNone/>
-            </a:pPr>
-            <a:r>
-              <a:rPr lang="en-US" sz="1300" dirty="0">
-                <a:solidFill>
-                  <a:srgbClr val="3D3A36"/>
-                </a:solidFill>
-                <a:latin typeface="Calibri" pitchFamily="34" charset="0"/>
-                <a:ea typeface="Calibri" pitchFamily="34" charset="-122"/>
-                <a:cs typeface="Calibri" pitchFamily="34" charset="-120"/>
-              </a:rPr>
-              <a:t>I understand that higher temperature means faster particles</a:t>
-            </a:r>
-            <a:endParaRPr lang="en-US" sz="1300" dirty="0"/>
-          </a:p>
-        </p:txBody>
-      </p:sp>
-      <p:sp>
-        <p:nvSpPr>
-          <p:cNvPr id="15" name="Shape 13"/>
-          <p:cNvSpPr/>
-          <p:nvPr/>
-        </p:nvSpPr>
-        <p:spPr>
-          <a:xfrm>
-            <a:off x="731520" y="2560320"/>
-            <a:ext cx="7680960" cy="438912"/>
-          </a:xfrm>
-          <a:prstGeom prst="rect">
-            <a:avLst/>
-          </a:prstGeom>
-          <a:solidFill>
-            <a:srgbClr val="F8F6F3"/>
-          </a:solidFill>
-          <a:ln/>
-        </p:spPr>
-      </p:sp>
-      <p:sp>
-        <p:nvSpPr>
-          <p:cNvPr id="16" name="Text 14"/>
-          <p:cNvSpPr/>
-          <p:nvPr/>
-        </p:nvSpPr>
-        <p:spPr>
-          <a:xfrm>
-            <a:off x="868680" y="2560320"/>
-            <a:ext cx="320040" cy="438912"/>
-          </a:xfrm>
-          <a:prstGeom prst="rect">
-            <a:avLst/>
-          </a:prstGeom>
-          <a:noFill/>
-          <a:ln/>
-        </p:spPr>
-        <p:txBody>
-          <a:bodyPr wrap="square" rtlCol="0" anchor="ctr"/>
-          <a:lstStyle/>
-          <a:p>
-            <a:pPr indent="0" marL="0">
-              <a:buNone/>
-            </a:pPr>
-            <a:r>
-              <a:rPr lang="en-US" sz="1400" dirty="0">
-                <a:solidFill>
-                  <a:srgbClr val="2A9D8F"/>
-                </a:solidFill>
-              </a:rPr>
-              <a:t>☐</a:t>
-            </a:r>
-            <a:endParaRPr lang="en-US" sz="1400" dirty="0"/>
-          </a:p>
-        </p:txBody>
-      </p:sp>
-      <p:sp>
-        <p:nvSpPr>
-          <p:cNvPr id="17" name="Text 15"/>
-          <p:cNvSpPr/>
-          <p:nvPr/>
-        </p:nvSpPr>
-        <p:spPr>
-          <a:xfrm>
-            <a:off x="1234440" y="2560320"/>
-            <a:ext cx="6949440" cy="438912"/>
-          </a:xfrm>
-          <a:prstGeom prst="rect">
-            <a:avLst/>
-          </a:prstGeom>
-          <a:noFill/>
-          <a:ln/>
-        </p:spPr>
-        <p:txBody>
-          <a:bodyPr wrap="square" rtlCol="0" anchor="ctr"/>
-          <a:lstStyle/>
-          <a:p>
-            <a:pPr indent="0" marL="0">
-              <a:buNone/>
-            </a:pPr>
-            <a:r>
-              <a:rPr lang="en-US" sz="1300" dirty="0">
-                <a:solidFill>
-                  <a:srgbClr val="3D3A36"/>
-                </a:solidFill>
-                <a:latin typeface="Calibri" pitchFamily="34" charset="0"/>
-                <a:ea typeface="Calibri" pitchFamily="34" charset="-122"/>
-                <a:cs typeface="Calibri" pitchFamily="34" charset="-120"/>
-              </a:rPr>
-              <a:t>I can use the particle model to explain everyday observations</a:t>
-            </a:r>
-            <a:endParaRPr lang="en-US" sz="1300" dirty="0"/>
-          </a:p>
-        </p:txBody>
-      </p:sp>
-      <p:sp>
-        <p:nvSpPr>
-          <p:cNvPr id="18" name="Shape 16"/>
-          <p:cNvSpPr/>
-          <p:nvPr/>
-        </p:nvSpPr>
-        <p:spPr>
-          <a:xfrm>
-            <a:off x="731520" y="3063240"/>
-            <a:ext cx="7680960" cy="438912"/>
-          </a:xfrm>
-          <a:prstGeom prst="rect">
-            <a:avLst/>
-          </a:prstGeom>
-          <a:solidFill>
-            <a:srgbClr val="FFFFFF"/>
-          </a:solidFill>
-          <a:ln/>
-        </p:spPr>
-      </p:sp>
-      <p:sp>
-        <p:nvSpPr>
-          <p:cNvPr id="19" name="Text 17"/>
-          <p:cNvSpPr/>
-          <p:nvPr/>
-        </p:nvSpPr>
-        <p:spPr>
-          <a:xfrm>
-            <a:off x="868680" y="3063240"/>
-            <a:ext cx="320040" cy="438912"/>
-          </a:xfrm>
-          <a:prstGeom prst="rect">
-            <a:avLst/>
-          </a:prstGeom>
-          <a:noFill/>
-          <a:ln/>
-        </p:spPr>
-        <p:txBody>
-          <a:bodyPr wrap="square" rtlCol="0" anchor="ctr"/>
-          <a:lstStyle/>
-          <a:p>
-            <a:pPr indent="0" marL="0">
-              <a:buNone/>
-            </a:pPr>
-            <a:r>
-              <a:rPr lang="en-US" sz="1400" dirty="0">
-                <a:solidFill>
-                  <a:srgbClr val="2A9D8F"/>
-                </a:solidFill>
-              </a:rPr>
-              <a:t>☐</a:t>
-            </a:r>
-            <a:endParaRPr lang="en-US" sz="1400" dirty="0"/>
-          </a:p>
-        </p:txBody>
-      </p:sp>
-      <p:sp>
-        <p:nvSpPr>
-          <p:cNvPr id="20" name="Text 18"/>
-          <p:cNvSpPr/>
-          <p:nvPr/>
-        </p:nvSpPr>
-        <p:spPr>
-          <a:xfrm>
-            <a:off x="1234440" y="3063240"/>
-            <a:ext cx="6949440" cy="438912"/>
-          </a:xfrm>
-          <a:prstGeom prst="rect">
-            <a:avLst/>
-          </a:prstGeom>
-          <a:noFill/>
-          <a:ln/>
-        </p:spPr>
-        <p:txBody>
-          <a:bodyPr wrap="square" rtlCol="0" anchor="ctr"/>
-          <a:lstStyle/>
-          <a:p>
-            <a:pPr indent="0" marL="0">
-              <a:buNone/>
-            </a:pPr>
-            <a:r>
-              <a:rPr lang="en-US" sz="1300" dirty="0">
-                <a:solidFill>
-                  <a:srgbClr val="3D3A36"/>
-                </a:solidFill>
-                <a:latin typeface="Calibri" pitchFamily="34" charset="0"/>
-                <a:ea typeface="Calibri" pitchFamily="34" charset="-122"/>
-                <a:cs typeface="Calibri" pitchFamily="34" charset="-120"/>
-              </a:rPr>
-              <a:t>I know the limitations of the particle model</a:t>
-            </a:r>
-            <a:endParaRPr lang="en-US" sz="1300" dirty="0"/>
-          </a:p>
-        </p:txBody>
-      </p:sp>
-      <p:sp>
-        <p:nvSpPr>
-          <p:cNvPr id="21" name="Shape 19"/>
-          <p:cNvSpPr/>
-          <p:nvPr/>
-        </p:nvSpPr>
-        <p:spPr>
-          <a:xfrm>
-            <a:off x="731520" y="3749040"/>
-            <a:ext cx="7680960" cy="594360"/>
-          </a:xfrm>
-          <a:prstGeom prst="rect">
-            <a:avLst/>
-          </a:prstGeom>
-          <a:solidFill>
-            <a:srgbClr val="E8F5F3"/>
-          </a:solidFill>
-          <a:ln/>
-          <a:effectLst>
-            <a:outerShdw sx="100000" sy="100000" kx="0" ky="0" algn="bl" rotWithShape="0" blurRad="50800" dist="25400" dir="8100000">
-              <a:srgbClr val="000000">
-                <a:alpha val="10000"/>
-              </a:srgbClr>
-            </a:outerShdw>
-          </a:effectLst>
-        </p:spPr>
-      </p:sp>
-      <p:sp>
-        <p:nvSpPr>
-          <p:cNvPr id="22" name="Text 20"/>
-          <p:cNvSpPr/>
-          <p:nvPr/>
-        </p:nvSpPr>
-        <p:spPr>
-          <a:xfrm>
-            <a:off x="914400" y="3749040"/>
-            <a:ext cx="7315200" cy="594360"/>
-          </a:xfrm>
-          <a:prstGeom prst="rect">
-            <a:avLst/>
-          </a:prstGeom>
-          <a:noFill/>
-          <a:ln/>
-        </p:spPr>
-        <p:txBody>
-          <a:bodyPr wrap="square" rtlCol="0" anchor="ctr"/>
-          <a:lstStyle/>
-          <a:p>
-            <a:pPr indent="0" marL="0">
-              <a:buNone/>
-            </a:pPr>
-            <a:r>
-              <a:rPr lang="en-US" sz="1200" b="1" dirty="0">
-                <a:solidFill>
-                  <a:srgbClr val="2A9D8F"/>
-                </a:solidFill>
-                <a:latin typeface="Calibri" pitchFamily="34" charset="0"/>
-                <a:ea typeface="Calibri" pitchFamily="34" charset="-122"/>
-                <a:cs typeface="Calibri" pitchFamily="34" charset="-120"/>
-              </a:rPr>
-              <a:t>Key Idea: </a:t>
-            </a:r>
-            <a:pPr indent="0" marL="0">
-              <a:buNone/>
-            </a:pPr>
-            <a:r>
-              <a:rPr lang="en-US" sz="1200" i="1" dirty="0">
-                <a:solidFill>
-                  <a:srgbClr val="3D3A36"/>
-                </a:solidFill>
-                <a:latin typeface="Calibri" pitchFamily="34" charset="0"/>
-                <a:ea typeface="Calibri" pitchFamily="34" charset="-122"/>
-                <a:cs typeface="Calibri" pitchFamily="34" charset="-120"/>
-              </a:rPr>
-              <a:t>The particle model is one of the most important ideas in all of science.</a:t>
-            </a:r>
-            <a:endParaRPr lang="en-US" sz="1200" dirty="0"/>
-          </a:p>
-        </p:txBody>
-      </p:sp>
-    </p:spTree>
-  </p:cSld>
-  <p:clrMapOvr>
-    <a:masterClrMapping/>
-  </p:clrMapOvr>
-</p:sld>
-</file>
-
-<file path=ppt/slides/slide8.xml><?xml version="1.0" encoding="utf-8"?>
-<p:sld xmlns:a="http://schemas.openxmlformats.org/drawingml/2006/main" xmlns:r="http://schemas.openxmlformats.org/officeDocument/2006/relationships" xmlns:p="http://schemas.openxmlformats.org/presentationml/2006/main">
-  <p:cSld name="Slide 8">
-    <p:spTree>
-      <p:nvGrpSpPr>
-        <p:cNvPr id="1" name=""/>
-        <p:cNvGrpSpPr/>
-        <p:nvPr/>
-      </p:nvGrpSpPr>
-      <p:grpSpPr>
-        <a:xfrm>
-          <a:off x="0" y="0"/>
-          <a:ext cx="0" cy="0"/>
-          <a:chOff x="0" y="0"/>
-          <a:chExt cx="0" cy="0"/>
-        </a:xfrm>
-      </p:grpSpPr>
-      <p:sp>
-        <p:nvSpPr>
-          <p:cNvPr id="2" name="Shape 0"/>
-          <p:cNvSpPr/>
-          <p:nvPr/>
-        </p:nvSpPr>
-        <p:spPr>
-          <a:xfrm>
-            <a:off x="0" y="0"/>
-            <a:ext cx="9144000" cy="5143500"/>
-          </a:xfrm>
-          <a:prstGeom prst="rect">
-            <a:avLst/>
-          </a:prstGeom>
-          <a:solidFill>
-            <a:srgbClr val="1B2A4A"/>
-          </a:solidFill>
-          <a:ln/>
-        </p:spPr>
-      </p:sp>
-      <p:sp>
-        <p:nvSpPr>
-          <p:cNvPr id="3" name="Shape 1"/>
-          <p:cNvSpPr/>
-          <p:nvPr/>
-        </p:nvSpPr>
-        <p:spPr>
-          <a:xfrm>
-            <a:off x="0" y="4777740"/>
-            <a:ext cx="9144000" cy="365760"/>
-          </a:xfrm>
-          <a:prstGeom prst="rect">
-            <a:avLst/>
-          </a:prstGeom>
-          <a:solidFill>
-            <a:srgbClr val="2A9D8F"/>
-          </a:solidFill>
-          <a:ln/>
-        </p:spPr>
-      </p:sp>
-      <p:sp>
-        <p:nvSpPr>
-          <p:cNvPr id="4" name="Shape 2"/>
-          <p:cNvSpPr/>
-          <p:nvPr/>
-        </p:nvSpPr>
-        <p:spPr>
-          <a:xfrm>
-            <a:off x="-914400" y="-914400"/>
-            <a:ext cx="3657600" cy="3657600"/>
-          </a:xfrm>
-          <a:prstGeom prst="ellipse">
-            <a:avLst/>
-          </a:prstGeom>
-          <a:solidFill>
-            <a:srgbClr val="2A9D8F">
-              <a:alpha val="10000"/>
-            </a:srgbClr>
-          </a:solidFill>
-          <a:ln/>
-        </p:spPr>
-      </p:sp>
-      <p:sp>
-        <p:nvSpPr>
-          <p:cNvPr id="5" name="Text 3"/>
-          <p:cNvSpPr/>
-          <p:nvPr/>
-        </p:nvSpPr>
-        <p:spPr>
-          <a:xfrm>
-            <a:off x="731520" y="1463040"/>
-            <a:ext cx="7680960" cy="822960"/>
-          </a:xfrm>
-          <a:prstGeom prst="rect">
-            <a:avLst/>
-          </a:prstGeom>
-          <a:noFill/>
-          <a:ln/>
-        </p:spPr>
-        <p:txBody>
-          <a:bodyPr wrap="square" rtlCol="0" anchor="ctr"/>
-          <a:lstStyle/>
-          <a:p>
-            <a:pPr algn="ctr" indent="0" marL="0">
-              <a:buNone/>
-            </a:pPr>
-            <a:r>
-              <a:rPr lang="en-US" sz="3400" b="1" dirty="0">
+              <a:rPr lang="en-US" sz="3200" b="1" dirty="0">
                 <a:solidFill>
                   <a:srgbClr val="FFFFFF"/>
                 </a:solidFill>
@@ -5380,20 +5328,20 @@
               </a:rPr>
               <a:t>Review &amp; Practise</a:t>
             </a:r>
-            <a:endParaRPr lang="en-US" sz="3400" dirty="0"/>
+            <a:endParaRPr lang="en-US" sz="3200" dirty="0"/>
           </a:p>
         </p:txBody>
       </p:sp>
       <p:sp>
         <p:nvSpPr>
-          <p:cNvPr id="6" name="Text 4"/>
+          <p:cNvPr id="3" name="Text 1"/>
           <p:cNvSpPr/>
           <p:nvPr/>
         </p:nvSpPr>
         <p:spPr>
           <a:xfrm>
-            <a:off x="731520" y="2468880"/>
-            <a:ext cx="7680960" cy="457200"/>
+            <a:off x="731520" y="2377440"/>
+            <a:ext cx="7315200" cy="548640"/>
           </a:xfrm>
           <a:prstGeom prst="rect">
             <a:avLst/>
@@ -5405,34 +5353,36 @@
           <a:bodyPr wrap="square" rtlCol="0" anchor="ctr"/>
           <a:lstStyle/>
           <a:p>
-            <a:pPr algn="ctr" indent="0" marL="0">
+            <a:pPr indent="0" marL="0">
               <a:buNone/>
             </a:pPr>
             <a:r>
-              <a:rPr lang="en-US" sz="1800" dirty="0">
+              <a:rPr lang="en-US" sz="1500" dirty="0">
                 <a:solidFill>
-                  <a:srgbClr val="2A9D8F"/>
+                  <a:srgbClr val="FFFFFF">
+                    <a:alpha val="60000"/>
+                  </a:srgbClr>
                 </a:solidFill>
-                <a:latin typeface="Calibri" pitchFamily="34" charset="0"/>
-                <a:ea typeface="Calibri" pitchFamily="34" charset="-122"/>
-                <a:cs typeface="Calibri" pitchFamily="34" charset="-120"/>
+                <a:latin typeface="Arial" pitchFamily="34" charset="0"/>
+                <a:ea typeface="Arial" pitchFamily="34" charset="-122"/>
+                <a:cs typeface="Arial" pitchFamily="34" charset="-120"/>
               </a:rPr>
-              <a:t>mrzocchi.com</a:t>
-            </a:r>
-            <a:endParaRPr lang="en-US" sz="1800" dirty="0"/>
+              <a:t>Use the Self-Quiz, Review Games, and Practice Builder to test yourself.</a:t>
+            </a:r>
+            <a:endParaRPr lang="en-US" sz="1500" dirty="0"/>
           </a:p>
         </p:txBody>
       </p:sp>
       <p:sp>
         <p:nvSpPr>
-          <p:cNvPr id="7" name="Text 5"/>
+          <p:cNvPr id="4" name="Text 2"/>
           <p:cNvSpPr/>
           <p:nvPr/>
         </p:nvSpPr>
         <p:spPr>
           <a:xfrm>
-            <a:off x="731520" y="3108960"/>
-            <a:ext cx="7680960" cy="457200"/>
+            <a:off x="731520" y="3291840"/>
+            <a:ext cx="3657600" cy="457200"/>
           </a:xfrm>
           <a:prstGeom prst="rect">
             <a:avLst/>
@@ -5444,21 +5394,21 @@
           <a:bodyPr wrap="square" rtlCol="0" anchor="ctr"/>
           <a:lstStyle/>
           <a:p>
-            <a:pPr algn="ctr" indent="0" marL="0">
+            <a:pPr indent="0" marL="0">
               <a:buNone/>
             </a:pPr>
             <a:r>
-              <a:rPr lang="en-US" sz="1300" dirty="0">
+              <a:rPr lang="en-US" sz="1800" b="1" dirty="0">
                 <a:solidFill>
-                  <a:srgbClr val="9B9690"/>
+                  <a:srgbClr val="E9C46A"/>
                 </a:solidFill>
-                <a:latin typeface="Calibri" pitchFamily="34" charset="0"/>
-                <a:ea typeface="Calibri" pitchFamily="34" charset="-122"/>
-                <a:cs typeface="Calibri" pitchFamily="34" charset="-120"/>
+                <a:latin typeface="Georgia" pitchFamily="34" charset="0"/>
+                <a:ea typeface="Georgia" pitchFamily="34" charset="-122"/>
+                <a:cs typeface="Georgia" pitchFamily="34" charset="-120"/>
               </a:rPr>
-              <a:t>Use the Self-Quiz, Review Games, and Practice Builder to test yourself.</a:t>
-            </a:r>
-            <a:endParaRPr lang="en-US" sz="1300" dirty="0"/>
+              <a:t>mrzocchi.com</a:t>
+            </a:r>
+            <a:endParaRPr lang="en-US" sz="1800" dirty="0"/>
           </a:p>
         </p:txBody>
       </p:sp>
